--- a/design/templates/modulo/template.pptx
+++ b/design/templates/modulo/template.pptx
@@ -307,7 +307,7 @@
             </a:lvl1pPr>
           </a:lstStyle>
           <a:p>
-            <a:fld id="{69A66F8C-F25E-4B2E-B2E2-0A218D443514}" type="datetimeFigureOut">
+            <a:fld id="{90A7BBED-E6FA-40A6-8A51-59E4B08CD8B8}" type="datetimeFigureOut">
               <a:rPr lang="en-US" smtClean="0"/>
               <a:t>10/3/2026</a:t>
             </a:fld>
@@ -352,7 +352,7 @@
             </a:lvl1pPr>
           </a:lstStyle>
           <a:p>
-            <a:fld id="{369B3908-4DF9-450B-8F99-2A754569D7A5}" type="slidenum">
+            <a:fld id="{4F0FE17B-5063-4433-97D2-96EAD825CE6E}" type="slidenum">
               <a:rPr lang="en-US" smtClean="0"/>
               <a:t>‹#›</a:t>
             </a:fld>
@@ -470,7 +470,7 @@
     </p:spTree>
     <p:extLst>
       <p:ext uri="{BB962C8B-B14F-4D97-AF65-F5344CB8AC3E}">
-        <p14:creationId xmlns:p14="http://schemas.microsoft.com/office/powerpoint/2010/main" val="2895193390"/>
+        <p14:creationId xmlns:p14="http://schemas.microsoft.com/office/powerpoint/2010/main" val="2099681651"/>
       </p:ext>
     </p:extLst>
   </p:cSld>
@@ -636,7 +636,7 @@
             </a:lvl1pPr>
           </a:lstStyle>
           <a:p>
-            <a:fld id="{69A66F8C-F25E-4B2E-B2E2-0A218D443514}" type="datetimeFigureOut">
+            <a:fld id="{90A7BBED-E6FA-40A6-8A51-59E4B08CD8B8}" type="datetimeFigureOut">
               <a:rPr lang="en-US" smtClean="0"/>
               <a:t>10/3/2026</a:t>
             </a:fld>
@@ -681,7 +681,7 @@
             </a:lvl1pPr>
           </a:lstStyle>
           <a:p>
-            <a:fld id="{369B3908-4DF9-450B-8F99-2A754569D7A5}" type="slidenum">
+            <a:fld id="{4F0FE17B-5063-4433-97D2-96EAD825CE6E}" type="slidenum">
               <a:rPr lang="en-US" smtClean="0"/>
               <a:t>‹#›</a:t>
             </a:fld>
@@ -801,7 +801,7 @@
           <p:cNvPr id="8" name="body">
             <a:extLst>
               <a:ext uri="{FF2B5EF4-FFF2-40B4-BE49-F238E27FC236}">
-                <a16:creationId xmlns:a16="http://schemas.microsoft.com/office/drawing/2014/main" id="{5ACEFA47-9263-E444-9A3F-89FD20563F30}"/>
+                <a16:creationId xmlns:a16="http://schemas.microsoft.com/office/drawing/2014/main" id="{02E64055-1583-12CC-2009-AD180AB086BF}"/>
               </a:ext>
             </a:extLst>
           </p:cNvPr>
@@ -841,7 +841,7 @@
           <p:cNvPr id="9" name="source">
             <a:extLst>
               <a:ext uri="{FF2B5EF4-FFF2-40B4-BE49-F238E27FC236}">
-                <a16:creationId xmlns:a16="http://schemas.microsoft.com/office/drawing/2014/main" id="{9C2DBEC1-3213-DD20-C196-854D56648197}"/>
+                <a16:creationId xmlns:a16="http://schemas.microsoft.com/office/drawing/2014/main" id="{4BC19463-BA3C-969C-D041-6924382E0ED0}"/>
               </a:ext>
             </a:extLst>
           </p:cNvPr>
@@ -898,7 +898,7 @@
     </p:spTree>
     <p:extLst>
       <p:ext uri="{BB962C8B-B14F-4D97-AF65-F5344CB8AC3E}">
-        <p14:creationId xmlns:p14="http://schemas.microsoft.com/office/powerpoint/2010/main" val="3370482455"/>
+        <p14:creationId xmlns:p14="http://schemas.microsoft.com/office/powerpoint/2010/main" val="1541121241"/>
       </p:ext>
     </p:extLst>
   </p:cSld>
@@ -1048,7 +1048,7 @@
             </a:lvl1pPr>
           </a:lstStyle>
           <a:p>
-            <a:fld id="{69A66F8C-F25E-4B2E-B2E2-0A218D443514}" type="datetimeFigureOut">
+            <a:fld id="{90A7BBED-E6FA-40A6-8A51-59E4B08CD8B8}" type="datetimeFigureOut">
               <a:rPr lang="en-US" smtClean="0"/>
               <a:t>10/3/2026</a:t>
             </a:fld>
@@ -1093,7 +1093,7 @@
             </a:lvl1pPr>
           </a:lstStyle>
           <a:p>
-            <a:fld id="{369B3908-4DF9-450B-8F99-2A754569D7A5}" type="slidenum">
+            <a:fld id="{4F0FE17B-5063-4433-97D2-96EAD825CE6E}" type="slidenum">
               <a:rPr lang="en-US" smtClean="0"/>
               <a:t>‹#›</a:t>
             </a:fld>
@@ -1213,7 +1213,7 @@
           <p:cNvPr id="8" name="body">
             <a:extLst>
               <a:ext uri="{FF2B5EF4-FFF2-40B4-BE49-F238E27FC236}">
-                <a16:creationId xmlns:a16="http://schemas.microsoft.com/office/drawing/2014/main" id="{03F40CAF-7773-EC1B-0F2C-37A325CECF61}"/>
+                <a16:creationId xmlns:a16="http://schemas.microsoft.com/office/drawing/2014/main" id="{B2E79E62-D748-F83F-F1D6-E04B645C5C4A}"/>
               </a:ext>
             </a:extLst>
           </p:cNvPr>
@@ -1256,7 +1256,7 @@
     </p:spTree>
     <p:extLst>
       <p:ext uri="{BB962C8B-B14F-4D97-AF65-F5344CB8AC3E}">
-        <p14:creationId xmlns:p14="http://schemas.microsoft.com/office/powerpoint/2010/main" val="2636807632"/>
+        <p14:creationId xmlns:p14="http://schemas.microsoft.com/office/powerpoint/2010/main" val="1259221280"/>
       </p:ext>
     </p:extLst>
   </p:cSld>
@@ -1448,7 +1448,7 @@
           <p:cNvPr id="8" name="section_number">
             <a:extLst>
               <a:ext uri="{FF2B5EF4-FFF2-40B4-BE49-F238E27FC236}">
-                <a16:creationId xmlns:a16="http://schemas.microsoft.com/office/drawing/2014/main" id="{91C8B03C-5D8E-4A64-56B1-8F0945242640}"/>
+                <a16:creationId xmlns:a16="http://schemas.microsoft.com/office/drawing/2014/main" id="{9C351877-B7DE-5FE6-E513-88FBC3ECA59E}"/>
               </a:ext>
             </a:extLst>
           </p:cNvPr>
@@ -1501,7 +1501,7 @@
           <p:cNvPr id="9" name="subtitle">
             <a:extLst>
               <a:ext uri="{FF2B5EF4-FFF2-40B4-BE49-F238E27FC236}">
-                <a16:creationId xmlns:a16="http://schemas.microsoft.com/office/drawing/2014/main" id="{15E32326-25CE-DCAB-D320-9D550814C761}"/>
+                <a16:creationId xmlns:a16="http://schemas.microsoft.com/office/drawing/2014/main" id="{1A576F68-2FAD-749D-1932-331AAFB0DBDF}"/>
               </a:ext>
             </a:extLst>
           </p:cNvPr>
@@ -1553,7 +1553,7 @@
           <p:cNvPr id="10" name="pattern">
             <a:extLst>
               <a:ext uri="{FF2B5EF4-FFF2-40B4-BE49-F238E27FC236}">
-                <a16:creationId xmlns:a16="http://schemas.microsoft.com/office/drawing/2014/main" id="{59533718-0651-DEEE-B5A2-04108BEDFFE4}"/>
+                <a16:creationId xmlns:a16="http://schemas.microsoft.com/office/drawing/2014/main" id="{7FBA572F-148C-9804-719D-6F1C77A83748}"/>
               </a:ext>
             </a:extLst>
           </p:cNvPr>
@@ -1610,7 +1610,7 @@
           <p:cNvPr id="11" name="pattern">
             <a:extLst>
               <a:ext uri="{FF2B5EF4-FFF2-40B4-BE49-F238E27FC236}">
-                <a16:creationId xmlns:a16="http://schemas.microsoft.com/office/drawing/2014/main" id="{FEA57707-AC60-D9D2-25C7-642E52DC6BB1}"/>
+                <a16:creationId xmlns:a16="http://schemas.microsoft.com/office/drawing/2014/main" id="{0E647454-7C98-C50D-9801-4F4E14D35B99}"/>
               </a:ext>
             </a:extLst>
           </p:cNvPr>
@@ -1667,7 +1667,7 @@
           <p:cNvPr id="12" name="pattern">
             <a:extLst>
               <a:ext uri="{FF2B5EF4-FFF2-40B4-BE49-F238E27FC236}">
-                <a16:creationId xmlns:a16="http://schemas.microsoft.com/office/drawing/2014/main" id="{C9E50A58-4CD3-5B70-7742-14219019DBF7}"/>
+                <a16:creationId xmlns:a16="http://schemas.microsoft.com/office/drawing/2014/main" id="{9FC3BBE6-FDB7-57A3-8E37-61D31F19B30D}"/>
               </a:ext>
             </a:extLst>
           </p:cNvPr>
@@ -1724,7 +1724,7 @@
           <p:cNvPr id="13" name="pattern">
             <a:extLst>
               <a:ext uri="{FF2B5EF4-FFF2-40B4-BE49-F238E27FC236}">
-                <a16:creationId xmlns:a16="http://schemas.microsoft.com/office/drawing/2014/main" id="{0D6B0F0B-B493-A37E-BA53-D6A7EDBB3EF2}"/>
+                <a16:creationId xmlns:a16="http://schemas.microsoft.com/office/drawing/2014/main" id="{AC3902D3-1F87-5181-1FF1-72DA0B55A847}"/>
               </a:ext>
             </a:extLst>
           </p:cNvPr>
@@ -1781,7 +1781,7 @@
           <p:cNvPr id="14" name="pattern">
             <a:extLst>
               <a:ext uri="{FF2B5EF4-FFF2-40B4-BE49-F238E27FC236}">
-                <a16:creationId xmlns:a16="http://schemas.microsoft.com/office/drawing/2014/main" id="{45825164-85D4-400B-798B-5AFDD1573828}"/>
+                <a16:creationId xmlns:a16="http://schemas.microsoft.com/office/drawing/2014/main" id="{A4A0BC35-2CEA-F84C-BB25-10B3EB5DE983}"/>
               </a:ext>
             </a:extLst>
           </p:cNvPr>
@@ -1838,7 +1838,7 @@
           <p:cNvPr id="15" name="pattern">
             <a:extLst>
               <a:ext uri="{FF2B5EF4-FFF2-40B4-BE49-F238E27FC236}">
-                <a16:creationId xmlns:a16="http://schemas.microsoft.com/office/drawing/2014/main" id="{71FD7982-ED2D-6A31-9BA9-8275E0D1D908}"/>
+                <a16:creationId xmlns:a16="http://schemas.microsoft.com/office/drawing/2014/main" id="{FEF8DAD2-819F-4F35-7508-705EFF9DD6F1}"/>
               </a:ext>
             </a:extLst>
           </p:cNvPr>
@@ -1895,7 +1895,7 @@
           <p:cNvPr id="16" name="pattern">
             <a:extLst>
               <a:ext uri="{FF2B5EF4-FFF2-40B4-BE49-F238E27FC236}">
-                <a16:creationId xmlns:a16="http://schemas.microsoft.com/office/drawing/2014/main" id="{09EF5D6B-0485-E5AA-EAA9-AE20C09AE29D}"/>
+                <a16:creationId xmlns:a16="http://schemas.microsoft.com/office/drawing/2014/main" id="{252E7667-DC2F-6000-A894-316702229319}"/>
               </a:ext>
             </a:extLst>
           </p:cNvPr>
@@ -1952,7 +1952,7 @@
           <p:cNvPr id="17" name="pattern">
             <a:extLst>
               <a:ext uri="{FF2B5EF4-FFF2-40B4-BE49-F238E27FC236}">
-                <a16:creationId xmlns:a16="http://schemas.microsoft.com/office/drawing/2014/main" id="{A15E913D-D325-84F1-6AAE-C2350E3C68A3}"/>
+                <a16:creationId xmlns:a16="http://schemas.microsoft.com/office/drawing/2014/main" id="{7DDE64AD-AE12-B688-251C-CB0087FFDA82}"/>
               </a:ext>
             </a:extLst>
           </p:cNvPr>
@@ -2009,7 +2009,7 @@
           <p:cNvPr id="18" name="pattern">
             <a:extLst>
               <a:ext uri="{FF2B5EF4-FFF2-40B4-BE49-F238E27FC236}">
-                <a16:creationId xmlns:a16="http://schemas.microsoft.com/office/drawing/2014/main" id="{44274A9A-619F-330D-5290-59736959C32B}"/>
+                <a16:creationId xmlns:a16="http://schemas.microsoft.com/office/drawing/2014/main" id="{923CF5ED-F549-CCDE-2E76-0A33D76275AC}"/>
               </a:ext>
             </a:extLst>
           </p:cNvPr>
@@ -2066,7 +2066,7 @@
           <p:cNvPr id="19" name="pattern">
             <a:extLst>
               <a:ext uri="{FF2B5EF4-FFF2-40B4-BE49-F238E27FC236}">
-                <a16:creationId xmlns:a16="http://schemas.microsoft.com/office/drawing/2014/main" id="{EA3D2577-4BB6-4884-EE1B-91A0E46DD7F7}"/>
+                <a16:creationId xmlns:a16="http://schemas.microsoft.com/office/drawing/2014/main" id="{768978EF-2694-3035-9885-FBDEA3CBC752}"/>
               </a:ext>
             </a:extLst>
           </p:cNvPr>
@@ -2123,7 +2123,7 @@
           <p:cNvPr id="20" name="pattern">
             <a:extLst>
               <a:ext uri="{FF2B5EF4-FFF2-40B4-BE49-F238E27FC236}">
-                <a16:creationId xmlns:a16="http://schemas.microsoft.com/office/drawing/2014/main" id="{D94B7A76-EE5D-5EDD-0AD6-690A0F6AC9EF}"/>
+                <a16:creationId xmlns:a16="http://schemas.microsoft.com/office/drawing/2014/main" id="{84501BC4-F6C0-0FA4-FB2E-A259FC314284}"/>
               </a:ext>
             </a:extLst>
           </p:cNvPr>
@@ -2180,7 +2180,7 @@
           <p:cNvPr id="21" name="pattern">
             <a:extLst>
               <a:ext uri="{FF2B5EF4-FFF2-40B4-BE49-F238E27FC236}">
-                <a16:creationId xmlns:a16="http://schemas.microsoft.com/office/drawing/2014/main" id="{C51DAB11-FEC4-D67D-16DC-B62598180388}"/>
+                <a16:creationId xmlns:a16="http://schemas.microsoft.com/office/drawing/2014/main" id="{730CA8BA-CE1E-8033-6CAF-2BA61FF966CB}"/>
               </a:ext>
             </a:extLst>
           </p:cNvPr>
@@ -2237,7 +2237,7 @@
           <p:cNvPr id="22" name="pattern">
             <a:extLst>
               <a:ext uri="{FF2B5EF4-FFF2-40B4-BE49-F238E27FC236}">
-                <a16:creationId xmlns:a16="http://schemas.microsoft.com/office/drawing/2014/main" id="{A0C69BF0-A73F-4CF0-4B83-0A0904535ABB}"/>
+                <a16:creationId xmlns:a16="http://schemas.microsoft.com/office/drawing/2014/main" id="{0CABA232-1275-E5AF-A9BD-DEE3EF5575BB}"/>
               </a:ext>
             </a:extLst>
           </p:cNvPr>
@@ -2294,7 +2294,7 @@
           <p:cNvPr id="23" name="pattern">
             <a:extLst>
               <a:ext uri="{FF2B5EF4-FFF2-40B4-BE49-F238E27FC236}">
-                <a16:creationId xmlns:a16="http://schemas.microsoft.com/office/drawing/2014/main" id="{EC0B16F0-480F-46B9-0A0D-26EBE9BD9422}"/>
+                <a16:creationId xmlns:a16="http://schemas.microsoft.com/office/drawing/2014/main" id="{43481D2A-491F-FF56-B78D-C0644F95558E}"/>
               </a:ext>
             </a:extLst>
           </p:cNvPr>
@@ -2351,7 +2351,7 @@
           <p:cNvPr id="24" name="pattern">
             <a:extLst>
               <a:ext uri="{FF2B5EF4-FFF2-40B4-BE49-F238E27FC236}">
-                <a16:creationId xmlns:a16="http://schemas.microsoft.com/office/drawing/2014/main" id="{625CE88B-5823-8ACC-165C-E337563EE8B5}"/>
+                <a16:creationId xmlns:a16="http://schemas.microsoft.com/office/drawing/2014/main" id="{D5D4EC0D-DBFD-3C88-9C71-CE1BE0B42F27}"/>
               </a:ext>
             </a:extLst>
           </p:cNvPr>
@@ -2408,7 +2408,7 @@
           <p:cNvPr id="25" name="pattern">
             <a:extLst>
               <a:ext uri="{FF2B5EF4-FFF2-40B4-BE49-F238E27FC236}">
-                <a16:creationId xmlns:a16="http://schemas.microsoft.com/office/drawing/2014/main" id="{BB862C77-94E9-F518-1BF5-A52BF5261612}"/>
+                <a16:creationId xmlns:a16="http://schemas.microsoft.com/office/drawing/2014/main" id="{D76EBD76-30E4-4F56-6920-4CD5D87C9DF5}"/>
               </a:ext>
             </a:extLst>
           </p:cNvPr>
@@ -2465,7 +2465,7 @@
           <p:cNvPr id="26" name="pattern">
             <a:extLst>
               <a:ext uri="{FF2B5EF4-FFF2-40B4-BE49-F238E27FC236}">
-                <a16:creationId xmlns:a16="http://schemas.microsoft.com/office/drawing/2014/main" id="{84210D3C-9748-5B52-CBAE-1BFAF82C9A3B}"/>
+                <a16:creationId xmlns:a16="http://schemas.microsoft.com/office/drawing/2014/main" id="{D3A5D65A-A460-8EB2-AFEF-8DBC91F9DEC2}"/>
               </a:ext>
             </a:extLst>
           </p:cNvPr>
@@ -2522,7 +2522,7 @@
           <p:cNvPr id="27" name="pattern">
             <a:extLst>
               <a:ext uri="{FF2B5EF4-FFF2-40B4-BE49-F238E27FC236}">
-                <a16:creationId xmlns:a16="http://schemas.microsoft.com/office/drawing/2014/main" id="{D9D934B8-BE1F-D3AF-5787-0AF13B8418F8}"/>
+                <a16:creationId xmlns:a16="http://schemas.microsoft.com/office/drawing/2014/main" id="{E3AA09C1-B1BE-3481-C989-EBBDA9791627}"/>
               </a:ext>
             </a:extLst>
           </p:cNvPr>
@@ -2579,7 +2579,7 @@
           <p:cNvPr id="28" name="pattern">
             <a:extLst>
               <a:ext uri="{FF2B5EF4-FFF2-40B4-BE49-F238E27FC236}">
-                <a16:creationId xmlns:a16="http://schemas.microsoft.com/office/drawing/2014/main" id="{B4180453-4095-7660-3C44-F94FA9CD1519}"/>
+                <a16:creationId xmlns:a16="http://schemas.microsoft.com/office/drawing/2014/main" id="{E2CD535C-A7FD-C551-1360-83A95991EDFF}"/>
               </a:ext>
             </a:extLst>
           </p:cNvPr>
@@ -2636,7 +2636,7 @@
           <p:cNvPr id="29" name="pattern">
             <a:extLst>
               <a:ext uri="{FF2B5EF4-FFF2-40B4-BE49-F238E27FC236}">
-                <a16:creationId xmlns:a16="http://schemas.microsoft.com/office/drawing/2014/main" id="{AE5F0B30-961F-3C98-D698-67B3EF9115A6}"/>
+                <a16:creationId xmlns:a16="http://schemas.microsoft.com/office/drawing/2014/main" id="{51071316-718C-F909-5C92-0946EF6F7652}"/>
               </a:ext>
             </a:extLst>
           </p:cNvPr>
@@ -2693,7 +2693,7 @@
           <p:cNvPr id="30" name="pattern">
             <a:extLst>
               <a:ext uri="{FF2B5EF4-FFF2-40B4-BE49-F238E27FC236}">
-                <a16:creationId xmlns:a16="http://schemas.microsoft.com/office/drawing/2014/main" id="{F99AD452-E520-9DD9-0D5A-9743E78F688C}"/>
+                <a16:creationId xmlns:a16="http://schemas.microsoft.com/office/drawing/2014/main" id="{128EC606-5085-0198-D4BC-D867D928D078}"/>
               </a:ext>
             </a:extLst>
           </p:cNvPr>
@@ -2750,7 +2750,7 @@
           <p:cNvPr id="31" name="pattern">
             <a:extLst>
               <a:ext uri="{FF2B5EF4-FFF2-40B4-BE49-F238E27FC236}">
-                <a16:creationId xmlns:a16="http://schemas.microsoft.com/office/drawing/2014/main" id="{E1078C5E-52D0-A2FF-2F4C-1517B4E6E167}"/>
+                <a16:creationId xmlns:a16="http://schemas.microsoft.com/office/drawing/2014/main" id="{956DD1B7-7103-3BBF-5170-60BE0188EFBA}"/>
               </a:ext>
             </a:extLst>
           </p:cNvPr>
@@ -2807,7 +2807,7 @@
           <p:cNvPr id="32" name="pattern">
             <a:extLst>
               <a:ext uri="{FF2B5EF4-FFF2-40B4-BE49-F238E27FC236}">
-                <a16:creationId xmlns:a16="http://schemas.microsoft.com/office/drawing/2014/main" id="{59828F5E-85FD-0D1A-E7FD-681283DF4C7A}"/>
+                <a16:creationId xmlns:a16="http://schemas.microsoft.com/office/drawing/2014/main" id="{C34B66E3-665E-5AC8-A8B6-FBF3F0E0F98F}"/>
               </a:ext>
             </a:extLst>
           </p:cNvPr>
@@ -2864,7 +2864,7 @@
           <p:cNvPr id="33" name="pattern">
             <a:extLst>
               <a:ext uri="{FF2B5EF4-FFF2-40B4-BE49-F238E27FC236}">
-                <a16:creationId xmlns:a16="http://schemas.microsoft.com/office/drawing/2014/main" id="{067B1537-4581-A67B-9091-756BFEC98C0F}"/>
+                <a16:creationId xmlns:a16="http://schemas.microsoft.com/office/drawing/2014/main" id="{2BEC6407-A704-B3B7-906E-D776407C88C2}"/>
               </a:ext>
             </a:extLst>
           </p:cNvPr>
@@ -2921,7 +2921,7 @@
           <p:cNvPr id="34" name="pattern">
             <a:extLst>
               <a:ext uri="{FF2B5EF4-FFF2-40B4-BE49-F238E27FC236}">
-                <a16:creationId xmlns:a16="http://schemas.microsoft.com/office/drawing/2014/main" id="{871C5217-6DAF-4431-5930-820092F1F973}"/>
+                <a16:creationId xmlns:a16="http://schemas.microsoft.com/office/drawing/2014/main" id="{60AEEC9F-A063-9043-E4E5-07DCAAFA66DA}"/>
               </a:ext>
             </a:extLst>
           </p:cNvPr>
@@ -2978,7 +2978,7 @@
           <p:cNvPr id="35" name="pattern">
             <a:extLst>
               <a:ext uri="{FF2B5EF4-FFF2-40B4-BE49-F238E27FC236}">
-                <a16:creationId xmlns:a16="http://schemas.microsoft.com/office/drawing/2014/main" id="{F06DB54C-74CD-3821-F000-7EF1D7070E10}"/>
+                <a16:creationId xmlns:a16="http://schemas.microsoft.com/office/drawing/2014/main" id="{A8BA0256-0A35-AF95-7261-FF1C723D6741}"/>
               </a:ext>
             </a:extLst>
           </p:cNvPr>
@@ -3035,7 +3035,7 @@
           <p:cNvPr id="36" name="pattern">
             <a:extLst>
               <a:ext uri="{FF2B5EF4-FFF2-40B4-BE49-F238E27FC236}">
-                <a16:creationId xmlns:a16="http://schemas.microsoft.com/office/drawing/2014/main" id="{6985C3DE-B019-6710-62EE-71BE49DCBE6A}"/>
+                <a16:creationId xmlns:a16="http://schemas.microsoft.com/office/drawing/2014/main" id="{9422C96A-90DD-3ECB-6A9F-F0A2B0DD9449}"/>
               </a:ext>
             </a:extLst>
           </p:cNvPr>
@@ -3092,7 +3092,7 @@
           <p:cNvPr id="37" name="pattern">
             <a:extLst>
               <a:ext uri="{FF2B5EF4-FFF2-40B4-BE49-F238E27FC236}">
-                <a16:creationId xmlns:a16="http://schemas.microsoft.com/office/drawing/2014/main" id="{DA756ABE-50BD-4738-EA6E-EC674993A766}"/>
+                <a16:creationId xmlns:a16="http://schemas.microsoft.com/office/drawing/2014/main" id="{33D23F28-0D49-6ED6-8D7B-1FCB069C0BBD}"/>
               </a:ext>
             </a:extLst>
           </p:cNvPr>
@@ -3149,7 +3149,7 @@
           <p:cNvPr id="38" name="pattern">
             <a:extLst>
               <a:ext uri="{FF2B5EF4-FFF2-40B4-BE49-F238E27FC236}">
-                <a16:creationId xmlns:a16="http://schemas.microsoft.com/office/drawing/2014/main" id="{B722D2B1-DB3C-6362-DA6B-7B78095FFC2A}"/>
+                <a16:creationId xmlns:a16="http://schemas.microsoft.com/office/drawing/2014/main" id="{FBE2637C-6148-EDD1-E70E-AE4C8E054E0D}"/>
               </a:ext>
             </a:extLst>
           </p:cNvPr>
@@ -3206,7 +3206,7 @@
           <p:cNvPr id="39" name="pattern">
             <a:extLst>
               <a:ext uri="{FF2B5EF4-FFF2-40B4-BE49-F238E27FC236}">
-                <a16:creationId xmlns:a16="http://schemas.microsoft.com/office/drawing/2014/main" id="{30ADB43B-0BBA-A088-0D30-5CD9E0999E3B}"/>
+                <a16:creationId xmlns:a16="http://schemas.microsoft.com/office/drawing/2014/main" id="{AD2F8F7C-97C6-F2D0-2E00-D4464FA208EB}"/>
               </a:ext>
             </a:extLst>
           </p:cNvPr>
@@ -3263,7 +3263,7 @@
           <p:cNvPr id="40" name="pattern">
             <a:extLst>
               <a:ext uri="{FF2B5EF4-FFF2-40B4-BE49-F238E27FC236}">
-                <a16:creationId xmlns:a16="http://schemas.microsoft.com/office/drawing/2014/main" id="{4B61B19C-B1BE-A794-3E2B-43269DA03F08}"/>
+                <a16:creationId xmlns:a16="http://schemas.microsoft.com/office/drawing/2014/main" id="{7E7F3628-0958-7CE8-DEA3-6577950532DD}"/>
               </a:ext>
             </a:extLst>
           </p:cNvPr>
@@ -3320,7 +3320,7 @@
           <p:cNvPr id="41" name="pattern">
             <a:extLst>
               <a:ext uri="{FF2B5EF4-FFF2-40B4-BE49-F238E27FC236}">
-                <a16:creationId xmlns:a16="http://schemas.microsoft.com/office/drawing/2014/main" id="{62B8990B-1547-9412-21F3-C3C75024DC26}"/>
+                <a16:creationId xmlns:a16="http://schemas.microsoft.com/office/drawing/2014/main" id="{7F2DABDF-0EE1-369B-862C-3152EC9B7094}"/>
               </a:ext>
             </a:extLst>
           </p:cNvPr>
@@ -3377,7 +3377,7 @@
           <p:cNvPr id="42" name="pattern">
             <a:extLst>
               <a:ext uri="{FF2B5EF4-FFF2-40B4-BE49-F238E27FC236}">
-                <a16:creationId xmlns:a16="http://schemas.microsoft.com/office/drawing/2014/main" id="{52F3C2E7-77B6-1E5B-C7AF-8D31F554F259}"/>
+                <a16:creationId xmlns:a16="http://schemas.microsoft.com/office/drawing/2014/main" id="{E4631F8B-1249-F3EF-8008-10F818CFBD4E}"/>
               </a:ext>
             </a:extLst>
           </p:cNvPr>
@@ -3434,7 +3434,7 @@
           <p:cNvPr id="43" name="pattern">
             <a:extLst>
               <a:ext uri="{FF2B5EF4-FFF2-40B4-BE49-F238E27FC236}">
-                <a16:creationId xmlns:a16="http://schemas.microsoft.com/office/drawing/2014/main" id="{AF12A255-D707-0986-AE28-A1C2A7B96930}"/>
+                <a16:creationId xmlns:a16="http://schemas.microsoft.com/office/drawing/2014/main" id="{73EF6172-F6DF-4BF2-CAE5-E5EC42781C5E}"/>
               </a:ext>
             </a:extLst>
           </p:cNvPr>
@@ -3491,7 +3491,7 @@
           <p:cNvPr id="44" name="pattern">
             <a:extLst>
               <a:ext uri="{FF2B5EF4-FFF2-40B4-BE49-F238E27FC236}">
-                <a16:creationId xmlns:a16="http://schemas.microsoft.com/office/drawing/2014/main" id="{3F74CE37-AC8F-031F-E18C-7A9E45E49A4E}"/>
+                <a16:creationId xmlns:a16="http://schemas.microsoft.com/office/drawing/2014/main" id="{4B319A41-8FA0-89CF-BD27-A664E1994EB3}"/>
               </a:ext>
             </a:extLst>
           </p:cNvPr>
@@ -3548,7 +3548,7 @@
           <p:cNvPr id="45" name="pattern">
             <a:extLst>
               <a:ext uri="{FF2B5EF4-FFF2-40B4-BE49-F238E27FC236}">
-                <a16:creationId xmlns:a16="http://schemas.microsoft.com/office/drawing/2014/main" id="{73A02407-8536-61C6-5E28-2A1C17919C88}"/>
+                <a16:creationId xmlns:a16="http://schemas.microsoft.com/office/drawing/2014/main" id="{0F8D60B7-114D-5F4D-3AD1-7D856FF6C740}"/>
               </a:ext>
             </a:extLst>
           </p:cNvPr>
@@ -3605,7 +3605,7 @@
           <p:cNvPr id="46" name="pattern">
             <a:extLst>
               <a:ext uri="{FF2B5EF4-FFF2-40B4-BE49-F238E27FC236}">
-                <a16:creationId xmlns:a16="http://schemas.microsoft.com/office/drawing/2014/main" id="{BCA8EFE2-06BF-00A3-C075-55D340361A07}"/>
+                <a16:creationId xmlns:a16="http://schemas.microsoft.com/office/drawing/2014/main" id="{C1C17510-44C4-2CB7-566E-84D027435A79}"/>
               </a:ext>
             </a:extLst>
           </p:cNvPr>
@@ -3662,7 +3662,7 @@
           <p:cNvPr id="47" name="pattern">
             <a:extLst>
               <a:ext uri="{FF2B5EF4-FFF2-40B4-BE49-F238E27FC236}">
-                <a16:creationId xmlns:a16="http://schemas.microsoft.com/office/drawing/2014/main" id="{965A8ECE-DF92-3EE5-3012-D794DCB47D79}"/>
+                <a16:creationId xmlns:a16="http://schemas.microsoft.com/office/drawing/2014/main" id="{B8C5E26C-E1FF-8991-7C5E-6D70ECDFF46C}"/>
               </a:ext>
             </a:extLst>
           </p:cNvPr>
@@ -3719,7 +3719,7 @@
           <p:cNvPr id="48" name="pattern">
             <a:extLst>
               <a:ext uri="{FF2B5EF4-FFF2-40B4-BE49-F238E27FC236}">
-                <a16:creationId xmlns:a16="http://schemas.microsoft.com/office/drawing/2014/main" id="{98E979CC-DEC6-D848-DF4B-192F51FC4CF5}"/>
+                <a16:creationId xmlns:a16="http://schemas.microsoft.com/office/drawing/2014/main" id="{F4D245CB-2D13-D30A-968E-CD7626213BB5}"/>
               </a:ext>
             </a:extLst>
           </p:cNvPr>
@@ -3776,7 +3776,7 @@
           <p:cNvPr id="49" name="pattern">
             <a:extLst>
               <a:ext uri="{FF2B5EF4-FFF2-40B4-BE49-F238E27FC236}">
-                <a16:creationId xmlns:a16="http://schemas.microsoft.com/office/drawing/2014/main" id="{9B124075-6C0E-DB8F-233E-737A963DBA31}"/>
+                <a16:creationId xmlns:a16="http://schemas.microsoft.com/office/drawing/2014/main" id="{12EC89F8-821E-5339-249D-E0CE0835708D}"/>
               </a:ext>
             </a:extLst>
           </p:cNvPr>
@@ -3833,7 +3833,7 @@
           <p:cNvPr id="50" name="pattern">
             <a:extLst>
               <a:ext uri="{FF2B5EF4-FFF2-40B4-BE49-F238E27FC236}">
-                <a16:creationId xmlns:a16="http://schemas.microsoft.com/office/drawing/2014/main" id="{7BE99B20-CBDB-733C-7567-3643B060A700}"/>
+                <a16:creationId xmlns:a16="http://schemas.microsoft.com/office/drawing/2014/main" id="{E8C8E51A-7C7F-F306-3F01-129324457C67}"/>
               </a:ext>
             </a:extLst>
           </p:cNvPr>
@@ -3890,7 +3890,7 @@
           <p:cNvPr id="51" name="pattern">
             <a:extLst>
               <a:ext uri="{FF2B5EF4-FFF2-40B4-BE49-F238E27FC236}">
-                <a16:creationId xmlns:a16="http://schemas.microsoft.com/office/drawing/2014/main" id="{19BDE725-DF25-C3C8-0FEC-A14A057E7497}"/>
+                <a16:creationId xmlns:a16="http://schemas.microsoft.com/office/drawing/2014/main" id="{99014ECA-7AAD-1FE1-AA8B-675F1C8BAE5E}"/>
               </a:ext>
             </a:extLst>
           </p:cNvPr>
@@ -3947,7 +3947,7 @@
           <p:cNvPr id="52" name="pattern">
             <a:extLst>
               <a:ext uri="{FF2B5EF4-FFF2-40B4-BE49-F238E27FC236}">
-                <a16:creationId xmlns:a16="http://schemas.microsoft.com/office/drawing/2014/main" id="{E8BEEDDB-F4AD-823B-E074-191E005DDF52}"/>
+                <a16:creationId xmlns:a16="http://schemas.microsoft.com/office/drawing/2014/main" id="{9FED3CF9-23D4-4CD9-112C-7DB98E9446E0}"/>
               </a:ext>
             </a:extLst>
           </p:cNvPr>
@@ -4004,7 +4004,7 @@
           <p:cNvPr id="53" name="pattern">
             <a:extLst>
               <a:ext uri="{FF2B5EF4-FFF2-40B4-BE49-F238E27FC236}">
-                <a16:creationId xmlns:a16="http://schemas.microsoft.com/office/drawing/2014/main" id="{96CA02E3-2E2E-569E-00E7-E2BC68503B82}"/>
+                <a16:creationId xmlns:a16="http://schemas.microsoft.com/office/drawing/2014/main" id="{8B2C5B23-A95F-24BD-4CB1-6AB4A0B52B61}"/>
               </a:ext>
             </a:extLst>
           </p:cNvPr>
@@ -4061,7 +4061,7 @@
           <p:cNvPr id="54" name="pattern">
             <a:extLst>
               <a:ext uri="{FF2B5EF4-FFF2-40B4-BE49-F238E27FC236}">
-                <a16:creationId xmlns:a16="http://schemas.microsoft.com/office/drawing/2014/main" id="{EB5E1ADF-DD43-9920-C2BC-20068B6CDA05}"/>
+                <a16:creationId xmlns:a16="http://schemas.microsoft.com/office/drawing/2014/main" id="{4990F041-3348-F698-09DE-F54114ABF25D}"/>
               </a:ext>
             </a:extLst>
           </p:cNvPr>
@@ -4118,7 +4118,7 @@
           <p:cNvPr id="55" name="pattern">
             <a:extLst>
               <a:ext uri="{FF2B5EF4-FFF2-40B4-BE49-F238E27FC236}">
-                <a16:creationId xmlns:a16="http://schemas.microsoft.com/office/drawing/2014/main" id="{82072E5D-13BC-1A52-EB50-B1FF60C4D14E}"/>
+                <a16:creationId xmlns:a16="http://schemas.microsoft.com/office/drawing/2014/main" id="{A5B9D29B-5391-E1EC-3BC6-640974B776EE}"/>
               </a:ext>
             </a:extLst>
           </p:cNvPr>
@@ -4175,7 +4175,7 @@
           <p:cNvPr id="56" name="pattern">
             <a:extLst>
               <a:ext uri="{FF2B5EF4-FFF2-40B4-BE49-F238E27FC236}">
-                <a16:creationId xmlns:a16="http://schemas.microsoft.com/office/drawing/2014/main" id="{BDF611F3-203A-7B02-FBC8-48FE4337D209}"/>
+                <a16:creationId xmlns:a16="http://schemas.microsoft.com/office/drawing/2014/main" id="{2F059C82-20A4-40E3-D84C-2C136D06B38A}"/>
               </a:ext>
             </a:extLst>
           </p:cNvPr>
@@ -4232,7 +4232,7 @@
           <p:cNvPr id="57" name="pattern">
             <a:extLst>
               <a:ext uri="{FF2B5EF4-FFF2-40B4-BE49-F238E27FC236}">
-                <a16:creationId xmlns:a16="http://schemas.microsoft.com/office/drawing/2014/main" id="{DCED34CA-B1FE-6449-23B1-B7F833255EC4}"/>
+                <a16:creationId xmlns:a16="http://schemas.microsoft.com/office/drawing/2014/main" id="{4CD8C9F5-D8AC-3EB4-82C3-3821F0BA8BE4}"/>
               </a:ext>
             </a:extLst>
           </p:cNvPr>
@@ -4289,7 +4289,7 @@
           <p:cNvPr id="58" name="pattern">
             <a:extLst>
               <a:ext uri="{FF2B5EF4-FFF2-40B4-BE49-F238E27FC236}">
-                <a16:creationId xmlns:a16="http://schemas.microsoft.com/office/drawing/2014/main" id="{88061A13-1B8F-7A36-8477-3087B19054AD}"/>
+                <a16:creationId xmlns:a16="http://schemas.microsoft.com/office/drawing/2014/main" id="{E733DACD-C385-263C-4F26-A7B8306FCEF5}"/>
               </a:ext>
             </a:extLst>
           </p:cNvPr>
@@ -4346,7 +4346,7 @@
           <p:cNvPr id="59" name="pattern">
             <a:extLst>
               <a:ext uri="{FF2B5EF4-FFF2-40B4-BE49-F238E27FC236}">
-                <a16:creationId xmlns:a16="http://schemas.microsoft.com/office/drawing/2014/main" id="{642B9640-8DCF-0521-F40D-D4CAE6AAD99A}"/>
+                <a16:creationId xmlns:a16="http://schemas.microsoft.com/office/drawing/2014/main" id="{0E510EA8-0BA4-A0D3-8D9A-490513C8FA2A}"/>
               </a:ext>
             </a:extLst>
           </p:cNvPr>
@@ -4403,7 +4403,7 @@
           <p:cNvPr id="60" name="pattern">
             <a:extLst>
               <a:ext uri="{FF2B5EF4-FFF2-40B4-BE49-F238E27FC236}">
-                <a16:creationId xmlns:a16="http://schemas.microsoft.com/office/drawing/2014/main" id="{DD0EDB41-3817-EA2D-D2E8-12973404A759}"/>
+                <a16:creationId xmlns:a16="http://schemas.microsoft.com/office/drawing/2014/main" id="{770249AA-EDE7-E845-E5BD-E25FF5C98D85}"/>
               </a:ext>
             </a:extLst>
           </p:cNvPr>
@@ -4460,7 +4460,7 @@
           <p:cNvPr id="61" name="pattern">
             <a:extLst>
               <a:ext uri="{FF2B5EF4-FFF2-40B4-BE49-F238E27FC236}">
-                <a16:creationId xmlns:a16="http://schemas.microsoft.com/office/drawing/2014/main" id="{82A3BA25-E0B6-AABC-AF39-8F7CD08DBCB8}"/>
+                <a16:creationId xmlns:a16="http://schemas.microsoft.com/office/drawing/2014/main" id="{AF509F25-AC9F-41DB-26E3-61805839D535}"/>
               </a:ext>
             </a:extLst>
           </p:cNvPr>
@@ -4517,7 +4517,7 @@
           <p:cNvPr id="62" name="pattern">
             <a:extLst>
               <a:ext uri="{FF2B5EF4-FFF2-40B4-BE49-F238E27FC236}">
-                <a16:creationId xmlns:a16="http://schemas.microsoft.com/office/drawing/2014/main" id="{C3ABB9A3-3AE2-6283-5557-610C7F5FAB72}"/>
+                <a16:creationId xmlns:a16="http://schemas.microsoft.com/office/drawing/2014/main" id="{6315A2AF-D1F6-5476-8BA2-527391254D35}"/>
               </a:ext>
             </a:extLst>
           </p:cNvPr>
@@ -4574,7 +4574,7 @@
           <p:cNvPr id="63" name="pattern">
             <a:extLst>
               <a:ext uri="{FF2B5EF4-FFF2-40B4-BE49-F238E27FC236}">
-                <a16:creationId xmlns:a16="http://schemas.microsoft.com/office/drawing/2014/main" id="{BE763D0D-20CD-BAB5-15DD-E15F6A7FBE5F}"/>
+                <a16:creationId xmlns:a16="http://schemas.microsoft.com/office/drawing/2014/main" id="{D0025DF1-2704-F031-F4C1-0112EE623D4A}"/>
               </a:ext>
             </a:extLst>
           </p:cNvPr>
@@ -4631,7 +4631,7 @@
           <p:cNvPr id="64" name="pattern">
             <a:extLst>
               <a:ext uri="{FF2B5EF4-FFF2-40B4-BE49-F238E27FC236}">
-                <a16:creationId xmlns:a16="http://schemas.microsoft.com/office/drawing/2014/main" id="{87B207D1-93FD-7D5C-4079-C2AF8AD1D105}"/>
+                <a16:creationId xmlns:a16="http://schemas.microsoft.com/office/drawing/2014/main" id="{A55405C6-46B1-79C4-FA0D-FEB5838DB4A4}"/>
               </a:ext>
             </a:extLst>
           </p:cNvPr>
@@ -4688,7 +4688,7 @@
           <p:cNvPr id="65" name="pattern">
             <a:extLst>
               <a:ext uri="{FF2B5EF4-FFF2-40B4-BE49-F238E27FC236}">
-                <a16:creationId xmlns:a16="http://schemas.microsoft.com/office/drawing/2014/main" id="{F49868AA-ABA6-E07A-1456-08B2252B3975}"/>
+                <a16:creationId xmlns:a16="http://schemas.microsoft.com/office/drawing/2014/main" id="{E9A1A620-8AA4-4E21-B7A5-1C7C22B70D84}"/>
               </a:ext>
             </a:extLst>
           </p:cNvPr>
@@ -4745,7 +4745,7 @@
           <p:cNvPr id="66" name="pattern">
             <a:extLst>
               <a:ext uri="{FF2B5EF4-FFF2-40B4-BE49-F238E27FC236}">
-                <a16:creationId xmlns:a16="http://schemas.microsoft.com/office/drawing/2014/main" id="{5A8E4CBB-496F-2235-D766-01E79A6B47F3}"/>
+                <a16:creationId xmlns:a16="http://schemas.microsoft.com/office/drawing/2014/main" id="{C4C2141B-B5A0-0285-812E-892810F68493}"/>
               </a:ext>
             </a:extLst>
           </p:cNvPr>
@@ -4802,7 +4802,7 @@
           <p:cNvPr id="67" name="pattern">
             <a:extLst>
               <a:ext uri="{FF2B5EF4-FFF2-40B4-BE49-F238E27FC236}">
-                <a16:creationId xmlns:a16="http://schemas.microsoft.com/office/drawing/2014/main" id="{EBD98386-92D2-84BD-2F25-6AA232E9F00E}"/>
+                <a16:creationId xmlns:a16="http://schemas.microsoft.com/office/drawing/2014/main" id="{33D8B061-831D-931B-5119-A019FCE53A2C}"/>
               </a:ext>
             </a:extLst>
           </p:cNvPr>
@@ -4859,7 +4859,7 @@
           <p:cNvPr id="68" name="pattern">
             <a:extLst>
               <a:ext uri="{FF2B5EF4-FFF2-40B4-BE49-F238E27FC236}">
-                <a16:creationId xmlns:a16="http://schemas.microsoft.com/office/drawing/2014/main" id="{CFB93584-BDA6-94E7-C6B2-F85128DA92E2}"/>
+                <a16:creationId xmlns:a16="http://schemas.microsoft.com/office/drawing/2014/main" id="{ADD2116A-C068-4860-622C-80E80D103327}"/>
               </a:ext>
             </a:extLst>
           </p:cNvPr>
@@ -4916,7 +4916,7 @@
           <p:cNvPr id="69" name="pattern">
             <a:extLst>
               <a:ext uri="{FF2B5EF4-FFF2-40B4-BE49-F238E27FC236}">
-                <a16:creationId xmlns:a16="http://schemas.microsoft.com/office/drawing/2014/main" id="{EBFC48D8-26AD-C99F-1998-9A2E7BE07BA5}"/>
+                <a16:creationId xmlns:a16="http://schemas.microsoft.com/office/drawing/2014/main" id="{296D57E2-9903-94C1-BD37-06CF50E29F07}"/>
               </a:ext>
             </a:extLst>
           </p:cNvPr>
@@ -4973,7 +4973,7 @@
           <p:cNvPr id="70" name="pattern">
             <a:extLst>
               <a:ext uri="{FF2B5EF4-FFF2-40B4-BE49-F238E27FC236}">
-                <a16:creationId xmlns:a16="http://schemas.microsoft.com/office/drawing/2014/main" id="{E8A15515-77E6-294E-DE87-1D552192DBD4}"/>
+                <a16:creationId xmlns:a16="http://schemas.microsoft.com/office/drawing/2014/main" id="{5F31F98F-E4C2-FBEE-AB71-E09E706DAC41}"/>
               </a:ext>
             </a:extLst>
           </p:cNvPr>
@@ -5030,7 +5030,7 @@
           <p:cNvPr id="71" name="pattern">
             <a:extLst>
               <a:ext uri="{FF2B5EF4-FFF2-40B4-BE49-F238E27FC236}">
-                <a16:creationId xmlns:a16="http://schemas.microsoft.com/office/drawing/2014/main" id="{6BB09FA3-4E8C-E969-B6F3-8FE7C97634B8}"/>
+                <a16:creationId xmlns:a16="http://schemas.microsoft.com/office/drawing/2014/main" id="{3AA215BD-22EA-DCB0-69A1-2CF16E08CA3D}"/>
               </a:ext>
             </a:extLst>
           </p:cNvPr>
@@ -5087,7 +5087,7 @@
           <p:cNvPr id="72" name="pattern">
             <a:extLst>
               <a:ext uri="{FF2B5EF4-FFF2-40B4-BE49-F238E27FC236}">
-                <a16:creationId xmlns:a16="http://schemas.microsoft.com/office/drawing/2014/main" id="{47B3E994-2448-4795-5B0B-BCAC9FF55157}"/>
+                <a16:creationId xmlns:a16="http://schemas.microsoft.com/office/drawing/2014/main" id="{181EA99A-5433-53B3-EF3C-9F88C291A4F1}"/>
               </a:ext>
             </a:extLst>
           </p:cNvPr>
@@ -5144,7 +5144,7 @@
           <p:cNvPr id="73" name="pattern">
             <a:extLst>
               <a:ext uri="{FF2B5EF4-FFF2-40B4-BE49-F238E27FC236}">
-                <a16:creationId xmlns:a16="http://schemas.microsoft.com/office/drawing/2014/main" id="{E09F8F17-524B-DEBC-DBFB-8CAA6D2C35C0}"/>
+                <a16:creationId xmlns:a16="http://schemas.microsoft.com/office/drawing/2014/main" id="{2435ACE5-2779-FDFC-C0C2-205E517EFA08}"/>
               </a:ext>
             </a:extLst>
           </p:cNvPr>
@@ -5201,7 +5201,7 @@
           <p:cNvPr id="74" name="pattern">
             <a:extLst>
               <a:ext uri="{FF2B5EF4-FFF2-40B4-BE49-F238E27FC236}">
-                <a16:creationId xmlns:a16="http://schemas.microsoft.com/office/drawing/2014/main" id="{5648E4CD-4FC0-AFD7-AD04-E438A8D3B102}"/>
+                <a16:creationId xmlns:a16="http://schemas.microsoft.com/office/drawing/2014/main" id="{71A065BC-96F0-C799-A255-44E61F9E26C0}"/>
               </a:ext>
             </a:extLst>
           </p:cNvPr>
@@ -5258,7 +5258,7 @@
           <p:cNvPr id="75" name="pattern">
             <a:extLst>
               <a:ext uri="{FF2B5EF4-FFF2-40B4-BE49-F238E27FC236}">
-                <a16:creationId xmlns:a16="http://schemas.microsoft.com/office/drawing/2014/main" id="{4C8F0582-FD6F-1112-0ADD-98D0D6071FE1}"/>
+                <a16:creationId xmlns:a16="http://schemas.microsoft.com/office/drawing/2014/main" id="{05EB03A2-4D83-2F71-39C0-F4F85069BA2A}"/>
               </a:ext>
             </a:extLst>
           </p:cNvPr>
@@ -5315,7 +5315,7 @@
           <p:cNvPr id="76" name="pattern">
             <a:extLst>
               <a:ext uri="{FF2B5EF4-FFF2-40B4-BE49-F238E27FC236}">
-                <a16:creationId xmlns:a16="http://schemas.microsoft.com/office/drawing/2014/main" id="{5AF30891-2742-DB46-1708-1E7E9C16CD0E}"/>
+                <a16:creationId xmlns:a16="http://schemas.microsoft.com/office/drawing/2014/main" id="{FF5A3147-AD06-04B6-929F-EA205430C3BB}"/>
               </a:ext>
             </a:extLst>
           </p:cNvPr>
@@ -5372,7 +5372,7 @@
           <p:cNvPr id="77" name="pattern">
             <a:extLst>
               <a:ext uri="{FF2B5EF4-FFF2-40B4-BE49-F238E27FC236}">
-                <a16:creationId xmlns:a16="http://schemas.microsoft.com/office/drawing/2014/main" id="{07F5564D-AA47-9135-EA87-69841CA88DCE}"/>
+                <a16:creationId xmlns:a16="http://schemas.microsoft.com/office/drawing/2014/main" id="{1B427107-7FBE-FCD9-C998-2473EFA620AB}"/>
               </a:ext>
             </a:extLst>
           </p:cNvPr>
@@ -5429,7 +5429,7 @@
           <p:cNvPr id="78" name="pattern">
             <a:extLst>
               <a:ext uri="{FF2B5EF4-FFF2-40B4-BE49-F238E27FC236}">
-                <a16:creationId xmlns:a16="http://schemas.microsoft.com/office/drawing/2014/main" id="{0E61ECAB-4436-799E-B8EA-85A2DAE66201}"/>
+                <a16:creationId xmlns:a16="http://schemas.microsoft.com/office/drawing/2014/main" id="{5CFEF44E-488E-B7A8-FF81-3A24159AFECB}"/>
               </a:ext>
             </a:extLst>
           </p:cNvPr>
@@ -5486,7 +5486,7 @@
           <p:cNvPr id="79" name="pattern">
             <a:extLst>
               <a:ext uri="{FF2B5EF4-FFF2-40B4-BE49-F238E27FC236}">
-                <a16:creationId xmlns:a16="http://schemas.microsoft.com/office/drawing/2014/main" id="{98900592-2825-2D3B-ED3C-F773D3729FBD}"/>
+                <a16:creationId xmlns:a16="http://schemas.microsoft.com/office/drawing/2014/main" id="{9A7580BB-EFAF-A814-00F9-6A2D72E1388D}"/>
               </a:ext>
             </a:extLst>
           </p:cNvPr>
@@ -5543,7 +5543,7 @@
           <p:cNvPr id="80" name="pattern">
             <a:extLst>
               <a:ext uri="{FF2B5EF4-FFF2-40B4-BE49-F238E27FC236}">
-                <a16:creationId xmlns:a16="http://schemas.microsoft.com/office/drawing/2014/main" id="{5722AB7C-97BF-B627-C37D-AD06CB34E4E7}"/>
+                <a16:creationId xmlns:a16="http://schemas.microsoft.com/office/drawing/2014/main" id="{38421D07-6746-7933-9428-D5A2D2607678}"/>
               </a:ext>
             </a:extLst>
           </p:cNvPr>
@@ -5600,7 +5600,7 @@
           <p:cNvPr id="81" name="pattern">
             <a:extLst>
               <a:ext uri="{FF2B5EF4-FFF2-40B4-BE49-F238E27FC236}">
-                <a16:creationId xmlns:a16="http://schemas.microsoft.com/office/drawing/2014/main" id="{EDA366BE-0B34-C3F5-DA35-12AA899315CC}"/>
+                <a16:creationId xmlns:a16="http://schemas.microsoft.com/office/drawing/2014/main" id="{408B3896-6A57-6C29-8FD9-864D883B9660}"/>
               </a:ext>
             </a:extLst>
           </p:cNvPr>
@@ -5657,7 +5657,7 @@
           <p:cNvPr id="82" name="pattern">
             <a:extLst>
               <a:ext uri="{FF2B5EF4-FFF2-40B4-BE49-F238E27FC236}">
-                <a16:creationId xmlns:a16="http://schemas.microsoft.com/office/drawing/2014/main" id="{E277B697-C88B-5AE3-FF00-29B9FBAEB21C}"/>
+                <a16:creationId xmlns:a16="http://schemas.microsoft.com/office/drawing/2014/main" id="{74E2CF47-D90B-7CA4-14AE-32405DFA8C15}"/>
               </a:ext>
             </a:extLst>
           </p:cNvPr>
@@ -5714,7 +5714,7 @@
           <p:cNvPr id="83" name="pattern">
             <a:extLst>
               <a:ext uri="{FF2B5EF4-FFF2-40B4-BE49-F238E27FC236}">
-                <a16:creationId xmlns:a16="http://schemas.microsoft.com/office/drawing/2014/main" id="{044C19C3-E5AF-6BAC-980C-BE5850269FF0}"/>
+                <a16:creationId xmlns:a16="http://schemas.microsoft.com/office/drawing/2014/main" id="{67190304-1007-F401-9E8A-2AD8D8439F36}"/>
               </a:ext>
             </a:extLst>
           </p:cNvPr>
@@ -5771,7 +5771,7 @@
           <p:cNvPr id="84" name="pattern">
             <a:extLst>
               <a:ext uri="{FF2B5EF4-FFF2-40B4-BE49-F238E27FC236}">
-                <a16:creationId xmlns:a16="http://schemas.microsoft.com/office/drawing/2014/main" id="{B93E8BFD-2F3F-68FE-0AD9-B6EF08AAB74D}"/>
+                <a16:creationId xmlns:a16="http://schemas.microsoft.com/office/drawing/2014/main" id="{BC30971A-DA6E-529C-6A82-37562B6E7EAD}"/>
               </a:ext>
             </a:extLst>
           </p:cNvPr>
@@ -5828,7 +5828,7 @@
           <p:cNvPr id="85" name="pattern">
             <a:extLst>
               <a:ext uri="{FF2B5EF4-FFF2-40B4-BE49-F238E27FC236}">
-                <a16:creationId xmlns:a16="http://schemas.microsoft.com/office/drawing/2014/main" id="{8003117D-432F-F250-29F9-7C7403C121E7}"/>
+                <a16:creationId xmlns:a16="http://schemas.microsoft.com/office/drawing/2014/main" id="{17F54F4D-2AD8-81D9-D14E-2676382FA42A}"/>
               </a:ext>
             </a:extLst>
           </p:cNvPr>
@@ -5885,7 +5885,7 @@
           <p:cNvPr id="86" name="pattern">
             <a:extLst>
               <a:ext uri="{FF2B5EF4-FFF2-40B4-BE49-F238E27FC236}">
-                <a16:creationId xmlns:a16="http://schemas.microsoft.com/office/drawing/2014/main" id="{4E90CD3B-B7C2-0934-A749-63A7E4D58E86}"/>
+                <a16:creationId xmlns:a16="http://schemas.microsoft.com/office/drawing/2014/main" id="{49104EFC-012A-C71A-CF28-A9D13E78FBC6}"/>
               </a:ext>
             </a:extLst>
           </p:cNvPr>
@@ -5942,7 +5942,7 @@
           <p:cNvPr id="87" name="pattern">
             <a:extLst>
               <a:ext uri="{FF2B5EF4-FFF2-40B4-BE49-F238E27FC236}">
-                <a16:creationId xmlns:a16="http://schemas.microsoft.com/office/drawing/2014/main" id="{253A2A7F-0D58-1F87-11D2-8CC339A6E84A}"/>
+                <a16:creationId xmlns:a16="http://schemas.microsoft.com/office/drawing/2014/main" id="{FFE398CC-B697-4105-FFBE-70DAF18908C4}"/>
               </a:ext>
             </a:extLst>
           </p:cNvPr>
@@ -5999,7 +5999,7 @@
           <p:cNvPr id="88" name="pattern">
             <a:extLst>
               <a:ext uri="{FF2B5EF4-FFF2-40B4-BE49-F238E27FC236}">
-                <a16:creationId xmlns:a16="http://schemas.microsoft.com/office/drawing/2014/main" id="{E6375E6F-FF21-C3CB-74D6-52C5EE53C74B}"/>
+                <a16:creationId xmlns:a16="http://schemas.microsoft.com/office/drawing/2014/main" id="{D2A4CEF3-A398-D56F-5583-B25FB65B3B52}"/>
               </a:ext>
             </a:extLst>
           </p:cNvPr>
@@ -6056,7 +6056,7 @@
           <p:cNvPr id="89" name="pattern">
             <a:extLst>
               <a:ext uri="{FF2B5EF4-FFF2-40B4-BE49-F238E27FC236}">
-                <a16:creationId xmlns:a16="http://schemas.microsoft.com/office/drawing/2014/main" id="{75844F2B-272E-7BB2-D9B7-683B01DAC353}"/>
+                <a16:creationId xmlns:a16="http://schemas.microsoft.com/office/drawing/2014/main" id="{5A51D492-564A-751B-27C4-731F4328FC5F}"/>
               </a:ext>
             </a:extLst>
           </p:cNvPr>
@@ -6113,7 +6113,7 @@
           <p:cNvPr id="90" name="pattern">
             <a:extLst>
               <a:ext uri="{FF2B5EF4-FFF2-40B4-BE49-F238E27FC236}">
-                <a16:creationId xmlns:a16="http://schemas.microsoft.com/office/drawing/2014/main" id="{C81A6E14-D9E7-DE70-17DB-9C473785B41F}"/>
+                <a16:creationId xmlns:a16="http://schemas.microsoft.com/office/drawing/2014/main" id="{6EEDA703-9055-DC53-75CD-5F0C410CF0AB}"/>
               </a:ext>
             </a:extLst>
           </p:cNvPr>
@@ -6170,7 +6170,7 @@
           <p:cNvPr id="91" name="pattern">
             <a:extLst>
               <a:ext uri="{FF2B5EF4-FFF2-40B4-BE49-F238E27FC236}">
-                <a16:creationId xmlns:a16="http://schemas.microsoft.com/office/drawing/2014/main" id="{BF2EE266-B6A6-CF3D-6864-6F890DE4E6FE}"/>
+                <a16:creationId xmlns:a16="http://schemas.microsoft.com/office/drawing/2014/main" id="{F23FFD5D-1623-DACE-4A86-EA2C6901687B}"/>
               </a:ext>
             </a:extLst>
           </p:cNvPr>
@@ -6227,7 +6227,7 @@
           <p:cNvPr id="92" name="pattern">
             <a:extLst>
               <a:ext uri="{FF2B5EF4-FFF2-40B4-BE49-F238E27FC236}">
-                <a16:creationId xmlns:a16="http://schemas.microsoft.com/office/drawing/2014/main" id="{FE931A37-A178-5551-28C4-2275AA7C912E}"/>
+                <a16:creationId xmlns:a16="http://schemas.microsoft.com/office/drawing/2014/main" id="{AD82B250-179A-C81B-202F-1ECE29EF7D55}"/>
               </a:ext>
             </a:extLst>
           </p:cNvPr>
@@ -6284,7 +6284,7 @@
           <p:cNvPr id="93" name="pattern">
             <a:extLst>
               <a:ext uri="{FF2B5EF4-FFF2-40B4-BE49-F238E27FC236}">
-                <a16:creationId xmlns:a16="http://schemas.microsoft.com/office/drawing/2014/main" id="{933EE64F-958F-936F-795C-3C06B42A934C}"/>
+                <a16:creationId xmlns:a16="http://schemas.microsoft.com/office/drawing/2014/main" id="{998DA858-90D4-C993-901F-4B3C0C8A8404}"/>
               </a:ext>
             </a:extLst>
           </p:cNvPr>
@@ -6341,7 +6341,7 @@
           <p:cNvPr id="94" name="pattern">
             <a:extLst>
               <a:ext uri="{FF2B5EF4-FFF2-40B4-BE49-F238E27FC236}">
-                <a16:creationId xmlns:a16="http://schemas.microsoft.com/office/drawing/2014/main" id="{3752CBF5-4D90-F49D-7F90-8B55EF259BAF}"/>
+                <a16:creationId xmlns:a16="http://schemas.microsoft.com/office/drawing/2014/main" id="{2F32B38F-DD44-D873-0346-D6A0A86E7888}"/>
               </a:ext>
             </a:extLst>
           </p:cNvPr>
@@ -6398,7 +6398,7 @@
           <p:cNvPr id="95" name="pattern">
             <a:extLst>
               <a:ext uri="{FF2B5EF4-FFF2-40B4-BE49-F238E27FC236}">
-                <a16:creationId xmlns:a16="http://schemas.microsoft.com/office/drawing/2014/main" id="{F59552C8-5116-C633-5396-210CFB9B14FC}"/>
+                <a16:creationId xmlns:a16="http://schemas.microsoft.com/office/drawing/2014/main" id="{07A282C8-72EB-B662-22D7-5589D7EAFBF4}"/>
               </a:ext>
             </a:extLst>
           </p:cNvPr>
@@ -6455,7 +6455,7 @@
           <p:cNvPr id="96" name="pattern">
             <a:extLst>
               <a:ext uri="{FF2B5EF4-FFF2-40B4-BE49-F238E27FC236}">
-                <a16:creationId xmlns:a16="http://schemas.microsoft.com/office/drawing/2014/main" id="{927E5B61-D9F6-9951-7A02-3E528100E878}"/>
+                <a16:creationId xmlns:a16="http://schemas.microsoft.com/office/drawing/2014/main" id="{FFAE0D38-0CF5-1457-70F0-F6319E953B34}"/>
               </a:ext>
             </a:extLst>
           </p:cNvPr>
@@ -6512,7 +6512,7 @@
           <p:cNvPr id="97" name="pattern">
             <a:extLst>
               <a:ext uri="{FF2B5EF4-FFF2-40B4-BE49-F238E27FC236}">
-                <a16:creationId xmlns:a16="http://schemas.microsoft.com/office/drawing/2014/main" id="{8BDE51A2-3839-4DF6-3BC0-D17CD58CD6CC}"/>
+                <a16:creationId xmlns:a16="http://schemas.microsoft.com/office/drawing/2014/main" id="{01C27594-59E8-0A7F-3FED-889F3B572632}"/>
               </a:ext>
             </a:extLst>
           </p:cNvPr>
@@ -6569,7 +6569,7 @@
           <p:cNvPr id="98" name="pattern">
             <a:extLst>
               <a:ext uri="{FF2B5EF4-FFF2-40B4-BE49-F238E27FC236}">
-                <a16:creationId xmlns:a16="http://schemas.microsoft.com/office/drawing/2014/main" id="{8A78E6C6-9D37-C635-8095-B2453D7DE21A}"/>
+                <a16:creationId xmlns:a16="http://schemas.microsoft.com/office/drawing/2014/main" id="{A5477413-662B-F613-1715-789F35B36492}"/>
               </a:ext>
             </a:extLst>
           </p:cNvPr>
@@ -6626,7 +6626,7 @@
           <p:cNvPr id="99" name="pattern">
             <a:extLst>
               <a:ext uri="{FF2B5EF4-FFF2-40B4-BE49-F238E27FC236}">
-                <a16:creationId xmlns:a16="http://schemas.microsoft.com/office/drawing/2014/main" id="{197ACDE4-9BD8-63E9-C052-E12A6E65CF5E}"/>
+                <a16:creationId xmlns:a16="http://schemas.microsoft.com/office/drawing/2014/main" id="{CE59EA9C-218D-49B4-4C80-366528105424}"/>
               </a:ext>
             </a:extLst>
           </p:cNvPr>
@@ -6683,7 +6683,7 @@
           <p:cNvPr id="100" name="pattern">
             <a:extLst>
               <a:ext uri="{FF2B5EF4-FFF2-40B4-BE49-F238E27FC236}">
-                <a16:creationId xmlns:a16="http://schemas.microsoft.com/office/drawing/2014/main" id="{E2E138CD-241B-1B79-86E1-4DB27E34736B}"/>
+                <a16:creationId xmlns:a16="http://schemas.microsoft.com/office/drawing/2014/main" id="{90D728E5-5EF6-3F3F-2A9C-963CBDBE0994}"/>
               </a:ext>
             </a:extLst>
           </p:cNvPr>
@@ -6740,7 +6740,7 @@
           <p:cNvPr id="101" name="pattern">
             <a:extLst>
               <a:ext uri="{FF2B5EF4-FFF2-40B4-BE49-F238E27FC236}">
-                <a16:creationId xmlns:a16="http://schemas.microsoft.com/office/drawing/2014/main" id="{A4E4CD26-66FD-BBF9-398B-0244E5F7C871}"/>
+                <a16:creationId xmlns:a16="http://schemas.microsoft.com/office/drawing/2014/main" id="{42829854-E07B-B4E9-5C31-091FF3F636EB}"/>
               </a:ext>
             </a:extLst>
           </p:cNvPr>
@@ -6797,7 +6797,7 @@
           <p:cNvPr id="102" name="pattern">
             <a:extLst>
               <a:ext uri="{FF2B5EF4-FFF2-40B4-BE49-F238E27FC236}">
-                <a16:creationId xmlns:a16="http://schemas.microsoft.com/office/drawing/2014/main" id="{1A104BD7-45DF-A3ED-9601-4616F0B6F299}"/>
+                <a16:creationId xmlns:a16="http://schemas.microsoft.com/office/drawing/2014/main" id="{48D41D87-3BC3-986D-BAA1-6FF2437CF7C4}"/>
               </a:ext>
             </a:extLst>
           </p:cNvPr>
@@ -6854,7 +6854,7 @@
           <p:cNvPr id="103" name="pattern">
             <a:extLst>
               <a:ext uri="{FF2B5EF4-FFF2-40B4-BE49-F238E27FC236}">
-                <a16:creationId xmlns:a16="http://schemas.microsoft.com/office/drawing/2014/main" id="{04F769AA-0A6E-2A1D-0075-0A227F757F2D}"/>
+                <a16:creationId xmlns:a16="http://schemas.microsoft.com/office/drawing/2014/main" id="{90F7D639-79BD-B42C-9BE6-CA434F5E2D72}"/>
               </a:ext>
             </a:extLst>
           </p:cNvPr>
@@ -6911,7 +6911,7 @@
           <p:cNvPr id="104" name="pattern">
             <a:extLst>
               <a:ext uri="{FF2B5EF4-FFF2-40B4-BE49-F238E27FC236}">
-                <a16:creationId xmlns:a16="http://schemas.microsoft.com/office/drawing/2014/main" id="{C6B6E763-5B82-B095-A91B-6AAFB3BD8A3F}"/>
+                <a16:creationId xmlns:a16="http://schemas.microsoft.com/office/drawing/2014/main" id="{73917006-4856-B5A4-73FF-263742F4C232}"/>
               </a:ext>
             </a:extLst>
           </p:cNvPr>
@@ -6968,7 +6968,7 @@
           <p:cNvPr id="105" name="pattern">
             <a:extLst>
               <a:ext uri="{FF2B5EF4-FFF2-40B4-BE49-F238E27FC236}">
-                <a16:creationId xmlns:a16="http://schemas.microsoft.com/office/drawing/2014/main" id="{07E1FA90-DA48-7D00-3BB5-F1BF9B1F4F07}"/>
+                <a16:creationId xmlns:a16="http://schemas.microsoft.com/office/drawing/2014/main" id="{5CC89AD8-6921-2AF9-263A-CA69ACADD75A}"/>
               </a:ext>
             </a:extLst>
           </p:cNvPr>
@@ -7025,7 +7025,7 @@
           <p:cNvPr id="106" name="pattern">
             <a:extLst>
               <a:ext uri="{FF2B5EF4-FFF2-40B4-BE49-F238E27FC236}">
-                <a16:creationId xmlns:a16="http://schemas.microsoft.com/office/drawing/2014/main" id="{F815C9F3-A7A4-7B2F-BD66-ADD7CBFBB6DF}"/>
+                <a16:creationId xmlns:a16="http://schemas.microsoft.com/office/drawing/2014/main" id="{13835AE7-C052-1097-6B25-1FF58FE9A725}"/>
               </a:ext>
             </a:extLst>
           </p:cNvPr>
@@ -7082,7 +7082,7 @@
           <p:cNvPr id="107" name="pattern">
             <a:extLst>
               <a:ext uri="{FF2B5EF4-FFF2-40B4-BE49-F238E27FC236}">
-                <a16:creationId xmlns:a16="http://schemas.microsoft.com/office/drawing/2014/main" id="{3EE9EB98-1883-E257-6EEB-7A25FFCD5050}"/>
+                <a16:creationId xmlns:a16="http://schemas.microsoft.com/office/drawing/2014/main" id="{702665CB-1C7B-EE88-FE65-9E7F9BAEA7F4}"/>
               </a:ext>
             </a:extLst>
           </p:cNvPr>
@@ -7139,7 +7139,7 @@
           <p:cNvPr id="108" name="pattern">
             <a:extLst>
               <a:ext uri="{FF2B5EF4-FFF2-40B4-BE49-F238E27FC236}">
-                <a16:creationId xmlns:a16="http://schemas.microsoft.com/office/drawing/2014/main" id="{F6360E3D-F7A7-CC44-5F1D-0FA1D1A8797B}"/>
+                <a16:creationId xmlns:a16="http://schemas.microsoft.com/office/drawing/2014/main" id="{C3060045-50F7-6A99-AB62-3C6BC504BA57}"/>
               </a:ext>
             </a:extLst>
           </p:cNvPr>
@@ -7196,7 +7196,7 @@
           <p:cNvPr id="109" name="pattern">
             <a:extLst>
               <a:ext uri="{FF2B5EF4-FFF2-40B4-BE49-F238E27FC236}">
-                <a16:creationId xmlns:a16="http://schemas.microsoft.com/office/drawing/2014/main" id="{BE22A9F3-C80B-4F1A-0420-F34DCE31A28D}"/>
+                <a16:creationId xmlns:a16="http://schemas.microsoft.com/office/drawing/2014/main" id="{84191751-F7B5-7F90-F72C-6B383BAEFC3B}"/>
               </a:ext>
             </a:extLst>
           </p:cNvPr>
@@ -7253,7 +7253,7 @@
           <p:cNvPr id="110" name="pattern">
             <a:extLst>
               <a:ext uri="{FF2B5EF4-FFF2-40B4-BE49-F238E27FC236}">
-                <a16:creationId xmlns:a16="http://schemas.microsoft.com/office/drawing/2014/main" id="{320DE222-1CED-82D2-FC65-CF241A3C77E9}"/>
+                <a16:creationId xmlns:a16="http://schemas.microsoft.com/office/drawing/2014/main" id="{71A7AF35-936F-07B9-5F99-8396B4AF4D9F}"/>
               </a:ext>
             </a:extLst>
           </p:cNvPr>
@@ -7310,7 +7310,7 @@
           <p:cNvPr id="111" name="pattern">
             <a:extLst>
               <a:ext uri="{FF2B5EF4-FFF2-40B4-BE49-F238E27FC236}">
-                <a16:creationId xmlns:a16="http://schemas.microsoft.com/office/drawing/2014/main" id="{8FD68B0E-244A-0F1D-8F86-A74E0BE0AC10}"/>
+                <a16:creationId xmlns:a16="http://schemas.microsoft.com/office/drawing/2014/main" id="{A5AA5D39-0ED0-23E8-D21D-6F9714D597DC}"/>
               </a:ext>
             </a:extLst>
           </p:cNvPr>
@@ -7367,7 +7367,7 @@
           <p:cNvPr id="112" name="pattern">
             <a:extLst>
               <a:ext uri="{FF2B5EF4-FFF2-40B4-BE49-F238E27FC236}">
-                <a16:creationId xmlns:a16="http://schemas.microsoft.com/office/drawing/2014/main" id="{6CAD33C8-E0A6-8AC6-3B6F-6C72A4648C09}"/>
+                <a16:creationId xmlns:a16="http://schemas.microsoft.com/office/drawing/2014/main" id="{702D5282-06C1-6E40-41D2-CB52E5ED3EB5}"/>
               </a:ext>
             </a:extLst>
           </p:cNvPr>
@@ -7424,7 +7424,7 @@
           <p:cNvPr id="113" name="pattern">
             <a:extLst>
               <a:ext uri="{FF2B5EF4-FFF2-40B4-BE49-F238E27FC236}">
-                <a16:creationId xmlns:a16="http://schemas.microsoft.com/office/drawing/2014/main" id="{9895975D-2713-9A4F-6BDB-AEC54E345D5D}"/>
+                <a16:creationId xmlns:a16="http://schemas.microsoft.com/office/drawing/2014/main" id="{BA830248-7C45-4160-E425-6A75015E8424}"/>
               </a:ext>
             </a:extLst>
           </p:cNvPr>
@@ -7481,7 +7481,7 @@
           <p:cNvPr id="114" name="pattern">
             <a:extLst>
               <a:ext uri="{FF2B5EF4-FFF2-40B4-BE49-F238E27FC236}">
-                <a16:creationId xmlns:a16="http://schemas.microsoft.com/office/drawing/2014/main" id="{BACEDFB5-C2D5-EC31-98CA-D62305375872}"/>
+                <a16:creationId xmlns:a16="http://schemas.microsoft.com/office/drawing/2014/main" id="{E2F4AB42-E985-FA15-EA26-374ADA16B021}"/>
               </a:ext>
             </a:extLst>
           </p:cNvPr>
@@ -7538,7 +7538,7 @@
           <p:cNvPr id="115" name="pattern">
             <a:extLst>
               <a:ext uri="{FF2B5EF4-FFF2-40B4-BE49-F238E27FC236}">
-                <a16:creationId xmlns:a16="http://schemas.microsoft.com/office/drawing/2014/main" id="{DEF7741B-58A2-5C56-36F1-849059344148}"/>
+                <a16:creationId xmlns:a16="http://schemas.microsoft.com/office/drawing/2014/main" id="{74802E34-4D34-4E0C-CFED-DF1842B29344}"/>
               </a:ext>
             </a:extLst>
           </p:cNvPr>
@@ -7595,7 +7595,7 @@
           <p:cNvPr id="116" name="pattern">
             <a:extLst>
               <a:ext uri="{FF2B5EF4-FFF2-40B4-BE49-F238E27FC236}">
-                <a16:creationId xmlns:a16="http://schemas.microsoft.com/office/drawing/2014/main" id="{C1222DCD-4363-30A7-AAE9-166B2C78EC0A}"/>
+                <a16:creationId xmlns:a16="http://schemas.microsoft.com/office/drawing/2014/main" id="{DE5E23FA-A237-C089-7FA2-1197B8438535}"/>
               </a:ext>
             </a:extLst>
           </p:cNvPr>
@@ -7652,7 +7652,7 @@
           <p:cNvPr id="117" name="pattern">
             <a:extLst>
               <a:ext uri="{FF2B5EF4-FFF2-40B4-BE49-F238E27FC236}">
-                <a16:creationId xmlns:a16="http://schemas.microsoft.com/office/drawing/2014/main" id="{7F2C2BDF-51A2-3088-E9E0-058A940033FA}"/>
+                <a16:creationId xmlns:a16="http://schemas.microsoft.com/office/drawing/2014/main" id="{380F6A65-7E12-2176-2B29-DC50EDC6774B}"/>
               </a:ext>
             </a:extLst>
           </p:cNvPr>
@@ -7709,7 +7709,7 @@
           <p:cNvPr id="118" name="pattern">
             <a:extLst>
               <a:ext uri="{FF2B5EF4-FFF2-40B4-BE49-F238E27FC236}">
-                <a16:creationId xmlns:a16="http://schemas.microsoft.com/office/drawing/2014/main" id="{0221288D-9EAA-7DC8-0934-633FBDFA3BF5}"/>
+                <a16:creationId xmlns:a16="http://schemas.microsoft.com/office/drawing/2014/main" id="{A37734E9-96D8-B2FE-06DD-C258877E32C7}"/>
               </a:ext>
             </a:extLst>
           </p:cNvPr>
@@ -7766,7 +7766,7 @@
           <p:cNvPr id="119" name="pattern">
             <a:extLst>
               <a:ext uri="{FF2B5EF4-FFF2-40B4-BE49-F238E27FC236}">
-                <a16:creationId xmlns:a16="http://schemas.microsoft.com/office/drawing/2014/main" id="{8C8FDF81-6750-7C84-99DA-759DBC6537D3}"/>
+                <a16:creationId xmlns:a16="http://schemas.microsoft.com/office/drawing/2014/main" id="{A116F8EF-50D0-1684-7555-4AEC146D485D}"/>
               </a:ext>
             </a:extLst>
           </p:cNvPr>
@@ -7823,7 +7823,7 @@
           <p:cNvPr id="120" name="pattern">
             <a:extLst>
               <a:ext uri="{FF2B5EF4-FFF2-40B4-BE49-F238E27FC236}">
-                <a16:creationId xmlns:a16="http://schemas.microsoft.com/office/drawing/2014/main" id="{ED55D43E-AA80-B85D-2B08-025126DA1D97}"/>
+                <a16:creationId xmlns:a16="http://schemas.microsoft.com/office/drawing/2014/main" id="{BAA3A2C6-2B20-4B4B-3888-695BFD3FD355}"/>
               </a:ext>
             </a:extLst>
           </p:cNvPr>
@@ -7880,7 +7880,7 @@
           <p:cNvPr id="121" name="pattern">
             <a:extLst>
               <a:ext uri="{FF2B5EF4-FFF2-40B4-BE49-F238E27FC236}">
-                <a16:creationId xmlns:a16="http://schemas.microsoft.com/office/drawing/2014/main" id="{47B84734-19CD-1147-E079-60E3FB23112A}"/>
+                <a16:creationId xmlns:a16="http://schemas.microsoft.com/office/drawing/2014/main" id="{71959514-CA86-48EF-7D24-6D2E410C0611}"/>
               </a:ext>
             </a:extLst>
           </p:cNvPr>
@@ -7937,7 +7937,7 @@
           <p:cNvPr id="122" name="pattern">
             <a:extLst>
               <a:ext uri="{FF2B5EF4-FFF2-40B4-BE49-F238E27FC236}">
-                <a16:creationId xmlns:a16="http://schemas.microsoft.com/office/drawing/2014/main" id="{C4B86191-8C1B-4AAD-1ECC-2270E0F55693}"/>
+                <a16:creationId xmlns:a16="http://schemas.microsoft.com/office/drawing/2014/main" id="{5199D5BE-86C6-0EF4-3FAC-39BE906ECD0B}"/>
               </a:ext>
             </a:extLst>
           </p:cNvPr>
@@ -7994,7 +7994,7 @@
           <p:cNvPr id="123" name="pattern">
             <a:extLst>
               <a:ext uri="{FF2B5EF4-FFF2-40B4-BE49-F238E27FC236}">
-                <a16:creationId xmlns:a16="http://schemas.microsoft.com/office/drawing/2014/main" id="{F46281D7-4A22-AB16-9860-C952E8541E3F}"/>
+                <a16:creationId xmlns:a16="http://schemas.microsoft.com/office/drawing/2014/main" id="{AF305459-EF48-951B-3AC3-65B82351667C}"/>
               </a:ext>
             </a:extLst>
           </p:cNvPr>
@@ -8051,7 +8051,7 @@
           <p:cNvPr id="124" name="pattern">
             <a:extLst>
               <a:ext uri="{FF2B5EF4-FFF2-40B4-BE49-F238E27FC236}">
-                <a16:creationId xmlns:a16="http://schemas.microsoft.com/office/drawing/2014/main" id="{F94CA788-7668-6FEE-8AAC-FA875FA5E683}"/>
+                <a16:creationId xmlns:a16="http://schemas.microsoft.com/office/drawing/2014/main" id="{4A29AF4C-E026-2EE2-B00B-6D1A686981B6}"/>
               </a:ext>
             </a:extLst>
           </p:cNvPr>
@@ -8108,7 +8108,7 @@
           <p:cNvPr id="125" name="pattern">
             <a:extLst>
               <a:ext uri="{FF2B5EF4-FFF2-40B4-BE49-F238E27FC236}">
-                <a16:creationId xmlns:a16="http://schemas.microsoft.com/office/drawing/2014/main" id="{C17B968A-9542-CD05-4B58-451CEA828C95}"/>
+                <a16:creationId xmlns:a16="http://schemas.microsoft.com/office/drawing/2014/main" id="{4AB22F78-75E0-45E3-F0B6-48D64A7C8F18}"/>
               </a:ext>
             </a:extLst>
           </p:cNvPr>
@@ -8165,7 +8165,7 @@
           <p:cNvPr id="126" name="pattern">
             <a:extLst>
               <a:ext uri="{FF2B5EF4-FFF2-40B4-BE49-F238E27FC236}">
-                <a16:creationId xmlns:a16="http://schemas.microsoft.com/office/drawing/2014/main" id="{F87C8A61-547E-8281-F471-B40E30425157}"/>
+                <a16:creationId xmlns:a16="http://schemas.microsoft.com/office/drawing/2014/main" id="{DDD4EFC8-3713-A61A-778A-5E7FB35D8BB4}"/>
               </a:ext>
             </a:extLst>
           </p:cNvPr>
@@ -8222,7 +8222,7 @@
           <p:cNvPr id="127" name="pattern">
             <a:extLst>
               <a:ext uri="{FF2B5EF4-FFF2-40B4-BE49-F238E27FC236}">
-                <a16:creationId xmlns:a16="http://schemas.microsoft.com/office/drawing/2014/main" id="{4B106BDD-9453-FDC8-25B4-F03096017492}"/>
+                <a16:creationId xmlns:a16="http://schemas.microsoft.com/office/drawing/2014/main" id="{524D74EA-24A5-4F56-DDC8-B3D1709A387B}"/>
               </a:ext>
             </a:extLst>
           </p:cNvPr>
@@ -8279,7 +8279,7 @@
           <p:cNvPr id="128" name="pattern">
             <a:extLst>
               <a:ext uri="{FF2B5EF4-FFF2-40B4-BE49-F238E27FC236}">
-                <a16:creationId xmlns:a16="http://schemas.microsoft.com/office/drawing/2014/main" id="{606EFE72-0365-F65E-085D-BAE11B18FFF9}"/>
+                <a16:creationId xmlns:a16="http://schemas.microsoft.com/office/drawing/2014/main" id="{CAC89427-3C90-5A14-253A-68CD9EC56DD2}"/>
               </a:ext>
             </a:extLst>
           </p:cNvPr>
@@ -8336,7 +8336,7 @@
           <p:cNvPr id="129" name="pattern">
             <a:extLst>
               <a:ext uri="{FF2B5EF4-FFF2-40B4-BE49-F238E27FC236}">
-                <a16:creationId xmlns:a16="http://schemas.microsoft.com/office/drawing/2014/main" id="{7FF742DA-F82D-E46B-BBD7-31ACA0F9012A}"/>
+                <a16:creationId xmlns:a16="http://schemas.microsoft.com/office/drawing/2014/main" id="{266DCACC-7130-0473-3295-A3F9A3D403A4}"/>
               </a:ext>
             </a:extLst>
           </p:cNvPr>
@@ -8393,7 +8393,7 @@
           <p:cNvPr id="130" name="pattern">
             <a:extLst>
               <a:ext uri="{FF2B5EF4-FFF2-40B4-BE49-F238E27FC236}">
-                <a16:creationId xmlns:a16="http://schemas.microsoft.com/office/drawing/2014/main" id="{F6B304B1-12E4-3684-41AA-4D48AD9AD48D}"/>
+                <a16:creationId xmlns:a16="http://schemas.microsoft.com/office/drawing/2014/main" id="{8BB16030-0D62-6182-8095-B95222C1BEBE}"/>
               </a:ext>
             </a:extLst>
           </p:cNvPr>
@@ -8450,7 +8450,7 @@
           <p:cNvPr id="131" name="pattern">
             <a:extLst>
               <a:ext uri="{FF2B5EF4-FFF2-40B4-BE49-F238E27FC236}">
-                <a16:creationId xmlns:a16="http://schemas.microsoft.com/office/drawing/2014/main" id="{DE5639AD-6D74-4A22-27AC-BCDAC7980E90}"/>
+                <a16:creationId xmlns:a16="http://schemas.microsoft.com/office/drawing/2014/main" id="{F031821D-FFE9-906C-17C3-E94157C1909F}"/>
               </a:ext>
             </a:extLst>
           </p:cNvPr>
@@ -8507,7 +8507,7 @@
           <p:cNvPr id="132" name="pattern">
             <a:extLst>
               <a:ext uri="{FF2B5EF4-FFF2-40B4-BE49-F238E27FC236}">
-                <a16:creationId xmlns:a16="http://schemas.microsoft.com/office/drawing/2014/main" id="{80916C30-D7E6-347F-7449-984B2CF1310B}"/>
+                <a16:creationId xmlns:a16="http://schemas.microsoft.com/office/drawing/2014/main" id="{36785494-6A1A-A31C-FCE4-E7E6F7E3E9C8}"/>
               </a:ext>
             </a:extLst>
           </p:cNvPr>
@@ -8564,7 +8564,7 @@
           <p:cNvPr id="133" name="pattern">
             <a:extLst>
               <a:ext uri="{FF2B5EF4-FFF2-40B4-BE49-F238E27FC236}">
-                <a16:creationId xmlns:a16="http://schemas.microsoft.com/office/drawing/2014/main" id="{8658AFBB-251A-1E63-0D8F-7B7916447A97}"/>
+                <a16:creationId xmlns:a16="http://schemas.microsoft.com/office/drawing/2014/main" id="{6C82F877-BE73-EF26-77C7-A8783D2C9FA9}"/>
               </a:ext>
             </a:extLst>
           </p:cNvPr>
@@ -8621,7 +8621,7 @@
           <p:cNvPr id="134" name="pattern">
             <a:extLst>
               <a:ext uri="{FF2B5EF4-FFF2-40B4-BE49-F238E27FC236}">
-                <a16:creationId xmlns:a16="http://schemas.microsoft.com/office/drawing/2014/main" id="{B8890CE2-142F-5DC6-1E48-B6638A7C97E7}"/>
+                <a16:creationId xmlns:a16="http://schemas.microsoft.com/office/drawing/2014/main" id="{1A1C5B93-84FE-D89B-6645-0B7DBD29466B}"/>
               </a:ext>
             </a:extLst>
           </p:cNvPr>
@@ -8678,7 +8678,7 @@
           <p:cNvPr id="135" name="pattern">
             <a:extLst>
               <a:ext uri="{FF2B5EF4-FFF2-40B4-BE49-F238E27FC236}">
-                <a16:creationId xmlns:a16="http://schemas.microsoft.com/office/drawing/2014/main" id="{04CD1BD2-3207-881F-B1FC-FA1FA027F0DC}"/>
+                <a16:creationId xmlns:a16="http://schemas.microsoft.com/office/drawing/2014/main" id="{3882ACA2-8831-44D8-C5FE-6CFF9CB64E90}"/>
               </a:ext>
             </a:extLst>
           </p:cNvPr>
@@ -8735,7 +8735,7 @@
           <p:cNvPr id="136" name="pattern">
             <a:extLst>
               <a:ext uri="{FF2B5EF4-FFF2-40B4-BE49-F238E27FC236}">
-                <a16:creationId xmlns:a16="http://schemas.microsoft.com/office/drawing/2014/main" id="{7B0B0E44-7516-38C8-D640-2B5868185707}"/>
+                <a16:creationId xmlns:a16="http://schemas.microsoft.com/office/drawing/2014/main" id="{EAE11F9D-6E7E-8186-B65E-760F3B8BDAA8}"/>
               </a:ext>
             </a:extLst>
           </p:cNvPr>
@@ -8792,7 +8792,7 @@
           <p:cNvPr id="137" name="pattern">
             <a:extLst>
               <a:ext uri="{FF2B5EF4-FFF2-40B4-BE49-F238E27FC236}">
-                <a16:creationId xmlns:a16="http://schemas.microsoft.com/office/drawing/2014/main" id="{768F90B1-0D4C-6491-2995-ABCE78A14AD7}"/>
+                <a16:creationId xmlns:a16="http://schemas.microsoft.com/office/drawing/2014/main" id="{29AC6550-EAE1-C75E-4DD1-DA5438282E03}"/>
               </a:ext>
             </a:extLst>
           </p:cNvPr>
@@ -8847,7 +8847,7 @@
     </p:spTree>
     <p:extLst>
       <p:ext uri="{BB962C8B-B14F-4D97-AF65-F5344CB8AC3E}">
-        <p14:creationId xmlns:p14="http://schemas.microsoft.com/office/powerpoint/2010/main" val="1726202818"/>
+        <p14:creationId xmlns:p14="http://schemas.microsoft.com/office/powerpoint/2010/main" val="3912328126"/>
       </p:ext>
     </p:extLst>
   </p:cSld>
@@ -8997,7 +8997,7 @@
             </a:lvl1pPr>
           </a:lstStyle>
           <a:p>
-            <a:fld id="{69A66F8C-F25E-4B2E-B2E2-0A218D443514}" type="datetimeFigureOut">
+            <a:fld id="{90A7BBED-E6FA-40A6-8A51-59E4B08CD8B8}" type="datetimeFigureOut">
               <a:rPr lang="en-US" smtClean="0"/>
               <a:t>10/3/2026</a:t>
             </a:fld>
@@ -9042,7 +9042,7 @@
             </a:lvl1pPr>
           </a:lstStyle>
           <a:p>
-            <a:fld id="{369B3908-4DF9-450B-8F99-2A754569D7A5}" type="slidenum">
+            <a:fld id="{4F0FE17B-5063-4433-97D2-96EAD825CE6E}" type="slidenum">
               <a:rPr lang="en-US" smtClean="0"/>
               <a:t>‹#›</a:t>
             </a:fld>
@@ -9162,7 +9162,7 @@
           <p:cNvPr id="8" name="item_1_title">
             <a:extLst>
               <a:ext uri="{FF2B5EF4-FFF2-40B4-BE49-F238E27FC236}">
-                <a16:creationId xmlns:a16="http://schemas.microsoft.com/office/drawing/2014/main" id="{059FCCDA-7095-AF28-E5F9-7E8A1DAA140B}"/>
+                <a16:creationId xmlns:a16="http://schemas.microsoft.com/office/drawing/2014/main" id="{813BA195-AAD8-7357-5D9F-D4B636B179D3}"/>
               </a:ext>
             </a:extLst>
           </p:cNvPr>
@@ -9190,7 +9190,7 @@
               </a:spcBef>
               <a:buFontTx/>
               <a:buNone/>
-              <a:defRPr sz="2200" b="1">
+              <a:defRPr sz="2000" b="1">
                 <a:solidFill>
                   <a:schemeClr val="accent1">
                     <a:lumMod val="95000"/>
@@ -9214,7 +9214,7 @@
           <p:cNvPr id="9" name="item_1">
             <a:extLst>
               <a:ext uri="{FF2B5EF4-FFF2-40B4-BE49-F238E27FC236}">
-                <a16:creationId xmlns:a16="http://schemas.microsoft.com/office/drawing/2014/main" id="{A7FF1DC0-D313-C510-560D-7FEADF6B3395}"/>
+                <a16:creationId xmlns:a16="http://schemas.microsoft.com/office/drawing/2014/main" id="{9904237F-C538-8902-DC65-F1A5CEA051D0}"/>
               </a:ext>
             </a:extLst>
           </p:cNvPr>
@@ -9262,7 +9262,7 @@
           <p:cNvPr id="10" name="item_2_title">
             <a:extLst>
               <a:ext uri="{FF2B5EF4-FFF2-40B4-BE49-F238E27FC236}">
-                <a16:creationId xmlns:a16="http://schemas.microsoft.com/office/drawing/2014/main" id="{1159F5A5-538F-D96C-DDB8-BBA98A13BA1E}"/>
+                <a16:creationId xmlns:a16="http://schemas.microsoft.com/office/drawing/2014/main" id="{0689C31E-5F43-EB5E-EEAA-A4F8B5EAE2AD}"/>
               </a:ext>
             </a:extLst>
           </p:cNvPr>
@@ -9293,7 +9293,7 @@
               </a:spcBef>
               <a:buFontTx/>
               <a:buNone/>
-              <a:defRPr sz="2200" b="1">
+              <a:defRPr sz="2000" b="1">
                 <a:solidFill>
                   <a:schemeClr val="accent1">
                     <a:lumMod val="95000"/>
@@ -9317,7 +9317,7 @@
           <p:cNvPr id="11" name="item_2">
             <a:extLst>
               <a:ext uri="{FF2B5EF4-FFF2-40B4-BE49-F238E27FC236}">
-                <a16:creationId xmlns:a16="http://schemas.microsoft.com/office/drawing/2014/main" id="{3C25FD99-109D-C465-3BA9-22F74C58FBD0}"/>
+                <a16:creationId xmlns:a16="http://schemas.microsoft.com/office/drawing/2014/main" id="{48767F65-C36F-2DAD-34D5-2C23D5D32708}"/>
               </a:ext>
             </a:extLst>
           </p:cNvPr>
@@ -9365,7 +9365,7 @@
           <p:cNvPr id="12" name="item_3_title">
             <a:extLst>
               <a:ext uri="{FF2B5EF4-FFF2-40B4-BE49-F238E27FC236}">
-                <a16:creationId xmlns:a16="http://schemas.microsoft.com/office/drawing/2014/main" id="{B0B06251-BA1E-ABC4-E3D0-38F8100F973C}"/>
+                <a16:creationId xmlns:a16="http://schemas.microsoft.com/office/drawing/2014/main" id="{218D291F-CF57-C29F-3881-8A1D375D1EE7}"/>
               </a:ext>
             </a:extLst>
           </p:cNvPr>
@@ -9396,7 +9396,7 @@
               </a:spcBef>
               <a:buFontTx/>
               <a:buNone/>
-              <a:defRPr sz="2200" b="1">
+              <a:defRPr sz="2000" b="1">
                 <a:solidFill>
                   <a:schemeClr val="accent1">
                     <a:lumMod val="95000"/>
@@ -9420,7 +9420,7 @@
           <p:cNvPr id="13" name="item_3">
             <a:extLst>
               <a:ext uri="{FF2B5EF4-FFF2-40B4-BE49-F238E27FC236}">
-                <a16:creationId xmlns:a16="http://schemas.microsoft.com/office/drawing/2014/main" id="{3015833D-8202-78E7-99AA-8D70A59EAEF4}"/>
+                <a16:creationId xmlns:a16="http://schemas.microsoft.com/office/drawing/2014/main" id="{BF7B8BD4-80BC-8559-6A4C-C9DE0BDEB1B3}"/>
               </a:ext>
             </a:extLst>
           </p:cNvPr>
@@ -9468,7 +9468,7 @@
           <p:cNvPr id="14" name="item_4_title">
             <a:extLst>
               <a:ext uri="{FF2B5EF4-FFF2-40B4-BE49-F238E27FC236}">
-                <a16:creationId xmlns:a16="http://schemas.microsoft.com/office/drawing/2014/main" id="{B7252A54-FDA4-77AE-99B4-B7649AD4E92B}"/>
+                <a16:creationId xmlns:a16="http://schemas.microsoft.com/office/drawing/2014/main" id="{C75A8736-4B3F-3D36-3701-84FB19B0BBCB}"/>
               </a:ext>
             </a:extLst>
           </p:cNvPr>
@@ -9499,7 +9499,7 @@
               </a:spcBef>
               <a:buFontTx/>
               <a:buNone/>
-              <a:defRPr sz="2200" b="1">
+              <a:defRPr sz="2000" b="1">
                 <a:solidFill>
                   <a:schemeClr val="accent1">
                     <a:lumMod val="95000"/>
@@ -9523,7 +9523,7 @@
           <p:cNvPr id="15" name="item_4">
             <a:extLst>
               <a:ext uri="{FF2B5EF4-FFF2-40B4-BE49-F238E27FC236}">
-                <a16:creationId xmlns:a16="http://schemas.microsoft.com/office/drawing/2014/main" id="{1B2B8AEB-DDF3-F297-1DE4-79278D0081C3}"/>
+                <a16:creationId xmlns:a16="http://schemas.microsoft.com/office/drawing/2014/main" id="{36B0AE47-8E0C-5507-D121-CC0A51E1BC93}"/>
               </a:ext>
             </a:extLst>
           </p:cNvPr>
@@ -9571,7 +9571,7 @@
           <p:cNvPr id="16" name="source">
             <a:extLst>
               <a:ext uri="{FF2B5EF4-FFF2-40B4-BE49-F238E27FC236}">
-                <a16:creationId xmlns:a16="http://schemas.microsoft.com/office/drawing/2014/main" id="{C21B2248-7FC2-0BEE-2F23-45D14FBFF12D}"/>
+                <a16:creationId xmlns:a16="http://schemas.microsoft.com/office/drawing/2014/main" id="{78D9CE4D-CD37-FF85-CE12-25E4F52E179D}"/>
               </a:ext>
             </a:extLst>
           </p:cNvPr>
@@ -9628,7 +9628,7 @@
     </p:spTree>
     <p:extLst>
       <p:ext uri="{BB962C8B-B14F-4D97-AF65-F5344CB8AC3E}">
-        <p14:creationId xmlns:p14="http://schemas.microsoft.com/office/powerpoint/2010/main" val="1195677177"/>
+        <p14:creationId xmlns:p14="http://schemas.microsoft.com/office/powerpoint/2010/main" val="2968238158"/>
       </p:ext>
     </p:extLst>
   </p:cSld>
@@ -9778,7 +9778,7 @@
             </a:lvl1pPr>
           </a:lstStyle>
           <a:p>
-            <a:fld id="{69A66F8C-F25E-4B2E-B2E2-0A218D443514}" type="datetimeFigureOut">
+            <a:fld id="{90A7BBED-E6FA-40A6-8A51-59E4B08CD8B8}" type="datetimeFigureOut">
               <a:rPr lang="en-US" smtClean="0"/>
               <a:t>10/3/2026</a:t>
             </a:fld>
@@ -9823,7 +9823,7 @@
             </a:lvl1pPr>
           </a:lstStyle>
           <a:p>
-            <a:fld id="{369B3908-4DF9-450B-8F99-2A754569D7A5}" type="slidenum">
+            <a:fld id="{4F0FE17B-5063-4433-97D2-96EAD825CE6E}" type="slidenum">
               <a:rPr lang="en-US" smtClean="0"/>
               <a:t>‹#›</a:t>
             </a:fld>
@@ -9943,7 +9943,7 @@
           <p:cNvPr id="8" name="body">
             <a:extLst>
               <a:ext uri="{FF2B5EF4-FFF2-40B4-BE49-F238E27FC236}">
-                <a16:creationId xmlns:a16="http://schemas.microsoft.com/office/drawing/2014/main" id="{A1E5F270-71CE-BE92-7382-C0D05F10B0EC}"/>
+                <a16:creationId xmlns:a16="http://schemas.microsoft.com/office/drawing/2014/main" id="{C23D53FE-44C4-07A5-EFD0-CE1CFB153692}"/>
               </a:ext>
             </a:extLst>
           </p:cNvPr>
@@ -9988,7 +9988,7 @@
           <p:cNvPr id="9" name="source">
             <a:extLst>
               <a:ext uri="{FF2B5EF4-FFF2-40B4-BE49-F238E27FC236}">
-                <a16:creationId xmlns:a16="http://schemas.microsoft.com/office/drawing/2014/main" id="{ADEDA1B4-5087-F369-D16C-ECF414EB97B0}"/>
+                <a16:creationId xmlns:a16="http://schemas.microsoft.com/office/drawing/2014/main" id="{CF70A86B-DF2A-5C9F-8EA4-560F35BF3E03}"/>
               </a:ext>
             </a:extLst>
           </p:cNvPr>
@@ -10045,7 +10045,7 @@
     </p:spTree>
     <p:extLst>
       <p:ext uri="{BB962C8B-B14F-4D97-AF65-F5344CB8AC3E}">
-        <p14:creationId xmlns:p14="http://schemas.microsoft.com/office/powerpoint/2010/main" val="981969945"/>
+        <p14:creationId xmlns:p14="http://schemas.microsoft.com/office/powerpoint/2010/main" val="478127596"/>
       </p:ext>
     </p:extLst>
   </p:cSld>
@@ -10195,7 +10195,7 @@
             </a:lvl1pPr>
           </a:lstStyle>
           <a:p>
-            <a:fld id="{69A66F8C-F25E-4B2E-B2E2-0A218D443514}" type="datetimeFigureOut">
+            <a:fld id="{90A7BBED-E6FA-40A6-8A51-59E4B08CD8B8}" type="datetimeFigureOut">
               <a:rPr lang="en-US" smtClean="0"/>
               <a:t>10/3/2026</a:t>
             </a:fld>
@@ -10240,7 +10240,7 @@
             </a:lvl1pPr>
           </a:lstStyle>
           <a:p>
-            <a:fld id="{369B3908-4DF9-450B-8F99-2A754569D7A5}" type="slidenum">
+            <a:fld id="{4F0FE17B-5063-4433-97D2-96EAD825CE6E}" type="slidenum">
               <a:rPr lang="en-US" smtClean="0"/>
               <a:t>‹#›</a:t>
             </a:fld>
@@ -10360,7 +10360,7 @@
           <p:cNvPr id="8" name="item_1_title">
             <a:extLst>
               <a:ext uri="{FF2B5EF4-FFF2-40B4-BE49-F238E27FC236}">
-                <a16:creationId xmlns:a16="http://schemas.microsoft.com/office/drawing/2014/main" id="{E1600693-0E5D-D031-930F-A8D5B72F5C32}"/>
+                <a16:creationId xmlns:a16="http://schemas.microsoft.com/office/drawing/2014/main" id="{E97D9723-C22C-E263-46AA-2024BE6B383C}"/>
               </a:ext>
             </a:extLst>
           </p:cNvPr>
@@ -10373,8 +10373,8 @@
         </p:nvSpPr>
         <p:spPr>
           <a:xfrm>
-            <a:off x="761607" y="2457096"/>
-            <a:ext cx="4992078" cy="394708"/>
+            <a:off x="733082" y="2428844"/>
+            <a:ext cx="5049131" cy="411327"/>
           </a:xfrm>
         </p:spPr>
         <p:txBody>
@@ -10388,7 +10388,7 @@
               </a:spcBef>
               <a:buFontTx/>
               <a:buNone/>
-              <a:defRPr sz="2200" b="1">
+              <a:defRPr sz="2000" b="1">
                 <a:solidFill>
                   <a:schemeClr val="accent1">
                     <a:lumMod val="95000"/>
@@ -10412,7 +10412,7 @@
           <p:cNvPr id="9" name="item_1">
             <a:extLst>
               <a:ext uri="{FF2B5EF4-FFF2-40B4-BE49-F238E27FC236}">
-                <a16:creationId xmlns:a16="http://schemas.microsoft.com/office/drawing/2014/main" id="{B2C4F865-BAD2-2FA5-DB0D-B57D7C998BFE}"/>
+                <a16:creationId xmlns:a16="http://schemas.microsoft.com/office/drawing/2014/main" id="{FCD982AE-7189-B3A2-A81D-B167604DDB13}"/>
               </a:ext>
             </a:extLst>
           </p:cNvPr>
@@ -10425,8 +10425,8 @@
         </p:nvSpPr>
         <p:spPr>
           <a:xfrm>
-            <a:off x="761607" y="2851805"/>
-            <a:ext cx="4992078" cy="947299"/>
+            <a:off x="733082" y="2840171"/>
+            <a:ext cx="5049131" cy="987185"/>
           </a:xfrm>
           <a:prstGeom prst="rect">
             <a:avLst/>
@@ -10460,7 +10460,7 @@
           <p:cNvPr id="10" name="item_2_title">
             <a:extLst>
               <a:ext uri="{FF2B5EF4-FFF2-40B4-BE49-F238E27FC236}">
-                <a16:creationId xmlns:a16="http://schemas.microsoft.com/office/drawing/2014/main" id="{1AC1E14B-9DFC-630C-12D3-C50ECFE0B551}"/>
+                <a16:creationId xmlns:a16="http://schemas.microsoft.com/office/drawing/2014/main" id="{9D643413-6926-2B4A-6DF5-97C4F772900A}"/>
               </a:ext>
             </a:extLst>
           </p:cNvPr>
@@ -10473,8 +10473,8 @@
         </p:nvSpPr>
         <p:spPr>
           <a:xfrm>
-            <a:off x="6438313" y="2457096"/>
-            <a:ext cx="4992078" cy="394708"/>
+            <a:off x="6409788" y="2428844"/>
+            <a:ext cx="5049131" cy="411327"/>
           </a:xfrm>
           <a:prstGeom prst="rect">
             <a:avLst/>
@@ -10491,7 +10491,7 @@
               </a:spcBef>
               <a:buFontTx/>
               <a:buNone/>
-              <a:defRPr sz="2200" b="1">
+              <a:defRPr sz="2000" b="1">
                 <a:solidFill>
                   <a:schemeClr val="accent1">
                     <a:lumMod val="95000"/>
@@ -10515,7 +10515,7 @@
           <p:cNvPr id="11" name="item_2">
             <a:extLst>
               <a:ext uri="{FF2B5EF4-FFF2-40B4-BE49-F238E27FC236}">
-                <a16:creationId xmlns:a16="http://schemas.microsoft.com/office/drawing/2014/main" id="{0DAB29C3-E178-8D97-441F-AEB04035BC23}"/>
+                <a16:creationId xmlns:a16="http://schemas.microsoft.com/office/drawing/2014/main" id="{BB9C6276-8E5B-D2F1-1C2B-9E1FF778EE58}"/>
               </a:ext>
             </a:extLst>
           </p:cNvPr>
@@ -10528,8 +10528,8 @@
         </p:nvSpPr>
         <p:spPr>
           <a:xfrm>
-            <a:off x="6438313" y="2851805"/>
-            <a:ext cx="4992078" cy="947299"/>
+            <a:off x="6409788" y="2840171"/>
+            <a:ext cx="5049131" cy="987185"/>
           </a:xfrm>
           <a:prstGeom prst="rect">
             <a:avLst/>
@@ -10563,7 +10563,7 @@
           <p:cNvPr id="12" name="item_3_title">
             <a:extLst>
               <a:ext uri="{FF2B5EF4-FFF2-40B4-BE49-F238E27FC236}">
-                <a16:creationId xmlns:a16="http://schemas.microsoft.com/office/drawing/2014/main" id="{E813E218-530F-39E8-D3FA-7842F3374EEE}"/>
+                <a16:creationId xmlns:a16="http://schemas.microsoft.com/office/drawing/2014/main" id="{2749EBC0-ADE2-95FF-97EC-1063E12D863C}"/>
               </a:ext>
             </a:extLst>
           </p:cNvPr>
@@ -10576,8 +10576,8 @@
         </p:nvSpPr>
         <p:spPr>
           <a:xfrm>
-            <a:off x="761607" y="4477169"/>
-            <a:ext cx="4992078" cy="394708"/>
+            <a:off x="733082" y="4448917"/>
+            <a:ext cx="5049131" cy="411327"/>
           </a:xfrm>
           <a:prstGeom prst="rect">
             <a:avLst/>
@@ -10594,7 +10594,7 @@
               </a:spcBef>
               <a:buFontTx/>
               <a:buNone/>
-              <a:defRPr sz="2200" b="1">
+              <a:defRPr sz="2000" b="1">
                 <a:solidFill>
                   <a:schemeClr val="accent1">
                     <a:lumMod val="95000"/>
@@ -10618,7 +10618,7 @@
           <p:cNvPr id="13" name="item_3">
             <a:extLst>
               <a:ext uri="{FF2B5EF4-FFF2-40B4-BE49-F238E27FC236}">
-                <a16:creationId xmlns:a16="http://schemas.microsoft.com/office/drawing/2014/main" id="{14472401-17E6-8342-762C-BB7098B13706}"/>
+                <a16:creationId xmlns:a16="http://schemas.microsoft.com/office/drawing/2014/main" id="{ADCEC31F-F744-B6C1-ACB0-FFBE78165BE4}"/>
               </a:ext>
             </a:extLst>
           </p:cNvPr>
@@ -10631,8 +10631,8 @@
         </p:nvSpPr>
         <p:spPr>
           <a:xfrm>
-            <a:off x="761607" y="4871878"/>
-            <a:ext cx="4992078" cy="947299"/>
+            <a:off x="733082" y="4860245"/>
+            <a:ext cx="5049131" cy="987185"/>
           </a:xfrm>
           <a:prstGeom prst="rect">
             <a:avLst/>
@@ -10666,7 +10666,7 @@
           <p:cNvPr id="14" name="item_4_title">
             <a:extLst>
               <a:ext uri="{FF2B5EF4-FFF2-40B4-BE49-F238E27FC236}">
-                <a16:creationId xmlns:a16="http://schemas.microsoft.com/office/drawing/2014/main" id="{DDB6A4A6-71A9-B0F3-40FF-E2C3177D08F0}"/>
+                <a16:creationId xmlns:a16="http://schemas.microsoft.com/office/drawing/2014/main" id="{61FFB201-AB96-8DBE-A632-37DF67C5CD69}"/>
               </a:ext>
             </a:extLst>
           </p:cNvPr>
@@ -10679,8 +10679,8 @@
         </p:nvSpPr>
         <p:spPr>
           <a:xfrm>
-            <a:off x="6438313" y="4477169"/>
-            <a:ext cx="4992078" cy="394708"/>
+            <a:off x="6409788" y="4448917"/>
+            <a:ext cx="5049131" cy="411327"/>
           </a:xfrm>
           <a:prstGeom prst="rect">
             <a:avLst/>
@@ -10697,7 +10697,7 @@
               </a:spcBef>
               <a:buFontTx/>
               <a:buNone/>
-              <a:defRPr sz="2200" b="1">
+              <a:defRPr sz="2000" b="1">
                 <a:solidFill>
                   <a:schemeClr val="accent1">
                     <a:lumMod val="95000"/>
@@ -10721,7 +10721,7 @@
           <p:cNvPr id="15" name="item_4">
             <a:extLst>
               <a:ext uri="{FF2B5EF4-FFF2-40B4-BE49-F238E27FC236}">
-                <a16:creationId xmlns:a16="http://schemas.microsoft.com/office/drawing/2014/main" id="{79C55AEC-E8D2-E6E4-762C-931B46673618}"/>
+                <a16:creationId xmlns:a16="http://schemas.microsoft.com/office/drawing/2014/main" id="{1B450D88-596A-302D-4495-D621F59D2C43}"/>
               </a:ext>
             </a:extLst>
           </p:cNvPr>
@@ -10734,8 +10734,8 @@
         </p:nvSpPr>
         <p:spPr>
           <a:xfrm>
-            <a:off x="6438313" y="4871878"/>
-            <a:ext cx="4992078" cy="947299"/>
+            <a:off x="6409788" y="4860245"/>
+            <a:ext cx="5049131" cy="987185"/>
           </a:xfrm>
           <a:prstGeom prst="rect">
             <a:avLst/>
@@ -10769,7 +10769,7 @@
           <p:cNvPr id="16" name="source">
             <a:extLst>
               <a:ext uri="{FF2B5EF4-FFF2-40B4-BE49-F238E27FC236}">
-                <a16:creationId xmlns:a16="http://schemas.microsoft.com/office/drawing/2014/main" id="{2494ADD0-5A1D-5964-A021-145A45E2EA48}"/>
+                <a16:creationId xmlns:a16="http://schemas.microsoft.com/office/drawing/2014/main" id="{215EFA6C-FC58-5C20-A6AF-1F85588922F6}"/>
               </a:ext>
             </a:extLst>
           </p:cNvPr>
@@ -10826,7 +10826,7 @@
     </p:spTree>
     <p:extLst>
       <p:ext uri="{BB962C8B-B14F-4D97-AF65-F5344CB8AC3E}">
-        <p14:creationId xmlns:p14="http://schemas.microsoft.com/office/powerpoint/2010/main" val="2839238067"/>
+        <p14:creationId xmlns:p14="http://schemas.microsoft.com/office/powerpoint/2010/main" val="4097179293"/>
       </p:ext>
     </p:extLst>
   </p:cSld>
@@ -10976,7 +10976,7 @@
             </a:lvl1pPr>
           </a:lstStyle>
           <a:p>
-            <a:fld id="{69A66F8C-F25E-4B2E-B2E2-0A218D443514}" type="datetimeFigureOut">
+            <a:fld id="{90A7BBED-E6FA-40A6-8A51-59E4B08CD8B8}" type="datetimeFigureOut">
               <a:rPr lang="en-US" smtClean="0"/>
               <a:t>10/3/2026</a:t>
             </a:fld>
@@ -11021,7 +11021,7 @@
             </a:lvl1pPr>
           </a:lstStyle>
           <a:p>
-            <a:fld id="{369B3908-4DF9-450B-8F99-2A754569D7A5}" type="slidenum">
+            <a:fld id="{4F0FE17B-5063-4433-97D2-96EAD825CE6E}" type="slidenum">
               <a:rPr lang="en-US" smtClean="0"/>
               <a:t>‹#›</a:t>
             </a:fld>
@@ -11141,7 +11141,7 @@
           <p:cNvPr id="8" name="body">
             <a:extLst>
               <a:ext uri="{FF2B5EF4-FFF2-40B4-BE49-F238E27FC236}">
-                <a16:creationId xmlns:a16="http://schemas.microsoft.com/office/drawing/2014/main" id="{B804D8A8-385A-5419-9228-395C16B9F9D1}"/>
+                <a16:creationId xmlns:a16="http://schemas.microsoft.com/office/drawing/2014/main" id="{32C36129-3762-A25F-ECE3-484C0F3227BC}"/>
               </a:ext>
             </a:extLst>
           </p:cNvPr>
@@ -11181,7 +11181,7 @@
           <p:cNvPr id="9" name="kpi_value_1">
             <a:extLst>
               <a:ext uri="{FF2B5EF4-FFF2-40B4-BE49-F238E27FC236}">
-                <a16:creationId xmlns:a16="http://schemas.microsoft.com/office/drawing/2014/main" id="{AE2B6442-FA99-5019-EEF7-E60A7AB0CD7A}"/>
+                <a16:creationId xmlns:a16="http://schemas.microsoft.com/office/drawing/2014/main" id="{03D647EE-9347-8FC4-526F-08E3BC1E2288}"/>
               </a:ext>
             </a:extLst>
           </p:cNvPr>
@@ -11236,7 +11236,7 @@
           <p:cNvPr id="10" name="kpi_label_1">
             <a:extLst>
               <a:ext uri="{FF2B5EF4-FFF2-40B4-BE49-F238E27FC236}">
-                <a16:creationId xmlns:a16="http://schemas.microsoft.com/office/drawing/2014/main" id="{620913E0-D040-9E87-3321-49AB849FB88E}"/>
+                <a16:creationId xmlns:a16="http://schemas.microsoft.com/office/drawing/2014/main" id="{C129D0FD-D8B1-34D2-7B1C-53AF092907E1}"/>
               </a:ext>
             </a:extLst>
           </p:cNvPr>
@@ -11267,7 +11267,7 @@
               </a:spcBef>
               <a:buFontTx/>
               <a:buNone/>
-              <a:defRPr sz="1800"/>
+              <a:defRPr sz="2000"/>
             </a:lvl1pPr>
           </a:lstStyle>
           <a:p>
@@ -11284,7 +11284,7 @@
           <p:cNvPr id="11" name="source">
             <a:extLst>
               <a:ext uri="{FF2B5EF4-FFF2-40B4-BE49-F238E27FC236}">
-                <a16:creationId xmlns:a16="http://schemas.microsoft.com/office/drawing/2014/main" id="{98798700-8AB4-A41D-0F4F-F5E9782AB15A}"/>
+                <a16:creationId xmlns:a16="http://schemas.microsoft.com/office/drawing/2014/main" id="{74FB9881-4009-A062-FB16-969013E678A2}"/>
               </a:ext>
             </a:extLst>
           </p:cNvPr>
@@ -11341,7 +11341,7 @@
     </p:spTree>
     <p:extLst>
       <p:ext uri="{BB962C8B-B14F-4D97-AF65-F5344CB8AC3E}">
-        <p14:creationId xmlns:p14="http://schemas.microsoft.com/office/powerpoint/2010/main" val="3287604392"/>
+        <p14:creationId xmlns:p14="http://schemas.microsoft.com/office/powerpoint/2010/main" val="1510952173"/>
       </p:ext>
     </p:extLst>
   </p:cSld>
@@ -11491,7 +11491,7 @@
             </a:lvl1pPr>
           </a:lstStyle>
           <a:p>
-            <a:fld id="{69A66F8C-F25E-4B2E-B2E2-0A218D443514}" type="datetimeFigureOut">
+            <a:fld id="{90A7BBED-E6FA-40A6-8A51-59E4B08CD8B8}" type="datetimeFigureOut">
               <a:rPr lang="en-US" smtClean="0"/>
               <a:t>10/3/2026</a:t>
             </a:fld>
@@ -11536,7 +11536,7 @@
             </a:lvl1pPr>
           </a:lstStyle>
           <a:p>
-            <a:fld id="{369B3908-4DF9-450B-8F99-2A754569D7A5}" type="slidenum">
+            <a:fld id="{4F0FE17B-5063-4433-97D2-96EAD825CE6E}" type="slidenum">
               <a:rPr lang="en-US" smtClean="0"/>
               <a:t>‹#›</a:t>
             </a:fld>
@@ -11656,7 +11656,7 @@
           <p:cNvPr id="8" name="body">
             <a:extLst>
               <a:ext uri="{FF2B5EF4-FFF2-40B4-BE49-F238E27FC236}">
-                <a16:creationId xmlns:a16="http://schemas.microsoft.com/office/drawing/2014/main" id="{4FCA2ED5-9BAD-ADCB-1603-86B75221DA73}"/>
+                <a16:creationId xmlns:a16="http://schemas.microsoft.com/office/drawing/2014/main" id="{B3A586A3-B887-EE1D-C92E-018597DED249}"/>
               </a:ext>
             </a:extLst>
           </p:cNvPr>
@@ -11696,7 +11696,7 @@
           <p:cNvPr id="9" name="kpi_value_1">
             <a:extLst>
               <a:ext uri="{FF2B5EF4-FFF2-40B4-BE49-F238E27FC236}">
-                <a16:creationId xmlns:a16="http://schemas.microsoft.com/office/drawing/2014/main" id="{D9CDC17A-3483-93FB-95B6-8CC6682E246A}"/>
+                <a16:creationId xmlns:a16="http://schemas.microsoft.com/office/drawing/2014/main" id="{3259CD03-0D8C-1FD4-52B5-FC3899003A53}"/>
               </a:ext>
             </a:extLst>
           </p:cNvPr>
@@ -11709,111 +11709,8 @@
         </p:nvSpPr>
         <p:spPr>
           <a:xfrm>
-            <a:off x="761608" y="2457097"/>
-            <a:ext cx="5106183" cy="1621911"/>
-          </a:xfrm>
-          <a:prstGeom prst="rect">
-            <a:avLst/>
-          </a:prstGeom>
-        </p:spPr>
-        <p:txBody>
-          <a:bodyPr wrap="square" anchor="t">
-            <a:noAutofit/>
-          </a:bodyPr>
-          <a:lstStyle>
-            <a:lvl1pPr marL="0" indent="0">
-              <a:spcBef>
-                <a:spcPts val="0"/>
-              </a:spcBef>
-              <a:buFontTx/>
-              <a:buNone/>
-              <a:defRPr sz="8400" b="1">
-                <a:solidFill>
-                  <a:schemeClr val="accent1">
-                    <a:lumMod val="95000"/>
-                  </a:schemeClr>
-                </a:solidFill>
-                <a:latin typeface="+mj-lt"/>
-              </a:defRPr>
-            </a:lvl1pPr>
-          </a:lstStyle>
-          <a:p>
-            <a:pPr lvl="0"/>
-            <a:r>
-              <a:rPr lang="en-US"/>
-              <a:t>kpi_value_1</a:t>
-            </a:r>
-          </a:p>
-        </p:txBody>
-      </p:sp>
-      <p:sp>
-        <p:nvSpPr>
-          <p:cNvPr id="10" name="kpi_label_1">
-            <a:extLst>
-              <a:ext uri="{FF2B5EF4-FFF2-40B4-BE49-F238E27FC236}">
-                <a16:creationId xmlns:a16="http://schemas.microsoft.com/office/drawing/2014/main" id="{09E95606-D9AD-D1BA-B513-F8B570DE4F22}"/>
-              </a:ext>
-            </a:extLst>
-          </p:cNvPr>
-          <p:cNvSpPr>
-            <a:spLocks noGrp="1"/>
-          </p:cNvSpPr>
-          <p:nvPr>
-            <p:ph type="body" sz="quarter" idx="15" hasCustomPrompt="1"/>
-          </p:nvPr>
-        </p:nvSpPr>
-        <p:spPr>
-          <a:xfrm>
-            <a:off x="761608" y="4079007"/>
-            <a:ext cx="5106183" cy="901062"/>
-          </a:xfrm>
-          <a:prstGeom prst="rect">
-            <a:avLst/>
-          </a:prstGeom>
-        </p:spPr>
-        <p:txBody>
-          <a:bodyPr wrap="square" anchor="t">
-            <a:noAutofit/>
-          </a:bodyPr>
-          <a:lstStyle>
-            <a:lvl1pPr marL="0" indent="0">
-              <a:spcBef>
-                <a:spcPts val="0"/>
-              </a:spcBef>
-              <a:buFontTx/>
-              <a:buNone/>
-              <a:defRPr sz="1800"/>
-            </a:lvl1pPr>
-          </a:lstStyle>
-          <a:p>
-            <a:pPr lvl="0"/>
-            <a:r>
-              <a:rPr lang="en-US"/>
-              <a:t>kpi_label_1</a:t>
-            </a:r>
-          </a:p>
-        </p:txBody>
-      </p:sp>
-      <p:sp>
-        <p:nvSpPr>
-          <p:cNvPr id="11" name="kpi_value_2">
-            <a:extLst>
-              <a:ext uri="{FF2B5EF4-FFF2-40B4-BE49-F238E27FC236}">
-                <a16:creationId xmlns:a16="http://schemas.microsoft.com/office/drawing/2014/main" id="{BB1B8EF6-A419-00F7-51A3-D1CE8F0B55DF}"/>
-              </a:ext>
-            </a:extLst>
-          </p:cNvPr>
-          <p:cNvSpPr>
-            <a:spLocks noGrp="1"/>
-          </p:cNvSpPr>
-          <p:nvPr>
-            <p:ph type="body" sz="quarter" idx="16" hasCustomPrompt="1"/>
-          </p:nvPr>
-        </p:nvSpPr>
-        <p:spPr>
-          <a:xfrm>
-            <a:off x="6552418" y="2457096"/>
-            <a:ext cx="4877974" cy="593006"/>
+            <a:off x="733082" y="2428843"/>
+            <a:ext cx="5163235" cy="1658236"/>
           </a:xfrm>
           <a:prstGeom prst="rect">
             <a:avLst/>
@@ -11844,31 +11741,31 @@
             <a:pPr lvl="0"/>
             <a:r>
               <a:rPr lang="en-US"/>
-              <a:t>kpi_value_2</a:t>
+              <a:t>kpi_value_1</a:t>
             </a:r>
           </a:p>
         </p:txBody>
       </p:sp>
       <p:sp>
         <p:nvSpPr>
-          <p:cNvPr id="12" name="kpi_label_2">
-            <a:extLst>
-              <a:ext uri="{FF2B5EF4-FFF2-40B4-BE49-F238E27FC236}">
-                <a16:creationId xmlns:a16="http://schemas.microsoft.com/office/drawing/2014/main" id="{822785BF-B0F2-5EAB-B4F8-CDA808ECE606}"/>
-              </a:ext>
-            </a:extLst>
-          </p:cNvPr>
-          <p:cNvSpPr>
-            <a:spLocks noGrp="1"/>
-          </p:cNvSpPr>
-          <p:nvPr>
-            <p:ph type="body" sz="quarter" idx="17" hasCustomPrompt="1"/>
-          </p:nvPr>
-        </p:nvSpPr>
-        <p:spPr>
-          <a:xfrm>
-            <a:off x="6552418" y="3050101"/>
-            <a:ext cx="4877974" cy="329448"/>
+          <p:cNvPr id="10" name="kpi_label_1">
+            <a:extLst>
+              <a:ext uri="{FF2B5EF4-FFF2-40B4-BE49-F238E27FC236}">
+                <a16:creationId xmlns:a16="http://schemas.microsoft.com/office/drawing/2014/main" id="{766DFBC3-D1CF-D3BE-9111-861D001708E2}"/>
+              </a:ext>
+            </a:extLst>
+          </p:cNvPr>
+          <p:cNvSpPr>
+            <a:spLocks noGrp="1"/>
+          </p:cNvSpPr>
+          <p:nvPr>
+            <p:ph type="body" sz="quarter" idx="15" hasCustomPrompt="1"/>
+          </p:nvPr>
+        </p:nvSpPr>
+        <p:spPr>
+          <a:xfrm>
+            <a:off x="733082" y="4087079"/>
+            <a:ext cx="5163235" cy="921242"/>
           </a:xfrm>
           <a:prstGeom prst="rect">
             <a:avLst/>
@@ -11885,38 +11782,38 @@
               </a:spcBef>
               <a:buFontTx/>
               <a:buNone/>
-              <a:defRPr sz="1800"/>
+              <a:defRPr sz="2000"/>
             </a:lvl1pPr>
           </a:lstStyle>
           <a:p>
             <a:pPr lvl="0"/>
             <a:r>
               <a:rPr lang="en-US"/>
-              <a:t>kpi_label_2</a:t>
+              <a:t>kpi_label_1</a:t>
             </a:r>
           </a:p>
         </p:txBody>
       </p:sp>
       <p:sp>
         <p:nvSpPr>
-          <p:cNvPr id="13" name="kpi_value_3">
-            <a:extLst>
-              <a:ext uri="{FF2B5EF4-FFF2-40B4-BE49-F238E27FC236}">
-                <a16:creationId xmlns:a16="http://schemas.microsoft.com/office/drawing/2014/main" id="{38B475AE-C57D-1C97-C804-1D8DB99E2915}"/>
-              </a:ext>
-            </a:extLst>
-          </p:cNvPr>
-          <p:cNvSpPr>
-            <a:spLocks noGrp="1"/>
-          </p:cNvSpPr>
-          <p:nvPr>
-            <p:ph type="body" sz="quarter" idx="18" hasCustomPrompt="1"/>
-          </p:nvPr>
-        </p:nvSpPr>
-        <p:spPr>
-          <a:xfrm>
-            <a:off x="6552419" y="4057616"/>
-            <a:ext cx="2096673" cy="593006"/>
+          <p:cNvPr id="11" name="kpi_value_2">
+            <a:extLst>
+              <a:ext uri="{FF2B5EF4-FFF2-40B4-BE49-F238E27FC236}">
+                <a16:creationId xmlns:a16="http://schemas.microsoft.com/office/drawing/2014/main" id="{55E2EA72-A3E8-BAC1-594B-FB298BC9F45E}"/>
+              </a:ext>
+            </a:extLst>
+          </p:cNvPr>
+          <p:cNvSpPr>
+            <a:spLocks noGrp="1"/>
+          </p:cNvSpPr>
+          <p:nvPr>
+            <p:ph type="body" sz="quarter" idx="16" hasCustomPrompt="1"/>
+          </p:nvPr>
+        </p:nvSpPr>
+        <p:spPr>
+          <a:xfrm>
+            <a:off x="6523892" y="2428844"/>
+            <a:ext cx="4935026" cy="629331"/>
           </a:xfrm>
           <a:prstGeom prst="rect">
             <a:avLst/>
@@ -11947,31 +11844,31 @@
             <a:pPr lvl="0"/>
             <a:r>
               <a:rPr lang="en-US"/>
-              <a:t>kpi_value_3</a:t>
+              <a:t>kpi_value_2</a:t>
             </a:r>
           </a:p>
         </p:txBody>
       </p:sp>
       <p:sp>
         <p:nvSpPr>
-          <p:cNvPr id="14" name="kpi_label_3">
-            <a:extLst>
-              <a:ext uri="{FF2B5EF4-FFF2-40B4-BE49-F238E27FC236}">
-                <a16:creationId xmlns:a16="http://schemas.microsoft.com/office/drawing/2014/main" id="{08F86E40-D3AC-D76B-1D3B-0CA67F999C24}"/>
-              </a:ext>
-            </a:extLst>
-          </p:cNvPr>
-          <p:cNvSpPr>
-            <a:spLocks noGrp="1"/>
-          </p:cNvSpPr>
-          <p:nvPr>
-            <p:ph type="body" sz="quarter" idx="19" hasCustomPrompt="1"/>
-          </p:nvPr>
-        </p:nvSpPr>
-        <p:spPr>
-          <a:xfrm>
-            <a:off x="6552419" y="4650621"/>
-            <a:ext cx="2096673" cy="329448"/>
+          <p:cNvPr id="12" name="kpi_label_2">
+            <a:extLst>
+              <a:ext uri="{FF2B5EF4-FFF2-40B4-BE49-F238E27FC236}">
+                <a16:creationId xmlns:a16="http://schemas.microsoft.com/office/drawing/2014/main" id="{6D86E217-0817-1B0C-4668-42FEC7475FC5}"/>
+              </a:ext>
+            </a:extLst>
+          </p:cNvPr>
+          <p:cNvSpPr>
+            <a:spLocks noGrp="1"/>
+          </p:cNvSpPr>
+          <p:nvPr>
+            <p:ph type="body" sz="quarter" idx="17" hasCustomPrompt="1"/>
+          </p:nvPr>
+        </p:nvSpPr>
+        <p:spPr>
+          <a:xfrm>
+            <a:off x="6523892" y="3058174"/>
+            <a:ext cx="4935026" cy="349628"/>
           </a:xfrm>
           <a:prstGeom prst="rect">
             <a:avLst/>
@@ -11988,38 +11885,38 @@
               </a:spcBef>
               <a:buFontTx/>
               <a:buNone/>
-              <a:defRPr sz="1800"/>
+              <a:defRPr sz="2000"/>
             </a:lvl1pPr>
           </a:lstStyle>
           <a:p>
             <a:pPr lvl="0"/>
             <a:r>
               <a:rPr lang="en-US"/>
-              <a:t>kpi_label_3</a:t>
+              <a:t>kpi_label_2</a:t>
             </a:r>
           </a:p>
         </p:txBody>
       </p:sp>
       <p:sp>
         <p:nvSpPr>
-          <p:cNvPr id="15" name="kpi_value_4">
-            <a:extLst>
-              <a:ext uri="{FF2B5EF4-FFF2-40B4-BE49-F238E27FC236}">
-                <a16:creationId xmlns:a16="http://schemas.microsoft.com/office/drawing/2014/main" id="{157D3FD1-FB36-FC30-4841-A7CAE96A9599}"/>
-              </a:ext>
-            </a:extLst>
-          </p:cNvPr>
-          <p:cNvSpPr>
-            <a:spLocks noGrp="1"/>
-          </p:cNvSpPr>
-          <p:nvPr>
-            <p:ph type="body" sz="quarter" idx="20" hasCustomPrompt="1"/>
-          </p:nvPr>
-        </p:nvSpPr>
-        <p:spPr>
-          <a:xfrm>
-            <a:off x="9333720" y="4057616"/>
-            <a:ext cx="2096673" cy="593006"/>
+          <p:cNvPr id="13" name="kpi_value_3">
+            <a:extLst>
+              <a:ext uri="{FF2B5EF4-FFF2-40B4-BE49-F238E27FC236}">
+                <a16:creationId xmlns:a16="http://schemas.microsoft.com/office/drawing/2014/main" id="{91832C22-25A5-580D-0BAC-EA528D73691D}"/>
+              </a:ext>
+            </a:extLst>
+          </p:cNvPr>
+          <p:cNvSpPr>
+            <a:spLocks noGrp="1"/>
+          </p:cNvSpPr>
+          <p:nvPr>
+            <p:ph type="body" sz="quarter" idx="18" hasCustomPrompt="1"/>
+          </p:nvPr>
+        </p:nvSpPr>
+        <p:spPr>
+          <a:xfrm>
+            <a:off x="6523893" y="4029364"/>
+            <a:ext cx="2153725" cy="629331"/>
           </a:xfrm>
           <a:prstGeom prst="rect">
             <a:avLst/>
@@ -12050,31 +11947,31 @@
             <a:pPr lvl="0"/>
             <a:r>
               <a:rPr lang="en-US"/>
-              <a:t>kpi_value_4</a:t>
+              <a:t>kpi_value_3</a:t>
             </a:r>
           </a:p>
         </p:txBody>
       </p:sp>
       <p:sp>
         <p:nvSpPr>
-          <p:cNvPr id="16" name="kpi_label_4">
-            <a:extLst>
-              <a:ext uri="{FF2B5EF4-FFF2-40B4-BE49-F238E27FC236}">
-                <a16:creationId xmlns:a16="http://schemas.microsoft.com/office/drawing/2014/main" id="{416997BE-9741-DA05-A0EA-89C8242286CB}"/>
-              </a:ext>
-            </a:extLst>
-          </p:cNvPr>
-          <p:cNvSpPr>
-            <a:spLocks noGrp="1"/>
-          </p:cNvSpPr>
-          <p:nvPr>
-            <p:ph type="body" sz="quarter" idx="21" hasCustomPrompt="1"/>
-          </p:nvPr>
-        </p:nvSpPr>
-        <p:spPr>
-          <a:xfrm>
-            <a:off x="9333720" y="4650621"/>
-            <a:ext cx="2096673" cy="329448"/>
+          <p:cNvPr id="14" name="kpi_label_3">
+            <a:extLst>
+              <a:ext uri="{FF2B5EF4-FFF2-40B4-BE49-F238E27FC236}">
+                <a16:creationId xmlns:a16="http://schemas.microsoft.com/office/drawing/2014/main" id="{5705EB15-CAF4-74A5-0B74-8C7D6258C053}"/>
+              </a:ext>
+            </a:extLst>
+          </p:cNvPr>
+          <p:cNvSpPr>
+            <a:spLocks noGrp="1"/>
+          </p:cNvSpPr>
+          <p:nvPr>
+            <p:ph type="body" sz="quarter" idx="19" hasCustomPrompt="1"/>
+          </p:nvPr>
+        </p:nvSpPr>
+        <p:spPr>
+          <a:xfrm>
+            <a:off x="6523893" y="4658693"/>
+            <a:ext cx="2153725" cy="349628"/>
           </a:xfrm>
           <a:prstGeom prst="rect">
             <a:avLst/>
@@ -12091,7 +11988,110 @@
               </a:spcBef>
               <a:buFontTx/>
               <a:buNone/>
-              <a:defRPr sz="1800"/>
+              <a:defRPr sz="2000"/>
+            </a:lvl1pPr>
+          </a:lstStyle>
+          <a:p>
+            <a:pPr lvl="0"/>
+            <a:r>
+              <a:rPr lang="en-US"/>
+              <a:t>kpi_label_3</a:t>
+            </a:r>
+          </a:p>
+        </p:txBody>
+      </p:sp>
+      <p:sp>
+        <p:nvSpPr>
+          <p:cNvPr id="15" name="kpi_value_4">
+            <a:extLst>
+              <a:ext uri="{FF2B5EF4-FFF2-40B4-BE49-F238E27FC236}">
+                <a16:creationId xmlns:a16="http://schemas.microsoft.com/office/drawing/2014/main" id="{E2A0E19F-8EE6-D4E6-21F7-0605AFF2F9F5}"/>
+              </a:ext>
+            </a:extLst>
+          </p:cNvPr>
+          <p:cNvSpPr>
+            <a:spLocks noGrp="1"/>
+          </p:cNvSpPr>
+          <p:nvPr>
+            <p:ph type="body" sz="quarter" idx="20" hasCustomPrompt="1"/>
+          </p:nvPr>
+        </p:nvSpPr>
+        <p:spPr>
+          <a:xfrm>
+            <a:off x="9305193" y="4029364"/>
+            <a:ext cx="2153725" cy="629331"/>
+          </a:xfrm>
+          <a:prstGeom prst="rect">
+            <a:avLst/>
+          </a:prstGeom>
+        </p:spPr>
+        <p:txBody>
+          <a:bodyPr wrap="square" anchor="t">
+            <a:noAutofit/>
+          </a:bodyPr>
+          <a:lstStyle>
+            <a:lvl1pPr marL="0" indent="0">
+              <a:spcBef>
+                <a:spcPts val="0"/>
+              </a:spcBef>
+              <a:buFontTx/>
+              <a:buNone/>
+              <a:defRPr sz="6000" b="1">
+                <a:solidFill>
+                  <a:schemeClr val="accent1">
+                    <a:lumMod val="95000"/>
+                  </a:schemeClr>
+                </a:solidFill>
+                <a:latin typeface="+mj-lt"/>
+              </a:defRPr>
+            </a:lvl1pPr>
+          </a:lstStyle>
+          <a:p>
+            <a:pPr lvl="0"/>
+            <a:r>
+              <a:rPr lang="en-US"/>
+              <a:t>kpi_value_4</a:t>
+            </a:r>
+          </a:p>
+        </p:txBody>
+      </p:sp>
+      <p:sp>
+        <p:nvSpPr>
+          <p:cNvPr id="16" name="kpi_label_4">
+            <a:extLst>
+              <a:ext uri="{FF2B5EF4-FFF2-40B4-BE49-F238E27FC236}">
+                <a16:creationId xmlns:a16="http://schemas.microsoft.com/office/drawing/2014/main" id="{332796AC-C1A3-820E-2CD9-F3E5718CDBF8}"/>
+              </a:ext>
+            </a:extLst>
+          </p:cNvPr>
+          <p:cNvSpPr>
+            <a:spLocks noGrp="1"/>
+          </p:cNvSpPr>
+          <p:nvPr>
+            <p:ph type="body" sz="quarter" idx="21" hasCustomPrompt="1"/>
+          </p:nvPr>
+        </p:nvSpPr>
+        <p:spPr>
+          <a:xfrm>
+            <a:off x="9305193" y="4658693"/>
+            <a:ext cx="2153725" cy="349628"/>
+          </a:xfrm>
+          <a:prstGeom prst="rect">
+            <a:avLst/>
+          </a:prstGeom>
+        </p:spPr>
+        <p:txBody>
+          <a:bodyPr wrap="square" anchor="t">
+            <a:noAutofit/>
+          </a:bodyPr>
+          <a:lstStyle>
+            <a:lvl1pPr marL="0" indent="0">
+              <a:spcBef>
+                <a:spcPts val="0"/>
+              </a:spcBef>
+              <a:buFontTx/>
+              <a:buNone/>
+              <a:defRPr sz="2000"/>
             </a:lvl1pPr>
           </a:lstStyle>
           <a:p>
@@ -12108,7 +12108,7 @@
           <p:cNvPr id="17" name="source">
             <a:extLst>
               <a:ext uri="{FF2B5EF4-FFF2-40B4-BE49-F238E27FC236}">
-                <a16:creationId xmlns:a16="http://schemas.microsoft.com/office/drawing/2014/main" id="{9628E0F0-E184-8B30-81D3-C6B5E0DA3C47}"/>
+                <a16:creationId xmlns:a16="http://schemas.microsoft.com/office/drawing/2014/main" id="{B361E649-0CE6-48C3-B622-C0918DEABAF0}"/>
               </a:ext>
             </a:extLst>
           </p:cNvPr>
@@ -12165,7 +12165,7 @@
     </p:spTree>
     <p:extLst>
       <p:ext uri="{BB962C8B-B14F-4D97-AF65-F5344CB8AC3E}">
-        <p14:creationId xmlns:p14="http://schemas.microsoft.com/office/powerpoint/2010/main" val="1427868791"/>
+        <p14:creationId xmlns:p14="http://schemas.microsoft.com/office/powerpoint/2010/main" val="2610465086"/>
       </p:ext>
     </p:extLst>
   </p:cSld>
@@ -12315,7 +12315,7 @@
             </a:lvl1pPr>
           </a:lstStyle>
           <a:p>
-            <a:fld id="{69A66F8C-F25E-4B2E-B2E2-0A218D443514}" type="datetimeFigureOut">
+            <a:fld id="{90A7BBED-E6FA-40A6-8A51-59E4B08CD8B8}" type="datetimeFigureOut">
               <a:rPr lang="en-US" smtClean="0"/>
               <a:t>10/3/2026</a:t>
             </a:fld>
@@ -12360,7 +12360,7 @@
             </a:lvl1pPr>
           </a:lstStyle>
           <a:p>
-            <a:fld id="{369B3908-4DF9-450B-8F99-2A754569D7A5}" type="slidenum">
+            <a:fld id="{4F0FE17B-5063-4433-97D2-96EAD825CE6E}" type="slidenum">
               <a:rPr lang="en-US" smtClean="0"/>
               <a:t>‹#›</a:t>
             </a:fld>
@@ -12480,7 +12480,7 @@
           <p:cNvPr id="8" name="body">
             <a:extLst>
               <a:ext uri="{FF2B5EF4-FFF2-40B4-BE49-F238E27FC236}">
-                <a16:creationId xmlns:a16="http://schemas.microsoft.com/office/drawing/2014/main" id="{54E3CC45-AC5C-2B37-81ED-B099106ED15C}"/>
+                <a16:creationId xmlns:a16="http://schemas.microsoft.com/office/drawing/2014/main" id="{42D9BB80-D5D5-2474-F745-52831618F566}"/>
               </a:ext>
             </a:extLst>
           </p:cNvPr>
@@ -12520,7 +12520,7 @@
           <p:cNvPr id="9" name="kpi_value_1">
             <a:extLst>
               <a:ext uri="{FF2B5EF4-FFF2-40B4-BE49-F238E27FC236}">
-                <a16:creationId xmlns:a16="http://schemas.microsoft.com/office/drawing/2014/main" id="{0F7540B5-9A9B-1D02-4882-49FB27E1D45B}"/>
+                <a16:creationId xmlns:a16="http://schemas.microsoft.com/office/drawing/2014/main" id="{E60BE19B-5499-7D40-132C-24504CE25ECC}"/>
               </a:ext>
             </a:extLst>
           </p:cNvPr>
@@ -12533,8 +12533,8 @@
         </p:nvSpPr>
         <p:spPr>
           <a:xfrm>
-            <a:off x="761607" y="2457096"/>
-            <a:ext cx="4992078" cy="1227392"/>
+            <a:off x="733082" y="2428844"/>
+            <a:ext cx="5049131" cy="1254881"/>
           </a:xfrm>
           <a:prstGeom prst="rect">
             <a:avLst/>
@@ -12575,7 +12575,7 @@
           <p:cNvPr id="10" name="kpi_label_1">
             <a:extLst>
               <a:ext uri="{FF2B5EF4-FFF2-40B4-BE49-F238E27FC236}">
-                <a16:creationId xmlns:a16="http://schemas.microsoft.com/office/drawing/2014/main" id="{8D42CF52-DC67-2919-B7DF-2BCF2B8834AD}"/>
+                <a16:creationId xmlns:a16="http://schemas.microsoft.com/office/drawing/2014/main" id="{389004A2-A68E-5998-8B13-EA667ED3FA7D}"/>
               </a:ext>
             </a:extLst>
           </p:cNvPr>
@@ -12588,8 +12588,8 @@
         </p:nvSpPr>
         <p:spPr>
           <a:xfrm>
-            <a:off x="761607" y="3684488"/>
-            <a:ext cx="4992078" cy="681884"/>
+            <a:off x="733082" y="3683724"/>
+            <a:ext cx="5049131" cy="697156"/>
           </a:xfrm>
           <a:prstGeom prst="rect">
             <a:avLst/>
@@ -12606,7 +12606,7 @@
               </a:spcBef>
               <a:buFontTx/>
               <a:buNone/>
-              <a:defRPr sz="1800"/>
+              <a:defRPr sz="2000"/>
             </a:lvl1pPr>
           </a:lstStyle>
           <a:p>
@@ -12623,7 +12623,7 @@
           <p:cNvPr id="11" name="kpi_value_2">
             <a:extLst>
               <a:ext uri="{FF2B5EF4-FFF2-40B4-BE49-F238E27FC236}">
-                <a16:creationId xmlns:a16="http://schemas.microsoft.com/office/drawing/2014/main" id="{8EE4FFEA-B547-036C-2A4C-29E808046AE4}"/>
+                <a16:creationId xmlns:a16="http://schemas.microsoft.com/office/drawing/2014/main" id="{47C983B0-628F-3507-0D1D-BDB5C02BBCBD}"/>
               </a:ext>
             </a:extLst>
           </p:cNvPr>
@@ -12636,8 +12636,8 @@
         </p:nvSpPr>
         <p:spPr>
           <a:xfrm>
-            <a:off x="6438313" y="2457096"/>
-            <a:ext cx="4992078" cy="1227392"/>
+            <a:off x="6409788" y="2428844"/>
+            <a:ext cx="5049131" cy="1254881"/>
           </a:xfrm>
           <a:prstGeom prst="rect">
             <a:avLst/>
@@ -12678,7 +12678,7 @@
           <p:cNvPr id="12" name="kpi_label_2">
             <a:extLst>
               <a:ext uri="{FF2B5EF4-FFF2-40B4-BE49-F238E27FC236}">
-                <a16:creationId xmlns:a16="http://schemas.microsoft.com/office/drawing/2014/main" id="{42DC6339-169D-5D3F-F12F-13C42BA0E47E}"/>
+                <a16:creationId xmlns:a16="http://schemas.microsoft.com/office/drawing/2014/main" id="{F561130C-467A-AD9F-B1D5-C5F9AD30AE17}"/>
               </a:ext>
             </a:extLst>
           </p:cNvPr>
@@ -12691,8 +12691,8 @@
         </p:nvSpPr>
         <p:spPr>
           <a:xfrm>
-            <a:off x="6438313" y="3684488"/>
-            <a:ext cx="4992078" cy="681884"/>
+            <a:off x="6409788" y="3683724"/>
+            <a:ext cx="5049131" cy="697156"/>
           </a:xfrm>
           <a:prstGeom prst="rect">
             <a:avLst/>
@@ -12709,7 +12709,7 @@
               </a:spcBef>
               <a:buFontTx/>
               <a:buNone/>
-              <a:defRPr sz="1800"/>
+              <a:defRPr sz="2000"/>
             </a:lvl1pPr>
           </a:lstStyle>
           <a:p>
@@ -12726,7 +12726,7 @@
           <p:cNvPr id="13" name="source">
             <a:extLst>
               <a:ext uri="{FF2B5EF4-FFF2-40B4-BE49-F238E27FC236}">
-                <a16:creationId xmlns:a16="http://schemas.microsoft.com/office/drawing/2014/main" id="{EBA6A2B7-D006-BDD8-9FA6-4F24C76EF68A}"/>
+                <a16:creationId xmlns:a16="http://schemas.microsoft.com/office/drawing/2014/main" id="{78F762C1-9B0D-AB98-7090-92FF88CE8B6F}"/>
               </a:ext>
             </a:extLst>
           </p:cNvPr>
@@ -12783,7 +12783,7 @@
     </p:spTree>
     <p:extLst>
       <p:ext uri="{BB962C8B-B14F-4D97-AF65-F5344CB8AC3E}">
-        <p14:creationId xmlns:p14="http://schemas.microsoft.com/office/powerpoint/2010/main" val="3048968634"/>
+        <p14:creationId xmlns:p14="http://schemas.microsoft.com/office/powerpoint/2010/main" val="2997925755"/>
       </p:ext>
     </p:extLst>
   </p:cSld>
@@ -12933,7 +12933,7 @@
             </a:lvl1pPr>
           </a:lstStyle>
           <a:p>
-            <a:fld id="{69A66F8C-F25E-4B2E-B2E2-0A218D443514}" type="datetimeFigureOut">
+            <a:fld id="{90A7BBED-E6FA-40A6-8A51-59E4B08CD8B8}" type="datetimeFigureOut">
               <a:rPr lang="en-US" smtClean="0"/>
               <a:t>10/3/2026</a:t>
             </a:fld>
@@ -12978,7 +12978,7 @@
             </a:lvl1pPr>
           </a:lstStyle>
           <a:p>
-            <a:fld id="{369B3908-4DF9-450B-8F99-2A754569D7A5}" type="slidenum">
+            <a:fld id="{4F0FE17B-5063-4433-97D2-96EAD825CE6E}" type="slidenum">
               <a:rPr lang="en-US" smtClean="0"/>
               <a:t>‹#›</a:t>
             </a:fld>
@@ -13098,7 +13098,7 @@
           <p:cNvPr id="8" name="body">
             <a:extLst>
               <a:ext uri="{FF2B5EF4-FFF2-40B4-BE49-F238E27FC236}">
-                <a16:creationId xmlns:a16="http://schemas.microsoft.com/office/drawing/2014/main" id="{CCC14418-2440-C2C8-AAC2-06AE4EA2D49D}"/>
+                <a16:creationId xmlns:a16="http://schemas.microsoft.com/office/drawing/2014/main" id="{B6F7BD4E-15B8-A6A1-7EAD-F657834A38AC}"/>
               </a:ext>
             </a:extLst>
           </p:cNvPr>
@@ -13138,7 +13138,7 @@
           <p:cNvPr id="9" name="kpi_value_1">
             <a:extLst>
               <a:ext uri="{FF2B5EF4-FFF2-40B4-BE49-F238E27FC236}">
-                <a16:creationId xmlns:a16="http://schemas.microsoft.com/office/drawing/2014/main" id="{F41FDC1F-8126-B8D5-612A-DD0CBFF84883}"/>
+                <a16:creationId xmlns:a16="http://schemas.microsoft.com/office/drawing/2014/main" id="{CCDBA900-12FB-E836-08BE-5A8B95B91F46}"/>
               </a:ext>
             </a:extLst>
           </p:cNvPr>
@@ -13169,7 +13169,7 @@
               </a:spcBef>
               <a:buFontTx/>
               <a:buNone/>
-              <a:defRPr sz="4000" b="1">
+              <a:defRPr sz="6000" b="1">
                 <a:solidFill>
                   <a:schemeClr val="accent1">
                     <a:lumMod val="95000"/>
@@ -13193,7 +13193,7 @@
           <p:cNvPr id="10" name="kpi_label_1">
             <a:extLst>
               <a:ext uri="{FF2B5EF4-FFF2-40B4-BE49-F238E27FC236}">
-                <a16:creationId xmlns:a16="http://schemas.microsoft.com/office/drawing/2014/main" id="{E39505FD-AEE6-3487-314E-DB05E5781733}"/>
+                <a16:creationId xmlns:a16="http://schemas.microsoft.com/office/drawing/2014/main" id="{A942375C-314F-D2F7-1238-45C8957B086F}"/>
               </a:ext>
             </a:extLst>
           </p:cNvPr>
@@ -13224,7 +13224,7 @@
               </a:spcBef>
               <a:buFontTx/>
               <a:buNone/>
-              <a:defRPr sz="1800"/>
+              <a:defRPr sz="2000"/>
             </a:lvl1pPr>
           </a:lstStyle>
           <a:p>
@@ -13241,7 +13241,7 @@
           <p:cNvPr id="11" name="kpi_value_2">
             <a:extLst>
               <a:ext uri="{FF2B5EF4-FFF2-40B4-BE49-F238E27FC236}">
-                <a16:creationId xmlns:a16="http://schemas.microsoft.com/office/drawing/2014/main" id="{E2078117-72F9-201B-FBF5-37099DF3C837}"/>
+                <a16:creationId xmlns:a16="http://schemas.microsoft.com/office/drawing/2014/main" id="{42B40ED7-CC51-30AC-AF3A-22DAFD15BB3C}"/>
               </a:ext>
             </a:extLst>
           </p:cNvPr>
@@ -13272,7 +13272,7 @@
               </a:spcBef>
               <a:buFontTx/>
               <a:buNone/>
-              <a:defRPr sz="4000" b="1">
+              <a:defRPr sz="6000" b="1">
                 <a:solidFill>
                   <a:schemeClr val="accent1">
                     <a:lumMod val="95000"/>
@@ -13296,7 +13296,7 @@
           <p:cNvPr id="12" name="kpi_label_2">
             <a:extLst>
               <a:ext uri="{FF2B5EF4-FFF2-40B4-BE49-F238E27FC236}">
-                <a16:creationId xmlns:a16="http://schemas.microsoft.com/office/drawing/2014/main" id="{EF42DFC7-473D-0181-41A6-B9FE280BCEE8}"/>
+                <a16:creationId xmlns:a16="http://schemas.microsoft.com/office/drawing/2014/main" id="{39DBAD88-A1D1-7EBC-5C43-82B06BC5EB11}"/>
               </a:ext>
             </a:extLst>
           </p:cNvPr>
@@ -13327,7 +13327,7 @@
               </a:spcBef>
               <a:buFontTx/>
               <a:buNone/>
-              <a:defRPr sz="1800"/>
+              <a:defRPr sz="2000"/>
             </a:lvl1pPr>
           </a:lstStyle>
           <a:p>
@@ -13344,7 +13344,7 @@
           <p:cNvPr id="13" name="kpi_value_3">
             <a:extLst>
               <a:ext uri="{FF2B5EF4-FFF2-40B4-BE49-F238E27FC236}">
-                <a16:creationId xmlns:a16="http://schemas.microsoft.com/office/drawing/2014/main" id="{94C89390-F5C2-F3D7-1169-51815FEC968E}"/>
+                <a16:creationId xmlns:a16="http://schemas.microsoft.com/office/drawing/2014/main" id="{E5563C4F-3B23-837E-F677-E1C831E29654}"/>
               </a:ext>
             </a:extLst>
           </p:cNvPr>
@@ -13375,7 +13375,7 @@
               </a:spcBef>
               <a:buFontTx/>
               <a:buNone/>
-              <a:defRPr sz="4000" b="1">
+              <a:defRPr sz="6000" b="1">
                 <a:solidFill>
                   <a:schemeClr val="accent1">
                     <a:lumMod val="95000"/>
@@ -13399,7 +13399,7 @@
           <p:cNvPr id="14" name="kpi_label_3">
             <a:extLst>
               <a:ext uri="{FF2B5EF4-FFF2-40B4-BE49-F238E27FC236}">
-                <a16:creationId xmlns:a16="http://schemas.microsoft.com/office/drawing/2014/main" id="{A4902ADE-B0A0-8163-BCF3-6C63B380B658}"/>
+                <a16:creationId xmlns:a16="http://schemas.microsoft.com/office/drawing/2014/main" id="{B39300BF-BD54-9EA9-04A3-1D12FC0E4AC2}"/>
               </a:ext>
             </a:extLst>
           </p:cNvPr>
@@ -13430,7 +13430,7 @@
               </a:spcBef>
               <a:buFontTx/>
               <a:buNone/>
-              <a:defRPr sz="1800"/>
+              <a:defRPr sz="2000"/>
             </a:lvl1pPr>
           </a:lstStyle>
           <a:p>
@@ -13447,7 +13447,7 @@
           <p:cNvPr id="15" name="kpi_value_4">
             <a:extLst>
               <a:ext uri="{FF2B5EF4-FFF2-40B4-BE49-F238E27FC236}">
-                <a16:creationId xmlns:a16="http://schemas.microsoft.com/office/drawing/2014/main" id="{14A09B58-75B9-0F83-FFAF-7A09ECBF8923}"/>
+                <a16:creationId xmlns:a16="http://schemas.microsoft.com/office/drawing/2014/main" id="{DFD76D23-F069-12CD-EC94-CB8DCE33E791}"/>
               </a:ext>
             </a:extLst>
           </p:cNvPr>
@@ -13478,7 +13478,7 @@
               </a:spcBef>
               <a:buFontTx/>
               <a:buNone/>
-              <a:defRPr sz="4000" b="1">
+              <a:defRPr sz="6000" b="1">
                 <a:solidFill>
                   <a:schemeClr val="accent1">
                     <a:lumMod val="95000"/>
@@ -13502,7 +13502,7 @@
           <p:cNvPr id="16" name="kpi_label_4">
             <a:extLst>
               <a:ext uri="{FF2B5EF4-FFF2-40B4-BE49-F238E27FC236}">
-                <a16:creationId xmlns:a16="http://schemas.microsoft.com/office/drawing/2014/main" id="{29C1A1C2-244C-41EB-0520-314AAB6713EA}"/>
+                <a16:creationId xmlns:a16="http://schemas.microsoft.com/office/drawing/2014/main" id="{BEDE80A8-5D02-9F70-3BBC-2E69AC4A28EE}"/>
               </a:ext>
             </a:extLst>
           </p:cNvPr>
@@ -13533,7 +13533,7 @@
               </a:spcBef>
               <a:buFontTx/>
               <a:buNone/>
-              <a:defRPr sz="1800"/>
+              <a:defRPr sz="2000"/>
             </a:lvl1pPr>
           </a:lstStyle>
           <a:p>
@@ -13550,7 +13550,7 @@
           <p:cNvPr id="17" name="source">
             <a:extLst>
               <a:ext uri="{FF2B5EF4-FFF2-40B4-BE49-F238E27FC236}">
-                <a16:creationId xmlns:a16="http://schemas.microsoft.com/office/drawing/2014/main" id="{646E547B-6DEC-5D30-D52A-E6EEDA1E0F92}"/>
+                <a16:creationId xmlns:a16="http://schemas.microsoft.com/office/drawing/2014/main" id="{B7B3A0DA-36E4-B65D-D7E0-01D1F1B6103B}"/>
               </a:ext>
             </a:extLst>
           </p:cNvPr>
@@ -13607,7 +13607,7 @@
     </p:spTree>
     <p:extLst>
       <p:ext uri="{BB962C8B-B14F-4D97-AF65-F5344CB8AC3E}">
-        <p14:creationId xmlns:p14="http://schemas.microsoft.com/office/powerpoint/2010/main" val="3684517792"/>
+        <p14:creationId xmlns:p14="http://schemas.microsoft.com/office/powerpoint/2010/main" val="380875177"/>
       </p:ext>
     </p:extLst>
   </p:cSld>
@@ -13757,7 +13757,7 @@
             </a:lvl1pPr>
           </a:lstStyle>
           <a:p>
-            <a:fld id="{69A66F8C-F25E-4B2E-B2E2-0A218D443514}" type="datetimeFigureOut">
+            <a:fld id="{90A7BBED-E6FA-40A6-8A51-59E4B08CD8B8}" type="datetimeFigureOut">
               <a:rPr lang="en-US" smtClean="0"/>
               <a:t>10/3/2026</a:t>
             </a:fld>
@@ -13802,7 +13802,7 @@
             </a:lvl1pPr>
           </a:lstStyle>
           <a:p>
-            <a:fld id="{369B3908-4DF9-450B-8F99-2A754569D7A5}" type="slidenum">
+            <a:fld id="{4F0FE17B-5063-4433-97D2-96EAD825CE6E}" type="slidenum">
               <a:rPr lang="en-US" smtClean="0"/>
               <a:t>‹#›</a:t>
             </a:fld>
@@ -13922,7 +13922,7 @@
           <p:cNvPr id="8" name="item_1_title">
             <a:extLst>
               <a:ext uri="{FF2B5EF4-FFF2-40B4-BE49-F238E27FC236}">
-                <a16:creationId xmlns:a16="http://schemas.microsoft.com/office/drawing/2014/main" id="{4A2C7D0C-AFBA-B968-0F8F-BD79FF803235}"/>
+                <a16:creationId xmlns:a16="http://schemas.microsoft.com/office/drawing/2014/main" id="{C56A0FC5-C1D8-0013-32A9-D8DCE274E507}"/>
               </a:ext>
             </a:extLst>
           </p:cNvPr>
@@ -13950,7 +13950,7 @@
               </a:spcBef>
               <a:buFontTx/>
               <a:buNone/>
-              <a:defRPr sz="2200" b="1">
+              <a:defRPr sz="2000" b="1">
                 <a:solidFill>
                   <a:schemeClr val="accent1">
                     <a:lumMod val="95000"/>
@@ -13974,7 +13974,7 @@
           <p:cNvPr id="9" name="item_1">
             <a:extLst>
               <a:ext uri="{FF2B5EF4-FFF2-40B4-BE49-F238E27FC236}">
-                <a16:creationId xmlns:a16="http://schemas.microsoft.com/office/drawing/2014/main" id="{58034229-23C9-8671-DE44-264C1DC15F63}"/>
+                <a16:creationId xmlns:a16="http://schemas.microsoft.com/office/drawing/2014/main" id="{07E7B4DB-62FB-85C8-5265-DFC52701DD9A}"/>
               </a:ext>
             </a:extLst>
           </p:cNvPr>
@@ -14022,7 +14022,7 @@
           <p:cNvPr id="10" name="item_2_title">
             <a:extLst>
               <a:ext uri="{FF2B5EF4-FFF2-40B4-BE49-F238E27FC236}">
-                <a16:creationId xmlns:a16="http://schemas.microsoft.com/office/drawing/2014/main" id="{B8FAEE87-F320-3DE4-A5A6-827019248FB8}"/>
+                <a16:creationId xmlns:a16="http://schemas.microsoft.com/office/drawing/2014/main" id="{1154B787-2F99-1018-732C-0BD20D9D39E3}"/>
               </a:ext>
             </a:extLst>
           </p:cNvPr>
@@ -14053,7 +14053,7 @@
               </a:spcBef>
               <a:buFontTx/>
               <a:buNone/>
-              <a:defRPr sz="2200" b="1">
+              <a:defRPr sz="2000" b="1">
                 <a:solidFill>
                   <a:schemeClr val="accent1">
                     <a:lumMod val="95000"/>
@@ -14077,7 +14077,7 @@
           <p:cNvPr id="11" name="item_2">
             <a:extLst>
               <a:ext uri="{FF2B5EF4-FFF2-40B4-BE49-F238E27FC236}">
-                <a16:creationId xmlns:a16="http://schemas.microsoft.com/office/drawing/2014/main" id="{B3E26289-6130-A572-F145-39BCBAD573CF}"/>
+                <a16:creationId xmlns:a16="http://schemas.microsoft.com/office/drawing/2014/main" id="{81604651-C12B-E508-FA1D-C09DB407EA66}"/>
               </a:ext>
             </a:extLst>
           </p:cNvPr>
@@ -14125,7 +14125,7 @@
           <p:cNvPr id="12" name="item_3_title">
             <a:extLst>
               <a:ext uri="{FF2B5EF4-FFF2-40B4-BE49-F238E27FC236}">
-                <a16:creationId xmlns:a16="http://schemas.microsoft.com/office/drawing/2014/main" id="{156B9FD5-554D-C763-F4BB-8B84481E9A96}"/>
+                <a16:creationId xmlns:a16="http://schemas.microsoft.com/office/drawing/2014/main" id="{0E624A19-8437-6890-0224-3AC838CAF891}"/>
               </a:ext>
             </a:extLst>
           </p:cNvPr>
@@ -14156,7 +14156,7 @@
               </a:spcBef>
               <a:buFontTx/>
               <a:buNone/>
-              <a:defRPr sz="2200" b="1">
+              <a:defRPr sz="2000" b="1">
                 <a:solidFill>
                   <a:schemeClr val="accent1">
                     <a:lumMod val="95000"/>
@@ -14180,7 +14180,7 @@
           <p:cNvPr id="13" name="item_3">
             <a:extLst>
               <a:ext uri="{FF2B5EF4-FFF2-40B4-BE49-F238E27FC236}">
-                <a16:creationId xmlns:a16="http://schemas.microsoft.com/office/drawing/2014/main" id="{B9A60F21-6071-B26E-DC5C-DEF9941EC507}"/>
+                <a16:creationId xmlns:a16="http://schemas.microsoft.com/office/drawing/2014/main" id="{7201E941-DD82-BF22-87C0-4F082903A3FB}"/>
               </a:ext>
             </a:extLst>
           </p:cNvPr>
@@ -14228,7 +14228,7 @@
           <p:cNvPr id="14" name="item_4_title">
             <a:extLst>
               <a:ext uri="{FF2B5EF4-FFF2-40B4-BE49-F238E27FC236}">
-                <a16:creationId xmlns:a16="http://schemas.microsoft.com/office/drawing/2014/main" id="{3BCB0E45-9A5B-7683-DDAE-907AF036EA37}"/>
+                <a16:creationId xmlns:a16="http://schemas.microsoft.com/office/drawing/2014/main" id="{0FB47588-AD79-402F-FF42-4E5792BF6CCC}"/>
               </a:ext>
             </a:extLst>
           </p:cNvPr>
@@ -14259,7 +14259,7 @@
               </a:spcBef>
               <a:buFontTx/>
               <a:buNone/>
-              <a:defRPr sz="2200" b="1">
+              <a:defRPr sz="2000" b="1">
                 <a:solidFill>
                   <a:schemeClr val="accent1">
                     <a:lumMod val="95000"/>
@@ -14283,7 +14283,7 @@
           <p:cNvPr id="15" name="item_4">
             <a:extLst>
               <a:ext uri="{FF2B5EF4-FFF2-40B4-BE49-F238E27FC236}">
-                <a16:creationId xmlns:a16="http://schemas.microsoft.com/office/drawing/2014/main" id="{4EDB95E3-FAA1-1919-4843-7C3A4D3662BA}"/>
+                <a16:creationId xmlns:a16="http://schemas.microsoft.com/office/drawing/2014/main" id="{CCECBA97-F052-3C8E-5451-67F9E6EAA6B8}"/>
               </a:ext>
             </a:extLst>
           </p:cNvPr>
@@ -14331,7 +14331,7 @@
           <p:cNvPr id="16" name="source">
             <a:extLst>
               <a:ext uri="{FF2B5EF4-FFF2-40B4-BE49-F238E27FC236}">
-                <a16:creationId xmlns:a16="http://schemas.microsoft.com/office/drawing/2014/main" id="{0CDF9BD5-A80E-B5B0-598A-EE8B1CCFBE73}"/>
+                <a16:creationId xmlns:a16="http://schemas.microsoft.com/office/drawing/2014/main" id="{70378907-591F-EE03-181F-60BFA451274F}"/>
               </a:ext>
             </a:extLst>
           </p:cNvPr>
@@ -14388,7 +14388,7 @@
     </p:spTree>
     <p:extLst>
       <p:ext uri="{BB962C8B-B14F-4D97-AF65-F5344CB8AC3E}">
-        <p14:creationId xmlns:p14="http://schemas.microsoft.com/office/powerpoint/2010/main" val="2211383990"/>
+        <p14:creationId xmlns:p14="http://schemas.microsoft.com/office/powerpoint/2010/main" val="1459420543"/>
       </p:ext>
     </p:extLst>
   </p:cSld>
@@ -14538,7 +14538,7 @@
             </a:lvl1pPr>
           </a:lstStyle>
           <a:p>
-            <a:fld id="{69A66F8C-F25E-4B2E-B2E2-0A218D443514}" type="datetimeFigureOut">
+            <a:fld id="{90A7BBED-E6FA-40A6-8A51-59E4B08CD8B8}" type="datetimeFigureOut">
               <a:rPr lang="en-US" smtClean="0"/>
               <a:t>10/3/2026</a:t>
             </a:fld>
@@ -14583,7 +14583,7 @@
             </a:lvl1pPr>
           </a:lstStyle>
           <a:p>
-            <a:fld id="{369B3908-4DF9-450B-8F99-2A754569D7A5}" type="slidenum">
+            <a:fld id="{4F0FE17B-5063-4433-97D2-96EAD825CE6E}" type="slidenum">
               <a:rPr lang="en-US" smtClean="0"/>
               <a:t>‹#›</a:t>
             </a:fld>
@@ -14703,7 +14703,7 @@
           <p:cNvPr id="8" name="marker_1">
             <a:extLst>
               <a:ext uri="{FF2B5EF4-FFF2-40B4-BE49-F238E27FC236}">
-                <a16:creationId xmlns:a16="http://schemas.microsoft.com/office/drawing/2014/main" id="{DA950547-21FE-F520-A764-D3ABDE310C9C}"/>
+                <a16:creationId xmlns:a16="http://schemas.microsoft.com/office/drawing/2014/main" id="{0972FE88-69A0-BCA2-7217-2B72CD4835C9}"/>
               </a:ext>
             </a:extLst>
           </p:cNvPr>
@@ -14716,7 +14716,7 @@
         </p:nvSpPr>
         <p:spPr>
           <a:xfrm>
-            <a:off x="761607" y="2457097"/>
+            <a:off x="733081" y="2428844"/>
             <a:ext cx="627576" cy="621561"/>
           </a:xfrm>
           <a:prstGeom prst="ellipse">
@@ -14739,7 +14739,7 @@
               </a:spcBef>
               <a:buFontTx/>
               <a:buNone/>
-              <a:defRPr sz="2400" b="1">
+              <a:defRPr sz="2000" b="1">
                 <a:solidFill>
                   <a:schemeClr val="bg1"/>
                 </a:solidFill>
@@ -14761,7 +14761,7 @@
           <p:cNvPr id="9" name="item_1_title">
             <a:extLst>
               <a:ext uri="{FF2B5EF4-FFF2-40B4-BE49-F238E27FC236}">
-                <a16:creationId xmlns:a16="http://schemas.microsoft.com/office/drawing/2014/main" id="{9E382803-7900-78FF-D591-D2331A091A0B}"/>
+                <a16:creationId xmlns:a16="http://schemas.microsoft.com/office/drawing/2014/main" id="{E8510A7D-2E6E-5A81-A5FA-A93FF9F705A9}"/>
               </a:ext>
             </a:extLst>
           </p:cNvPr>
@@ -14774,8 +14774,8 @@
         </p:nvSpPr>
         <p:spPr>
           <a:xfrm>
-            <a:off x="1503287" y="2457096"/>
-            <a:ext cx="9927104" cy="394708"/>
+            <a:off x="1474761" y="2428844"/>
+            <a:ext cx="9984156" cy="411327"/>
           </a:xfrm>
           <a:prstGeom prst="rect">
             <a:avLst/>
@@ -14792,7 +14792,7 @@
               </a:spcBef>
               <a:buFontTx/>
               <a:buNone/>
-              <a:defRPr sz="2200" b="1">
+              <a:defRPr sz="2000" b="1">
                 <a:solidFill>
                   <a:schemeClr val="accent1">
                     <a:lumMod val="95000"/>
@@ -14816,7 +14816,7 @@
           <p:cNvPr id="10" name="item_1">
             <a:extLst>
               <a:ext uri="{FF2B5EF4-FFF2-40B4-BE49-F238E27FC236}">
-                <a16:creationId xmlns:a16="http://schemas.microsoft.com/office/drawing/2014/main" id="{2AB12019-A81F-0134-D371-8593816CCE0F}"/>
+                <a16:creationId xmlns:a16="http://schemas.microsoft.com/office/drawing/2014/main" id="{4C909C09-13A2-F92C-EA3D-6135EC190C30}"/>
               </a:ext>
             </a:extLst>
           </p:cNvPr>
@@ -14829,8 +14829,8 @@
         </p:nvSpPr>
         <p:spPr>
           <a:xfrm>
-            <a:off x="1503287" y="2851805"/>
-            <a:ext cx="9927104" cy="947299"/>
+            <a:off x="1474761" y="2840171"/>
+            <a:ext cx="9984156" cy="987185"/>
           </a:xfrm>
           <a:prstGeom prst="rect">
             <a:avLst/>
@@ -14864,7 +14864,7 @@
           <p:cNvPr id="11" name="marker_2">
             <a:extLst>
               <a:ext uri="{FF2B5EF4-FFF2-40B4-BE49-F238E27FC236}">
-                <a16:creationId xmlns:a16="http://schemas.microsoft.com/office/drawing/2014/main" id="{59761FD4-E187-E02B-9B11-BB9BA281B09F}"/>
+                <a16:creationId xmlns:a16="http://schemas.microsoft.com/office/drawing/2014/main" id="{FC554A17-D784-3E4F-88CD-D94275AD1994}"/>
               </a:ext>
             </a:extLst>
           </p:cNvPr>
@@ -14877,7 +14877,7 @@
         </p:nvSpPr>
         <p:spPr>
           <a:xfrm>
-            <a:off x="761607" y="4477170"/>
+            <a:off x="733081" y="4448917"/>
             <a:ext cx="627576" cy="621561"/>
           </a:xfrm>
           <a:prstGeom prst="ellipse">
@@ -14900,7 +14900,7 @@
               </a:spcBef>
               <a:buFontTx/>
               <a:buNone/>
-              <a:defRPr sz="2400" b="1">
+              <a:defRPr sz="2000" b="1">
                 <a:solidFill>
                   <a:schemeClr val="bg1"/>
                 </a:solidFill>
@@ -14922,7 +14922,7 @@
           <p:cNvPr id="12" name="item_2_title">
             <a:extLst>
               <a:ext uri="{FF2B5EF4-FFF2-40B4-BE49-F238E27FC236}">
-                <a16:creationId xmlns:a16="http://schemas.microsoft.com/office/drawing/2014/main" id="{486854CF-D078-707B-066C-A822A4BE3393}"/>
+                <a16:creationId xmlns:a16="http://schemas.microsoft.com/office/drawing/2014/main" id="{1D39FF7B-63B5-F6C7-4139-615E1D791356}"/>
               </a:ext>
             </a:extLst>
           </p:cNvPr>
@@ -14935,8 +14935,8 @@
         </p:nvSpPr>
         <p:spPr>
           <a:xfrm>
-            <a:off x="1503287" y="4477169"/>
-            <a:ext cx="9927104" cy="394708"/>
+            <a:off x="1474761" y="4448917"/>
+            <a:ext cx="9984156" cy="411327"/>
           </a:xfrm>
           <a:prstGeom prst="rect">
             <a:avLst/>
@@ -14953,7 +14953,7 @@
               </a:spcBef>
               <a:buFontTx/>
               <a:buNone/>
-              <a:defRPr sz="2200" b="1">
+              <a:defRPr sz="2000" b="1">
                 <a:solidFill>
                   <a:schemeClr val="accent1">
                     <a:lumMod val="95000"/>
@@ -14977,7 +14977,7 @@
           <p:cNvPr id="13" name="item_2">
             <a:extLst>
               <a:ext uri="{FF2B5EF4-FFF2-40B4-BE49-F238E27FC236}">
-                <a16:creationId xmlns:a16="http://schemas.microsoft.com/office/drawing/2014/main" id="{F308DCFA-E1CD-68F2-FF22-59CA2F6F416E}"/>
+                <a16:creationId xmlns:a16="http://schemas.microsoft.com/office/drawing/2014/main" id="{B08B2CA6-5624-CB4C-082C-7834339AF877}"/>
               </a:ext>
             </a:extLst>
           </p:cNvPr>
@@ -14990,8 +14990,8 @@
         </p:nvSpPr>
         <p:spPr>
           <a:xfrm>
-            <a:off x="1503287" y="4871878"/>
-            <a:ext cx="9927104" cy="947299"/>
+            <a:off x="1474761" y="4860245"/>
+            <a:ext cx="9984156" cy="987185"/>
           </a:xfrm>
           <a:prstGeom prst="rect">
             <a:avLst/>
@@ -15025,7 +15025,7 @@
           <p:cNvPr id="14" name="source">
             <a:extLst>
               <a:ext uri="{FF2B5EF4-FFF2-40B4-BE49-F238E27FC236}">
-                <a16:creationId xmlns:a16="http://schemas.microsoft.com/office/drawing/2014/main" id="{8E25F6E0-FEED-1D36-C52B-2A55FB983EB5}"/>
+                <a16:creationId xmlns:a16="http://schemas.microsoft.com/office/drawing/2014/main" id="{14F9C527-2084-2929-10D3-2BC96BBA0FF4}"/>
               </a:ext>
             </a:extLst>
           </p:cNvPr>
@@ -15082,7 +15082,7 @@
     </p:spTree>
     <p:extLst>
       <p:ext uri="{BB962C8B-B14F-4D97-AF65-F5344CB8AC3E}">
-        <p14:creationId xmlns:p14="http://schemas.microsoft.com/office/powerpoint/2010/main" val="3875396330"/>
+        <p14:creationId xmlns:p14="http://schemas.microsoft.com/office/powerpoint/2010/main" val="3107894314"/>
       </p:ext>
     </p:extLst>
   </p:cSld>
@@ -15232,7 +15232,7 @@
             </a:lvl1pPr>
           </a:lstStyle>
           <a:p>
-            <a:fld id="{69A66F8C-F25E-4B2E-B2E2-0A218D443514}" type="datetimeFigureOut">
+            <a:fld id="{90A7BBED-E6FA-40A6-8A51-59E4B08CD8B8}" type="datetimeFigureOut">
               <a:rPr lang="en-US" smtClean="0"/>
               <a:t>10/3/2026</a:t>
             </a:fld>
@@ -15277,7 +15277,7 @@
             </a:lvl1pPr>
           </a:lstStyle>
           <a:p>
-            <a:fld id="{369B3908-4DF9-450B-8F99-2A754569D7A5}" type="slidenum">
+            <a:fld id="{4F0FE17B-5063-4433-97D2-96EAD825CE6E}" type="slidenum">
               <a:rPr lang="en-US" smtClean="0"/>
               <a:t>‹#›</a:t>
             </a:fld>
@@ -15397,7 +15397,7 @@
           <p:cNvPr id="8" name="item_1_title">
             <a:extLst>
               <a:ext uri="{FF2B5EF4-FFF2-40B4-BE49-F238E27FC236}">
-                <a16:creationId xmlns:a16="http://schemas.microsoft.com/office/drawing/2014/main" id="{342B1153-3EC4-506D-B134-A589FDE388CE}"/>
+                <a16:creationId xmlns:a16="http://schemas.microsoft.com/office/drawing/2014/main" id="{BD3D5D8A-0655-F0ED-4B42-03F170F3C78A}"/>
               </a:ext>
             </a:extLst>
           </p:cNvPr>
@@ -15410,8 +15410,8 @@
         </p:nvSpPr>
         <p:spPr>
           <a:xfrm>
-            <a:off x="761607" y="2457096"/>
-            <a:ext cx="4992078" cy="394708"/>
+            <a:off x="733082" y="2428844"/>
+            <a:ext cx="5049131" cy="411327"/>
           </a:xfrm>
         </p:spPr>
         <p:txBody>
@@ -15425,7 +15425,7 @@
               </a:spcBef>
               <a:buFontTx/>
               <a:buNone/>
-              <a:defRPr sz="2200" b="1">
+              <a:defRPr sz="2000" b="1">
                 <a:solidFill>
                   <a:schemeClr val="accent1">
                     <a:lumMod val="95000"/>
@@ -15449,7 +15449,7 @@
           <p:cNvPr id="9" name="item_1">
             <a:extLst>
               <a:ext uri="{FF2B5EF4-FFF2-40B4-BE49-F238E27FC236}">
-                <a16:creationId xmlns:a16="http://schemas.microsoft.com/office/drawing/2014/main" id="{91624442-709B-5E34-5894-BFAD5A0470C9}"/>
+                <a16:creationId xmlns:a16="http://schemas.microsoft.com/office/drawing/2014/main" id="{0110D668-F19E-0747-FFD3-67B747C663F5}"/>
               </a:ext>
             </a:extLst>
           </p:cNvPr>
@@ -15462,8 +15462,8 @@
         </p:nvSpPr>
         <p:spPr>
           <a:xfrm>
-            <a:off x="761607" y="2851805"/>
-            <a:ext cx="4992078" cy="947299"/>
+            <a:off x="733082" y="2840171"/>
+            <a:ext cx="5049131" cy="987185"/>
           </a:xfrm>
           <a:prstGeom prst="rect">
             <a:avLst/>
@@ -15497,7 +15497,7 @@
           <p:cNvPr id="10" name="item_2_title">
             <a:extLst>
               <a:ext uri="{FF2B5EF4-FFF2-40B4-BE49-F238E27FC236}">
-                <a16:creationId xmlns:a16="http://schemas.microsoft.com/office/drawing/2014/main" id="{119EF55D-DABB-D6F2-80F4-D0DC414124C3}"/>
+                <a16:creationId xmlns:a16="http://schemas.microsoft.com/office/drawing/2014/main" id="{1BAD3D23-8979-E548-ADDF-3BECC62026B3}"/>
               </a:ext>
             </a:extLst>
           </p:cNvPr>
@@ -15510,8 +15510,8 @@
         </p:nvSpPr>
         <p:spPr>
           <a:xfrm>
-            <a:off x="6438313" y="2457096"/>
-            <a:ext cx="4992078" cy="394708"/>
+            <a:off x="6409788" y="2428844"/>
+            <a:ext cx="5049131" cy="411327"/>
           </a:xfrm>
           <a:prstGeom prst="rect">
             <a:avLst/>
@@ -15528,7 +15528,7 @@
               </a:spcBef>
               <a:buFontTx/>
               <a:buNone/>
-              <a:defRPr sz="2200" b="1">
+              <a:defRPr sz="2000" b="1">
                 <a:solidFill>
                   <a:schemeClr val="accent1">
                     <a:lumMod val="95000"/>
@@ -15552,7 +15552,7 @@
           <p:cNvPr id="11" name="item_2">
             <a:extLst>
               <a:ext uri="{FF2B5EF4-FFF2-40B4-BE49-F238E27FC236}">
-                <a16:creationId xmlns:a16="http://schemas.microsoft.com/office/drawing/2014/main" id="{CB232022-8B7F-D492-3A86-95C30EF0B637}"/>
+                <a16:creationId xmlns:a16="http://schemas.microsoft.com/office/drawing/2014/main" id="{2C6FD4FC-8F3D-B19E-80BB-3F0490E4D4E8}"/>
               </a:ext>
             </a:extLst>
           </p:cNvPr>
@@ -15565,8 +15565,8 @@
         </p:nvSpPr>
         <p:spPr>
           <a:xfrm>
-            <a:off x="6438313" y="2851805"/>
-            <a:ext cx="4992078" cy="947299"/>
+            <a:off x="6409788" y="2840171"/>
+            <a:ext cx="5049131" cy="987185"/>
           </a:xfrm>
           <a:prstGeom prst="rect">
             <a:avLst/>
@@ -15600,7 +15600,7 @@
           <p:cNvPr id="12" name="item_3_title">
             <a:extLst>
               <a:ext uri="{FF2B5EF4-FFF2-40B4-BE49-F238E27FC236}">
-                <a16:creationId xmlns:a16="http://schemas.microsoft.com/office/drawing/2014/main" id="{857ECF64-A599-5769-17C7-D1C8FFCAB57A}"/>
+                <a16:creationId xmlns:a16="http://schemas.microsoft.com/office/drawing/2014/main" id="{D669A036-BF63-DC0A-374F-78F943C37CC3}"/>
               </a:ext>
             </a:extLst>
           </p:cNvPr>
@@ -15613,8 +15613,8 @@
         </p:nvSpPr>
         <p:spPr>
           <a:xfrm>
-            <a:off x="761607" y="4477169"/>
-            <a:ext cx="4992078" cy="394708"/>
+            <a:off x="733082" y="4448917"/>
+            <a:ext cx="5049131" cy="411327"/>
           </a:xfrm>
           <a:prstGeom prst="rect">
             <a:avLst/>
@@ -15631,7 +15631,7 @@
               </a:spcBef>
               <a:buFontTx/>
               <a:buNone/>
-              <a:defRPr sz="2200" b="1">
+              <a:defRPr sz="2000" b="1">
                 <a:solidFill>
                   <a:schemeClr val="accent1">
                     <a:lumMod val="95000"/>
@@ -15655,7 +15655,7 @@
           <p:cNvPr id="13" name="item_3">
             <a:extLst>
               <a:ext uri="{FF2B5EF4-FFF2-40B4-BE49-F238E27FC236}">
-                <a16:creationId xmlns:a16="http://schemas.microsoft.com/office/drawing/2014/main" id="{A2E8ACDE-E7BF-2AE4-5915-AFC8884FBC00}"/>
+                <a16:creationId xmlns:a16="http://schemas.microsoft.com/office/drawing/2014/main" id="{D375B290-4BE5-46E8-5D3A-9E8C2ACE42C3}"/>
               </a:ext>
             </a:extLst>
           </p:cNvPr>
@@ -15668,8 +15668,8 @@
         </p:nvSpPr>
         <p:spPr>
           <a:xfrm>
-            <a:off x="761607" y="4871878"/>
-            <a:ext cx="4992078" cy="947299"/>
+            <a:off x="733082" y="4860245"/>
+            <a:ext cx="5049131" cy="987185"/>
           </a:xfrm>
           <a:prstGeom prst="rect">
             <a:avLst/>
@@ -15703,7 +15703,7 @@
           <p:cNvPr id="14" name="item_4_title">
             <a:extLst>
               <a:ext uri="{FF2B5EF4-FFF2-40B4-BE49-F238E27FC236}">
-                <a16:creationId xmlns:a16="http://schemas.microsoft.com/office/drawing/2014/main" id="{4A273D3D-E685-08A3-D137-ED8E6992D960}"/>
+                <a16:creationId xmlns:a16="http://schemas.microsoft.com/office/drawing/2014/main" id="{B94E7133-6F69-46B3-1341-6FA76F4EB800}"/>
               </a:ext>
             </a:extLst>
           </p:cNvPr>
@@ -15716,8 +15716,8 @@
         </p:nvSpPr>
         <p:spPr>
           <a:xfrm>
-            <a:off x="6438313" y="4477169"/>
-            <a:ext cx="4992078" cy="394708"/>
+            <a:off x="6409788" y="4448917"/>
+            <a:ext cx="5049131" cy="411327"/>
           </a:xfrm>
           <a:prstGeom prst="rect">
             <a:avLst/>
@@ -15734,7 +15734,7 @@
               </a:spcBef>
               <a:buFontTx/>
               <a:buNone/>
-              <a:defRPr sz="2200" b="1">
+              <a:defRPr sz="2000" b="1">
                 <a:solidFill>
                   <a:schemeClr val="accent1">
                     <a:lumMod val="95000"/>
@@ -15758,7 +15758,7 @@
           <p:cNvPr id="15" name="item_4">
             <a:extLst>
               <a:ext uri="{FF2B5EF4-FFF2-40B4-BE49-F238E27FC236}">
-                <a16:creationId xmlns:a16="http://schemas.microsoft.com/office/drawing/2014/main" id="{6FEE06EF-C16A-46C0-5287-B0D7390816C3}"/>
+                <a16:creationId xmlns:a16="http://schemas.microsoft.com/office/drawing/2014/main" id="{CB48CEAD-6F1E-69F5-BACD-4B4636C71CD8}"/>
               </a:ext>
             </a:extLst>
           </p:cNvPr>
@@ -15771,8 +15771,8 @@
         </p:nvSpPr>
         <p:spPr>
           <a:xfrm>
-            <a:off x="6438313" y="4871878"/>
-            <a:ext cx="4992078" cy="947299"/>
+            <a:off x="6409788" y="4860245"/>
+            <a:ext cx="5049131" cy="987185"/>
           </a:xfrm>
           <a:prstGeom prst="rect">
             <a:avLst/>
@@ -15806,7 +15806,7 @@
           <p:cNvPr id="16" name="source">
             <a:extLst>
               <a:ext uri="{FF2B5EF4-FFF2-40B4-BE49-F238E27FC236}">
-                <a16:creationId xmlns:a16="http://schemas.microsoft.com/office/drawing/2014/main" id="{E947F452-089F-968D-70F9-BCCE91588805}"/>
+                <a16:creationId xmlns:a16="http://schemas.microsoft.com/office/drawing/2014/main" id="{F2131290-3461-A19E-8B96-C9797F5163C9}"/>
               </a:ext>
             </a:extLst>
           </p:cNvPr>
@@ -15863,7 +15863,7 @@
     </p:spTree>
     <p:extLst>
       <p:ext uri="{BB962C8B-B14F-4D97-AF65-F5344CB8AC3E}">
-        <p14:creationId xmlns:p14="http://schemas.microsoft.com/office/powerpoint/2010/main" val="1019153799"/>
+        <p14:creationId xmlns:p14="http://schemas.microsoft.com/office/powerpoint/2010/main" val="1519494198"/>
       </p:ext>
     </p:extLst>
   </p:cSld>
@@ -16013,7 +16013,7 @@
             </a:lvl1pPr>
           </a:lstStyle>
           <a:p>
-            <a:fld id="{69A66F8C-F25E-4B2E-B2E2-0A218D443514}" type="datetimeFigureOut">
+            <a:fld id="{90A7BBED-E6FA-40A6-8A51-59E4B08CD8B8}" type="datetimeFigureOut">
               <a:rPr lang="en-US" smtClean="0"/>
               <a:t>10/3/2026</a:t>
             </a:fld>
@@ -16058,7 +16058,7 @@
             </a:lvl1pPr>
           </a:lstStyle>
           <a:p>
-            <a:fld id="{369B3908-4DF9-450B-8F99-2A754569D7A5}" type="slidenum">
+            <a:fld id="{4F0FE17B-5063-4433-97D2-96EAD825CE6E}" type="slidenum">
               <a:rPr lang="en-US" smtClean="0"/>
               <a:t>‹#›</a:t>
             </a:fld>
@@ -16178,7 +16178,7 @@
           <p:cNvPr id="8" name="item_1_title">
             <a:extLst>
               <a:ext uri="{FF2B5EF4-FFF2-40B4-BE49-F238E27FC236}">
-                <a16:creationId xmlns:a16="http://schemas.microsoft.com/office/drawing/2014/main" id="{A82D89BF-424B-5960-A32D-DD0E71C35C3C}"/>
+                <a16:creationId xmlns:a16="http://schemas.microsoft.com/office/drawing/2014/main" id="{5C01D437-D1E2-E1FC-E172-542BD37516DA}"/>
               </a:ext>
             </a:extLst>
           </p:cNvPr>
@@ -16191,8 +16191,8 @@
         </p:nvSpPr>
         <p:spPr>
           <a:xfrm>
-            <a:off x="533398" y="2632562"/>
-            <a:ext cx="2610144" cy="1003717"/>
+            <a:off x="733082" y="2788694"/>
+            <a:ext cx="2210777" cy="899628"/>
           </a:xfrm>
         </p:spPr>
         <p:txBody>
@@ -16206,7 +16206,7 @@
               </a:spcBef>
               <a:buFontTx/>
               <a:buNone/>
-              <a:defRPr sz="2200" b="1">
+              <a:defRPr sz="2000" b="1">
                 <a:solidFill>
                   <a:schemeClr val="accent1">
                     <a:lumMod val="95000"/>
@@ -16230,7 +16230,7 @@
           <p:cNvPr id="9" name="item_1">
             <a:extLst>
               <a:ext uri="{FF2B5EF4-FFF2-40B4-BE49-F238E27FC236}">
-                <a16:creationId xmlns:a16="http://schemas.microsoft.com/office/drawing/2014/main" id="{5A05A19C-0568-5CAC-C051-A11A1C43EA2C}"/>
+                <a16:creationId xmlns:a16="http://schemas.microsoft.com/office/drawing/2014/main" id="{12F88D45-3C19-E40D-774B-9EB679095FE6}"/>
               </a:ext>
             </a:extLst>
           </p:cNvPr>
@@ -16243,8 +16243,8 @@
         </p:nvSpPr>
         <p:spPr>
           <a:xfrm>
-            <a:off x="533398" y="3636279"/>
-            <a:ext cx="2610144" cy="2408921"/>
+            <a:off x="733082" y="3688323"/>
+            <a:ext cx="2210777" cy="2159107"/>
           </a:xfrm>
           <a:prstGeom prst="rect">
             <a:avLst/>
@@ -16278,7 +16278,7 @@
           <p:cNvPr id="10" name="item_2_title">
             <a:extLst>
               <a:ext uri="{FF2B5EF4-FFF2-40B4-BE49-F238E27FC236}">
-                <a16:creationId xmlns:a16="http://schemas.microsoft.com/office/drawing/2014/main" id="{8B69A19A-59EC-F972-F9A2-623057126BC7}"/>
+                <a16:creationId xmlns:a16="http://schemas.microsoft.com/office/drawing/2014/main" id="{E644D0B8-E5EC-5781-4DA6-6CC13710D706}"/>
               </a:ext>
             </a:extLst>
           </p:cNvPr>
@@ -16291,8 +16291,8 @@
         </p:nvSpPr>
         <p:spPr>
           <a:xfrm>
-            <a:off x="3371751" y="2632562"/>
-            <a:ext cx="2610144" cy="1003717"/>
+            <a:off x="3571435" y="2788694"/>
+            <a:ext cx="2210777" cy="899628"/>
           </a:xfrm>
           <a:prstGeom prst="rect">
             <a:avLst/>
@@ -16309,7 +16309,7 @@
               </a:spcBef>
               <a:buFontTx/>
               <a:buNone/>
-              <a:defRPr sz="2200" b="1">
+              <a:defRPr sz="2000" b="1">
                 <a:solidFill>
                   <a:schemeClr val="accent1">
                     <a:lumMod val="95000"/>
@@ -16333,7 +16333,7 @@
           <p:cNvPr id="11" name="item_2">
             <a:extLst>
               <a:ext uri="{FF2B5EF4-FFF2-40B4-BE49-F238E27FC236}">
-                <a16:creationId xmlns:a16="http://schemas.microsoft.com/office/drawing/2014/main" id="{3E17B188-A1D5-0DE3-8142-BF25B8B8D22C}"/>
+                <a16:creationId xmlns:a16="http://schemas.microsoft.com/office/drawing/2014/main" id="{99B7B10A-74B5-D4AE-8205-91926FFFE162}"/>
               </a:ext>
             </a:extLst>
           </p:cNvPr>
@@ -16346,8 +16346,8 @@
         </p:nvSpPr>
         <p:spPr>
           <a:xfrm>
-            <a:off x="3371751" y="3636279"/>
-            <a:ext cx="2610144" cy="2408921"/>
+            <a:off x="3571435" y="3688323"/>
+            <a:ext cx="2210777" cy="2159107"/>
           </a:xfrm>
           <a:prstGeom prst="rect">
             <a:avLst/>
@@ -16381,7 +16381,7 @@
           <p:cNvPr id="12" name="item_3_title">
             <a:extLst>
               <a:ext uri="{FF2B5EF4-FFF2-40B4-BE49-F238E27FC236}">
-                <a16:creationId xmlns:a16="http://schemas.microsoft.com/office/drawing/2014/main" id="{B8FFBD9E-77CA-AF03-F1D0-C2E9B4C79A57}"/>
+                <a16:creationId xmlns:a16="http://schemas.microsoft.com/office/drawing/2014/main" id="{CE5D51B9-53DC-F10C-DE36-339FA8BEF788}"/>
               </a:ext>
             </a:extLst>
           </p:cNvPr>
@@ -16394,8 +16394,8 @@
         </p:nvSpPr>
         <p:spPr>
           <a:xfrm>
-            <a:off x="6210104" y="2632562"/>
-            <a:ext cx="2610144" cy="1003717"/>
+            <a:off x="6409788" y="2788694"/>
+            <a:ext cx="2210777" cy="899628"/>
           </a:xfrm>
           <a:prstGeom prst="rect">
             <a:avLst/>
@@ -16412,7 +16412,7 @@
               </a:spcBef>
               <a:buFontTx/>
               <a:buNone/>
-              <a:defRPr sz="2200" b="1">
+              <a:defRPr sz="2000" b="1">
                 <a:solidFill>
                   <a:schemeClr val="accent1">
                     <a:lumMod val="95000"/>
@@ -16436,7 +16436,7 @@
           <p:cNvPr id="13" name="item_3">
             <a:extLst>
               <a:ext uri="{FF2B5EF4-FFF2-40B4-BE49-F238E27FC236}">
-                <a16:creationId xmlns:a16="http://schemas.microsoft.com/office/drawing/2014/main" id="{88D5CB8E-6EFF-E830-E278-68AB2F8E9734}"/>
+                <a16:creationId xmlns:a16="http://schemas.microsoft.com/office/drawing/2014/main" id="{125485A7-8723-72E7-9035-933C91EAEBF0}"/>
               </a:ext>
             </a:extLst>
           </p:cNvPr>
@@ -16449,8 +16449,8 @@
         </p:nvSpPr>
         <p:spPr>
           <a:xfrm>
-            <a:off x="6210104" y="3636279"/>
-            <a:ext cx="2610144" cy="2408921"/>
+            <a:off x="6409788" y="3688323"/>
+            <a:ext cx="2210777" cy="2159107"/>
           </a:xfrm>
           <a:prstGeom prst="rect">
             <a:avLst/>
@@ -16484,7 +16484,7 @@
           <p:cNvPr id="14" name="item_4_title">
             <a:extLst>
               <a:ext uri="{FF2B5EF4-FFF2-40B4-BE49-F238E27FC236}">
-                <a16:creationId xmlns:a16="http://schemas.microsoft.com/office/drawing/2014/main" id="{8E2C317B-B66D-55B8-91FA-617D72A460A3}"/>
+                <a16:creationId xmlns:a16="http://schemas.microsoft.com/office/drawing/2014/main" id="{4BAC2131-37A4-9EE1-2997-E74596DAD094}"/>
               </a:ext>
             </a:extLst>
           </p:cNvPr>
@@ -16497,8 +16497,8 @@
         </p:nvSpPr>
         <p:spPr>
           <a:xfrm>
-            <a:off x="9048457" y="2632562"/>
-            <a:ext cx="2610144" cy="1003717"/>
+            <a:off x="9248141" y="2788694"/>
+            <a:ext cx="2210777" cy="899628"/>
           </a:xfrm>
           <a:prstGeom prst="rect">
             <a:avLst/>
@@ -16515,7 +16515,7 @@
               </a:spcBef>
               <a:buFontTx/>
               <a:buNone/>
-              <a:defRPr sz="2200" b="1">
+              <a:defRPr sz="2000" b="1">
                 <a:solidFill>
                   <a:schemeClr val="accent1">
                     <a:lumMod val="95000"/>
@@ -16539,7 +16539,7 @@
           <p:cNvPr id="15" name="item_4">
             <a:extLst>
               <a:ext uri="{FF2B5EF4-FFF2-40B4-BE49-F238E27FC236}">
-                <a16:creationId xmlns:a16="http://schemas.microsoft.com/office/drawing/2014/main" id="{4FAE068F-35C7-4B6D-3F77-897C80F803A7}"/>
+                <a16:creationId xmlns:a16="http://schemas.microsoft.com/office/drawing/2014/main" id="{BE1014AC-A868-FD0F-DA7D-ED651FCA354C}"/>
               </a:ext>
             </a:extLst>
           </p:cNvPr>
@@ -16552,8 +16552,8 @@
         </p:nvSpPr>
         <p:spPr>
           <a:xfrm>
-            <a:off x="9048457" y="3636279"/>
-            <a:ext cx="2610144" cy="2408921"/>
+            <a:off x="9248141" y="3688323"/>
+            <a:ext cx="2210777" cy="2159107"/>
           </a:xfrm>
           <a:prstGeom prst="rect">
             <a:avLst/>
@@ -16587,7 +16587,7 @@
           <p:cNvPr id="16" name="source">
             <a:extLst>
               <a:ext uri="{FF2B5EF4-FFF2-40B4-BE49-F238E27FC236}">
-                <a16:creationId xmlns:a16="http://schemas.microsoft.com/office/drawing/2014/main" id="{F7905507-1978-9246-0110-D30017EE52D7}"/>
+                <a16:creationId xmlns:a16="http://schemas.microsoft.com/office/drawing/2014/main" id="{A9299E4B-2795-55C0-03D4-216D74DAB702}"/>
               </a:ext>
             </a:extLst>
           </p:cNvPr>
@@ -16644,7 +16644,7 @@
     </p:spTree>
     <p:extLst>
       <p:ext uri="{BB962C8B-B14F-4D97-AF65-F5344CB8AC3E}">
-        <p14:creationId xmlns:p14="http://schemas.microsoft.com/office/powerpoint/2010/main" val="1592406271"/>
+        <p14:creationId xmlns:p14="http://schemas.microsoft.com/office/powerpoint/2010/main" val="1522023546"/>
       </p:ext>
     </p:extLst>
   </p:cSld>
@@ -16794,7 +16794,7 @@
             </a:lvl1pPr>
           </a:lstStyle>
           <a:p>
-            <a:fld id="{69A66F8C-F25E-4B2E-B2E2-0A218D443514}" type="datetimeFigureOut">
+            <a:fld id="{90A7BBED-E6FA-40A6-8A51-59E4B08CD8B8}" type="datetimeFigureOut">
               <a:rPr lang="en-US" smtClean="0"/>
               <a:t>10/3/2026</a:t>
             </a:fld>
@@ -16839,7 +16839,7 @@
             </a:lvl1pPr>
           </a:lstStyle>
           <a:p>
-            <a:fld id="{369B3908-4DF9-450B-8F99-2A754569D7A5}" type="slidenum">
+            <a:fld id="{4F0FE17B-5063-4433-97D2-96EAD825CE6E}" type="slidenum">
               <a:rPr lang="en-US" smtClean="0"/>
               <a:t>‹#›</a:t>
             </a:fld>
@@ -16959,7 +16959,7 @@
           <p:cNvPr id="8" name="kpi_value_1">
             <a:extLst>
               <a:ext uri="{FF2B5EF4-FFF2-40B4-BE49-F238E27FC236}">
-                <a16:creationId xmlns:a16="http://schemas.microsoft.com/office/drawing/2014/main" id="{D3122177-EC24-1B44-4A39-2136893F8890}"/>
+                <a16:creationId xmlns:a16="http://schemas.microsoft.com/office/drawing/2014/main" id="{5F9AEAF3-269C-4450-9F05-6B1C179C3663}"/>
               </a:ext>
             </a:extLst>
           </p:cNvPr>
@@ -16972,8 +16972,8 @@
         </p:nvSpPr>
         <p:spPr>
           <a:xfrm>
-            <a:off x="761608" y="2457096"/>
-            <a:ext cx="5328687" cy="2084490"/>
+            <a:off x="733082" y="2428844"/>
+            <a:ext cx="5385739" cy="2119523"/>
           </a:xfrm>
         </p:spPr>
         <p:txBody>
@@ -17011,7 +17011,7 @@
           <p:cNvPr id="9" name="kpi_label_1">
             <a:extLst>
               <a:ext uri="{FF2B5EF4-FFF2-40B4-BE49-F238E27FC236}">
-                <a16:creationId xmlns:a16="http://schemas.microsoft.com/office/drawing/2014/main" id="{F74ECB56-5079-3C68-498B-B4ADC46B4472}"/>
+                <a16:creationId xmlns:a16="http://schemas.microsoft.com/office/drawing/2014/main" id="{54A1A859-1154-6910-7053-25D8460062F3}"/>
               </a:ext>
             </a:extLst>
           </p:cNvPr>
@@ -17024,8 +17024,8 @@
         </p:nvSpPr>
         <p:spPr>
           <a:xfrm>
-            <a:off x="761608" y="4608828"/>
-            <a:ext cx="5328687" cy="1210349"/>
+            <a:off x="733082" y="4616739"/>
+            <a:ext cx="5385739" cy="1230691"/>
           </a:xfrm>
           <a:prstGeom prst="rect">
             <a:avLst/>
@@ -17042,7 +17042,7 @@
               </a:spcBef>
               <a:buFontTx/>
               <a:buNone/>
-              <a:defRPr sz="1800"/>
+              <a:defRPr sz="2000"/>
             </a:lvl1pPr>
           </a:lstStyle>
           <a:p>
@@ -17059,7 +17059,7 @@
           <p:cNvPr id="10" name="quote">
             <a:extLst>
               <a:ext uri="{FF2B5EF4-FFF2-40B4-BE49-F238E27FC236}">
-                <a16:creationId xmlns:a16="http://schemas.microsoft.com/office/drawing/2014/main" id="{F60D68FD-5693-9212-76B8-C38683659BC0}"/>
+                <a16:creationId xmlns:a16="http://schemas.microsoft.com/office/drawing/2014/main" id="{6969E228-C125-732D-779D-686C729B8FFF}"/>
               </a:ext>
             </a:extLst>
           </p:cNvPr>
@@ -17072,8 +17072,8 @@
         </p:nvSpPr>
         <p:spPr>
           <a:xfrm>
-            <a:off x="761608" y="2457096"/>
-            <a:ext cx="5328687" cy="2622422"/>
+            <a:off x="733082" y="2428844"/>
+            <a:ext cx="5385739" cy="2666497"/>
           </a:xfrm>
           <a:prstGeom prst="rect">
             <a:avLst/>
@@ -17090,7 +17090,7 @@
               </a:spcBef>
               <a:buFontTx/>
               <a:buNone/>
-              <a:defRPr sz="2400" i="1">
+              <a:defRPr sz="2000" i="1">
                 <a:latin typeface="+mj-lt"/>
               </a:defRPr>
             </a:lvl1pPr>
@@ -17109,7 +17109,7 @@
           <p:cNvPr id="11" name="attribution">
             <a:extLst>
               <a:ext uri="{FF2B5EF4-FFF2-40B4-BE49-F238E27FC236}">
-                <a16:creationId xmlns:a16="http://schemas.microsoft.com/office/drawing/2014/main" id="{7EA60CAE-8FC6-A95A-5888-512E0EBA43BF}"/>
+                <a16:creationId xmlns:a16="http://schemas.microsoft.com/office/drawing/2014/main" id="{5D564200-90EF-C546-1CD4-EF6AC5B4D6B5}"/>
               </a:ext>
             </a:extLst>
           </p:cNvPr>
@@ -17122,8 +17122,8 @@
         </p:nvSpPr>
         <p:spPr>
           <a:xfrm>
-            <a:off x="761608" y="5146760"/>
-            <a:ext cx="5328687" cy="672416"/>
+            <a:off x="733082" y="5163713"/>
+            <a:ext cx="5385739" cy="683717"/>
           </a:xfrm>
           <a:prstGeom prst="rect">
             <a:avLst/>
@@ -17140,7 +17140,7 @@
               </a:spcBef>
               <a:buFontTx/>
               <a:buNone/>
-              <a:defRPr sz="1400"/>
+              <a:defRPr sz="2000"/>
             </a:lvl1pPr>
           </a:lstStyle>
           <a:p>
@@ -17157,7 +17157,7 @@
           <p:cNvPr id="12" name="item_1_title">
             <a:extLst>
               <a:ext uri="{FF2B5EF4-FFF2-40B4-BE49-F238E27FC236}">
-                <a16:creationId xmlns:a16="http://schemas.microsoft.com/office/drawing/2014/main" id="{EB40ADA7-44E3-E3B6-202A-CB007C91AA0B}"/>
+                <a16:creationId xmlns:a16="http://schemas.microsoft.com/office/drawing/2014/main" id="{98544B10-46CD-0BB5-2CE3-339DE37C0251}"/>
               </a:ext>
             </a:extLst>
           </p:cNvPr>
@@ -17188,7 +17188,7 @@
               </a:spcBef>
               <a:buFontTx/>
               <a:buNone/>
-              <a:defRPr sz="2200" b="1">
+              <a:defRPr sz="2000" b="1">
                 <a:solidFill>
                   <a:schemeClr val="accent1">
                     <a:lumMod val="95000"/>
@@ -17212,7 +17212,7 @@
           <p:cNvPr id="13" name="item_1">
             <a:extLst>
               <a:ext uri="{FF2B5EF4-FFF2-40B4-BE49-F238E27FC236}">
-                <a16:creationId xmlns:a16="http://schemas.microsoft.com/office/drawing/2014/main" id="{A8E9AB26-28AF-C499-325E-383633A0BF4A}"/>
+                <a16:creationId xmlns:a16="http://schemas.microsoft.com/office/drawing/2014/main" id="{918D2851-8A11-4389-36C5-89ECFE42C7E9}"/>
               </a:ext>
             </a:extLst>
           </p:cNvPr>
@@ -17260,7 +17260,7 @@
           <p:cNvPr id="14" name="source">
             <a:extLst>
               <a:ext uri="{FF2B5EF4-FFF2-40B4-BE49-F238E27FC236}">
-                <a16:creationId xmlns:a16="http://schemas.microsoft.com/office/drawing/2014/main" id="{1271CDC6-15BF-375C-AA53-CD6F85E2D677}"/>
+                <a16:creationId xmlns:a16="http://schemas.microsoft.com/office/drawing/2014/main" id="{9AC6E76A-D484-951D-732F-CE5DA3888BA3}"/>
               </a:ext>
             </a:extLst>
           </p:cNvPr>
@@ -17317,7 +17317,7 @@
     </p:spTree>
     <p:extLst>
       <p:ext uri="{BB962C8B-B14F-4D97-AF65-F5344CB8AC3E}">
-        <p14:creationId xmlns:p14="http://schemas.microsoft.com/office/powerpoint/2010/main" val="1570433981"/>
+        <p14:creationId xmlns:p14="http://schemas.microsoft.com/office/powerpoint/2010/main" val="3551116666"/>
       </p:ext>
     </p:extLst>
   </p:cSld>
@@ -17467,7 +17467,7 @@
             </a:lvl1pPr>
           </a:lstStyle>
           <a:p>
-            <a:fld id="{69A66F8C-F25E-4B2E-B2E2-0A218D443514}" type="datetimeFigureOut">
+            <a:fld id="{90A7BBED-E6FA-40A6-8A51-59E4B08CD8B8}" type="datetimeFigureOut">
               <a:rPr lang="en-US" smtClean="0"/>
               <a:t>10/3/2026</a:t>
             </a:fld>
@@ -17512,7 +17512,7 @@
             </a:lvl1pPr>
           </a:lstStyle>
           <a:p>
-            <a:fld id="{369B3908-4DF9-450B-8F99-2A754569D7A5}" type="slidenum">
+            <a:fld id="{4F0FE17B-5063-4433-97D2-96EAD825CE6E}" type="slidenum">
               <a:rPr lang="en-US" smtClean="0"/>
               <a:t>‹#›</a:t>
             </a:fld>
@@ -17632,7 +17632,7 @@
           <p:cNvPr id="8" name="item_1_title">
             <a:extLst>
               <a:ext uri="{FF2B5EF4-FFF2-40B4-BE49-F238E27FC236}">
-                <a16:creationId xmlns:a16="http://schemas.microsoft.com/office/drawing/2014/main" id="{E97B83E0-7614-F050-C5DB-F10B68CFA0EE}"/>
+                <a16:creationId xmlns:a16="http://schemas.microsoft.com/office/drawing/2014/main" id="{547B8D95-E327-3549-54E5-2B1B418FE364}"/>
               </a:ext>
             </a:extLst>
           </p:cNvPr>
@@ -17645,8 +17645,8 @@
         </p:nvSpPr>
         <p:spPr>
           <a:xfrm>
-            <a:off x="761608" y="2457097"/>
-            <a:ext cx="3099843" cy="988847"/>
+            <a:off x="733082" y="2428843"/>
+            <a:ext cx="3156895" cy="1005466"/>
           </a:xfrm>
         </p:spPr>
         <p:txBody>
@@ -17660,7 +17660,7 @@
               </a:spcBef>
               <a:buFontTx/>
               <a:buNone/>
-              <a:defRPr sz="2200" b="1">
+              <a:defRPr sz="2000" b="1">
                 <a:solidFill>
                   <a:schemeClr val="accent1">
                     <a:lumMod val="95000"/>
@@ -17684,7 +17684,7 @@
           <p:cNvPr id="9" name="item_1">
             <a:extLst>
               <a:ext uri="{FF2B5EF4-FFF2-40B4-BE49-F238E27FC236}">
-                <a16:creationId xmlns:a16="http://schemas.microsoft.com/office/drawing/2014/main" id="{A25162D9-174D-EEED-B0A9-4458A4C05B15}"/>
+                <a16:creationId xmlns:a16="http://schemas.microsoft.com/office/drawing/2014/main" id="{215A2322-69AA-4FEF-B640-1AB0E54B4E24}"/>
               </a:ext>
             </a:extLst>
           </p:cNvPr>
@@ -17697,8 +17697,8 @@
         </p:nvSpPr>
         <p:spPr>
           <a:xfrm>
-            <a:off x="761608" y="3445944"/>
-            <a:ext cx="3099843" cy="2373233"/>
+            <a:off x="733082" y="3434310"/>
+            <a:ext cx="3156895" cy="2413119"/>
           </a:xfrm>
           <a:prstGeom prst="rect">
             <a:avLst/>
@@ -17732,7 +17732,7 @@
           <p:cNvPr id="10" name="item_2_title">
             <a:extLst>
               <a:ext uri="{FF2B5EF4-FFF2-40B4-BE49-F238E27FC236}">
-                <a16:creationId xmlns:a16="http://schemas.microsoft.com/office/drawing/2014/main" id="{AC053A44-E683-3E29-348F-82C070614DB8}"/>
+                <a16:creationId xmlns:a16="http://schemas.microsoft.com/office/drawing/2014/main" id="{0686A301-25A8-2AB9-0046-AEAEF73F0B5C}"/>
               </a:ext>
             </a:extLst>
           </p:cNvPr>
@@ -17745,8 +17745,8 @@
         </p:nvSpPr>
         <p:spPr>
           <a:xfrm>
-            <a:off x="4546079" y="2457097"/>
-            <a:ext cx="3099843" cy="988847"/>
+            <a:off x="4517553" y="2428843"/>
+            <a:ext cx="3156895" cy="1005466"/>
           </a:xfrm>
           <a:prstGeom prst="rect">
             <a:avLst/>
@@ -17763,7 +17763,7 @@
               </a:spcBef>
               <a:buFontTx/>
               <a:buNone/>
-              <a:defRPr sz="2200" b="1">
+              <a:defRPr sz="2000" b="1">
                 <a:solidFill>
                   <a:schemeClr val="accent1">
                     <a:lumMod val="95000"/>
@@ -17787,7 +17787,7 @@
           <p:cNvPr id="11" name="item_2">
             <a:extLst>
               <a:ext uri="{FF2B5EF4-FFF2-40B4-BE49-F238E27FC236}">
-                <a16:creationId xmlns:a16="http://schemas.microsoft.com/office/drawing/2014/main" id="{57CE6BB1-908E-EAA1-BA4B-0978C04352B1}"/>
+                <a16:creationId xmlns:a16="http://schemas.microsoft.com/office/drawing/2014/main" id="{4B32D676-957F-0435-4AB0-4ED1B04AF1F8}"/>
               </a:ext>
             </a:extLst>
           </p:cNvPr>
@@ -17800,8 +17800,8 @@
         </p:nvSpPr>
         <p:spPr>
           <a:xfrm>
-            <a:off x="4546079" y="3445944"/>
-            <a:ext cx="3099843" cy="2373233"/>
+            <a:off x="4517553" y="3434310"/>
+            <a:ext cx="3156895" cy="2413119"/>
           </a:xfrm>
           <a:prstGeom prst="rect">
             <a:avLst/>
@@ -17835,7 +17835,7 @@
           <p:cNvPr id="12" name="item_3_title">
             <a:extLst>
               <a:ext uri="{FF2B5EF4-FFF2-40B4-BE49-F238E27FC236}">
-                <a16:creationId xmlns:a16="http://schemas.microsoft.com/office/drawing/2014/main" id="{0FE6ED75-8389-4FFE-9184-8B25D7A5301E}"/>
+                <a16:creationId xmlns:a16="http://schemas.microsoft.com/office/drawing/2014/main" id="{E2122830-0B8A-4C17-7B56-3EEC6237CD4B}"/>
               </a:ext>
             </a:extLst>
           </p:cNvPr>
@@ -17848,8 +17848,8 @@
         </p:nvSpPr>
         <p:spPr>
           <a:xfrm>
-            <a:off x="8330549" y="2457097"/>
-            <a:ext cx="3099843" cy="988847"/>
+            <a:off x="8302023" y="2428843"/>
+            <a:ext cx="3156895" cy="1005466"/>
           </a:xfrm>
           <a:prstGeom prst="rect">
             <a:avLst/>
@@ -17866,7 +17866,7 @@
               </a:spcBef>
               <a:buFontTx/>
               <a:buNone/>
-              <a:defRPr sz="2200" b="1">
+              <a:defRPr sz="2000" b="1">
                 <a:solidFill>
                   <a:schemeClr val="accent1">
                     <a:lumMod val="95000"/>
@@ -17890,7 +17890,7 @@
           <p:cNvPr id="13" name="item_3">
             <a:extLst>
               <a:ext uri="{FF2B5EF4-FFF2-40B4-BE49-F238E27FC236}">
-                <a16:creationId xmlns:a16="http://schemas.microsoft.com/office/drawing/2014/main" id="{E22F1D78-7490-7A96-1753-F3F808CAFE93}"/>
+                <a16:creationId xmlns:a16="http://schemas.microsoft.com/office/drawing/2014/main" id="{62C4FFA7-B0FC-2F8F-6A4B-8A5D22F3BF2B}"/>
               </a:ext>
             </a:extLst>
           </p:cNvPr>
@@ -17903,8 +17903,8 @@
         </p:nvSpPr>
         <p:spPr>
           <a:xfrm>
-            <a:off x="8330549" y="3445944"/>
-            <a:ext cx="3099843" cy="2373233"/>
+            <a:off x="8302023" y="3434310"/>
+            <a:ext cx="3156895" cy="2413119"/>
           </a:xfrm>
           <a:prstGeom prst="rect">
             <a:avLst/>
@@ -17938,7 +17938,7 @@
           <p:cNvPr id="14" name="source">
             <a:extLst>
               <a:ext uri="{FF2B5EF4-FFF2-40B4-BE49-F238E27FC236}">
-                <a16:creationId xmlns:a16="http://schemas.microsoft.com/office/drawing/2014/main" id="{0E3E6908-292F-EA83-58CB-7240559B11A1}"/>
+                <a16:creationId xmlns:a16="http://schemas.microsoft.com/office/drawing/2014/main" id="{3CF7F627-354E-9F64-1B3D-DFADB793A692}"/>
               </a:ext>
             </a:extLst>
           </p:cNvPr>
@@ -17995,7 +17995,7 @@
     </p:spTree>
     <p:extLst>
       <p:ext uri="{BB962C8B-B14F-4D97-AF65-F5344CB8AC3E}">
-        <p14:creationId xmlns:p14="http://schemas.microsoft.com/office/powerpoint/2010/main" val="1688749301"/>
+        <p14:creationId xmlns:p14="http://schemas.microsoft.com/office/powerpoint/2010/main" val="510732548"/>
       </p:ext>
     </p:extLst>
   </p:cSld>
@@ -18145,7 +18145,7 @@
             </a:lvl1pPr>
           </a:lstStyle>
           <a:p>
-            <a:fld id="{69A66F8C-F25E-4B2E-B2E2-0A218D443514}" type="datetimeFigureOut">
+            <a:fld id="{90A7BBED-E6FA-40A6-8A51-59E4B08CD8B8}" type="datetimeFigureOut">
               <a:rPr lang="en-US" smtClean="0"/>
               <a:t>10/3/2026</a:t>
             </a:fld>
@@ -18190,7 +18190,7 @@
             </a:lvl1pPr>
           </a:lstStyle>
           <a:p>
-            <a:fld id="{369B3908-4DF9-450B-8F99-2A754569D7A5}" type="slidenum">
+            <a:fld id="{4F0FE17B-5063-4433-97D2-96EAD825CE6E}" type="slidenum">
               <a:rPr lang="en-US" smtClean="0"/>
               <a:t>‹#›</a:t>
             </a:fld>
@@ -18310,7 +18310,7 @@
           <p:cNvPr id="8" name="marker_1">
             <a:extLst>
               <a:ext uri="{FF2B5EF4-FFF2-40B4-BE49-F238E27FC236}">
-                <a16:creationId xmlns:a16="http://schemas.microsoft.com/office/drawing/2014/main" id="{8D7B9754-D1F9-00F8-B7D7-4092328A5AA7}"/>
+                <a16:creationId xmlns:a16="http://schemas.microsoft.com/office/drawing/2014/main" id="{5BDECB51-22FF-6CE1-0C86-357FB34B9B40}"/>
               </a:ext>
             </a:extLst>
           </p:cNvPr>
@@ -18323,7 +18323,7 @@
         </p:nvSpPr>
         <p:spPr>
           <a:xfrm>
-            <a:off x="761607" y="2457097"/>
+            <a:off x="733081" y="2428844"/>
             <a:ext cx="627576" cy="621561"/>
           </a:xfrm>
           <a:prstGeom prst="ellipse">
@@ -18346,7 +18346,7 @@
               </a:spcBef>
               <a:buFontTx/>
               <a:buNone/>
-              <a:defRPr sz="2400" b="1">
+              <a:defRPr sz="2000" b="1">
                 <a:solidFill>
                   <a:schemeClr val="bg1"/>
                 </a:solidFill>
@@ -18368,7 +18368,7 @@
           <p:cNvPr id="9" name="item_1_title">
             <a:extLst>
               <a:ext uri="{FF2B5EF4-FFF2-40B4-BE49-F238E27FC236}">
-                <a16:creationId xmlns:a16="http://schemas.microsoft.com/office/drawing/2014/main" id="{C7FE1A88-5CAD-2630-3C2C-DF7DD1E74B82}"/>
+                <a16:creationId xmlns:a16="http://schemas.microsoft.com/office/drawing/2014/main" id="{F60DE006-9559-4C9C-8165-A85EC5D30C5E}"/>
               </a:ext>
             </a:extLst>
           </p:cNvPr>
@@ -18381,8 +18381,8 @@
         </p:nvSpPr>
         <p:spPr>
           <a:xfrm>
-            <a:off x="1503287" y="2457096"/>
-            <a:ext cx="9927104" cy="394708"/>
+            <a:off x="1474761" y="2428844"/>
+            <a:ext cx="9984156" cy="411327"/>
           </a:xfrm>
           <a:prstGeom prst="rect">
             <a:avLst/>
@@ -18399,7 +18399,7 @@
               </a:spcBef>
               <a:buFontTx/>
               <a:buNone/>
-              <a:defRPr sz="2200" b="1">
+              <a:defRPr sz="2000" b="1">
                 <a:solidFill>
                   <a:schemeClr val="accent1">
                     <a:lumMod val="95000"/>
@@ -18423,7 +18423,7 @@
           <p:cNvPr id="10" name="item_1">
             <a:extLst>
               <a:ext uri="{FF2B5EF4-FFF2-40B4-BE49-F238E27FC236}">
-                <a16:creationId xmlns:a16="http://schemas.microsoft.com/office/drawing/2014/main" id="{670671AC-8274-5D3D-9BFF-4FC3C5EE5D5C}"/>
+                <a16:creationId xmlns:a16="http://schemas.microsoft.com/office/drawing/2014/main" id="{EE93D087-E0BD-3E73-E37D-8FAA5835059C}"/>
               </a:ext>
             </a:extLst>
           </p:cNvPr>
@@ -18436,8 +18436,8 @@
         </p:nvSpPr>
         <p:spPr>
           <a:xfrm>
-            <a:off x="1503287" y="2851805"/>
-            <a:ext cx="9927104" cy="947299"/>
+            <a:off x="1474761" y="2840171"/>
+            <a:ext cx="9984156" cy="987185"/>
           </a:xfrm>
           <a:prstGeom prst="rect">
             <a:avLst/>
@@ -18471,7 +18471,7 @@
           <p:cNvPr id="11" name="marker_2">
             <a:extLst>
               <a:ext uri="{FF2B5EF4-FFF2-40B4-BE49-F238E27FC236}">
-                <a16:creationId xmlns:a16="http://schemas.microsoft.com/office/drawing/2014/main" id="{5010D5B1-31C0-AB29-1E97-C6F7E42BB973}"/>
+                <a16:creationId xmlns:a16="http://schemas.microsoft.com/office/drawing/2014/main" id="{A5586212-7377-798A-06F6-80115D5F4E21}"/>
               </a:ext>
             </a:extLst>
           </p:cNvPr>
@@ -18484,7 +18484,7 @@
         </p:nvSpPr>
         <p:spPr>
           <a:xfrm>
-            <a:off x="761607" y="4477170"/>
+            <a:off x="733081" y="4448917"/>
             <a:ext cx="627576" cy="621561"/>
           </a:xfrm>
           <a:prstGeom prst="ellipse">
@@ -18507,7 +18507,7 @@
               </a:spcBef>
               <a:buFontTx/>
               <a:buNone/>
-              <a:defRPr sz="2400" b="1">
+              <a:defRPr sz="2000" b="1">
                 <a:solidFill>
                   <a:schemeClr val="bg1"/>
                 </a:solidFill>
@@ -18529,7 +18529,7 @@
           <p:cNvPr id="12" name="item_2_title">
             <a:extLst>
               <a:ext uri="{FF2B5EF4-FFF2-40B4-BE49-F238E27FC236}">
-                <a16:creationId xmlns:a16="http://schemas.microsoft.com/office/drawing/2014/main" id="{8B2BF356-9B31-CCDF-05F7-BD6F4A3320D3}"/>
+                <a16:creationId xmlns:a16="http://schemas.microsoft.com/office/drawing/2014/main" id="{0CCBD6B7-BD3F-6FDB-8177-C55671E9F960}"/>
               </a:ext>
             </a:extLst>
           </p:cNvPr>
@@ -18542,8 +18542,8 @@
         </p:nvSpPr>
         <p:spPr>
           <a:xfrm>
-            <a:off x="1503287" y="4477169"/>
-            <a:ext cx="9927104" cy="394708"/>
+            <a:off x="1474761" y="4448917"/>
+            <a:ext cx="9984156" cy="411327"/>
           </a:xfrm>
           <a:prstGeom prst="rect">
             <a:avLst/>
@@ -18560,7 +18560,7 @@
               </a:spcBef>
               <a:buFontTx/>
               <a:buNone/>
-              <a:defRPr sz="2200" b="1">
+              <a:defRPr sz="2000" b="1">
                 <a:solidFill>
                   <a:schemeClr val="accent1">
                     <a:lumMod val="95000"/>
@@ -18584,7 +18584,7 @@
           <p:cNvPr id="13" name="item_2">
             <a:extLst>
               <a:ext uri="{FF2B5EF4-FFF2-40B4-BE49-F238E27FC236}">
-                <a16:creationId xmlns:a16="http://schemas.microsoft.com/office/drawing/2014/main" id="{D3FD65FB-9C4C-9651-58BE-342113872877}"/>
+                <a16:creationId xmlns:a16="http://schemas.microsoft.com/office/drawing/2014/main" id="{3FCFDC7E-5A6F-19BD-BBC4-05BBD0AD0EF1}"/>
               </a:ext>
             </a:extLst>
           </p:cNvPr>
@@ -18597,8 +18597,8 @@
         </p:nvSpPr>
         <p:spPr>
           <a:xfrm>
-            <a:off x="1503287" y="4871878"/>
-            <a:ext cx="9927104" cy="947299"/>
+            <a:off x="1474761" y="4860245"/>
+            <a:ext cx="9984156" cy="987185"/>
           </a:xfrm>
           <a:prstGeom prst="rect">
             <a:avLst/>
@@ -18632,7 +18632,7 @@
           <p:cNvPr id="14" name="source">
             <a:extLst>
               <a:ext uri="{FF2B5EF4-FFF2-40B4-BE49-F238E27FC236}">
-                <a16:creationId xmlns:a16="http://schemas.microsoft.com/office/drawing/2014/main" id="{29184550-4479-4BE8-00D4-0150167F6571}"/>
+                <a16:creationId xmlns:a16="http://schemas.microsoft.com/office/drawing/2014/main" id="{C3D9EDDB-A5F0-6C6D-0259-0AB2D1EE17BF}"/>
               </a:ext>
             </a:extLst>
           </p:cNvPr>
@@ -18689,7 +18689,7 @@
     </p:spTree>
     <p:extLst>
       <p:ext uri="{BB962C8B-B14F-4D97-AF65-F5344CB8AC3E}">
-        <p14:creationId xmlns:p14="http://schemas.microsoft.com/office/powerpoint/2010/main" val="3267249433"/>
+        <p14:creationId xmlns:p14="http://schemas.microsoft.com/office/powerpoint/2010/main" val="2121778499"/>
       </p:ext>
     </p:extLst>
   </p:cSld>
@@ -18839,7 +18839,7 @@
             </a:lvl1pPr>
           </a:lstStyle>
           <a:p>
-            <a:fld id="{69A66F8C-F25E-4B2E-B2E2-0A218D443514}" type="datetimeFigureOut">
+            <a:fld id="{90A7BBED-E6FA-40A6-8A51-59E4B08CD8B8}" type="datetimeFigureOut">
               <a:rPr lang="en-US" smtClean="0"/>
               <a:t>10/3/2026</a:t>
             </a:fld>
@@ -18884,7 +18884,7 @@
             </a:lvl1pPr>
           </a:lstStyle>
           <a:p>
-            <a:fld id="{369B3908-4DF9-450B-8F99-2A754569D7A5}" type="slidenum">
+            <a:fld id="{4F0FE17B-5063-4433-97D2-96EAD825CE6E}" type="slidenum">
               <a:rPr lang="en-US" smtClean="0"/>
               <a:t>‹#›</a:t>
             </a:fld>
@@ -19004,7 +19004,7 @@
           <p:cNvPr id="8" name="kpi_value_1">
             <a:extLst>
               <a:ext uri="{FF2B5EF4-FFF2-40B4-BE49-F238E27FC236}">
-                <a16:creationId xmlns:a16="http://schemas.microsoft.com/office/drawing/2014/main" id="{718ED6E0-D75F-9C44-D1A3-227578AC823C}"/>
+                <a16:creationId xmlns:a16="http://schemas.microsoft.com/office/drawing/2014/main" id="{5D6C4614-7AC9-D51C-5B39-E882ECC06991}"/>
               </a:ext>
             </a:extLst>
           </p:cNvPr>
@@ -19017,8 +19017,8 @@
         </p:nvSpPr>
         <p:spPr>
           <a:xfrm>
-            <a:off x="761608" y="2457096"/>
-            <a:ext cx="5328687" cy="2084490"/>
+            <a:off x="733082" y="2428844"/>
+            <a:ext cx="5385739" cy="2119523"/>
           </a:xfrm>
         </p:spPr>
         <p:txBody>
@@ -19056,7 +19056,7 @@
           <p:cNvPr id="9" name="kpi_label_1">
             <a:extLst>
               <a:ext uri="{FF2B5EF4-FFF2-40B4-BE49-F238E27FC236}">
-                <a16:creationId xmlns:a16="http://schemas.microsoft.com/office/drawing/2014/main" id="{982E012F-7A45-07FD-FA3B-7D2555FEE56F}"/>
+                <a16:creationId xmlns:a16="http://schemas.microsoft.com/office/drawing/2014/main" id="{B761510F-0B83-4A55-771F-2C7023D3C84B}"/>
               </a:ext>
             </a:extLst>
           </p:cNvPr>
@@ -19069,8 +19069,8 @@
         </p:nvSpPr>
         <p:spPr>
           <a:xfrm>
-            <a:off x="761608" y="4608828"/>
-            <a:ext cx="5328687" cy="1210349"/>
+            <a:off x="733082" y="4616739"/>
+            <a:ext cx="5385739" cy="1230691"/>
           </a:xfrm>
           <a:prstGeom prst="rect">
             <a:avLst/>
@@ -19087,7 +19087,7 @@
               </a:spcBef>
               <a:buFontTx/>
               <a:buNone/>
-              <a:defRPr sz="1800"/>
+              <a:defRPr sz="2000"/>
             </a:lvl1pPr>
           </a:lstStyle>
           <a:p>
@@ -19104,7 +19104,7 @@
           <p:cNvPr id="10" name="quote">
             <a:extLst>
               <a:ext uri="{FF2B5EF4-FFF2-40B4-BE49-F238E27FC236}">
-                <a16:creationId xmlns:a16="http://schemas.microsoft.com/office/drawing/2014/main" id="{1BD311D8-9F7F-E402-2D7E-594B34E8DF9C}"/>
+                <a16:creationId xmlns:a16="http://schemas.microsoft.com/office/drawing/2014/main" id="{FA688083-C025-8C8F-EF94-06DC75D186D3}"/>
               </a:ext>
             </a:extLst>
           </p:cNvPr>
@@ -19117,8 +19117,8 @@
         </p:nvSpPr>
         <p:spPr>
           <a:xfrm>
-            <a:off x="761608" y="2457096"/>
-            <a:ext cx="5328687" cy="2622422"/>
+            <a:off x="733082" y="2428844"/>
+            <a:ext cx="5385739" cy="2666497"/>
           </a:xfrm>
           <a:prstGeom prst="rect">
             <a:avLst/>
@@ -19135,7 +19135,7 @@
               </a:spcBef>
               <a:buFontTx/>
               <a:buNone/>
-              <a:defRPr sz="2400" i="1">
+              <a:defRPr sz="2000" i="1">
                 <a:latin typeface="+mj-lt"/>
               </a:defRPr>
             </a:lvl1pPr>
@@ -19154,7 +19154,7 @@
           <p:cNvPr id="11" name="attribution">
             <a:extLst>
               <a:ext uri="{FF2B5EF4-FFF2-40B4-BE49-F238E27FC236}">
-                <a16:creationId xmlns:a16="http://schemas.microsoft.com/office/drawing/2014/main" id="{CF52853B-AB33-64FA-25A5-01D2D62A9899}"/>
+                <a16:creationId xmlns:a16="http://schemas.microsoft.com/office/drawing/2014/main" id="{3BFDE860-5FBD-CF09-B4F4-0C1B5B79156F}"/>
               </a:ext>
             </a:extLst>
           </p:cNvPr>
@@ -19167,8 +19167,8 @@
         </p:nvSpPr>
         <p:spPr>
           <a:xfrm>
-            <a:off x="761608" y="5146760"/>
-            <a:ext cx="5328687" cy="672416"/>
+            <a:off x="733082" y="5163713"/>
+            <a:ext cx="5385739" cy="683717"/>
           </a:xfrm>
           <a:prstGeom prst="rect">
             <a:avLst/>
@@ -19185,7 +19185,7 @@
               </a:spcBef>
               <a:buFontTx/>
               <a:buNone/>
-              <a:defRPr sz="1400"/>
+              <a:defRPr sz="2000"/>
             </a:lvl1pPr>
           </a:lstStyle>
           <a:p>
@@ -19202,7 +19202,7 @@
           <p:cNvPr id="12" name="item_1_title">
             <a:extLst>
               <a:ext uri="{FF2B5EF4-FFF2-40B4-BE49-F238E27FC236}">
-                <a16:creationId xmlns:a16="http://schemas.microsoft.com/office/drawing/2014/main" id="{4673EB80-6559-AED1-7F44-C289F24FB2B1}"/>
+                <a16:creationId xmlns:a16="http://schemas.microsoft.com/office/drawing/2014/main" id="{7C724B6B-B567-9DFA-ED71-3C1F1DAC36F3}"/>
               </a:ext>
             </a:extLst>
           </p:cNvPr>
@@ -19233,7 +19233,7 @@
               </a:spcBef>
               <a:buFontTx/>
               <a:buNone/>
-              <a:defRPr sz="2200" b="1">
+              <a:defRPr sz="2000" b="1">
                 <a:solidFill>
                   <a:schemeClr val="accent1">
                     <a:lumMod val="95000"/>
@@ -19257,7 +19257,7 @@
           <p:cNvPr id="13" name="item_1">
             <a:extLst>
               <a:ext uri="{FF2B5EF4-FFF2-40B4-BE49-F238E27FC236}">
-                <a16:creationId xmlns:a16="http://schemas.microsoft.com/office/drawing/2014/main" id="{715EC956-D2CA-70B9-7FDA-31B593B07DFA}"/>
+                <a16:creationId xmlns:a16="http://schemas.microsoft.com/office/drawing/2014/main" id="{E9176F30-FF22-9248-0E64-13F7EB302944}"/>
               </a:ext>
             </a:extLst>
           </p:cNvPr>
@@ -19305,7 +19305,7 @@
           <p:cNvPr id="14" name="source">
             <a:extLst>
               <a:ext uri="{FF2B5EF4-FFF2-40B4-BE49-F238E27FC236}">
-                <a16:creationId xmlns:a16="http://schemas.microsoft.com/office/drawing/2014/main" id="{3400C9C1-B436-D51C-15EB-0879D2873161}"/>
+                <a16:creationId xmlns:a16="http://schemas.microsoft.com/office/drawing/2014/main" id="{6F4AFD07-D26A-740D-F6B0-A4474BDA2198}"/>
               </a:ext>
             </a:extLst>
           </p:cNvPr>
@@ -19362,7 +19362,7 @@
     </p:spTree>
     <p:extLst>
       <p:ext uri="{BB962C8B-B14F-4D97-AF65-F5344CB8AC3E}">
-        <p14:creationId xmlns:p14="http://schemas.microsoft.com/office/powerpoint/2010/main" val="3990610559"/>
+        <p14:creationId xmlns:p14="http://schemas.microsoft.com/office/powerpoint/2010/main" val="2312588192"/>
       </p:ext>
     </p:extLst>
   </p:cSld>
@@ -19512,7 +19512,7 @@
             </a:lvl1pPr>
           </a:lstStyle>
           <a:p>
-            <a:fld id="{69A66F8C-F25E-4B2E-B2E2-0A218D443514}" type="datetimeFigureOut">
+            <a:fld id="{90A7BBED-E6FA-40A6-8A51-59E4B08CD8B8}" type="datetimeFigureOut">
               <a:rPr lang="en-US" smtClean="0"/>
               <a:t>10/3/2026</a:t>
             </a:fld>
@@ -19557,7 +19557,7 @@
             </a:lvl1pPr>
           </a:lstStyle>
           <a:p>
-            <a:fld id="{369B3908-4DF9-450B-8F99-2A754569D7A5}" type="slidenum">
+            <a:fld id="{4F0FE17B-5063-4433-97D2-96EAD825CE6E}" type="slidenum">
               <a:rPr lang="en-US" smtClean="0"/>
               <a:t>‹#›</a:t>
             </a:fld>
@@ -19677,7 +19677,7 @@
           <p:cNvPr id="8" name="marker_1">
             <a:extLst>
               <a:ext uri="{FF2B5EF4-FFF2-40B4-BE49-F238E27FC236}">
-                <a16:creationId xmlns:a16="http://schemas.microsoft.com/office/drawing/2014/main" id="{D9FF4928-DEAF-3A15-F659-68D3F4756AFE}"/>
+                <a16:creationId xmlns:a16="http://schemas.microsoft.com/office/drawing/2014/main" id="{C2E3D9E9-301F-9E63-3289-AAAAF92003EE}"/>
               </a:ext>
             </a:extLst>
           </p:cNvPr>
@@ -19713,7 +19713,7 @@
               </a:spcBef>
               <a:buFontTx/>
               <a:buNone/>
-              <a:defRPr sz="2400" b="1">
+              <a:defRPr sz="2000" b="1">
                 <a:solidFill>
                   <a:schemeClr val="bg1"/>
                 </a:solidFill>
@@ -19735,7 +19735,7 @@
           <p:cNvPr id="9" name="item_1">
             <a:extLst>
               <a:ext uri="{FF2B5EF4-FFF2-40B4-BE49-F238E27FC236}">
-                <a16:creationId xmlns:a16="http://schemas.microsoft.com/office/drawing/2014/main" id="{132B4E3C-69EB-04B4-5AE9-BA3A389E1F4B}"/>
+                <a16:creationId xmlns:a16="http://schemas.microsoft.com/office/drawing/2014/main" id="{005AC9F8-84C3-6D74-A4B0-F2CEFFDA6362}"/>
               </a:ext>
             </a:extLst>
           </p:cNvPr>
@@ -19783,7 +19783,7 @@
           <p:cNvPr id="10" name="marker_2">
             <a:extLst>
               <a:ext uri="{FF2B5EF4-FFF2-40B4-BE49-F238E27FC236}">
-                <a16:creationId xmlns:a16="http://schemas.microsoft.com/office/drawing/2014/main" id="{FD4DD142-C2F7-7F5C-6B12-B3D67147D070}"/>
+                <a16:creationId xmlns:a16="http://schemas.microsoft.com/office/drawing/2014/main" id="{CF778F3E-7FAE-E374-D978-26975BDFA5F2}"/>
               </a:ext>
             </a:extLst>
           </p:cNvPr>
@@ -19819,7 +19819,7 @@
               </a:spcBef>
               <a:buFontTx/>
               <a:buNone/>
-              <a:defRPr sz="2400" b="1">
+              <a:defRPr sz="2000" b="1">
                 <a:solidFill>
                   <a:schemeClr val="bg1"/>
                 </a:solidFill>
@@ -19841,7 +19841,7 @@
           <p:cNvPr id="11" name="item_2">
             <a:extLst>
               <a:ext uri="{FF2B5EF4-FFF2-40B4-BE49-F238E27FC236}">
-                <a16:creationId xmlns:a16="http://schemas.microsoft.com/office/drawing/2014/main" id="{2A4C22BC-DC5D-22DA-1C09-CB2ABDE98A06}"/>
+                <a16:creationId xmlns:a16="http://schemas.microsoft.com/office/drawing/2014/main" id="{612A6343-D96F-37ED-8A16-B9F6ECA40D46}"/>
               </a:ext>
             </a:extLst>
           </p:cNvPr>
@@ -19889,7 +19889,7 @@
           <p:cNvPr id="12" name="marker_3">
             <a:extLst>
               <a:ext uri="{FF2B5EF4-FFF2-40B4-BE49-F238E27FC236}">
-                <a16:creationId xmlns:a16="http://schemas.microsoft.com/office/drawing/2014/main" id="{0C5DFE8E-27E6-A0CB-0E31-705DA4DADCBB}"/>
+                <a16:creationId xmlns:a16="http://schemas.microsoft.com/office/drawing/2014/main" id="{E3E1F391-890A-41BB-61FE-1C80D5DCF467}"/>
               </a:ext>
             </a:extLst>
           </p:cNvPr>
@@ -19925,7 +19925,7 @@
               </a:spcBef>
               <a:buFontTx/>
               <a:buNone/>
-              <a:defRPr sz="2400" b="1">
+              <a:defRPr sz="2000" b="1">
                 <a:solidFill>
                   <a:schemeClr val="bg1"/>
                 </a:solidFill>
@@ -19947,7 +19947,7 @@
           <p:cNvPr id="13" name="item_3">
             <a:extLst>
               <a:ext uri="{FF2B5EF4-FFF2-40B4-BE49-F238E27FC236}">
-                <a16:creationId xmlns:a16="http://schemas.microsoft.com/office/drawing/2014/main" id="{1D7E8AA7-8E86-E6A8-B8EA-7B2B4FCF9E26}"/>
+                <a16:creationId xmlns:a16="http://schemas.microsoft.com/office/drawing/2014/main" id="{7FB6EFA5-82F6-3865-550C-B2E395D34ADD}"/>
               </a:ext>
             </a:extLst>
           </p:cNvPr>
@@ -19995,7 +19995,7 @@
           <p:cNvPr id="14" name="marker_4">
             <a:extLst>
               <a:ext uri="{FF2B5EF4-FFF2-40B4-BE49-F238E27FC236}">
-                <a16:creationId xmlns:a16="http://schemas.microsoft.com/office/drawing/2014/main" id="{70FF3E1F-0227-224F-C854-5FF0E4F8944A}"/>
+                <a16:creationId xmlns:a16="http://schemas.microsoft.com/office/drawing/2014/main" id="{861FD1AE-89DA-6DDA-AE07-48E7AC174D63}"/>
               </a:ext>
             </a:extLst>
           </p:cNvPr>
@@ -20031,7 +20031,7 @@
               </a:spcBef>
               <a:buFontTx/>
               <a:buNone/>
-              <a:defRPr sz="2400" b="1">
+              <a:defRPr sz="2000" b="1">
                 <a:solidFill>
                   <a:schemeClr val="bg1"/>
                 </a:solidFill>
@@ -20053,7 +20053,7 @@
           <p:cNvPr id="15" name="item_4">
             <a:extLst>
               <a:ext uri="{FF2B5EF4-FFF2-40B4-BE49-F238E27FC236}">
-                <a16:creationId xmlns:a16="http://schemas.microsoft.com/office/drawing/2014/main" id="{7208D000-20B2-8567-D282-9E12DC408A2F}"/>
+                <a16:creationId xmlns:a16="http://schemas.microsoft.com/office/drawing/2014/main" id="{846FF7F3-D179-4BC9-3A84-9FD83F4D178E}"/>
               </a:ext>
             </a:extLst>
           </p:cNvPr>
@@ -20101,7 +20101,7 @@
           <p:cNvPr id="16" name="source">
             <a:extLst>
               <a:ext uri="{FF2B5EF4-FFF2-40B4-BE49-F238E27FC236}">
-                <a16:creationId xmlns:a16="http://schemas.microsoft.com/office/drawing/2014/main" id="{19A6B67D-359B-8AAE-438F-12DDCAE3D285}"/>
+                <a16:creationId xmlns:a16="http://schemas.microsoft.com/office/drawing/2014/main" id="{C4681F74-5BD6-838A-110A-E60071FF9FA5}"/>
               </a:ext>
             </a:extLst>
           </p:cNvPr>
@@ -20158,7 +20158,7 @@
     </p:spTree>
     <p:extLst>
       <p:ext uri="{BB962C8B-B14F-4D97-AF65-F5344CB8AC3E}">
-        <p14:creationId xmlns:p14="http://schemas.microsoft.com/office/powerpoint/2010/main" val="3889318916"/>
+        <p14:creationId xmlns:p14="http://schemas.microsoft.com/office/powerpoint/2010/main" val="706916566"/>
       </p:ext>
     </p:extLst>
   </p:cSld>
@@ -20308,7 +20308,7 @@
             </a:lvl1pPr>
           </a:lstStyle>
           <a:p>
-            <a:fld id="{69A66F8C-F25E-4B2E-B2E2-0A218D443514}" type="datetimeFigureOut">
+            <a:fld id="{90A7BBED-E6FA-40A6-8A51-59E4B08CD8B8}" type="datetimeFigureOut">
               <a:rPr lang="en-US" smtClean="0"/>
               <a:t>10/3/2026</a:t>
             </a:fld>
@@ -20353,7 +20353,7 @@
             </a:lvl1pPr>
           </a:lstStyle>
           <a:p>
-            <a:fld id="{369B3908-4DF9-450B-8F99-2A754569D7A5}" type="slidenum">
+            <a:fld id="{4F0FE17B-5063-4433-97D2-96EAD825CE6E}" type="slidenum">
               <a:rPr lang="en-US" smtClean="0"/>
               <a:t>‹#›</a:t>
             </a:fld>
@@ -20473,7 +20473,7 @@
           <p:cNvPr id="8" name="decisions_title">
             <a:extLst>
               <a:ext uri="{FF2B5EF4-FFF2-40B4-BE49-F238E27FC236}">
-                <a16:creationId xmlns:a16="http://schemas.microsoft.com/office/drawing/2014/main" id="{3B114AEC-C5AE-42DE-FEF5-781D5897A4BC}"/>
+                <a16:creationId xmlns:a16="http://schemas.microsoft.com/office/drawing/2014/main" id="{88E14ACA-29F1-5643-1AE1-8C42FB75E9EF}"/>
               </a:ext>
             </a:extLst>
           </p:cNvPr>
@@ -20486,8 +20486,8 @@
         </p:nvSpPr>
         <p:spPr>
           <a:xfrm>
-            <a:off x="761607" y="4974418"/>
-            <a:ext cx="2436134" cy="844758"/>
+            <a:off x="733081" y="4946166"/>
+            <a:ext cx="2692870" cy="901263"/>
           </a:xfrm>
         </p:spPr>
         <p:txBody>
@@ -20525,7 +20525,7 @@
           <p:cNvPr id="9" name="decisions">
             <a:extLst>
               <a:ext uri="{FF2B5EF4-FFF2-40B4-BE49-F238E27FC236}">
-                <a16:creationId xmlns:a16="http://schemas.microsoft.com/office/drawing/2014/main" id="{37900E04-802E-209C-3DBE-4FB66CB6939C}"/>
+                <a16:creationId xmlns:a16="http://schemas.microsoft.com/office/drawing/2014/main" id="{4C214548-D2F3-D297-438E-52E29985100A}"/>
               </a:ext>
             </a:extLst>
           </p:cNvPr>
@@ -20538,8 +20538,8 @@
         </p:nvSpPr>
         <p:spPr>
           <a:xfrm>
-            <a:off x="3765413" y="4974418"/>
-            <a:ext cx="7664979" cy="844758"/>
+            <a:off x="3537204" y="4946166"/>
+            <a:ext cx="7921715" cy="901263"/>
           </a:xfrm>
           <a:prstGeom prst="rect">
             <a:avLst/>
@@ -20551,7 +20551,7 @@
           </a:bodyPr>
           <a:lstStyle>
             <a:lvl1pPr>
-              <a:defRPr sz="1800"/>
+              <a:defRPr sz="2000"/>
             </a:lvl1pPr>
           </a:lstStyle>
           <a:p>
@@ -20568,7 +20568,7 @@
           <p:cNvPr id="10" name="item_1_title">
             <a:extLst>
               <a:ext uri="{FF2B5EF4-FFF2-40B4-BE49-F238E27FC236}">
-                <a16:creationId xmlns:a16="http://schemas.microsoft.com/office/drawing/2014/main" id="{6AB9C321-2CAF-AAC7-A731-84AE9F7F27D0}"/>
+                <a16:creationId xmlns:a16="http://schemas.microsoft.com/office/drawing/2014/main" id="{300AC3A8-0DF3-54C5-49BB-1F25A54D1484}"/>
               </a:ext>
             </a:extLst>
           </p:cNvPr>
@@ -20581,8 +20581,8 @@
         </p:nvSpPr>
         <p:spPr>
           <a:xfrm>
-            <a:off x="761608" y="2457097"/>
-            <a:ext cx="3099843" cy="540127"/>
+            <a:off x="733082" y="2428843"/>
+            <a:ext cx="3156895" cy="556746"/>
           </a:xfrm>
           <a:prstGeom prst="rect">
             <a:avLst/>
@@ -20599,7 +20599,7 @@
               </a:spcBef>
               <a:buFontTx/>
               <a:buNone/>
-              <a:defRPr sz="2200" b="1">
+              <a:defRPr sz="2000" b="1">
                 <a:solidFill>
                   <a:schemeClr val="accent1">
                     <a:lumMod val="95000"/>
@@ -20623,7 +20623,7 @@
           <p:cNvPr id="11" name="item_1">
             <a:extLst>
               <a:ext uri="{FF2B5EF4-FFF2-40B4-BE49-F238E27FC236}">
-                <a16:creationId xmlns:a16="http://schemas.microsoft.com/office/drawing/2014/main" id="{F1B47B20-802B-3B99-8B2E-7225FBB46CC9}"/>
+                <a16:creationId xmlns:a16="http://schemas.microsoft.com/office/drawing/2014/main" id="{87B648D8-D4AE-1EDF-C21D-DA9FC9F45A3D}"/>
               </a:ext>
             </a:extLst>
           </p:cNvPr>
@@ -20636,8 +20636,8 @@
         </p:nvSpPr>
         <p:spPr>
           <a:xfrm>
-            <a:off x="761608" y="2997222"/>
-            <a:ext cx="3099843" cy="1296304"/>
+            <a:off x="733082" y="2985589"/>
+            <a:ext cx="3156895" cy="1336190"/>
           </a:xfrm>
           <a:prstGeom prst="rect">
             <a:avLst/>
@@ -20671,7 +20671,7 @@
           <p:cNvPr id="12" name="item_2_title">
             <a:extLst>
               <a:ext uri="{FF2B5EF4-FFF2-40B4-BE49-F238E27FC236}">
-                <a16:creationId xmlns:a16="http://schemas.microsoft.com/office/drawing/2014/main" id="{A3735C77-3A1C-541F-4707-E80CC7130B1E}"/>
+                <a16:creationId xmlns:a16="http://schemas.microsoft.com/office/drawing/2014/main" id="{DB45DBE0-3755-A84F-9FB7-B7FC3E885602}"/>
               </a:ext>
             </a:extLst>
           </p:cNvPr>
@@ -20684,8 +20684,8 @@
         </p:nvSpPr>
         <p:spPr>
           <a:xfrm>
-            <a:off x="4546079" y="2457097"/>
-            <a:ext cx="3099843" cy="540127"/>
+            <a:off x="4517553" y="2428843"/>
+            <a:ext cx="3156895" cy="556746"/>
           </a:xfrm>
           <a:prstGeom prst="rect">
             <a:avLst/>
@@ -20702,7 +20702,7 @@
               </a:spcBef>
               <a:buFontTx/>
               <a:buNone/>
-              <a:defRPr sz="2200" b="1">
+              <a:defRPr sz="2000" b="1">
                 <a:solidFill>
                   <a:schemeClr val="accent1">
                     <a:lumMod val="95000"/>
@@ -20726,7 +20726,7 @@
           <p:cNvPr id="13" name="item_2">
             <a:extLst>
               <a:ext uri="{FF2B5EF4-FFF2-40B4-BE49-F238E27FC236}">
-                <a16:creationId xmlns:a16="http://schemas.microsoft.com/office/drawing/2014/main" id="{AB924EF4-0113-1568-5402-9131FC893BE0}"/>
+                <a16:creationId xmlns:a16="http://schemas.microsoft.com/office/drawing/2014/main" id="{DF20C678-3992-7E76-F752-362E0FCD0308}"/>
               </a:ext>
             </a:extLst>
           </p:cNvPr>
@@ -20739,8 +20739,8 @@
         </p:nvSpPr>
         <p:spPr>
           <a:xfrm>
-            <a:off x="4546079" y="2997222"/>
-            <a:ext cx="3099843" cy="1296304"/>
+            <a:off x="4517553" y="2985589"/>
+            <a:ext cx="3156895" cy="1336190"/>
           </a:xfrm>
           <a:prstGeom prst="rect">
             <a:avLst/>
@@ -20774,7 +20774,7 @@
           <p:cNvPr id="14" name="item_3_title">
             <a:extLst>
               <a:ext uri="{FF2B5EF4-FFF2-40B4-BE49-F238E27FC236}">
-                <a16:creationId xmlns:a16="http://schemas.microsoft.com/office/drawing/2014/main" id="{3B41E67D-854B-E24D-D1DB-9636BD5B09A6}"/>
+                <a16:creationId xmlns:a16="http://schemas.microsoft.com/office/drawing/2014/main" id="{CAF8CE19-8FA2-49DA-87FD-2325B72BF88F}"/>
               </a:ext>
             </a:extLst>
           </p:cNvPr>
@@ -20787,8 +20787,8 @@
         </p:nvSpPr>
         <p:spPr>
           <a:xfrm>
-            <a:off x="8330549" y="2457097"/>
-            <a:ext cx="3099843" cy="540127"/>
+            <a:off x="8302023" y="2428843"/>
+            <a:ext cx="3156895" cy="556746"/>
           </a:xfrm>
           <a:prstGeom prst="rect">
             <a:avLst/>
@@ -20805,7 +20805,7 @@
               </a:spcBef>
               <a:buFontTx/>
               <a:buNone/>
-              <a:defRPr sz="2200" b="1">
+              <a:defRPr sz="2000" b="1">
                 <a:solidFill>
                   <a:schemeClr val="accent1">
                     <a:lumMod val="95000"/>
@@ -20829,7 +20829,7 @@
           <p:cNvPr id="15" name="item_3">
             <a:extLst>
               <a:ext uri="{FF2B5EF4-FFF2-40B4-BE49-F238E27FC236}">
-                <a16:creationId xmlns:a16="http://schemas.microsoft.com/office/drawing/2014/main" id="{14FD7321-5412-3C82-97E2-ED9AA79BAEDE}"/>
+                <a16:creationId xmlns:a16="http://schemas.microsoft.com/office/drawing/2014/main" id="{FA5DFC59-C4E6-214E-7904-86E12CB899C4}"/>
               </a:ext>
             </a:extLst>
           </p:cNvPr>
@@ -20842,8 +20842,8 @@
         </p:nvSpPr>
         <p:spPr>
           <a:xfrm>
-            <a:off x="8330549" y="2997222"/>
-            <a:ext cx="3099843" cy="1296304"/>
+            <a:off x="8302023" y="2985589"/>
+            <a:ext cx="3156895" cy="1336190"/>
           </a:xfrm>
           <a:prstGeom prst="rect">
             <a:avLst/>
@@ -20877,7 +20877,7 @@
           <p:cNvPr id="16" name="source">
             <a:extLst>
               <a:ext uri="{FF2B5EF4-FFF2-40B4-BE49-F238E27FC236}">
-                <a16:creationId xmlns:a16="http://schemas.microsoft.com/office/drawing/2014/main" id="{E2ADAD16-17ED-25F1-0E00-8C6260840924}"/>
+                <a16:creationId xmlns:a16="http://schemas.microsoft.com/office/drawing/2014/main" id="{4F863FE9-1501-60BB-9757-205F2F714C4C}"/>
               </a:ext>
             </a:extLst>
           </p:cNvPr>
@@ -20934,7 +20934,7 @@
     </p:spTree>
     <p:extLst>
       <p:ext uri="{BB962C8B-B14F-4D97-AF65-F5344CB8AC3E}">
-        <p14:creationId xmlns:p14="http://schemas.microsoft.com/office/powerpoint/2010/main" val="3075387025"/>
+        <p14:creationId xmlns:p14="http://schemas.microsoft.com/office/powerpoint/2010/main" val="879783967"/>
       </p:ext>
     </p:extLst>
   </p:cSld>
@@ -21084,7 +21084,7 @@
             </a:lvl1pPr>
           </a:lstStyle>
           <a:p>
-            <a:fld id="{69A66F8C-F25E-4B2E-B2E2-0A218D443514}" type="datetimeFigureOut">
+            <a:fld id="{90A7BBED-E6FA-40A6-8A51-59E4B08CD8B8}" type="datetimeFigureOut">
               <a:rPr lang="en-US" smtClean="0"/>
               <a:t>10/3/2026</a:t>
             </a:fld>
@@ -21129,7 +21129,7 @@
             </a:lvl1pPr>
           </a:lstStyle>
           <a:p>
-            <a:fld id="{369B3908-4DF9-450B-8F99-2A754569D7A5}" type="slidenum">
+            <a:fld id="{4F0FE17B-5063-4433-97D2-96EAD825CE6E}" type="slidenum">
               <a:rPr lang="en-US" smtClean="0"/>
               <a:t>‹#›</a:t>
             </a:fld>
@@ -21249,7 +21249,7 @@
           <p:cNvPr id="8" name="body">
             <a:extLst>
               <a:ext uri="{FF2B5EF4-FFF2-40B4-BE49-F238E27FC236}">
-                <a16:creationId xmlns:a16="http://schemas.microsoft.com/office/drawing/2014/main" id="{6ADC8E16-72D4-FED7-B0CF-AFD11A6F6223}"/>
+                <a16:creationId xmlns:a16="http://schemas.microsoft.com/office/drawing/2014/main" id="{899907ED-B816-BD11-F7F0-7DC61010F491}"/>
               </a:ext>
             </a:extLst>
           </p:cNvPr>
@@ -21289,7 +21289,7 @@
           <p:cNvPr id="9" name="kpi_value_1">
             <a:extLst>
               <a:ext uri="{FF2B5EF4-FFF2-40B4-BE49-F238E27FC236}">
-                <a16:creationId xmlns:a16="http://schemas.microsoft.com/office/drawing/2014/main" id="{DEC2528E-550E-D8D1-AF71-7AFEA9590E03}"/>
+                <a16:creationId xmlns:a16="http://schemas.microsoft.com/office/drawing/2014/main" id="{661F95F1-A35A-4046-2E6C-E299FF6718B0}"/>
               </a:ext>
             </a:extLst>
           </p:cNvPr>
@@ -21302,8 +21302,8 @@
         </p:nvSpPr>
         <p:spPr>
           <a:xfrm>
-            <a:off x="761607" y="2457096"/>
-            <a:ext cx="4992078" cy="1572872"/>
+            <a:off x="733082" y="2428844"/>
+            <a:ext cx="5049131" cy="1609197"/>
           </a:xfrm>
           <a:prstGeom prst="rect">
             <a:avLst/>
@@ -21320,7 +21320,7 @@
               </a:spcBef>
               <a:buFontTx/>
               <a:buNone/>
-              <a:defRPr sz="8400" b="1">
+              <a:defRPr sz="6000" b="1">
                 <a:solidFill>
                   <a:schemeClr val="accent1">
                     <a:lumMod val="95000"/>
@@ -21344,7 +21344,7 @@
           <p:cNvPr id="10" name="kpi_label_1">
             <a:extLst>
               <a:ext uri="{FF2B5EF4-FFF2-40B4-BE49-F238E27FC236}">
-                <a16:creationId xmlns:a16="http://schemas.microsoft.com/office/drawing/2014/main" id="{4C242AE1-5DFE-FB7C-5803-EE545EDCAE11}"/>
+                <a16:creationId xmlns:a16="http://schemas.microsoft.com/office/drawing/2014/main" id="{348E3FAD-C735-8F59-57F0-B3EF59674D0C}"/>
               </a:ext>
             </a:extLst>
           </p:cNvPr>
@@ -21357,8 +21357,8 @@
         </p:nvSpPr>
         <p:spPr>
           <a:xfrm>
-            <a:off x="761607" y="4029968"/>
-            <a:ext cx="4992078" cy="873818"/>
+            <a:off x="733082" y="4038040"/>
+            <a:ext cx="5049131" cy="893998"/>
           </a:xfrm>
           <a:prstGeom prst="rect">
             <a:avLst/>
@@ -21375,7 +21375,7 @@
               </a:spcBef>
               <a:buFontTx/>
               <a:buNone/>
-              <a:defRPr sz="1800"/>
+              <a:defRPr sz="2000"/>
             </a:lvl1pPr>
           </a:lstStyle>
           <a:p>
@@ -21392,7 +21392,7 @@
           <p:cNvPr id="11" name="kpi_value_2">
             <a:extLst>
               <a:ext uri="{FF2B5EF4-FFF2-40B4-BE49-F238E27FC236}">
-                <a16:creationId xmlns:a16="http://schemas.microsoft.com/office/drawing/2014/main" id="{37E76861-BBA6-D295-A850-4FCE7EA400B9}"/>
+                <a16:creationId xmlns:a16="http://schemas.microsoft.com/office/drawing/2014/main" id="{F504F54F-BC62-EAD1-86DD-AC59D5F5485C}"/>
               </a:ext>
             </a:extLst>
           </p:cNvPr>
@@ -21405,8 +21405,8 @@
         </p:nvSpPr>
         <p:spPr>
           <a:xfrm>
-            <a:off x="6438313" y="2457096"/>
-            <a:ext cx="4992078" cy="1572872"/>
+            <a:off x="6409788" y="2428844"/>
+            <a:ext cx="5049131" cy="1609197"/>
           </a:xfrm>
           <a:prstGeom prst="rect">
             <a:avLst/>
@@ -21423,7 +21423,7 @@
               </a:spcBef>
               <a:buFontTx/>
               <a:buNone/>
-              <a:defRPr sz="8400" b="1">
+              <a:defRPr sz="6000" b="1">
                 <a:solidFill>
                   <a:schemeClr val="accent1">
                     <a:lumMod val="95000"/>
@@ -21447,7 +21447,7 @@
           <p:cNvPr id="12" name="kpi_label_2">
             <a:extLst>
               <a:ext uri="{FF2B5EF4-FFF2-40B4-BE49-F238E27FC236}">
-                <a16:creationId xmlns:a16="http://schemas.microsoft.com/office/drawing/2014/main" id="{2D4BCD91-8EC8-2D12-0BE6-EBE277AC49D1}"/>
+                <a16:creationId xmlns:a16="http://schemas.microsoft.com/office/drawing/2014/main" id="{8CCD5861-525B-9378-0B7E-2CA30E9CA0B1}"/>
               </a:ext>
             </a:extLst>
           </p:cNvPr>
@@ -21460,8 +21460,8 @@
         </p:nvSpPr>
         <p:spPr>
           <a:xfrm>
-            <a:off x="6438313" y="4029968"/>
-            <a:ext cx="4992078" cy="873818"/>
+            <a:off x="6409788" y="4038040"/>
+            <a:ext cx="5049131" cy="893998"/>
           </a:xfrm>
           <a:prstGeom prst="rect">
             <a:avLst/>
@@ -21478,7 +21478,7 @@
               </a:spcBef>
               <a:buFontTx/>
               <a:buNone/>
-              <a:defRPr sz="1800"/>
+              <a:defRPr sz="2000"/>
             </a:lvl1pPr>
           </a:lstStyle>
           <a:p>
@@ -21495,7 +21495,7 @@
           <p:cNvPr id="13" name="source">
             <a:extLst>
               <a:ext uri="{FF2B5EF4-FFF2-40B4-BE49-F238E27FC236}">
-                <a16:creationId xmlns:a16="http://schemas.microsoft.com/office/drawing/2014/main" id="{5AD15BC0-ABE1-113E-1A37-3F633127B1B2}"/>
+                <a16:creationId xmlns:a16="http://schemas.microsoft.com/office/drawing/2014/main" id="{6C94E663-080E-D9A6-D2FA-4073554FA3E7}"/>
               </a:ext>
             </a:extLst>
           </p:cNvPr>
@@ -21552,7 +21552,7 @@
     </p:spTree>
     <p:extLst>
       <p:ext uri="{BB962C8B-B14F-4D97-AF65-F5344CB8AC3E}">
-        <p14:creationId xmlns:p14="http://schemas.microsoft.com/office/powerpoint/2010/main" val="1201402512"/>
+        <p14:creationId xmlns:p14="http://schemas.microsoft.com/office/powerpoint/2010/main" val="3100997651"/>
       </p:ext>
     </p:extLst>
   </p:cSld>
@@ -21702,7 +21702,7 @@
             </a:lvl1pPr>
           </a:lstStyle>
           <a:p>
-            <a:fld id="{69A66F8C-F25E-4B2E-B2E2-0A218D443514}" type="datetimeFigureOut">
+            <a:fld id="{90A7BBED-E6FA-40A6-8A51-59E4B08CD8B8}" type="datetimeFigureOut">
               <a:rPr lang="en-US" smtClean="0"/>
               <a:t>10/3/2026</a:t>
             </a:fld>
@@ -21747,7 +21747,7 @@
             </a:lvl1pPr>
           </a:lstStyle>
           <a:p>
-            <a:fld id="{369B3908-4DF9-450B-8F99-2A754569D7A5}" type="slidenum">
+            <a:fld id="{4F0FE17B-5063-4433-97D2-96EAD825CE6E}" type="slidenum">
               <a:rPr lang="en-US" smtClean="0"/>
               <a:t>‹#›</a:t>
             </a:fld>
@@ -21867,7 +21867,7 @@
           <p:cNvPr id="8" name="body">
             <a:extLst>
               <a:ext uri="{FF2B5EF4-FFF2-40B4-BE49-F238E27FC236}">
-                <a16:creationId xmlns:a16="http://schemas.microsoft.com/office/drawing/2014/main" id="{A459651F-641C-B3CB-14E7-3F9178FAF65C}"/>
+                <a16:creationId xmlns:a16="http://schemas.microsoft.com/office/drawing/2014/main" id="{78B5D885-518C-7C4E-7BEA-F4AFDDB70F13}"/>
               </a:ext>
             </a:extLst>
           </p:cNvPr>
@@ -21907,7 +21907,7 @@
           <p:cNvPr id="9" name="kpi_value_1">
             <a:extLst>
               <a:ext uri="{FF2B5EF4-FFF2-40B4-BE49-F238E27FC236}">
-                <a16:creationId xmlns:a16="http://schemas.microsoft.com/office/drawing/2014/main" id="{C91F5BD6-2CF2-AD1A-38D4-9256B894336F}"/>
+                <a16:creationId xmlns:a16="http://schemas.microsoft.com/office/drawing/2014/main" id="{1F63810D-84D3-7EA6-8BBB-8B67803357EA}"/>
               </a:ext>
             </a:extLst>
           </p:cNvPr>
@@ -21920,8 +21920,8 @@
         </p:nvSpPr>
         <p:spPr>
           <a:xfrm>
-            <a:off x="761608" y="2457096"/>
-            <a:ext cx="2153725" cy="1572872"/>
+            <a:off x="733082" y="2428844"/>
+            <a:ext cx="2210777" cy="1609197"/>
           </a:xfrm>
           <a:prstGeom prst="rect">
             <a:avLst/>
@@ -21962,7 +21962,7 @@
           <p:cNvPr id="10" name="kpi_label_1">
             <a:extLst>
               <a:ext uri="{FF2B5EF4-FFF2-40B4-BE49-F238E27FC236}">
-                <a16:creationId xmlns:a16="http://schemas.microsoft.com/office/drawing/2014/main" id="{FD1F8163-719D-93CB-80FE-D4C0C67EA78B}"/>
+                <a16:creationId xmlns:a16="http://schemas.microsoft.com/office/drawing/2014/main" id="{1B6FB93C-CD22-4EEE-DE4C-8C30B0E06A97}"/>
               </a:ext>
             </a:extLst>
           </p:cNvPr>
@@ -21975,8 +21975,8 @@
         </p:nvSpPr>
         <p:spPr>
           <a:xfrm>
-            <a:off x="761608" y="4029968"/>
-            <a:ext cx="2153725" cy="873818"/>
+            <a:off x="733082" y="4038040"/>
+            <a:ext cx="2210777" cy="893998"/>
           </a:xfrm>
           <a:prstGeom prst="rect">
             <a:avLst/>
@@ -21993,7 +21993,7 @@
               </a:spcBef>
               <a:buFontTx/>
               <a:buNone/>
-              <a:defRPr sz="1800"/>
+              <a:defRPr sz="2000"/>
             </a:lvl1pPr>
           </a:lstStyle>
           <a:p>
@@ -22010,7 +22010,7 @@
           <p:cNvPr id="11" name="kpi_value_2">
             <a:extLst>
               <a:ext uri="{FF2B5EF4-FFF2-40B4-BE49-F238E27FC236}">
-                <a16:creationId xmlns:a16="http://schemas.microsoft.com/office/drawing/2014/main" id="{E99D6E48-3145-985D-161F-2C297B3ECBB6}"/>
+                <a16:creationId xmlns:a16="http://schemas.microsoft.com/office/drawing/2014/main" id="{B00CE5BE-6F82-33D3-CC4B-C43A13A7481F}"/>
               </a:ext>
             </a:extLst>
           </p:cNvPr>
@@ -22023,8 +22023,8 @@
         </p:nvSpPr>
         <p:spPr>
           <a:xfrm>
-            <a:off x="3599961" y="2457096"/>
-            <a:ext cx="2153725" cy="1572872"/>
+            <a:off x="3571435" y="2428844"/>
+            <a:ext cx="2210777" cy="1609197"/>
           </a:xfrm>
           <a:prstGeom prst="rect">
             <a:avLst/>
@@ -22065,7 +22065,7 @@
           <p:cNvPr id="12" name="kpi_label_2">
             <a:extLst>
               <a:ext uri="{FF2B5EF4-FFF2-40B4-BE49-F238E27FC236}">
-                <a16:creationId xmlns:a16="http://schemas.microsoft.com/office/drawing/2014/main" id="{8C5735A8-4B18-8A17-EF2E-E58FD5ED4B45}"/>
+                <a16:creationId xmlns:a16="http://schemas.microsoft.com/office/drawing/2014/main" id="{25F762D7-87D3-8C9A-C007-D6ED975B3014}"/>
               </a:ext>
             </a:extLst>
           </p:cNvPr>
@@ -22078,8 +22078,8 @@
         </p:nvSpPr>
         <p:spPr>
           <a:xfrm>
-            <a:off x="3599961" y="4029968"/>
-            <a:ext cx="2153725" cy="873818"/>
+            <a:off x="3571435" y="4038040"/>
+            <a:ext cx="2210777" cy="893998"/>
           </a:xfrm>
           <a:prstGeom prst="rect">
             <a:avLst/>
@@ -22096,7 +22096,7 @@
               </a:spcBef>
               <a:buFontTx/>
               <a:buNone/>
-              <a:defRPr sz="1800"/>
+              <a:defRPr sz="2000"/>
             </a:lvl1pPr>
           </a:lstStyle>
           <a:p>
@@ -22113,7 +22113,7 @@
           <p:cNvPr id="13" name="kpi_value_3">
             <a:extLst>
               <a:ext uri="{FF2B5EF4-FFF2-40B4-BE49-F238E27FC236}">
-                <a16:creationId xmlns:a16="http://schemas.microsoft.com/office/drawing/2014/main" id="{38B21BE6-FC54-1344-E593-55FF6D4A29A4}"/>
+                <a16:creationId xmlns:a16="http://schemas.microsoft.com/office/drawing/2014/main" id="{01E6E47F-FCCD-18BA-3F03-15797FA16EBC}"/>
               </a:ext>
             </a:extLst>
           </p:cNvPr>
@@ -22126,8 +22126,8 @@
         </p:nvSpPr>
         <p:spPr>
           <a:xfrm>
-            <a:off x="6438314" y="2457096"/>
-            <a:ext cx="2153725" cy="1572872"/>
+            <a:off x="6409788" y="2428844"/>
+            <a:ext cx="2210777" cy="1609197"/>
           </a:xfrm>
           <a:prstGeom prst="rect">
             <a:avLst/>
@@ -22168,7 +22168,7 @@
           <p:cNvPr id="14" name="kpi_label_3">
             <a:extLst>
               <a:ext uri="{FF2B5EF4-FFF2-40B4-BE49-F238E27FC236}">
-                <a16:creationId xmlns:a16="http://schemas.microsoft.com/office/drawing/2014/main" id="{54813F40-633B-606B-5B38-1B90404BBB66}"/>
+                <a16:creationId xmlns:a16="http://schemas.microsoft.com/office/drawing/2014/main" id="{0A77A2DE-F2DE-558A-BF02-F1CFD3E1CDBF}"/>
               </a:ext>
             </a:extLst>
           </p:cNvPr>
@@ -22181,8 +22181,8 @@
         </p:nvSpPr>
         <p:spPr>
           <a:xfrm>
-            <a:off x="6438314" y="4029968"/>
-            <a:ext cx="2153725" cy="873818"/>
+            <a:off x="6409788" y="4038040"/>
+            <a:ext cx="2210777" cy="893998"/>
           </a:xfrm>
           <a:prstGeom prst="rect">
             <a:avLst/>
@@ -22199,7 +22199,7 @@
               </a:spcBef>
               <a:buFontTx/>
               <a:buNone/>
-              <a:defRPr sz="1800"/>
+              <a:defRPr sz="2000"/>
             </a:lvl1pPr>
           </a:lstStyle>
           <a:p>
@@ -22216,7 +22216,7 @@
           <p:cNvPr id="15" name="kpi_value_4">
             <a:extLst>
               <a:ext uri="{FF2B5EF4-FFF2-40B4-BE49-F238E27FC236}">
-                <a16:creationId xmlns:a16="http://schemas.microsoft.com/office/drawing/2014/main" id="{5886464C-BC25-152C-CA77-9B6B9169BCD1}"/>
+                <a16:creationId xmlns:a16="http://schemas.microsoft.com/office/drawing/2014/main" id="{4EDF186E-6F87-3DDF-ED30-731199820E1C}"/>
               </a:ext>
             </a:extLst>
           </p:cNvPr>
@@ -22229,8 +22229,8 @@
         </p:nvSpPr>
         <p:spPr>
           <a:xfrm>
-            <a:off x="9276667" y="2457096"/>
-            <a:ext cx="2153725" cy="1572872"/>
+            <a:off x="9248141" y="2428844"/>
+            <a:ext cx="2210777" cy="1609197"/>
           </a:xfrm>
           <a:prstGeom prst="rect">
             <a:avLst/>
@@ -22271,7 +22271,7 @@
           <p:cNvPr id="16" name="kpi_label_4">
             <a:extLst>
               <a:ext uri="{FF2B5EF4-FFF2-40B4-BE49-F238E27FC236}">
-                <a16:creationId xmlns:a16="http://schemas.microsoft.com/office/drawing/2014/main" id="{30B9BD1E-CC72-7445-3797-F26C43D73E58}"/>
+                <a16:creationId xmlns:a16="http://schemas.microsoft.com/office/drawing/2014/main" id="{5A60885E-52BA-7DFD-66A8-53067C0A9830}"/>
               </a:ext>
             </a:extLst>
           </p:cNvPr>
@@ -22284,8 +22284,8 @@
         </p:nvSpPr>
         <p:spPr>
           <a:xfrm>
-            <a:off x="9276667" y="4029968"/>
-            <a:ext cx="2153725" cy="873818"/>
+            <a:off x="9248141" y="4038040"/>
+            <a:ext cx="2210777" cy="893998"/>
           </a:xfrm>
           <a:prstGeom prst="rect">
             <a:avLst/>
@@ -22302,7 +22302,7 @@
               </a:spcBef>
               <a:buFontTx/>
               <a:buNone/>
-              <a:defRPr sz="1800"/>
+              <a:defRPr sz="2000"/>
             </a:lvl1pPr>
           </a:lstStyle>
           <a:p>
@@ -22319,7 +22319,7 @@
           <p:cNvPr id="17" name="source">
             <a:extLst>
               <a:ext uri="{FF2B5EF4-FFF2-40B4-BE49-F238E27FC236}">
-                <a16:creationId xmlns:a16="http://schemas.microsoft.com/office/drawing/2014/main" id="{CD27442B-4F6D-628B-3FD5-94BEB56484C6}"/>
+                <a16:creationId xmlns:a16="http://schemas.microsoft.com/office/drawing/2014/main" id="{ADDC0CCE-B2F8-9B68-31F6-ECC0EAB09DCC}"/>
               </a:ext>
             </a:extLst>
           </p:cNvPr>
@@ -22376,7 +22376,7 @@
     </p:spTree>
     <p:extLst>
       <p:ext uri="{BB962C8B-B14F-4D97-AF65-F5344CB8AC3E}">
-        <p14:creationId xmlns:p14="http://schemas.microsoft.com/office/powerpoint/2010/main" val="3567514577"/>
+        <p14:creationId xmlns:p14="http://schemas.microsoft.com/office/powerpoint/2010/main" val="884059172"/>
       </p:ext>
     </p:extLst>
   </p:cSld>
@@ -22526,7 +22526,7 @@
             </a:lvl1pPr>
           </a:lstStyle>
           <a:p>
-            <a:fld id="{69A66F8C-F25E-4B2E-B2E2-0A218D443514}" type="datetimeFigureOut">
+            <a:fld id="{90A7BBED-E6FA-40A6-8A51-59E4B08CD8B8}" type="datetimeFigureOut">
               <a:rPr lang="en-US" smtClean="0"/>
               <a:t>10/3/2026</a:t>
             </a:fld>
@@ -22571,7 +22571,7 @@
             </a:lvl1pPr>
           </a:lstStyle>
           <a:p>
-            <a:fld id="{369B3908-4DF9-450B-8F99-2A754569D7A5}" type="slidenum">
+            <a:fld id="{4F0FE17B-5063-4433-97D2-96EAD825CE6E}" type="slidenum">
               <a:rPr lang="en-US" smtClean="0"/>
               <a:t>‹#›</a:t>
             </a:fld>
@@ -22691,7 +22691,7 @@
           <p:cNvPr id="8" name="body">
             <a:extLst>
               <a:ext uri="{FF2B5EF4-FFF2-40B4-BE49-F238E27FC236}">
-                <a16:creationId xmlns:a16="http://schemas.microsoft.com/office/drawing/2014/main" id="{3574065A-37D2-23F3-6141-4E0ECB8E5BBC}"/>
+                <a16:creationId xmlns:a16="http://schemas.microsoft.com/office/drawing/2014/main" id="{C94221ED-B370-B539-61AB-36A8D5549767}"/>
               </a:ext>
             </a:extLst>
           </p:cNvPr>
@@ -22731,7 +22731,7 @@
           <p:cNvPr id="9" name="quote">
             <a:extLst>
               <a:ext uri="{FF2B5EF4-FFF2-40B4-BE49-F238E27FC236}">
-                <a16:creationId xmlns:a16="http://schemas.microsoft.com/office/drawing/2014/main" id="{BB8A24D6-A7C7-9958-AE56-B7CF47358D1D}"/>
+                <a16:creationId xmlns:a16="http://schemas.microsoft.com/office/drawing/2014/main" id="{5D658E76-EA3F-AF29-3ECE-B8F9DD88E18F}"/>
               </a:ext>
             </a:extLst>
           </p:cNvPr>
@@ -22744,8 +22744,8 @@
         </p:nvSpPr>
         <p:spPr>
           <a:xfrm>
-            <a:off x="7436729" y="2457097"/>
-            <a:ext cx="3993662" cy="2599255"/>
+            <a:off x="7408204" y="2428843"/>
+            <a:ext cx="4050715" cy="2853530"/>
           </a:xfrm>
           <a:prstGeom prst="rect">
             <a:avLst/>
@@ -22762,7 +22762,7 @@
               </a:spcBef>
               <a:buFontTx/>
               <a:buNone/>
-              <a:defRPr sz="2400" i="1">
+              <a:defRPr sz="2000" i="1">
                 <a:latin typeface="+mj-lt"/>
               </a:defRPr>
             </a:lvl1pPr>
@@ -22781,7 +22781,7 @@
           <p:cNvPr id="10" name="attribution">
             <a:extLst>
               <a:ext uri="{FF2B5EF4-FFF2-40B4-BE49-F238E27FC236}">
-                <a16:creationId xmlns:a16="http://schemas.microsoft.com/office/drawing/2014/main" id="{2F9C5ED7-D04F-357F-79DC-5EF846305D8D}"/>
+                <a16:creationId xmlns:a16="http://schemas.microsoft.com/office/drawing/2014/main" id="{66F3286A-5229-0661-78E8-2E388B9AD281}"/>
               </a:ext>
             </a:extLst>
           </p:cNvPr>
@@ -22794,8 +22794,8 @@
         </p:nvSpPr>
         <p:spPr>
           <a:xfrm>
-            <a:off x="7436729" y="5508396"/>
-            <a:ext cx="3993662" cy="310780"/>
+            <a:off x="7408204" y="5282374"/>
+            <a:ext cx="4050715" cy="565055"/>
           </a:xfrm>
           <a:prstGeom prst="rect">
             <a:avLst/>
@@ -22812,7 +22812,7 @@
               </a:spcBef>
               <a:buFontTx/>
               <a:buNone/>
-              <a:defRPr sz="1400"/>
+              <a:defRPr sz="2000"/>
             </a:lvl1pPr>
           </a:lstStyle>
           <a:p>
@@ -22829,7 +22829,7 @@
           <p:cNvPr id="11" name="source">
             <a:extLst>
               <a:ext uri="{FF2B5EF4-FFF2-40B4-BE49-F238E27FC236}">
-                <a16:creationId xmlns:a16="http://schemas.microsoft.com/office/drawing/2014/main" id="{F02F9647-BEB5-B11B-3FB5-3C0F45D81978}"/>
+                <a16:creationId xmlns:a16="http://schemas.microsoft.com/office/drawing/2014/main" id="{923993F2-11A7-4877-F3FD-0F00E01B7BC8}"/>
               </a:ext>
             </a:extLst>
           </p:cNvPr>
@@ -22886,7 +22886,7 @@
     </p:spTree>
     <p:extLst>
       <p:ext uri="{BB962C8B-B14F-4D97-AF65-F5344CB8AC3E}">
-        <p14:creationId xmlns:p14="http://schemas.microsoft.com/office/powerpoint/2010/main" val="2655826248"/>
+        <p14:creationId xmlns:p14="http://schemas.microsoft.com/office/powerpoint/2010/main" val="3935436072"/>
       </p:ext>
     </p:extLst>
   </p:cSld>
@@ -23036,7 +23036,7 @@
             </a:lvl1pPr>
           </a:lstStyle>
           <a:p>
-            <a:fld id="{69A66F8C-F25E-4B2E-B2E2-0A218D443514}" type="datetimeFigureOut">
+            <a:fld id="{90A7BBED-E6FA-40A6-8A51-59E4B08CD8B8}" type="datetimeFigureOut">
               <a:rPr lang="en-US" smtClean="0"/>
               <a:t>10/3/2026</a:t>
             </a:fld>
@@ -23081,7 +23081,7 @@
             </a:lvl1pPr>
           </a:lstStyle>
           <a:p>
-            <a:fld id="{369B3908-4DF9-450B-8F99-2A754569D7A5}" type="slidenum">
+            <a:fld id="{4F0FE17B-5063-4433-97D2-96EAD825CE6E}" type="slidenum">
               <a:rPr lang="en-US" smtClean="0"/>
               <a:t>‹#›</a:t>
             </a:fld>
@@ -23201,7 +23201,7 @@
           <p:cNvPr id="8" name="item_1_title">
             <a:extLst>
               <a:ext uri="{FF2B5EF4-FFF2-40B4-BE49-F238E27FC236}">
-                <a16:creationId xmlns:a16="http://schemas.microsoft.com/office/drawing/2014/main" id="{1CD29DA3-87DB-F8D3-834D-36419A49F4BF}"/>
+                <a16:creationId xmlns:a16="http://schemas.microsoft.com/office/drawing/2014/main" id="{6551CC7A-CA9B-0E14-007C-EAB1C394FAE4}"/>
               </a:ext>
             </a:extLst>
           </p:cNvPr>
@@ -23214,8 +23214,8 @@
         </p:nvSpPr>
         <p:spPr>
           <a:xfrm>
-            <a:off x="761608" y="2457097"/>
-            <a:ext cx="3099843" cy="988847"/>
+            <a:off x="733082" y="2428843"/>
+            <a:ext cx="3156895" cy="1005466"/>
           </a:xfrm>
         </p:spPr>
         <p:txBody>
@@ -23229,7 +23229,7 @@
               </a:spcBef>
               <a:buFontTx/>
               <a:buNone/>
-              <a:defRPr sz="2200" b="1">
+              <a:defRPr sz="2000" b="1">
                 <a:solidFill>
                   <a:schemeClr val="accent1">
                     <a:lumMod val="95000"/>
@@ -23253,7 +23253,7 @@
           <p:cNvPr id="9" name="item_1">
             <a:extLst>
               <a:ext uri="{FF2B5EF4-FFF2-40B4-BE49-F238E27FC236}">
-                <a16:creationId xmlns:a16="http://schemas.microsoft.com/office/drawing/2014/main" id="{9751D91A-0CD2-16D2-6B6B-9B5A76BA55A7}"/>
+                <a16:creationId xmlns:a16="http://schemas.microsoft.com/office/drawing/2014/main" id="{956970D3-FF66-58F0-4CD4-E2AE6A80EC3A}"/>
               </a:ext>
             </a:extLst>
           </p:cNvPr>
@@ -23266,8 +23266,8 @@
         </p:nvSpPr>
         <p:spPr>
           <a:xfrm>
-            <a:off x="761608" y="3445944"/>
-            <a:ext cx="3099843" cy="2373233"/>
+            <a:off x="733082" y="3434310"/>
+            <a:ext cx="3156895" cy="2413119"/>
           </a:xfrm>
           <a:prstGeom prst="rect">
             <a:avLst/>
@@ -23301,7 +23301,7 @@
           <p:cNvPr id="10" name="item_2_title">
             <a:extLst>
               <a:ext uri="{FF2B5EF4-FFF2-40B4-BE49-F238E27FC236}">
-                <a16:creationId xmlns:a16="http://schemas.microsoft.com/office/drawing/2014/main" id="{CCA0CFF8-9003-865B-91EB-8CAF48759953}"/>
+                <a16:creationId xmlns:a16="http://schemas.microsoft.com/office/drawing/2014/main" id="{DE80496C-C789-F552-1076-46DD84A86092}"/>
               </a:ext>
             </a:extLst>
           </p:cNvPr>
@@ -23314,8 +23314,8 @@
         </p:nvSpPr>
         <p:spPr>
           <a:xfrm>
-            <a:off x="4546079" y="2457097"/>
-            <a:ext cx="3099843" cy="988847"/>
+            <a:off x="4517553" y="2428843"/>
+            <a:ext cx="3156895" cy="1005466"/>
           </a:xfrm>
           <a:prstGeom prst="rect">
             <a:avLst/>
@@ -23332,7 +23332,7 @@
               </a:spcBef>
               <a:buFontTx/>
               <a:buNone/>
-              <a:defRPr sz="2200" b="1">
+              <a:defRPr sz="2000" b="1">
                 <a:solidFill>
                   <a:schemeClr val="accent1">
                     <a:lumMod val="95000"/>
@@ -23356,7 +23356,7 @@
           <p:cNvPr id="11" name="item_2">
             <a:extLst>
               <a:ext uri="{FF2B5EF4-FFF2-40B4-BE49-F238E27FC236}">
-                <a16:creationId xmlns:a16="http://schemas.microsoft.com/office/drawing/2014/main" id="{A87EBC71-5309-32AD-90C4-587AF1509F29}"/>
+                <a16:creationId xmlns:a16="http://schemas.microsoft.com/office/drawing/2014/main" id="{413CD5AC-FE05-8138-C36D-D71EF729F3FE}"/>
               </a:ext>
             </a:extLst>
           </p:cNvPr>
@@ -23369,8 +23369,8 @@
         </p:nvSpPr>
         <p:spPr>
           <a:xfrm>
-            <a:off x="4546079" y="3445944"/>
-            <a:ext cx="3099843" cy="2373233"/>
+            <a:off x="4517553" y="3434310"/>
+            <a:ext cx="3156895" cy="2413119"/>
           </a:xfrm>
           <a:prstGeom prst="rect">
             <a:avLst/>
@@ -23404,7 +23404,7 @@
           <p:cNvPr id="12" name="item_3_title">
             <a:extLst>
               <a:ext uri="{FF2B5EF4-FFF2-40B4-BE49-F238E27FC236}">
-                <a16:creationId xmlns:a16="http://schemas.microsoft.com/office/drawing/2014/main" id="{59C4FF96-D508-40BB-67C3-ACCD58EC3F55}"/>
+                <a16:creationId xmlns:a16="http://schemas.microsoft.com/office/drawing/2014/main" id="{9BFC28F0-9FE7-0D33-2EE0-66FCFF56C049}"/>
               </a:ext>
             </a:extLst>
           </p:cNvPr>
@@ -23417,8 +23417,8 @@
         </p:nvSpPr>
         <p:spPr>
           <a:xfrm>
-            <a:off x="8330549" y="2457097"/>
-            <a:ext cx="3099843" cy="988847"/>
+            <a:off x="8302023" y="2428843"/>
+            <a:ext cx="3156895" cy="1005466"/>
           </a:xfrm>
           <a:prstGeom prst="rect">
             <a:avLst/>
@@ -23435,7 +23435,7 @@
               </a:spcBef>
               <a:buFontTx/>
               <a:buNone/>
-              <a:defRPr sz="2200" b="1">
+              <a:defRPr sz="2000" b="1">
                 <a:solidFill>
                   <a:schemeClr val="accent1">
                     <a:lumMod val="95000"/>
@@ -23459,7 +23459,7 @@
           <p:cNvPr id="13" name="item_3">
             <a:extLst>
               <a:ext uri="{FF2B5EF4-FFF2-40B4-BE49-F238E27FC236}">
-                <a16:creationId xmlns:a16="http://schemas.microsoft.com/office/drawing/2014/main" id="{E881CC93-0169-7C36-02B0-13A9A23AA3AD}"/>
+                <a16:creationId xmlns:a16="http://schemas.microsoft.com/office/drawing/2014/main" id="{12D6E6D2-EDA4-7858-A449-61B951037126}"/>
               </a:ext>
             </a:extLst>
           </p:cNvPr>
@@ -23472,8 +23472,8 @@
         </p:nvSpPr>
         <p:spPr>
           <a:xfrm>
-            <a:off x="8330549" y="3445944"/>
-            <a:ext cx="3099843" cy="2373233"/>
+            <a:off x="8302023" y="3434310"/>
+            <a:ext cx="3156895" cy="2413119"/>
           </a:xfrm>
           <a:prstGeom prst="rect">
             <a:avLst/>
@@ -23507,7 +23507,7 @@
           <p:cNvPr id="14" name="source">
             <a:extLst>
               <a:ext uri="{FF2B5EF4-FFF2-40B4-BE49-F238E27FC236}">
-                <a16:creationId xmlns:a16="http://schemas.microsoft.com/office/drawing/2014/main" id="{8CC67AAF-DABD-6C7E-DD09-22C45CEF38A5}"/>
+                <a16:creationId xmlns:a16="http://schemas.microsoft.com/office/drawing/2014/main" id="{5A088D18-60C3-BB04-0CEC-452F5E86215A}"/>
               </a:ext>
             </a:extLst>
           </p:cNvPr>
@@ -23564,7 +23564,7 @@
     </p:spTree>
     <p:extLst>
       <p:ext uri="{BB962C8B-B14F-4D97-AF65-F5344CB8AC3E}">
-        <p14:creationId xmlns:p14="http://schemas.microsoft.com/office/powerpoint/2010/main" val="2229579150"/>
+        <p14:creationId xmlns:p14="http://schemas.microsoft.com/office/powerpoint/2010/main" val="3837282541"/>
       </p:ext>
     </p:extLst>
   </p:cSld>
@@ -23714,7 +23714,7 @@
             </a:lvl1pPr>
           </a:lstStyle>
           <a:p>
-            <a:fld id="{69A66F8C-F25E-4B2E-B2E2-0A218D443514}" type="datetimeFigureOut">
+            <a:fld id="{90A7BBED-E6FA-40A6-8A51-59E4B08CD8B8}" type="datetimeFigureOut">
               <a:rPr lang="en-US" smtClean="0"/>
               <a:t>10/3/2026</a:t>
             </a:fld>
@@ -23759,7 +23759,7 @@
             </a:lvl1pPr>
           </a:lstStyle>
           <a:p>
-            <a:fld id="{369B3908-4DF9-450B-8F99-2A754569D7A5}" type="slidenum">
+            <a:fld id="{4F0FE17B-5063-4433-97D2-96EAD825CE6E}" type="slidenum">
               <a:rPr lang="en-US" smtClean="0"/>
               <a:t>‹#›</a:t>
             </a:fld>
@@ -23879,7 +23879,7 @@
           <p:cNvPr id="8" name="item_1_title">
             <a:extLst>
               <a:ext uri="{FF2B5EF4-FFF2-40B4-BE49-F238E27FC236}">
-                <a16:creationId xmlns:a16="http://schemas.microsoft.com/office/drawing/2014/main" id="{241719DB-BCAD-886C-4E12-2030A5D2C18F}"/>
+                <a16:creationId xmlns:a16="http://schemas.microsoft.com/office/drawing/2014/main" id="{E345F748-397C-B4C1-D25A-F44804C5EA45}"/>
               </a:ext>
             </a:extLst>
           </p:cNvPr>
@@ -23892,8 +23892,8 @@
         </p:nvSpPr>
         <p:spPr>
           <a:xfrm>
-            <a:off x="761607" y="2457097"/>
-            <a:ext cx="4992078" cy="988847"/>
+            <a:off x="733082" y="2428843"/>
+            <a:ext cx="5049131" cy="1005466"/>
           </a:xfrm>
         </p:spPr>
         <p:txBody>
@@ -23907,7 +23907,7 @@
               </a:spcBef>
               <a:buFontTx/>
               <a:buNone/>
-              <a:defRPr sz="2200" b="1">
+              <a:defRPr sz="2000" b="1">
                 <a:solidFill>
                   <a:schemeClr val="accent1">
                     <a:lumMod val="95000"/>
@@ -23931,7 +23931,7 @@
           <p:cNvPr id="9" name="item_1">
             <a:extLst>
               <a:ext uri="{FF2B5EF4-FFF2-40B4-BE49-F238E27FC236}">
-                <a16:creationId xmlns:a16="http://schemas.microsoft.com/office/drawing/2014/main" id="{2E9C7B50-8C60-D5FD-6164-D553B00FAD52}"/>
+                <a16:creationId xmlns:a16="http://schemas.microsoft.com/office/drawing/2014/main" id="{A38BC5E5-ACB0-CFA1-30E7-9E95E6828889}"/>
               </a:ext>
             </a:extLst>
           </p:cNvPr>
@@ -23944,8 +23944,8 @@
         </p:nvSpPr>
         <p:spPr>
           <a:xfrm>
-            <a:off x="761607" y="3445944"/>
-            <a:ext cx="4992078" cy="2373233"/>
+            <a:off x="733082" y="3434310"/>
+            <a:ext cx="5049131" cy="2413119"/>
           </a:xfrm>
           <a:prstGeom prst="rect">
             <a:avLst/>
@@ -23979,7 +23979,7 @@
           <p:cNvPr id="10" name="item_2_title">
             <a:extLst>
               <a:ext uri="{FF2B5EF4-FFF2-40B4-BE49-F238E27FC236}">
-                <a16:creationId xmlns:a16="http://schemas.microsoft.com/office/drawing/2014/main" id="{A5993AA8-3BF0-9966-1EB2-DFD3A194A4F3}"/>
+                <a16:creationId xmlns:a16="http://schemas.microsoft.com/office/drawing/2014/main" id="{8BA6DD3B-B6EE-1DAE-8033-6243DC0401CB}"/>
               </a:ext>
             </a:extLst>
           </p:cNvPr>
@@ -23992,8 +23992,8 @@
         </p:nvSpPr>
         <p:spPr>
           <a:xfrm>
-            <a:off x="6438313" y="2457097"/>
-            <a:ext cx="4992078" cy="988847"/>
+            <a:off x="6409788" y="2428843"/>
+            <a:ext cx="5049131" cy="1005466"/>
           </a:xfrm>
           <a:prstGeom prst="rect">
             <a:avLst/>
@@ -24010,7 +24010,7 @@
               </a:spcBef>
               <a:buFontTx/>
               <a:buNone/>
-              <a:defRPr sz="2200" b="1">
+              <a:defRPr sz="2000" b="1">
                 <a:solidFill>
                   <a:schemeClr val="accent1">
                     <a:lumMod val="95000"/>
@@ -24034,7 +24034,7 @@
           <p:cNvPr id="11" name="item_2">
             <a:extLst>
               <a:ext uri="{FF2B5EF4-FFF2-40B4-BE49-F238E27FC236}">
-                <a16:creationId xmlns:a16="http://schemas.microsoft.com/office/drawing/2014/main" id="{74AC4E6C-FF1C-5DF5-88E3-F9775D789A0B}"/>
+                <a16:creationId xmlns:a16="http://schemas.microsoft.com/office/drawing/2014/main" id="{ADF6A01D-3F31-895B-2392-040D8D825A7C}"/>
               </a:ext>
             </a:extLst>
           </p:cNvPr>
@@ -24047,8 +24047,8 @@
         </p:nvSpPr>
         <p:spPr>
           <a:xfrm>
-            <a:off x="6438313" y="3445944"/>
-            <a:ext cx="4992078" cy="2373233"/>
+            <a:off x="6409788" y="3434310"/>
+            <a:ext cx="5049131" cy="2413119"/>
           </a:xfrm>
           <a:prstGeom prst="rect">
             <a:avLst/>
@@ -24082,7 +24082,7 @@
           <p:cNvPr id="12" name="source">
             <a:extLst>
               <a:ext uri="{FF2B5EF4-FFF2-40B4-BE49-F238E27FC236}">
-                <a16:creationId xmlns:a16="http://schemas.microsoft.com/office/drawing/2014/main" id="{CADF64F9-CB37-D517-28A5-02382CF22C28}"/>
+                <a16:creationId xmlns:a16="http://schemas.microsoft.com/office/drawing/2014/main" id="{1BE7FD71-A349-49AA-433B-4DF249E9B29A}"/>
               </a:ext>
             </a:extLst>
           </p:cNvPr>
@@ -24139,7 +24139,7 @@
     </p:spTree>
     <p:extLst>
       <p:ext uri="{BB962C8B-B14F-4D97-AF65-F5344CB8AC3E}">
-        <p14:creationId xmlns:p14="http://schemas.microsoft.com/office/powerpoint/2010/main" val="2875157115"/>
+        <p14:creationId xmlns:p14="http://schemas.microsoft.com/office/powerpoint/2010/main" val="1132650108"/>
       </p:ext>
     </p:extLst>
   </p:cSld>
@@ -24289,7 +24289,7 @@
             </a:lvl1pPr>
           </a:lstStyle>
           <a:p>
-            <a:fld id="{69A66F8C-F25E-4B2E-B2E2-0A218D443514}" type="datetimeFigureOut">
+            <a:fld id="{90A7BBED-E6FA-40A6-8A51-59E4B08CD8B8}" type="datetimeFigureOut">
               <a:rPr lang="en-US" smtClean="0"/>
               <a:t>10/3/2026</a:t>
             </a:fld>
@@ -24334,7 +24334,7 @@
             </a:lvl1pPr>
           </a:lstStyle>
           <a:p>
-            <a:fld id="{369B3908-4DF9-450B-8F99-2A754569D7A5}" type="slidenum">
+            <a:fld id="{4F0FE17B-5063-4433-97D2-96EAD825CE6E}" type="slidenum">
               <a:rPr lang="en-US" smtClean="0"/>
               <a:t>‹#›</a:t>
             </a:fld>
@@ -24454,7 +24454,7 @@
           <p:cNvPr id="8" name="chart">
             <a:extLst>
               <a:ext uri="{FF2B5EF4-FFF2-40B4-BE49-F238E27FC236}">
-                <a16:creationId xmlns:a16="http://schemas.microsoft.com/office/drawing/2014/main" id="{103CECF6-14A4-CC1A-DF5A-D95AB133EF13}"/>
+                <a16:creationId xmlns:a16="http://schemas.microsoft.com/office/drawing/2014/main" id="{DF5453D0-1241-1E3E-BDEC-84B8EB262496}"/>
               </a:ext>
             </a:extLst>
           </p:cNvPr>
@@ -24484,7 +24484,7 @@
           <p:cNvPr id="9" name="body">
             <a:extLst>
               <a:ext uri="{FF2B5EF4-FFF2-40B4-BE49-F238E27FC236}">
-                <a16:creationId xmlns:a16="http://schemas.microsoft.com/office/drawing/2014/main" id="{A02520E1-8800-1EE8-5F0E-CC60E2A04E32}"/>
+                <a16:creationId xmlns:a16="http://schemas.microsoft.com/office/drawing/2014/main" id="{0BD62B22-7B14-1A84-8CEA-1319065B7159}"/>
               </a:ext>
             </a:extLst>
           </p:cNvPr>
@@ -24527,7 +24527,7 @@
           <p:cNvPr id="10" name="source">
             <a:extLst>
               <a:ext uri="{FF2B5EF4-FFF2-40B4-BE49-F238E27FC236}">
-                <a16:creationId xmlns:a16="http://schemas.microsoft.com/office/drawing/2014/main" id="{3818DE63-0E8F-D5DB-001F-033A25DE6B22}"/>
+                <a16:creationId xmlns:a16="http://schemas.microsoft.com/office/drawing/2014/main" id="{89F8ECF3-0DF0-348E-0F91-148FAA3AB6C3}"/>
               </a:ext>
             </a:extLst>
           </p:cNvPr>
@@ -24584,7 +24584,7 @@
     </p:spTree>
     <p:extLst>
       <p:ext uri="{BB962C8B-B14F-4D97-AF65-F5344CB8AC3E}">
-        <p14:creationId xmlns:p14="http://schemas.microsoft.com/office/powerpoint/2010/main" val="1350369450"/>
+        <p14:creationId xmlns:p14="http://schemas.microsoft.com/office/powerpoint/2010/main" val="3868304045"/>
       </p:ext>
     </p:extLst>
   </p:cSld>
@@ -24734,7 +24734,7 @@
             </a:lvl1pPr>
           </a:lstStyle>
           <a:p>
-            <a:fld id="{69A66F8C-F25E-4B2E-B2E2-0A218D443514}" type="datetimeFigureOut">
+            <a:fld id="{90A7BBED-E6FA-40A6-8A51-59E4B08CD8B8}" type="datetimeFigureOut">
               <a:rPr lang="en-US" smtClean="0"/>
               <a:t>10/3/2026</a:t>
             </a:fld>
@@ -24779,7 +24779,7 @@
             </a:lvl1pPr>
           </a:lstStyle>
           <a:p>
-            <a:fld id="{369B3908-4DF9-450B-8F99-2A754569D7A5}" type="slidenum">
+            <a:fld id="{4F0FE17B-5063-4433-97D2-96EAD825CE6E}" type="slidenum">
               <a:rPr lang="en-US" smtClean="0"/>
               <a:t>‹#›</a:t>
             </a:fld>
@@ -24899,7 +24899,7 @@
           <p:cNvPr id="8" name="item_1_title">
             <a:extLst>
               <a:ext uri="{FF2B5EF4-FFF2-40B4-BE49-F238E27FC236}">
-                <a16:creationId xmlns:a16="http://schemas.microsoft.com/office/drawing/2014/main" id="{6E8BF4B1-38F3-792D-0ACC-E59F19A03642}"/>
+                <a16:creationId xmlns:a16="http://schemas.microsoft.com/office/drawing/2014/main" id="{02636107-3127-28A4-35A7-FABA316CCDC9}"/>
               </a:ext>
             </a:extLst>
           </p:cNvPr>
@@ -24912,8 +24912,8 @@
         </p:nvSpPr>
         <p:spPr>
           <a:xfrm>
-            <a:off x="761607" y="2457096"/>
-            <a:ext cx="4992078" cy="394708"/>
+            <a:off x="733082" y="2428844"/>
+            <a:ext cx="5049131" cy="411327"/>
           </a:xfrm>
         </p:spPr>
         <p:txBody>
@@ -24927,7 +24927,7 @@
               </a:spcBef>
               <a:buFontTx/>
               <a:buNone/>
-              <a:defRPr sz="2200" b="1">
+              <a:defRPr sz="2000" b="1">
                 <a:solidFill>
                   <a:schemeClr val="accent1">
                     <a:lumMod val="95000"/>
@@ -24951,7 +24951,7 @@
           <p:cNvPr id="9" name="item_1">
             <a:extLst>
               <a:ext uri="{FF2B5EF4-FFF2-40B4-BE49-F238E27FC236}">
-                <a16:creationId xmlns:a16="http://schemas.microsoft.com/office/drawing/2014/main" id="{62AF5613-BF32-9961-440E-6980E8164D49}"/>
+                <a16:creationId xmlns:a16="http://schemas.microsoft.com/office/drawing/2014/main" id="{92B805EF-7484-55CD-C2A7-2EA329ABD17F}"/>
               </a:ext>
             </a:extLst>
           </p:cNvPr>
@@ -24964,8 +24964,8 @@
         </p:nvSpPr>
         <p:spPr>
           <a:xfrm>
-            <a:off x="761607" y="2851805"/>
-            <a:ext cx="4992078" cy="947299"/>
+            <a:off x="733082" y="2840171"/>
+            <a:ext cx="5049131" cy="987185"/>
           </a:xfrm>
           <a:prstGeom prst="rect">
             <a:avLst/>
@@ -24999,7 +24999,7 @@
           <p:cNvPr id="10" name="item_2_title">
             <a:extLst>
               <a:ext uri="{FF2B5EF4-FFF2-40B4-BE49-F238E27FC236}">
-                <a16:creationId xmlns:a16="http://schemas.microsoft.com/office/drawing/2014/main" id="{919CCD0E-1858-4282-36EA-5CE5A9E4585C}"/>
+                <a16:creationId xmlns:a16="http://schemas.microsoft.com/office/drawing/2014/main" id="{4D9C0957-362F-17AD-E7AE-4423006ACB92}"/>
               </a:ext>
             </a:extLst>
           </p:cNvPr>
@@ -25012,8 +25012,8 @@
         </p:nvSpPr>
         <p:spPr>
           <a:xfrm>
-            <a:off x="6438313" y="2457096"/>
-            <a:ext cx="4992078" cy="394708"/>
+            <a:off x="6409788" y="2428844"/>
+            <a:ext cx="5049131" cy="411327"/>
           </a:xfrm>
           <a:prstGeom prst="rect">
             <a:avLst/>
@@ -25030,7 +25030,7 @@
               </a:spcBef>
               <a:buFontTx/>
               <a:buNone/>
-              <a:defRPr sz="2200" b="1">
+              <a:defRPr sz="2000" b="1">
                 <a:solidFill>
                   <a:schemeClr val="accent1">
                     <a:lumMod val="95000"/>
@@ -25054,7 +25054,7 @@
           <p:cNvPr id="11" name="item_2">
             <a:extLst>
               <a:ext uri="{FF2B5EF4-FFF2-40B4-BE49-F238E27FC236}">
-                <a16:creationId xmlns:a16="http://schemas.microsoft.com/office/drawing/2014/main" id="{F6B89DDA-D3D2-5D17-1280-96F806C62935}"/>
+                <a16:creationId xmlns:a16="http://schemas.microsoft.com/office/drawing/2014/main" id="{6DD54B37-2D22-D30B-F992-A5D31EB918E1}"/>
               </a:ext>
             </a:extLst>
           </p:cNvPr>
@@ -25067,8 +25067,8 @@
         </p:nvSpPr>
         <p:spPr>
           <a:xfrm>
-            <a:off x="6438313" y="2851805"/>
-            <a:ext cx="4992078" cy="947299"/>
+            <a:off x="6409788" y="2840171"/>
+            <a:ext cx="5049131" cy="987185"/>
           </a:xfrm>
           <a:prstGeom prst="rect">
             <a:avLst/>
@@ -25102,7 +25102,7 @@
           <p:cNvPr id="12" name="item_3_title">
             <a:extLst>
               <a:ext uri="{FF2B5EF4-FFF2-40B4-BE49-F238E27FC236}">
-                <a16:creationId xmlns:a16="http://schemas.microsoft.com/office/drawing/2014/main" id="{A8BA81BD-151A-4925-1465-3C28A97058A2}"/>
+                <a16:creationId xmlns:a16="http://schemas.microsoft.com/office/drawing/2014/main" id="{8D1D780F-05FA-7F30-F79E-F3EADFBEADAD}"/>
               </a:ext>
             </a:extLst>
           </p:cNvPr>
@@ -25115,8 +25115,8 @@
         </p:nvSpPr>
         <p:spPr>
           <a:xfrm>
-            <a:off x="761607" y="4477169"/>
-            <a:ext cx="4992078" cy="394708"/>
+            <a:off x="733082" y="4448917"/>
+            <a:ext cx="5049131" cy="411327"/>
           </a:xfrm>
           <a:prstGeom prst="rect">
             <a:avLst/>
@@ -25133,7 +25133,7 @@
               </a:spcBef>
               <a:buFontTx/>
               <a:buNone/>
-              <a:defRPr sz="2200" b="1">
+              <a:defRPr sz="2000" b="1">
                 <a:solidFill>
                   <a:schemeClr val="accent1">
                     <a:lumMod val="95000"/>
@@ -25157,7 +25157,7 @@
           <p:cNvPr id="13" name="item_3">
             <a:extLst>
               <a:ext uri="{FF2B5EF4-FFF2-40B4-BE49-F238E27FC236}">
-                <a16:creationId xmlns:a16="http://schemas.microsoft.com/office/drawing/2014/main" id="{55C69D33-3958-4522-3100-4132684473B9}"/>
+                <a16:creationId xmlns:a16="http://schemas.microsoft.com/office/drawing/2014/main" id="{02877D39-AAB7-4C04-90F5-AF8FB7D5F463}"/>
               </a:ext>
             </a:extLst>
           </p:cNvPr>
@@ -25170,8 +25170,8 @@
         </p:nvSpPr>
         <p:spPr>
           <a:xfrm>
-            <a:off x="761607" y="4871878"/>
-            <a:ext cx="4992078" cy="947299"/>
+            <a:off x="733082" y="4860245"/>
+            <a:ext cx="5049131" cy="987185"/>
           </a:xfrm>
           <a:prstGeom prst="rect">
             <a:avLst/>
@@ -25205,7 +25205,7 @@
           <p:cNvPr id="14" name="item_4_title">
             <a:extLst>
               <a:ext uri="{FF2B5EF4-FFF2-40B4-BE49-F238E27FC236}">
-                <a16:creationId xmlns:a16="http://schemas.microsoft.com/office/drawing/2014/main" id="{186E2142-2377-C849-F7DF-3935D027CA43}"/>
+                <a16:creationId xmlns:a16="http://schemas.microsoft.com/office/drawing/2014/main" id="{D6B00120-1F32-DC98-1C2C-3E1A75E4565D}"/>
               </a:ext>
             </a:extLst>
           </p:cNvPr>
@@ -25218,8 +25218,8 @@
         </p:nvSpPr>
         <p:spPr>
           <a:xfrm>
-            <a:off x="6438313" y="4477169"/>
-            <a:ext cx="4992078" cy="394708"/>
+            <a:off x="6409788" y="4448917"/>
+            <a:ext cx="5049131" cy="411327"/>
           </a:xfrm>
           <a:prstGeom prst="rect">
             <a:avLst/>
@@ -25236,7 +25236,7 @@
               </a:spcBef>
               <a:buFontTx/>
               <a:buNone/>
-              <a:defRPr sz="2200" b="1">
+              <a:defRPr sz="2000" b="1">
                 <a:solidFill>
                   <a:schemeClr val="accent1">
                     <a:lumMod val="95000"/>
@@ -25260,7 +25260,7 @@
           <p:cNvPr id="15" name="item_4">
             <a:extLst>
               <a:ext uri="{FF2B5EF4-FFF2-40B4-BE49-F238E27FC236}">
-                <a16:creationId xmlns:a16="http://schemas.microsoft.com/office/drawing/2014/main" id="{C7817058-C1B5-1A14-7F08-3471D71C1310}"/>
+                <a16:creationId xmlns:a16="http://schemas.microsoft.com/office/drawing/2014/main" id="{44323E82-158B-C796-4007-E9FE37B08487}"/>
               </a:ext>
             </a:extLst>
           </p:cNvPr>
@@ -25273,8 +25273,8 @@
         </p:nvSpPr>
         <p:spPr>
           <a:xfrm>
-            <a:off x="6438313" y="4871878"/>
-            <a:ext cx="4992078" cy="947299"/>
+            <a:off x="6409788" y="4860245"/>
+            <a:ext cx="5049131" cy="987185"/>
           </a:xfrm>
           <a:prstGeom prst="rect">
             <a:avLst/>
@@ -25308,7 +25308,7 @@
           <p:cNvPr id="16" name="source">
             <a:extLst>
               <a:ext uri="{FF2B5EF4-FFF2-40B4-BE49-F238E27FC236}">
-                <a16:creationId xmlns:a16="http://schemas.microsoft.com/office/drawing/2014/main" id="{9E676FD3-FF7C-70BF-D876-3A2D6F4215CE}"/>
+                <a16:creationId xmlns:a16="http://schemas.microsoft.com/office/drawing/2014/main" id="{A3493431-24F6-AAFA-5000-6A2A537E070F}"/>
               </a:ext>
             </a:extLst>
           </p:cNvPr>
@@ -25365,7 +25365,7 @@
     </p:spTree>
     <p:extLst>
       <p:ext uri="{BB962C8B-B14F-4D97-AF65-F5344CB8AC3E}">
-        <p14:creationId xmlns:p14="http://schemas.microsoft.com/office/powerpoint/2010/main" val="2281242584"/>
+        <p14:creationId xmlns:p14="http://schemas.microsoft.com/office/powerpoint/2010/main" val="468703984"/>
       </p:ext>
     </p:extLst>
   </p:cSld>
@@ -25586,7 +25586,7 @@
             </a:lvl1pPr>
           </a:lstStyle>
           <a:p>
-            <a:fld id="{69A66F8C-F25E-4B2E-B2E2-0A218D443514}" type="datetimeFigureOut">
+            <a:fld id="{90A7BBED-E6FA-40A6-8A51-59E4B08CD8B8}" type="datetimeFigureOut">
               <a:rPr lang="en-US" smtClean="0"/>
               <a:t>10/3/2026</a:t>
             </a:fld>
@@ -25633,7 +25633,7 @@
             </a:lvl1pPr>
           </a:lstStyle>
           <a:p>
-            <a:fld id="{369B3908-4DF9-450B-8F99-2A754569D7A5}" type="slidenum">
+            <a:fld id="{4F0FE17B-5063-4433-97D2-96EAD825CE6E}" type="slidenum">
               <a:rPr lang="en-US" smtClean="0"/>
               <a:t>‹#›</a:t>
             </a:fld>
@@ -25644,7 +25644,7 @@
     </p:spTree>
     <p:extLst>
       <p:ext uri="{BB962C8B-B14F-4D97-AF65-F5344CB8AC3E}">
-        <p14:creationId xmlns:p14="http://schemas.microsoft.com/office/powerpoint/2010/main" val="676776345"/>
+        <p14:creationId xmlns:p14="http://schemas.microsoft.com/office/powerpoint/2010/main" val="3932171887"/>
       </p:ext>
     </p:extLst>
   </p:cSld>

--- a/design/templates/modulo/template.pptx
+++ b/design/templates/modulo/template.pptx
@@ -307,9 +307,9 @@
             </a:lvl1pPr>
           </a:lstStyle>
           <a:p>
-            <a:fld id="{90A7BBED-E6FA-40A6-8A51-59E4B08CD8B8}" type="datetimeFigureOut">
+            <a:fld id="{3DE1F4D6-9B94-49E1-9259-C44CF083EB57}" type="datetimeFigureOut">
               <a:rPr lang="en-US" smtClean="0"/>
-              <a:t>10/3/2026</a:t>
+              <a:t>10/4/2026</a:t>
             </a:fld>
             <a:endParaRPr lang="en-US"/>
           </a:p>
@@ -352,7 +352,7 @@
             </a:lvl1pPr>
           </a:lstStyle>
           <a:p>
-            <a:fld id="{4F0FE17B-5063-4433-97D2-96EAD825CE6E}" type="slidenum">
+            <a:fld id="{022853CD-29C7-4A68-BCE3-2ED71C774B8A}" type="slidenum">
               <a:rPr lang="en-US" smtClean="0"/>
               <a:t>‹#›</a:t>
             </a:fld>
@@ -470,7 +470,7 @@
     </p:spTree>
     <p:extLst>
       <p:ext uri="{BB962C8B-B14F-4D97-AF65-F5344CB8AC3E}">
-        <p14:creationId xmlns:p14="http://schemas.microsoft.com/office/powerpoint/2010/main" val="2099681651"/>
+        <p14:creationId xmlns:p14="http://schemas.microsoft.com/office/powerpoint/2010/main" val="4231174890"/>
       </p:ext>
     </p:extLst>
   </p:cSld>
@@ -636,9 +636,9 @@
             </a:lvl1pPr>
           </a:lstStyle>
           <a:p>
-            <a:fld id="{90A7BBED-E6FA-40A6-8A51-59E4B08CD8B8}" type="datetimeFigureOut">
+            <a:fld id="{3DE1F4D6-9B94-49E1-9259-C44CF083EB57}" type="datetimeFigureOut">
               <a:rPr lang="en-US" smtClean="0"/>
-              <a:t>10/3/2026</a:t>
+              <a:t>10/4/2026</a:t>
             </a:fld>
             <a:endParaRPr lang="en-US"/>
           </a:p>
@@ -681,7 +681,7 @@
             </a:lvl1pPr>
           </a:lstStyle>
           <a:p>
-            <a:fld id="{4F0FE17B-5063-4433-97D2-96EAD825CE6E}" type="slidenum">
+            <a:fld id="{022853CD-29C7-4A68-BCE3-2ED71C774B8A}" type="slidenum">
               <a:rPr lang="en-US" smtClean="0"/>
               <a:t>‹#›</a:t>
             </a:fld>
@@ -801,7 +801,7 @@
           <p:cNvPr id="8" name="body">
             <a:extLst>
               <a:ext uri="{FF2B5EF4-FFF2-40B4-BE49-F238E27FC236}">
-                <a16:creationId xmlns:a16="http://schemas.microsoft.com/office/drawing/2014/main" id="{02E64055-1583-12CC-2009-AD180AB086BF}"/>
+                <a16:creationId xmlns:a16="http://schemas.microsoft.com/office/drawing/2014/main" id="{AB52E163-3663-A201-BAE9-3ACDEDE3A782}"/>
               </a:ext>
             </a:extLst>
           </p:cNvPr>
@@ -815,7 +815,7 @@
         <p:spPr>
           <a:xfrm>
             <a:off x="533398" y="2231074"/>
-            <a:ext cx="11125202" cy="3814124"/>
+            <a:ext cx="9728202" cy="3814124"/>
           </a:xfrm>
         </p:spPr>
         <p:txBody>
@@ -841,7 +841,7 @@
           <p:cNvPr id="9" name="source">
             <a:extLst>
               <a:ext uri="{FF2B5EF4-FFF2-40B4-BE49-F238E27FC236}">
-                <a16:creationId xmlns:a16="http://schemas.microsoft.com/office/drawing/2014/main" id="{4BC19463-BA3C-969C-D041-6924382E0ED0}"/>
+                <a16:creationId xmlns:a16="http://schemas.microsoft.com/office/drawing/2014/main" id="{1B7BCA9C-DCE2-5875-7A16-56AD8AA0679F}"/>
               </a:ext>
             </a:extLst>
           </p:cNvPr>
@@ -898,7 +898,7 @@
     </p:spTree>
     <p:extLst>
       <p:ext uri="{BB962C8B-B14F-4D97-AF65-F5344CB8AC3E}">
-        <p14:creationId xmlns:p14="http://schemas.microsoft.com/office/powerpoint/2010/main" val="1541121241"/>
+        <p14:creationId xmlns:p14="http://schemas.microsoft.com/office/powerpoint/2010/main" val="3773317909"/>
       </p:ext>
     </p:extLst>
   </p:cSld>
@@ -1048,9 +1048,9 @@
             </a:lvl1pPr>
           </a:lstStyle>
           <a:p>
-            <a:fld id="{90A7BBED-E6FA-40A6-8A51-59E4B08CD8B8}" type="datetimeFigureOut">
+            <a:fld id="{3DE1F4D6-9B94-49E1-9259-C44CF083EB57}" type="datetimeFigureOut">
               <a:rPr lang="en-US" smtClean="0"/>
-              <a:t>10/3/2026</a:t>
+              <a:t>10/4/2026</a:t>
             </a:fld>
             <a:endParaRPr lang="en-US"/>
           </a:p>
@@ -1093,7 +1093,7 @@
             </a:lvl1pPr>
           </a:lstStyle>
           <a:p>
-            <a:fld id="{4F0FE17B-5063-4433-97D2-96EAD825CE6E}" type="slidenum">
+            <a:fld id="{022853CD-29C7-4A68-BCE3-2ED71C774B8A}" type="slidenum">
               <a:rPr lang="en-US" smtClean="0"/>
               <a:t>‹#›</a:t>
             </a:fld>
@@ -1213,7 +1213,7 @@
           <p:cNvPr id="8" name="body">
             <a:extLst>
               <a:ext uri="{FF2B5EF4-FFF2-40B4-BE49-F238E27FC236}">
-                <a16:creationId xmlns:a16="http://schemas.microsoft.com/office/drawing/2014/main" id="{B2E79E62-D748-F83F-F1D6-E04B645C5C4A}"/>
+                <a16:creationId xmlns:a16="http://schemas.microsoft.com/office/drawing/2014/main" id="{B29D50D1-82AF-D53E-707D-CFDB59161A79}"/>
               </a:ext>
             </a:extLst>
           </p:cNvPr>
@@ -1227,7 +1227,7 @@
         <p:spPr>
           <a:xfrm>
             <a:off x="533398" y="2231074"/>
-            <a:ext cx="11125202" cy="3814124"/>
+            <a:ext cx="9728202" cy="3814124"/>
           </a:xfrm>
         </p:spPr>
         <p:txBody>
@@ -1256,7 +1256,7 @@
     </p:spTree>
     <p:extLst>
       <p:ext uri="{BB962C8B-B14F-4D97-AF65-F5344CB8AC3E}">
-        <p14:creationId xmlns:p14="http://schemas.microsoft.com/office/powerpoint/2010/main" val="1259221280"/>
+        <p14:creationId xmlns:p14="http://schemas.microsoft.com/office/powerpoint/2010/main" val="2179612173"/>
       </p:ext>
     </p:extLst>
   </p:cSld>
@@ -1448,7 +1448,7 @@
           <p:cNvPr id="8" name="section_number">
             <a:extLst>
               <a:ext uri="{FF2B5EF4-FFF2-40B4-BE49-F238E27FC236}">
-                <a16:creationId xmlns:a16="http://schemas.microsoft.com/office/drawing/2014/main" id="{9C351877-B7DE-5FE6-E513-88FBC3ECA59E}"/>
+                <a16:creationId xmlns:a16="http://schemas.microsoft.com/office/drawing/2014/main" id="{90AE172E-E626-4F7B-A62F-E50981513E23}"/>
               </a:ext>
             </a:extLst>
           </p:cNvPr>
@@ -1501,7 +1501,7 @@
           <p:cNvPr id="9" name="subtitle">
             <a:extLst>
               <a:ext uri="{FF2B5EF4-FFF2-40B4-BE49-F238E27FC236}">
-                <a16:creationId xmlns:a16="http://schemas.microsoft.com/office/drawing/2014/main" id="{1A576F68-2FAD-749D-1932-331AAFB0DBDF}"/>
+                <a16:creationId xmlns:a16="http://schemas.microsoft.com/office/drawing/2014/main" id="{7F7421F6-7B25-8E06-F029-E0F32A893D05}"/>
               </a:ext>
             </a:extLst>
           </p:cNvPr>
@@ -1553,7 +1553,7 @@
           <p:cNvPr id="10" name="pattern">
             <a:extLst>
               <a:ext uri="{FF2B5EF4-FFF2-40B4-BE49-F238E27FC236}">
-                <a16:creationId xmlns:a16="http://schemas.microsoft.com/office/drawing/2014/main" id="{7FBA572F-148C-9804-719D-6F1C77A83748}"/>
+                <a16:creationId xmlns:a16="http://schemas.microsoft.com/office/drawing/2014/main" id="{70191A93-AFB5-6EB6-B604-B9ED68ECCBDC}"/>
               </a:ext>
             </a:extLst>
           </p:cNvPr>
@@ -1610,7 +1610,7 @@
           <p:cNvPr id="11" name="pattern">
             <a:extLst>
               <a:ext uri="{FF2B5EF4-FFF2-40B4-BE49-F238E27FC236}">
-                <a16:creationId xmlns:a16="http://schemas.microsoft.com/office/drawing/2014/main" id="{0E647454-7C98-C50D-9801-4F4E14D35B99}"/>
+                <a16:creationId xmlns:a16="http://schemas.microsoft.com/office/drawing/2014/main" id="{63D7197E-A3C8-9E87-AA17-2954B976355F}"/>
               </a:ext>
             </a:extLst>
           </p:cNvPr>
@@ -1667,7 +1667,7 @@
           <p:cNvPr id="12" name="pattern">
             <a:extLst>
               <a:ext uri="{FF2B5EF4-FFF2-40B4-BE49-F238E27FC236}">
-                <a16:creationId xmlns:a16="http://schemas.microsoft.com/office/drawing/2014/main" id="{9FC3BBE6-FDB7-57A3-8E37-61D31F19B30D}"/>
+                <a16:creationId xmlns:a16="http://schemas.microsoft.com/office/drawing/2014/main" id="{EACA0A0B-3F6F-84F6-AC10-DA785A93D64C}"/>
               </a:ext>
             </a:extLst>
           </p:cNvPr>
@@ -1724,7 +1724,7 @@
           <p:cNvPr id="13" name="pattern">
             <a:extLst>
               <a:ext uri="{FF2B5EF4-FFF2-40B4-BE49-F238E27FC236}">
-                <a16:creationId xmlns:a16="http://schemas.microsoft.com/office/drawing/2014/main" id="{AC3902D3-1F87-5181-1FF1-72DA0B55A847}"/>
+                <a16:creationId xmlns:a16="http://schemas.microsoft.com/office/drawing/2014/main" id="{A89306DA-A110-26AB-02A4-9EDE0B8560E9}"/>
               </a:ext>
             </a:extLst>
           </p:cNvPr>
@@ -1781,7 +1781,7 @@
           <p:cNvPr id="14" name="pattern">
             <a:extLst>
               <a:ext uri="{FF2B5EF4-FFF2-40B4-BE49-F238E27FC236}">
-                <a16:creationId xmlns:a16="http://schemas.microsoft.com/office/drawing/2014/main" id="{A4A0BC35-2CEA-F84C-BB25-10B3EB5DE983}"/>
+                <a16:creationId xmlns:a16="http://schemas.microsoft.com/office/drawing/2014/main" id="{1FE8B49F-429F-1CB8-A77F-6CDB377ED2E8}"/>
               </a:ext>
             </a:extLst>
           </p:cNvPr>
@@ -1838,7 +1838,7 @@
           <p:cNvPr id="15" name="pattern">
             <a:extLst>
               <a:ext uri="{FF2B5EF4-FFF2-40B4-BE49-F238E27FC236}">
-                <a16:creationId xmlns:a16="http://schemas.microsoft.com/office/drawing/2014/main" id="{FEF8DAD2-819F-4F35-7508-705EFF9DD6F1}"/>
+                <a16:creationId xmlns:a16="http://schemas.microsoft.com/office/drawing/2014/main" id="{EB17BBD9-BEDE-E302-A682-629F09760840}"/>
               </a:ext>
             </a:extLst>
           </p:cNvPr>
@@ -1895,7 +1895,7 @@
           <p:cNvPr id="16" name="pattern">
             <a:extLst>
               <a:ext uri="{FF2B5EF4-FFF2-40B4-BE49-F238E27FC236}">
-                <a16:creationId xmlns:a16="http://schemas.microsoft.com/office/drawing/2014/main" id="{252E7667-DC2F-6000-A894-316702229319}"/>
+                <a16:creationId xmlns:a16="http://schemas.microsoft.com/office/drawing/2014/main" id="{9982AF16-FEE5-85EF-1120-D0811EE51495}"/>
               </a:ext>
             </a:extLst>
           </p:cNvPr>
@@ -1952,7 +1952,7 @@
           <p:cNvPr id="17" name="pattern">
             <a:extLst>
               <a:ext uri="{FF2B5EF4-FFF2-40B4-BE49-F238E27FC236}">
-                <a16:creationId xmlns:a16="http://schemas.microsoft.com/office/drawing/2014/main" id="{7DDE64AD-AE12-B688-251C-CB0087FFDA82}"/>
+                <a16:creationId xmlns:a16="http://schemas.microsoft.com/office/drawing/2014/main" id="{538F4D3C-634B-6F49-38BB-BA3CFE58D18B}"/>
               </a:ext>
             </a:extLst>
           </p:cNvPr>
@@ -2009,7 +2009,7 @@
           <p:cNvPr id="18" name="pattern">
             <a:extLst>
               <a:ext uri="{FF2B5EF4-FFF2-40B4-BE49-F238E27FC236}">
-                <a16:creationId xmlns:a16="http://schemas.microsoft.com/office/drawing/2014/main" id="{923CF5ED-F549-CCDE-2E76-0A33D76275AC}"/>
+                <a16:creationId xmlns:a16="http://schemas.microsoft.com/office/drawing/2014/main" id="{9818D4CB-A672-BBFF-C0EB-16BA09347D0C}"/>
               </a:ext>
             </a:extLst>
           </p:cNvPr>
@@ -2066,7 +2066,7 @@
           <p:cNvPr id="19" name="pattern">
             <a:extLst>
               <a:ext uri="{FF2B5EF4-FFF2-40B4-BE49-F238E27FC236}">
-                <a16:creationId xmlns:a16="http://schemas.microsoft.com/office/drawing/2014/main" id="{768978EF-2694-3035-9885-FBDEA3CBC752}"/>
+                <a16:creationId xmlns:a16="http://schemas.microsoft.com/office/drawing/2014/main" id="{061D4614-ECD7-48A8-DF81-51C9F48908E3}"/>
               </a:ext>
             </a:extLst>
           </p:cNvPr>
@@ -2123,7 +2123,7 @@
           <p:cNvPr id="20" name="pattern">
             <a:extLst>
               <a:ext uri="{FF2B5EF4-FFF2-40B4-BE49-F238E27FC236}">
-                <a16:creationId xmlns:a16="http://schemas.microsoft.com/office/drawing/2014/main" id="{84501BC4-F6C0-0FA4-FB2E-A259FC314284}"/>
+                <a16:creationId xmlns:a16="http://schemas.microsoft.com/office/drawing/2014/main" id="{FEF7803E-0FE6-AB45-400E-308DF85CBE17}"/>
               </a:ext>
             </a:extLst>
           </p:cNvPr>
@@ -2180,7 +2180,7 @@
           <p:cNvPr id="21" name="pattern">
             <a:extLst>
               <a:ext uri="{FF2B5EF4-FFF2-40B4-BE49-F238E27FC236}">
-                <a16:creationId xmlns:a16="http://schemas.microsoft.com/office/drawing/2014/main" id="{730CA8BA-CE1E-8033-6CAF-2BA61FF966CB}"/>
+                <a16:creationId xmlns:a16="http://schemas.microsoft.com/office/drawing/2014/main" id="{65CC3B35-CAC2-9A03-37ED-E7EAE4661C7C}"/>
               </a:ext>
             </a:extLst>
           </p:cNvPr>
@@ -2237,7 +2237,7 @@
           <p:cNvPr id="22" name="pattern">
             <a:extLst>
               <a:ext uri="{FF2B5EF4-FFF2-40B4-BE49-F238E27FC236}">
-                <a16:creationId xmlns:a16="http://schemas.microsoft.com/office/drawing/2014/main" id="{0CABA232-1275-E5AF-A9BD-DEE3EF5575BB}"/>
+                <a16:creationId xmlns:a16="http://schemas.microsoft.com/office/drawing/2014/main" id="{9D839F77-7346-4505-E580-12135DCF6749}"/>
               </a:ext>
             </a:extLst>
           </p:cNvPr>
@@ -2294,7 +2294,7 @@
           <p:cNvPr id="23" name="pattern">
             <a:extLst>
               <a:ext uri="{FF2B5EF4-FFF2-40B4-BE49-F238E27FC236}">
-                <a16:creationId xmlns:a16="http://schemas.microsoft.com/office/drawing/2014/main" id="{43481D2A-491F-FF56-B78D-C0644F95558E}"/>
+                <a16:creationId xmlns:a16="http://schemas.microsoft.com/office/drawing/2014/main" id="{826A30B2-9904-F991-E8F0-EC3FFBAEF759}"/>
               </a:ext>
             </a:extLst>
           </p:cNvPr>
@@ -2351,7 +2351,7 @@
           <p:cNvPr id="24" name="pattern">
             <a:extLst>
               <a:ext uri="{FF2B5EF4-FFF2-40B4-BE49-F238E27FC236}">
-                <a16:creationId xmlns:a16="http://schemas.microsoft.com/office/drawing/2014/main" id="{D5D4EC0D-DBFD-3C88-9C71-CE1BE0B42F27}"/>
+                <a16:creationId xmlns:a16="http://schemas.microsoft.com/office/drawing/2014/main" id="{D4A50D30-1307-9AC9-FE10-11510F18233F}"/>
               </a:ext>
             </a:extLst>
           </p:cNvPr>
@@ -2408,7 +2408,7 @@
           <p:cNvPr id="25" name="pattern">
             <a:extLst>
               <a:ext uri="{FF2B5EF4-FFF2-40B4-BE49-F238E27FC236}">
-                <a16:creationId xmlns:a16="http://schemas.microsoft.com/office/drawing/2014/main" id="{D76EBD76-30E4-4F56-6920-4CD5D87C9DF5}"/>
+                <a16:creationId xmlns:a16="http://schemas.microsoft.com/office/drawing/2014/main" id="{009B514C-562C-821A-2597-1EB3CA860D20}"/>
               </a:ext>
             </a:extLst>
           </p:cNvPr>
@@ -2465,7 +2465,7 @@
           <p:cNvPr id="26" name="pattern">
             <a:extLst>
               <a:ext uri="{FF2B5EF4-FFF2-40B4-BE49-F238E27FC236}">
-                <a16:creationId xmlns:a16="http://schemas.microsoft.com/office/drawing/2014/main" id="{D3A5D65A-A460-8EB2-AFEF-8DBC91F9DEC2}"/>
+                <a16:creationId xmlns:a16="http://schemas.microsoft.com/office/drawing/2014/main" id="{B2D7D46B-BB9A-6E9E-624D-093E2B73AC12}"/>
               </a:ext>
             </a:extLst>
           </p:cNvPr>
@@ -2522,7 +2522,7 @@
           <p:cNvPr id="27" name="pattern">
             <a:extLst>
               <a:ext uri="{FF2B5EF4-FFF2-40B4-BE49-F238E27FC236}">
-                <a16:creationId xmlns:a16="http://schemas.microsoft.com/office/drawing/2014/main" id="{E3AA09C1-B1BE-3481-C989-EBBDA9791627}"/>
+                <a16:creationId xmlns:a16="http://schemas.microsoft.com/office/drawing/2014/main" id="{D82922AB-F002-E5C7-5C0F-DC2837279134}"/>
               </a:ext>
             </a:extLst>
           </p:cNvPr>
@@ -2579,7 +2579,7 @@
           <p:cNvPr id="28" name="pattern">
             <a:extLst>
               <a:ext uri="{FF2B5EF4-FFF2-40B4-BE49-F238E27FC236}">
-                <a16:creationId xmlns:a16="http://schemas.microsoft.com/office/drawing/2014/main" id="{E2CD535C-A7FD-C551-1360-83A95991EDFF}"/>
+                <a16:creationId xmlns:a16="http://schemas.microsoft.com/office/drawing/2014/main" id="{BDA43CFF-229C-C76F-7C2A-F1ACFB13C56D}"/>
               </a:ext>
             </a:extLst>
           </p:cNvPr>
@@ -2636,7 +2636,7 @@
           <p:cNvPr id="29" name="pattern">
             <a:extLst>
               <a:ext uri="{FF2B5EF4-FFF2-40B4-BE49-F238E27FC236}">
-                <a16:creationId xmlns:a16="http://schemas.microsoft.com/office/drawing/2014/main" id="{51071316-718C-F909-5C92-0946EF6F7652}"/>
+                <a16:creationId xmlns:a16="http://schemas.microsoft.com/office/drawing/2014/main" id="{B532B364-3702-88EB-0DD8-C23CF75440AF}"/>
               </a:ext>
             </a:extLst>
           </p:cNvPr>
@@ -2693,7 +2693,7 @@
           <p:cNvPr id="30" name="pattern">
             <a:extLst>
               <a:ext uri="{FF2B5EF4-FFF2-40B4-BE49-F238E27FC236}">
-                <a16:creationId xmlns:a16="http://schemas.microsoft.com/office/drawing/2014/main" id="{128EC606-5085-0198-D4BC-D867D928D078}"/>
+                <a16:creationId xmlns:a16="http://schemas.microsoft.com/office/drawing/2014/main" id="{7340A704-1F3B-EB45-59A0-534D1779EB3E}"/>
               </a:ext>
             </a:extLst>
           </p:cNvPr>
@@ -2750,7 +2750,7 @@
           <p:cNvPr id="31" name="pattern">
             <a:extLst>
               <a:ext uri="{FF2B5EF4-FFF2-40B4-BE49-F238E27FC236}">
-                <a16:creationId xmlns:a16="http://schemas.microsoft.com/office/drawing/2014/main" id="{956DD1B7-7103-3BBF-5170-60BE0188EFBA}"/>
+                <a16:creationId xmlns:a16="http://schemas.microsoft.com/office/drawing/2014/main" id="{79C7A331-FFB7-F4A7-1769-77400366409B}"/>
               </a:ext>
             </a:extLst>
           </p:cNvPr>
@@ -2807,7 +2807,7 @@
           <p:cNvPr id="32" name="pattern">
             <a:extLst>
               <a:ext uri="{FF2B5EF4-FFF2-40B4-BE49-F238E27FC236}">
-                <a16:creationId xmlns:a16="http://schemas.microsoft.com/office/drawing/2014/main" id="{C34B66E3-665E-5AC8-A8B6-FBF3F0E0F98F}"/>
+                <a16:creationId xmlns:a16="http://schemas.microsoft.com/office/drawing/2014/main" id="{0F52DFD6-A21B-E60C-5754-DA2C176BB4B4}"/>
               </a:ext>
             </a:extLst>
           </p:cNvPr>
@@ -2864,7 +2864,7 @@
           <p:cNvPr id="33" name="pattern">
             <a:extLst>
               <a:ext uri="{FF2B5EF4-FFF2-40B4-BE49-F238E27FC236}">
-                <a16:creationId xmlns:a16="http://schemas.microsoft.com/office/drawing/2014/main" id="{2BEC6407-A704-B3B7-906E-D776407C88C2}"/>
+                <a16:creationId xmlns:a16="http://schemas.microsoft.com/office/drawing/2014/main" id="{5CD2E4E9-447B-4E19-199F-76E2DF2F68C3}"/>
               </a:ext>
             </a:extLst>
           </p:cNvPr>
@@ -2921,7 +2921,7 @@
           <p:cNvPr id="34" name="pattern">
             <a:extLst>
               <a:ext uri="{FF2B5EF4-FFF2-40B4-BE49-F238E27FC236}">
-                <a16:creationId xmlns:a16="http://schemas.microsoft.com/office/drawing/2014/main" id="{60AEEC9F-A063-9043-E4E5-07DCAAFA66DA}"/>
+                <a16:creationId xmlns:a16="http://schemas.microsoft.com/office/drawing/2014/main" id="{86368702-E53C-EE3F-F442-158791CE7BBF}"/>
               </a:ext>
             </a:extLst>
           </p:cNvPr>
@@ -2978,7 +2978,7 @@
           <p:cNvPr id="35" name="pattern">
             <a:extLst>
               <a:ext uri="{FF2B5EF4-FFF2-40B4-BE49-F238E27FC236}">
-                <a16:creationId xmlns:a16="http://schemas.microsoft.com/office/drawing/2014/main" id="{A8BA0256-0A35-AF95-7261-FF1C723D6741}"/>
+                <a16:creationId xmlns:a16="http://schemas.microsoft.com/office/drawing/2014/main" id="{DBB562F0-E723-0EF2-FACA-CF2C0233DC75}"/>
               </a:ext>
             </a:extLst>
           </p:cNvPr>
@@ -3035,7 +3035,7 @@
           <p:cNvPr id="36" name="pattern">
             <a:extLst>
               <a:ext uri="{FF2B5EF4-FFF2-40B4-BE49-F238E27FC236}">
-                <a16:creationId xmlns:a16="http://schemas.microsoft.com/office/drawing/2014/main" id="{9422C96A-90DD-3ECB-6A9F-F0A2B0DD9449}"/>
+                <a16:creationId xmlns:a16="http://schemas.microsoft.com/office/drawing/2014/main" id="{BEB25B21-8B68-68EC-0913-7AE92E323378}"/>
               </a:ext>
             </a:extLst>
           </p:cNvPr>
@@ -3092,7 +3092,7 @@
           <p:cNvPr id="37" name="pattern">
             <a:extLst>
               <a:ext uri="{FF2B5EF4-FFF2-40B4-BE49-F238E27FC236}">
-                <a16:creationId xmlns:a16="http://schemas.microsoft.com/office/drawing/2014/main" id="{33D23F28-0D49-6ED6-8D7B-1FCB069C0BBD}"/>
+                <a16:creationId xmlns:a16="http://schemas.microsoft.com/office/drawing/2014/main" id="{E1D4F4B0-4B2D-9538-8779-62076DF3A9AF}"/>
               </a:ext>
             </a:extLst>
           </p:cNvPr>
@@ -3149,7 +3149,7 @@
           <p:cNvPr id="38" name="pattern">
             <a:extLst>
               <a:ext uri="{FF2B5EF4-FFF2-40B4-BE49-F238E27FC236}">
-                <a16:creationId xmlns:a16="http://schemas.microsoft.com/office/drawing/2014/main" id="{FBE2637C-6148-EDD1-E70E-AE4C8E054E0D}"/>
+                <a16:creationId xmlns:a16="http://schemas.microsoft.com/office/drawing/2014/main" id="{38F1BE45-B47A-69AC-922C-BD2ED1F7011F}"/>
               </a:ext>
             </a:extLst>
           </p:cNvPr>
@@ -3206,7 +3206,7 @@
           <p:cNvPr id="39" name="pattern">
             <a:extLst>
               <a:ext uri="{FF2B5EF4-FFF2-40B4-BE49-F238E27FC236}">
-                <a16:creationId xmlns:a16="http://schemas.microsoft.com/office/drawing/2014/main" id="{AD2F8F7C-97C6-F2D0-2E00-D4464FA208EB}"/>
+                <a16:creationId xmlns:a16="http://schemas.microsoft.com/office/drawing/2014/main" id="{68FC317D-5B5A-9AF3-CF1E-643639FC05B8}"/>
               </a:ext>
             </a:extLst>
           </p:cNvPr>
@@ -3263,7 +3263,7 @@
           <p:cNvPr id="40" name="pattern">
             <a:extLst>
               <a:ext uri="{FF2B5EF4-FFF2-40B4-BE49-F238E27FC236}">
-                <a16:creationId xmlns:a16="http://schemas.microsoft.com/office/drawing/2014/main" id="{7E7F3628-0958-7CE8-DEA3-6577950532DD}"/>
+                <a16:creationId xmlns:a16="http://schemas.microsoft.com/office/drawing/2014/main" id="{DD6120CD-9EB2-5D78-4038-45CCBD612989}"/>
               </a:ext>
             </a:extLst>
           </p:cNvPr>
@@ -3320,7 +3320,7 @@
           <p:cNvPr id="41" name="pattern">
             <a:extLst>
               <a:ext uri="{FF2B5EF4-FFF2-40B4-BE49-F238E27FC236}">
-                <a16:creationId xmlns:a16="http://schemas.microsoft.com/office/drawing/2014/main" id="{7F2DABDF-0EE1-369B-862C-3152EC9B7094}"/>
+                <a16:creationId xmlns:a16="http://schemas.microsoft.com/office/drawing/2014/main" id="{F208C570-477C-1259-698E-DBF46D320AAC}"/>
               </a:ext>
             </a:extLst>
           </p:cNvPr>
@@ -3377,7 +3377,7 @@
           <p:cNvPr id="42" name="pattern">
             <a:extLst>
               <a:ext uri="{FF2B5EF4-FFF2-40B4-BE49-F238E27FC236}">
-                <a16:creationId xmlns:a16="http://schemas.microsoft.com/office/drawing/2014/main" id="{E4631F8B-1249-F3EF-8008-10F818CFBD4E}"/>
+                <a16:creationId xmlns:a16="http://schemas.microsoft.com/office/drawing/2014/main" id="{91BDC506-D3F2-D293-47F6-4C522A5E6419}"/>
               </a:ext>
             </a:extLst>
           </p:cNvPr>
@@ -3434,7 +3434,7 @@
           <p:cNvPr id="43" name="pattern">
             <a:extLst>
               <a:ext uri="{FF2B5EF4-FFF2-40B4-BE49-F238E27FC236}">
-                <a16:creationId xmlns:a16="http://schemas.microsoft.com/office/drawing/2014/main" id="{73EF6172-F6DF-4BF2-CAE5-E5EC42781C5E}"/>
+                <a16:creationId xmlns:a16="http://schemas.microsoft.com/office/drawing/2014/main" id="{D69458FA-C0D3-C4CB-99DB-1EE9FFAE4224}"/>
               </a:ext>
             </a:extLst>
           </p:cNvPr>
@@ -3491,7 +3491,7 @@
           <p:cNvPr id="44" name="pattern">
             <a:extLst>
               <a:ext uri="{FF2B5EF4-FFF2-40B4-BE49-F238E27FC236}">
-                <a16:creationId xmlns:a16="http://schemas.microsoft.com/office/drawing/2014/main" id="{4B319A41-8FA0-89CF-BD27-A664E1994EB3}"/>
+                <a16:creationId xmlns:a16="http://schemas.microsoft.com/office/drawing/2014/main" id="{4D41A7E5-603B-918D-1E68-32CF8D003107}"/>
               </a:ext>
             </a:extLst>
           </p:cNvPr>
@@ -3548,7 +3548,7 @@
           <p:cNvPr id="45" name="pattern">
             <a:extLst>
               <a:ext uri="{FF2B5EF4-FFF2-40B4-BE49-F238E27FC236}">
-                <a16:creationId xmlns:a16="http://schemas.microsoft.com/office/drawing/2014/main" id="{0F8D60B7-114D-5F4D-3AD1-7D856FF6C740}"/>
+                <a16:creationId xmlns:a16="http://schemas.microsoft.com/office/drawing/2014/main" id="{DA853575-490B-8A32-4CEA-5A9C8BA8CCFB}"/>
               </a:ext>
             </a:extLst>
           </p:cNvPr>
@@ -3605,7 +3605,7 @@
           <p:cNvPr id="46" name="pattern">
             <a:extLst>
               <a:ext uri="{FF2B5EF4-FFF2-40B4-BE49-F238E27FC236}">
-                <a16:creationId xmlns:a16="http://schemas.microsoft.com/office/drawing/2014/main" id="{C1C17510-44C4-2CB7-566E-84D027435A79}"/>
+                <a16:creationId xmlns:a16="http://schemas.microsoft.com/office/drawing/2014/main" id="{D6E2722C-8203-4C9F-D502-0B1B2E5915F0}"/>
               </a:ext>
             </a:extLst>
           </p:cNvPr>
@@ -3662,7 +3662,7 @@
           <p:cNvPr id="47" name="pattern">
             <a:extLst>
               <a:ext uri="{FF2B5EF4-FFF2-40B4-BE49-F238E27FC236}">
-                <a16:creationId xmlns:a16="http://schemas.microsoft.com/office/drawing/2014/main" id="{B8C5E26C-E1FF-8991-7C5E-6D70ECDFF46C}"/>
+                <a16:creationId xmlns:a16="http://schemas.microsoft.com/office/drawing/2014/main" id="{050183C9-7D2D-621F-E2ED-1094DA0D5933}"/>
               </a:ext>
             </a:extLst>
           </p:cNvPr>
@@ -3719,7 +3719,7 @@
           <p:cNvPr id="48" name="pattern">
             <a:extLst>
               <a:ext uri="{FF2B5EF4-FFF2-40B4-BE49-F238E27FC236}">
-                <a16:creationId xmlns:a16="http://schemas.microsoft.com/office/drawing/2014/main" id="{F4D245CB-2D13-D30A-968E-CD7626213BB5}"/>
+                <a16:creationId xmlns:a16="http://schemas.microsoft.com/office/drawing/2014/main" id="{0EE5E5AF-06E6-2873-4CA3-13340BF62AC8}"/>
               </a:ext>
             </a:extLst>
           </p:cNvPr>
@@ -3776,7 +3776,7 @@
           <p:cNvPr id="49" name="pattern">
             <a:extLst>
               <a:ext uri="{FF2B5EF4-FFF2-40B4-BE49-F238E27FC236}">
-                <a16:creationId xmlns:a16="http://schemas.microsoft.com/office/drawing/2014/main" id="{12EC89F8-821E-5339-249D-E0CE0835708D}"/>
+                <a16:creationId xmlns:a16="http://schemas.microsoft.com/office/drawing/2014/main" id="{F25C70DB-D41C-1684-6062-860C5EFF9DA4}"/>
               </a:ext>
             </a:extLst>
           </p:cNvPr>
@@ -3833,7 +3833,7 @@
           <p:cNvPr id="50" name="pattern">
             <a:extLst>
               <a:ext uri="{FF2B5EF4-FFF2-40B4-BE49-F238E27FC236}">
-                <a16:creationId xmlns:a16="http://schemas.microsoft.com/office/drawing/2014/main" id="{E8C8E51A-7C7F-F306-3F01-129324457C67}"/>
+                <a16:creationId xmlns:a16="http://schemas.microsoft.com/office/drawing/2014/main" id="{7459D36B-C86C-E370-8586-B370B4F503B9}"/>
               </a:ext>
             </a:extLst>
           </p:cNvPr>
@@ -3890,7 +3890,7 @@
           <p:cNvPr id="51" name="pattern">
             <a:extLst>
               <a:ext uri="{FF2B5EF4-FFF2-40B4-BE49-F238E27FC236}">
-                <a16:creationId xmlns:a16="http://schemas.microsoft.com/office/drawing/2014/main" id="{99014ECA-7AAD-1FE1-AA8B-675F1C8BAE5E}"/>
+                <a16:creationId xmlns:a16="http://schemas.microsoft.com/office/drawing/2014/main" id="{BD9F22DD-72F0-AD8B-E3CE-18120366D72F}"/>
               </a:ext>
             </a:extLst>
           </p:cNvPr>
@@ -3947,7 +3947,7 @@
           <p:cNvPr id="52" name="pattern">
             <a:extLst>
               <a:ext uri="{FF2B5EF4-FFF2-40B4-BE49-F238E27FC236}">
-                <a16:creationId xmlns:a16="http://schemas.microsoft.com/office/drawing/2014/main" id="{9FED3CF9-23D4-4CD9-112C-7DB98E9446E0}"/>
+                <a16:creationId xmlns:a16="http://schemas.microsoft.com/office/drawing/2014/main" id="{265630D3-1109-AE42-8E0F-5B12A4F6B198}"/>
               </a:ext>
             </a:extLst>
           </p:cNvPr>
@@ -4004,7 +4004,7 @@
           <p:cNvPr id="53" name="pattern">
             <a:extLst>
               <a:ext uri="{FF2B5EF4-FFF2-40B4-BE49-F238E27FC236}">
-                <a16:creationId xmlns:a16="http://schemas.microsoft.com/office/drawing/2014/main" id="{8B2C5B23-A95F-24BD-4CB1-6AB4A0B52B61}"/>
+                <a16:creationId xmlns:a16="http://schemas.microsoft.com/office/drawing/2014/main" id="{A1443EBE-15B3-76D3-F822-4543FD19223B}"/>
               </a:ext>
             </a:extLst>
           </p:cNvPr>
@@ -4061,7 +4061,7 @@
           <p:cNvPr id="54" name="pattern">
             <a:extLst>
               <a:ext uri="{FF2B5EF4-FFF2-40B4-BE49-F238E27FC236}">
-                <a16:creationId xmlns:a16="http://schemas.microsoft.com/office/drawing/2014/main" id="{4990F041-3348-F698-09DE-F54114ABF25D}"/>
+                <a16:creationId xmlns:a16="http://schemas.microsoft.com/office/drawing/2014/main" id="{3F8AA390-7DF2-A8B2-ACB6-EFE31B2DEE66}"/>
               </a:ext>
             </a:extLst>
           </p:cNvPr>
@@ -4118,7 +4118,7 @@
           <p:cNvPr id="55" name="pattern">
             <a:extLst>
               <a:ext uri="{FF2B5EF4-FFF2-40B4-BE49-F238E27FC236}">
-                <a16:creationId xmlns:a16="http://schemas.microsoft.com/office/drawing/2014/main" id="{A5B9D29B-5391-E1EC-3BC6-640974B776EE}"/>
+                <a16:creationId xmlns:a16="http://schemas.microsoft.com/office/drawing/2014/main" id="{CE03A263-B406-ACDC-1795-F31BA16FABA6}"/>
               </a:ext>
             </a:extLst>
           </p:cNvPr>
@@ -4175,7 +4175,7 @@
           <p:cNvPr id="56" name="pattern">
             <a:extLst>
               <a:ext uri="{FF2B5EF4-FFF2-40B4-BE49-F238E27FC236}">
-                <a16:creationId xmlns:a16="http://schemas.microsoft.com/office/drawing/2014/main" id="{2F059C82-20A4-40E3-D84C-2C136D06B38A}"/>
+                <a16:creationId xmlns:a16="http://schemas.microsoft.com/office/drawing/2014/main" id="{03197AB6-1FEE-4320-A895-F50237F27E61}"/>
               </a:ext>
             </a:extLst>
           </p:cNvPr>
@@ -4232,7 +4232,7 @@
           <p:cNvPr id="57" name="pattern">
             <a:extLst>
               <a:ext uri="{FF2B5EF4-FFF2-40B4-BE49-F238E27FC236}">
-                <a16:creationId xmlns:a16="http://schemas.microsoft.com/office/drawing/2014/main" id="{4CD8C9F5-D8AC-3EB4-82C3-3821F0BA8BE4}"/>
+                <a16:creationId xmlns:a16="http://schemas.microsoft.com/office/drawing/2014/main" id="{FDA3EE45-2260-A465-331A-6E4264A389EA}"/>
               </a:ext>
             </a:extLst>
           </p:cNvPr>
@@ -4289,7 +4289,7 @@
           <p:cNvPr id="58" name="pattern">
             <a:extLst>
               <a:ext uri="{FF2B5EF4-FFF2-40B4-BE49-F238E27FC236}">
-                <a16:creationId xmlns:a16="http://schemas.microsoft.com/office/drawing/2014/main" id="{E733DACD-C385-263C-4F26-A7B8306FCEF5}"/>
+                <a16:creationId xmlns:a16="http://schemas.microsoft.com/office/drawing/2014/main" id="{C20489E4-2CD1-EFB3-63F5-2E27A78A29F4}"/>
               </a:ext>
             </a:extLst>
           </p:cNvPr>
@@ -4346,7 +4346,7 @@
           <p:cNvPr id="59" name="pattern">
             <a:extLst>
               <a:ext uri="{FF2B5EF4-FFF2-40B4-BE49-F238E27FC236}">
-                <a16:creationId xmlns:a16="http://schemas.microsoft.com/office/drawing/2014/main" id="{0E510EA8-0BA4-A0D3-8D9A-490513C8FA2A}"/>
+                <a16:creationId xmlns:a16="http://schemas.microsoft.com/office/drawing/2014/main" id="{411BA303-8A72-35D1-DB7C-EBAA93EBEB45}"/>
               </a:ext>
             </a:extLst>
           </p:cNvPr>
@@ -4403,7 +4403,7 @@
           <p:cNvPr id="60" name="pattern">
             <a:extLst>
               <a:ext uri="{FF2B5EF4-FFF2-40B4-BE49-F238E27FC236}">
-                <a16:creationId xmlns:a16="http://schemas.microsoft.com/office/drawing/2014/main" id="{770249AA-EDE7-E845-E5BD-E25FF5C98D85}"/>
+                <a16:creationId xmlns:a16="http://schemas.microsoft.com/office/drawing/2014/main" id="{131830DC-2F9D-D48B-0BDC-0354649356D9}"/>
               </a:ext>
             </a:extLst>
           </p:cNvPr>
@@ -4460,7 +4460,7 @@
           <p:cNvPr id="61" name="pattern">
             <a:extLst>
               <a:ext uri="{FF2B5EF4-FFF2-40B4-BE49-F238E27FC236}">
-                <a16:creationId xmlns:a16="http://schemas.microsoft.com/office/drawing/2014/main" id="{AF509F25-AC9F-41DB-26E3-61805839D535}"/>
+                <a16:creationId xmlns:a16="http://schemas.microsoft.com/office/drawing/2014/main" id="{E2B9FE12-5800-8E1B-5DAC-76BE402D8D85}"/>
               </a:ext>
             </a:extLst>
           </p:cNvPr>
@@ -4517,7 +4517,7 @@
           <p:cNvPr id="62" name="pattern">
             <a:extLst>
               <a:ext uri="{FF2B5EF4-FFF2-40B4-BE49-F238E27FC236}">
-                <a16:creationId xmlns:a16="http://schemas.microsoft.com/office/drawing/2014/main" id="{6315A2AF-D1F6-5476-8BA2-527391254D35}"/>
+                <a16:creationId xmlns:a16="http://schemas.microsoft.com/office/drawing/2014/main" id="{46D9CA23-ADDB-6AD9-25CA-3E6B5D80EEF4}"/>
               </a:ext>
             </a:extLst>
           </p:cNvPr>
@@ -4574,7 +4574,7 @@
           <p:cNvPr id="63" name="pattern">
             <a:extLst>
               <a:ext uri="{FF2B5EF4-FFF2-40B4-BE49-F238E27FC236}">
-                <a16:creationId xmlns:a16="http://schemas.microsoft.com/office/drawing/2014/main" id="{D0025DF1-2704-F031-F4C1-0112EE623D4A}"/>
+                <a16:creationId xmlns:a16="http://schemas.microsoft.com/office/drawing/2014/main" id="{EF5DC761-02C4-20C1-3F2A-630D63D7422D}"/>
               </a:ext>
             </a:extLst>
           </p:cNvPr>
@@ -4631,7 +4631,7 @@
           <p:cNvPr id="64" name="pattern">
             <a:extLst>
               <a:ext uri="{FF2B5EF4-FFF2-40B4-BE49-F238E27FC236}">
-                <a16:creationId xmlns:a16="http://schemas.microsoft.com/office/drawing/2014/main" id="{A55405C6-46B1-79C4-FA0D-FEB5838DB4A4}"/>
+                <a16:creationId xmlns:a16="http://schemas.microsoft.com/office/drawing/2014/main" id="{205128F5-9972-D5BE-A0F5-C34354A3BD3C}"/>
               </a:ext>
             </a:extLst>
           </p:cNvPr>
@@ -4688,7 +4688,7 @@
           <p:cNvPr id="65" name="pattern">
             <a:extLst>
               <a:ext uri="{FF2B5EF4-FFF2-40B4-BE49-F238E27FC236}">
-                <a16:creationId xmlns:a16="http://schemas.microsoft.com/office/drawing/2014/main" id="{E9A1A620-8AA4-4E21-B7A5-1C7C22B70D84}"/>
+                <a16:creationId xmlns:a16="http://schemas.microsoft.com/office/drawing/2014/main" id="{F1DD5341-59AD-C8D4-4929-CC708EBF76AD}"/>
               </a:ext>
             </a:extLst>
           </p:cNvPr>
@@ -4745,7 +4745,7 @@
           <p:cNvPr id="66" name="pattern">
             <a:extLst>
               <a:ext uri="{FF2B5EF4-FFF2-40B4-BE49-F238E27FC236}">
-                <a16:creationId xmlns:a16="http://schemas.microsoft.com/office/drawing/2014/main" id="{C4C2141B-B5A0-0285-812E-892810F68493}"/>
+                <a16:creationId xmlns:a16="http://schemas.microsoft.com/office/drawing/2014/main" id="{094B7B16-5CE5-3445-3E60-49A31EF1326E}"/>
               </a:ext>
             </a:extLst>
           </p:cNvPr>
@@ -4802,7 +4802,7 @@
           <p:cNvPr id="67" name="pattern">
             <a:extLst>
               <a:ext uri="{FF2B5EF4-FFF2-40B4-BE49-F238E27FC236}">
-                <a16:creationId xmlns:a16="http://schemas.microsoft.com/office/drawing/2014/main" id="{33D8B061-831D-931B-5119-A019FCE53A2C}"/>
+                <a16:creationId xmlns:a16="http://schemas.microsoft.com/office/drawing/2014/main" id="{98270C17-D9A2-8368-B3FF-A55E11EE74B9}"/>
               </a:ext>
             </a:extLst>
           </p:cNvPr>
@@ -4859,7 +4859,7 @@
           <p:cNvPr id="68" name="pattern">
             <a:extLst>
               <a:ext uri="{FF2B5EF4-FFF2-40B4-BE49-F238E27FC236}">
-                <a16:creationId xmlns:a16="http://schemas.microsoft.com/office/drawing/2014/main" id="{ADD2116A-C068-4860-622C-80E80D103327}"/>
+                <a16:creationId xmlns:a16="http://schemas.microsoft.com/office/drawing/2014/main" id="{15DB908B-8B49-F27B-AF8D-2C12ACF04AB5}"/>
               </a:ext>
             </a:extLst>
           </p:cNvPr>
@@ -4916,7 +4916,7 @@
           <p:cNvPr id="69" name="pattern">
             <a:extLst>
               <a:ext uri="{FF2B5EF4-FFF2-40B4-BE49-F238E27FC236}">
-                <a16:creationId xmlns:a16="http://schemas.microsoft.com/office/drawing/2014/main" id="{296D57E2-9903-94C1-BD37-06CF50E29F07}"/>
+                <a16:creationId xmlns:a16="http://schemas.microsoft.com/office/drawing/2014/main" id="{D2CEEA5E-E2EA-2F2D-1CF5-45F52AFE7C4B}"/>
               </a:ext>
             </a:extLst>
           </p:cNvPr>
@@ -4973,7 +4973,7 @@
           <p:cNvPr id="70" name="pattern">
             <a:extLst>
               <a:ext uri="{FF2B5EF4-FFF2-40B4-BE49-F238E27FC236}">
-                <a16:creationId xmlns:a16="http://schemas.microsoft.com/office/drawing/2014/main" id="{5F31F98F-E4C2-FBEE-AB71-E09E706DAC41}"/>
+                <a16:creationId xmlns:a16="http://schemas.microsoft.com/office/drawing/2014/main" id="{C7CC89CE-C878-044A-6365-3C67F26B637E}"/>
               </a:ext>
             </a:extLst>
           </p:cNvPr>
@@ -5030,7 +5030,7 @@
           <p:cNvPr id="71" name="pattern">
             <a:extLst>
               <a:ext uri="{FF2B5EF4-FFF2-40B4-BE49-F238E27FC236}">
-                <a16:creationId xmlns:a16="http://schemas.microsoft.com/office/drawing/2014/main" id="{3AA215BD-22EA-DCB0-69A1-2CF16E08CA3D}"/>
+                <a16:creationId xmlns:a16="http://schemas.microsoft.com/office/drawing/2014/main" id="{68163425-66F6-2D2D-5B9B-CC6975689384}"/>
               </a:ext>
             </a:extLst>
           </p:cNvPr>
@@ -5087,7 +5087,7 @@
           <p:cNvPr id="72" name="pattern">
             <a:extLst>
               <a:ext uri="{FF2B5EF4-FFF2-40B4-BE49-F238E27FC236}">
-                <a16:creationId xmlns:a16="http://schemas.microsoft.com/office/drawing/2014/main" id="{181EA99A-5433-53B3-EF3C-9F88C291A4F1}"/>
+                <a16:creationId xmlns:a16="http://schemas.microsoft.com/office/drawing/2014/main" id="{20956E9A-5FF3-16E1-3DC3-C925F20EF41B}"/>
               </a:ext>
             </a:extLst>
           </p:cNvPr>
@@ -5144,7 +5144,7 @@
           <p:cNvPr id="73" name="pattern">
             <a:extLst>
               <a:ext uri="{FF2B5EF4-FFF2-40B4-BE49-F238E27FC236}">
-                <a16:creationId xmlns:a16="http://schemas.microsoft.com/office/drawing/2014/main" id="{2435ACE5-2779-FDFC-C0C2-205E517EFA08}"/>
+                <a16:creationId xmlns:a16="http://schemas.microsoft.com/office/drawing/2014/main" id="{89B241CD-B309-4349-6F7D-5DF31288F0BB}"/>
               </a:ext>
             </a:extLst>
           </p:cNvPr>
@@ -5201,7 +5201,7 @@
           <p:cNvPr id="74" name="pattern">
             <a:extLst>
               <a:ext uri="{FF2B5EF4-FFF2-40B4-BE49-F238E27FC236}">
-                <a16:creationId xmlns:a16="http://schemas.microsoft.com/office/drawing/2014/main" id="{71A065BC-96F0-C799-A255-44E61F9E26C0}"/>
+                <a16:creationId xmlns:a16="http://schemas.microsoft.com/office/drawing/2014/main" id="{779CA482-74B1-C44F-BA31-A658029AF2DD}"/>
               </a:ext>
             </a:extLst>
           </p:cNvPr>
@@ -5258,7 +5258,7 @@
           <p:cNvPr id="75" name="pattern">
             <a:extLst>
               <a:ext uri="{FF2B5EF4-FFF2-40B4-BE49-F238E27FC236}">
-                <a16:creationId xmlns:a16="http://schemas.microsoft.com/office/drawing/2014/main" id="{05EB03A2-4D83-2F71-39C0-F4F85069BA2A}"/>
+                <a16:creationId xmlns:a16="http://schemas.microsoft.com/office/drawing/2014/main" id="{A3B1D27B-1C2E-C27F-EDFF-F4018ED2A502}"/>
               </a:ext>
             </a:extLst>
           </p:cNvPr>
@@ -5315,7 +5315,7 @@
           <p:cNvPr id="76" name="pattern">
             <a:extLst>
               <a:ext uri="{FF2B5EF4-FFF2-40B4-BE49-F238E27FC236}">
-                <a16:creationId xmlns:a16="http://schemas.microsoft.com/office/drawing/2014/main" id="{FF5A3147-AD06-04B6-929F-EA205430C3BB}"/>
+                <a16:creationId xmlns:a16="http://schemas.microsoft.com/office/drawing/2014/main" id="{15626E6C-8359-E05B-5D8C-183219242236}"/>
               </a:ext>
             </a:extLst>
           </p:cNvPr>
@@ -5372,7 +5372,7 @@
           <p:cNvPr id="77" name="pattern">
             <a:extLst>
               <a:ext uri="{FF2B5EF4-FFF2-40B4-BE49-F238E27FC236}">
-                <a16:creationId xmlns:a16="http://schemas.microsoft.com/office/drawing/2014/main" id="{1B427107-7FBE-FCD9-C998-2473EFA620AB}"/>
+                <a16:creationId xmlns:a16="http://schemas.microsoft.com/office/drawing/2014/main" id="{0FE33FF4-A2D8-046B-C0FB-FB237165E8B5}"/>
               </a:ext>
             </a:extLst>
           </p:cNvPr>
@@ -5429,7 +5429,7 @@
           <p:cNvPr id="78" name="pattern">
             <a:extLst>
               <a:ext uri="{FF2B5EF4-FFF2-40B4-BE49-F238E27FC236}">
-                <a16:creationId xmlns:a16="http://schemas.microsoft.com/office/drawing/2014/main" id="{5CFEF44E-488E-B7A8-FF81-3A24159AFECB}"/>
+                <a16:creationId xmlns:a16="http://schemas.microsoft.com/office/drawing/2014/main" id="{E7BA0020-5220-7423-81FF-FD16BE4DC49E}"/>
               </a:ext>
             </a:extLst>
           </p:cNvPr>
@@ -5486,7 +5486,7 @@
           <p:cNvPr id="79" name="pattern">
             <a:extLst>
               <a:ext uri="{FF2B5EF4-FFF2-40B4-BE49-F238E27FC236}">
-                <a16:creationId xmlns:a16="http://schemas.microsoft.com/office/drawing/2014/main" id="{9A7580BB-EFAF-A814-00F9-6A2D72E1388D}"/>
+                <a16:creationId xmlns:a16="http://schemas.microsoft.com/office/drawing/2014/main" id="{D419E21F-430F-4F0A-653F-4E63C9A38C83}"/>
               </a:ext>
             </a:extLst>
           </p:cNvPr>
@@ -5543,7 +5543,7 @@
           <p:cNvPr id="80" name="pattern">
             <a:extLst>
               <a:ext uri="{FF2B5EF4-FFF2-40B4-BE49-F238E27FC236}">
-                <a16:creationId xmlns:a16="http://schemas.microsoft.com/office/drawing/2014/main" id="{38421D07-6746-7933-9428-D5A2D2607678}"/>
+                <a16:creationId xmlns:a16="http://schemas.microsoft.com/office/drawing/2014/main" id="{474AB0B9-702F-4618-D494-7229BEB61FD3}"/>
               </a:ext>
             </a:extLst>
           </p:cNvPr>
@@ -5600,7 +5600,7 @@
           <p:cNvPr id="81" name="pattern">
             <a:extLst>
               <a:ext uri="{FF2B5EF4-FFF2-40B4-BE49-F238E27FC236}">
-                <a16:creationId xmlns:a16="http://schemas.microsoft.com/office/drawing/2014/main" id="{408B3896-6A57-6C29-8FD9-864D883B9660}"/>
+                <a16:creationId xmlns:a16="http://schemas.microsoft.com/office/drawing/2014/main" id="{2B6A0FAB-3268-07BF-2E09-F5BA389F4821}"/>
               </a:ext>
             </a:extLst>
           </p:cNvPr>
@@ -5657,7 +5657,7 @@
           <p:cNvPr id="82" name="pattern">
             <a:extLst>
               <a:ext uri="{FF2B5EF4-FFF2-40B4-BE49-F238E27FC236}">
-                <a16:creationId xmlns:a16="http://schemas.microsoft.com/office/drawing/2014/main" id="{74E2CF47-D90B-7CA4-14AE-32405DFA8C15}"/>
+                <a16:creationId xmlns:a16="http://schemas.microsoft.com/office/drawing/2014/main" id="{4F92C07D-3825-BE4E-D902-58A4210EFF58}"/>
               </a:ext>
             </a:extLst>
           </p:cNvPr>
@@ -5714,7 +5714,7 @@
           <p:cNvPr id="83" name="pattern">
             <a:extLst>
               <a:ext uri="{FF2B5EF4-FFF2-40B4-BE49-F238E27FC236}">
-                <a16:creationId xmlns:a16="http://schemas.microsoft.com/office/drawing/2014/main" id="{67190304-1007-F401-9E8A-2AD8D8439F36}"/>
+                <a16:creationId xmlns:a16="http://schemas.microsoft.com/office/drawing/2014/main" id="{A51701A4-D5C2-0CB8-8214-BF76B7006E22}"/>
               </a:ext>
             </a:extLst>
           </p:cNvPr>
@@ -5771,7 +5771,7 @@
           <p:cNvPr id="84" name="pattern">
             <a:extLst>
               <a:ext uri="{FF2B5EF4-FFF2-40B4-BE49-F238E27FC236}">
-                <a16:creationId xmlns:a16="http://schemas.microsoft.com/office/drawing/2014/main" id="{BC30971A-DA6E-529C-6A82-37562B6E7EAD}"/>
+                <a16:creationId xmlns:a16="http://schemas.microsoft.com/office/drawing/2014/main" id="{C4EFAA2D-26A2-70DB-92B5-39D11E7A428F}"/>
               </a:ext>
             </a:extLst>
           </p:cNvPr>
@@ -5828,7 +5828,7 @@
           <p:cNvPr id="85" name="pattern">
             <a:extLst>
               <a:ext uri="{FF2B5EF4-FFF2-40B4-BE49-F238E27FC236}">
-                <a16:creationId xmlns:a16="http://schemas.microsoft.com/office/drawing/2014/main" id="{17F54F4D-2AD8-81D9-D14E-2676382FA42A}"/>
+                <a16:creationId xmlns:a16="http://schemas.microsoft.com/office/drawing/2014/main" id="{FDCE6DDF-50F9-E229-FCEF-3DAC8518F488}"/>
               </a:ext>
             </a:extLst>
           </p:cNvPr>
@@ -5885,7 +5885,7 @@
           <p:cNvPr id="86" name="pattern">
             <a:extLst>
               <a:ext uri="{FF2B5EF4-FFF2-40B4-BE49-F238E27FC236}">
-                <a16:creationId xmlns:a16="http://schemas.microsoft.com/office/drawing/2014/main" id="{49104EFC-012A-C71A-CF28-A9D13E78FBC6}"/>
+                <a16:creationId xmlns:a16="http://schemas.microsoft.com/office/drawing/2014/main" id="{00A369E1-0DD8-0792-D2F3-2493BA401EC3}"/>
               </a:ext>
             </a:extLst>
           </p:cNvPr>
@@ -5942,7 +5942,7 @@
           <p:cNvPr id="87" name="pattern">
             <a:extLst>
               <a:ext uri="{FF2B5EF4-FFF2-40B4-BE49-F238E27FC236}">
-                <a16:creationId xmlns:a16="http://schemas.microsoft.com/office/drawing/2014/main" id="{FFE398CC-B697-4105-FFBE-70DAF18908C4}"/>
+                <a16:creationId xmlns:a16="http://schemas.microsoft.com/office/drawing/2014/main" id="{6E1200B4-B003-11B2-F1D8-E080F4D924C5}"/>
               </a:ext>
             </a:extLst>
           </p:cNvPr>
@@ -5999,7 +5999,7 @@
           <p:cNvPr id="88" name="pattern">
             <a:extLst>
               <a:ext uri="{FF2B5EF4-FFF2-40B4-BE49-F238E27FC236}">
-                <a16:creationId xmlns:a16="http://schemas.microsoft.com/office/drawing/2014/main" id="{D2A4CEF3-A398-D56F-5583-B25FB65B3B52}"/>
+                <a16:creationId xmlns:a16="http://schemas.microsoft.com/office/drawing/2014/main" id="{7F1A7FBB-CC66-FDCA-02F3-0E84D0891B70}"/>
               </a:ext>
             </a:extLst>
           </p:cNvPr>
@@ -6056,7 +6056,7 @@
           <p:cNvPr id="89" name="pattern">
             <a:extLst>
               <a:ext uri="{FF2B5EF4-FFF2-40B4-BE49-F238E27FC236}">
-                <a16:creationId xmlns:a16="http://schemas.microsoft.com/office/drawing/2014/main" id="{5A51D492-564A-751B-27C4-731F4328FC5F}"/>
+                <a16:creationId xmlns:a16="http://schemas.microsoft.com/office/drawing/2014/main" id="{B8D607F7-9E8E-DE65-520E-90FD0B3A7C0A}"/>
               </a:ext>
             </a:extLst>
           </p:cNvPr>
@@ -6113,7 +6113,7 @@
           <p:cNvPr id="90" name="pattern">
             <a:extLst>
               <a:ext uri="{FF2B5EF4-FFF2-40B4-BE49-F238E27FC236}">
-                <a16:creationId xmlns:a16="http://schemas.microsoft.com/office/drawing/2014/main" id="{6EEDA703-9055-DC53-75CD-5F0C410CF0AB}"/>
+                <a16:creationId xmlns:a16="http://schemas.microsoft.com/office/drawing/2014/main" id="{5EB7C756-56F2-4C85-AB5E-3E5381FD8309}"/>
               </a:ext>
             </a:extLst>
           </p:cNvPr>
@@ -6170,7 +6170,7 @@
           <p:cNvPr id="91" name="pattern">
             <a:extLst>
               <a:ext uri="{FF2B5EF4-FFF2-40B4-BE49-F238E27FC236}">
-                <a16:creationId xmlns:a16="http://schemas.microsoft.com/office/drawing/2014/main" id="{F23FFD5D-1623-DACE-4A86-EA2C6901687B}"/>
+                <a16:creationId xmlns:a16="http://schemas.microsoft.com/office/drawing/2014/main" id="{9E5E8E05-3BD6-7F68-31F9-69DEF6C2749C}"/>
               </a:ext>
             </a:extLst>
           </p:cNvPr>
@@ -6227,7 +6227,7 @@
           <p:cNvPr id="92" name="pattern">
             <a:extLst>
               <a:ext uri="{FF2B5EF4-FFF2-40B4-BE49-F238E27FC236}">
-                <a16:creationId xmlns:a16="http://schemas.microsoft.com/office/drawing/2014/main" id="{AD82B250-179A-C81B-202F-1ECE29EF7D55}"/>
+                <a16:creationId xmlns:a16="http://schemas.microsoft.com/office/drawing/2014/main" id="{BF65C3F8-09D0-CFE8-81FA-5F9BB66F7035}"/>
               </a:ext>
             </a:extLst>
           </p:cNvPr>
@@ -6284,7 +6284,7 @@
           <p:cNvPr id="93" name="pattern">
             <a:extLst>
               <a:ext uri="{FF2B5EF4-FFF2-40B4-BE49-F238E27FC236}">
-                <a16:creationId xmlns:a16="http://schemas.microsoft.com/office/drawing/2014/main" id="{998DA858-90D4-C993-901F-4B3C0C8A8404}"/>
+                <a16:creationId xmlns:a16="http://schemas.microsoft.com/office/drawing/2014/main" id="{E39A1D7C-056C-39A4-E166-D9588BC4B064}"/>
               </a:ext>
             </a:extLst>
           </p:cNvPr>
@@ -6341,7 +6341,7 @@
           <p:cNvPr id="94" name="pattern">
             <a:extLst>
               <a:ext uri="{FF2B5EF4-FFF2-40B4-BE49-F238E27FC236}">
-                <a16:creationId xmlns:a16="http://schemas.microsoft.com/office/drawing/2014/main" id="{2F32B38F-DD44-D873-0346-D6A0A86E7888}"/>
+                <a16:creationId xmlns:a16="http://schemas.microsoft.com/office/drawing/2014/main" id="{606076E7-E0C7-E8E8-E9DE-6D59ED28398D}"/>
               </a:ext>
             </a:extLst>
           </p:cNvPr>
@@ -6398,7 +6398,7 @@
           <p:cNvPr id="95" name="pattern">
             <a:extLst>
               <a:ext uri="{FF2B5EF4-FFF2-40B4-BE49-F238E27FC236}">
-                <a16:creationId xmlns:a16="http://schemas.microsoft.com/office/drawing/2014/main" id="{07A282C8-72EB-B662-22D7-5589D7EAFBF4}"/>
+                <a16:creationId xmlns:a16="http://schemas.microsoft.com/office/drawing/2014/main" id="{4E22CE1E-09FE-2A87-A4D1-B8A5C9683773}"/>
               </a:ext>
             </a:extLst>
           </p:cNvPr>
@@ -6455,7 +6455,7 @@
           <p:cNvPr id="96" name="pattern">
             <a:extLst>
               <a:ext uri="{FF2B5EF4-FFF2-40B4-BE49-F238E27FC236}">
-                <a16:creationId xmlns:a16="http://schemas.microsoft.com/office/drawing/2014/main" id="{FFAE0D38-0CF5-1457-70F0-F6319E953B34}"/>
+                <a16:creationId xmlns:a16="http://schemas.microsoft.com/office/drawing/2014/main" id="{E1CB955F-A787-4CD6-CCB8-5E7911D0C14F}"/>
               </a:ext>
             </a:extLst>
           </p:cNvPr>
@@ -6512,7 +6512,7 @@
           <p:cNvPr id="97" name="pattern">
             <a:extLst>
               <a:ext uri="{FF2B5EF4-FFF2-40B4-BE49-F238E27FC236}">
-                <a16:creationId xmlns:a16="http://schemas.microsoft.com/office/drawing/2014/main" id="{01C27594-59E8-0A7F-3FED-889F3B572632}"/>
+                <a16:creationId xmlns:a16="http://schemas.microsoft.com/office/drawing/2014/main" id="{B9326F7A-27FF-F543-D54C-9FCC79C9D14E}"/>
               </a:ext>
             </a:extLst>
           </p:cNvPr>
@@ -6569,7 +6569,7 @@
           <p:cNvPr id="98" name="pattern">
             <a:extLst>
               <a:ext uri="{FF2B5EF4-FFF2-40B4-BE49-F238E27FC236}">
-                <a16:creationId xmlns:a16="http://schemas.microsoft.com/office/drawing/2014/main" id="{A5477413-662B-F613-1715-789F35B36492}"/>
+                <a16:creationId xmlns:a16="http://schemas.microsoft.com/office/drawing/2014/main" id="{E92C109F-FC5F-649A-B3D4-0B3914204304}"/>
               </a:ext>
             </a:extLst>
           </p:cNvPr>
@@ -6626,7 +6626,7 @@
           <p:cNvPr id="99" name="pattern">
             <a:extLst>
               <a:ext uri="{FF2B5EF4-FFF2-40B4-BE49-F238E27FC236}">
-                <a16:creationId xmlns:a16="http://schemas.microsoft.com/office/drawing/2014/main" id="{CE59EA9C-218D-49B4-4C80-366528105424}"/>
+                <a16:creationId xmlns:a16="http://schemas.microsoft.com/office/drawing/2014/main" id="{74F3FF53-6C38-873B-6666-E71B1CB313DF}"/>
               </a:ext>
             </a:extLst>
           </p:cNvPr>
@@ -6683,7 +6683,7 @@
           <p:cNvPr id="100" name="pattern">
             <a:extLst>
               <a:ext uri="{FF2B5EF4-FFF2-40B4-BE49-F238E27FC236}">
-                <a16:creationId xmlns:a16="http://schemas.microsoft.com/office/drawing/2014/main" id="{90D728E5-5EF6-3F3F-2A9C-963CBDBE0994}"/>
+                <a16:creationId xmlns:a16="http://schemas.microsoft.com/office/drawing/2014/main" id="{7FB84013-ADF6-DF37-234A-6DE96945142C}"/>
               </a:ext>
             </a:extLst>
           </p:cNvPr>
@@ -6740,7 +6740,7 @@
           <p:cNvPr id="101" name="pattern">
             <a:extLst>
               <a:ext uri="{FF2B5EF4-FFF2-40B4-BE49-F238E27FC236}">
-                <a16:creationId xmlns:a16="http://schemas.microsoft.com/office/drawing/2014/main" id="{42829854-E07B-B4E9-5C31-091FF3F636EB}"/>
+                <a16:creationId xmlns:a16="http://schemas.microsoft.com/office/drawing/2014/main" id="{785E2E6E-67AE-15C0-EDEF-982EAF9C88B0}"/>
               </a:ext>
             </a:extLst>
           </p:cNvPr>
@@ -6797,7 +6797,7 @@
           <p:cNvPr id="102" name="pattern">
             <a:extLst>
               <a:ext uri="{FF2B5EF4-FFF2-40B4-BE49-F238E27FC236}">
-                <a16:creationId xmlns:a16="http://schemas.microsoft.com/office/drawing/2014/main" id="{48D41D87-3BC3-986D-BAA1-6FF2437CF7C4}"/>
+                <a16:creationId xmlns:a16="http://schemas.microsoft.com/office/drawing/2014/main" id="{89E8D2AD-E8F8-1564-716F-264C1AD9E1E7}"/>
               </a:ext>
             </a:extLst>
           </p:cNvPr>
@@ -6854,7 +6854,7 @@
           <p:cNvPr id="103" name="pattern">
             <a:extLst>
               <a:ext uri="{FF2B5EF4-FFF2-40B4-BE49-F238E27FC236}">
-                <a16:creationId xmlns:a16="http://schemas.microsoft.com/office/drawing/2014/main" id="{90F7D639-79BD-B42C-9BE6-CA434F5E2D72}"/>
+                <a16:creationId xmlns:a16="http://schemas.microsoft.com/office/drawing/2014/main" id="{C6A77CCC-7D46-687B-E7C6-0922C61AE4A3}"/>
               </a:ext>
             </a:extLst>
           </p:cNvPr>
@@ -6911,7 +6911,7 @@
           <p:cNvPr id="104" name="pattern">
             <a:extLst>
               <a:ext uri="{FF2B5EF4-FFF2-40B4-BE49-F238E27FC236}">
-                <a16:creationId xmlns:a16="http://schemas.microsoft.com/office/drawing/2014/main" id="{73917006-4856-B5A4-73FF-263742F4C232}"/>
+                <a16:creationId xmlns:a16="http://schemas.microsoft.com/office/drawing/2014/main" id="{D713BF18-53A2-57BC-2545-B3423CE9359D}"/>
               </a:ext>
             </a:extLst>
           </p:cNvPr>
@@ -6968,7 +6968,7 @@
           <p:cNvPr id="105" name="pattern">
             <a:extLst>
               <a:ext uri="{FF2B5EF4-FFF2-40B4-BE49-F238E27FC236}">
-                <a16:creationId xmlns:a16="http://schemas.microsoft.com/office/drawing/2014/main" id="{5CC89AD8-6921-2AF9-263A-CA69ACADD75A}"/>
+                <a16:creationId xmlns:a16="http://schemas.microsoft.com/office/drawing/2014/main" id="{BEFC9B96-39AB-907D-7527-6758C18DABEE}"/>
               </a:ext>
             </a:extLst>
           </p:cNvPr>
@@ -7025,7 +7025,7 @@
           <p:cNvPr id="106" name="pattern">
             <a:extLst>
               <a:ext uri="{FF2B5EF4-FFF2-40B4-BE49-F238E27FC236}">
-                <a16:creationId xmlns:a16="http://schemas.microsoft.com/office/drawing/2014/main" id="{13835AE7-C052-1097-6B25-1FF58FE9A725}"/>
+                <a16:creationId xmlns:a16="http://schemas.microsoft.com/office/drawing/2014/main" id="{C3D52FA7-3F8F-DC35-26F6-653C14079DBA}"/>
               </a:ext>
             </a:extLst>
           </p:cNvPr>
@@ -7082,7 +7082,7 @@
           <p:cNvPr id="107" name="pattern">
             <a:extLst>
               <a:ext uri="{FF2B5EF4-FFF2-40B4-BE49-F238E27FC236}">
-                <a16:creationId xmlns:a16="http://schemas.microsoft.com/office/drawing/2014/main" id="{702665CB-1C7B-EE88-FE65-9E7F9BAEA7F4}"/>
+                <a16:creationId xmlns:a16="http://schemas.microsoft.com/office/drawing/2014/main" id="{873FECF6-5E67-A0C9-4BE9-047C6111E52B}"/>
               </a:ext>
             </a:extLst>
           </p:cNvPr>
@@ -7139,7 +7139,7 @@
           <p:cNvPr id="108" name="pattern">
             <a:extLst>
               <a:ext uri="{FF2B5EF4-FFF2-40B4-BE49-F238E27FC236}">
-                <a16:creationId xmlns:a16="http://schemas.microsoft.com/office/drawing/2014/main" id="{C3060045-50F7-6A99-AB62-3C6BC504BA57}"/>
+                <a16:creationId xmlns:a16="http://schemas.microsoft.com/office/drawing/2014/main" id="{471F083E-4759-FAFF-5690-FFA6140E54A2}"/>
               </a:ext>
             </a:extLst>
           </p:cNvPr>
@@ -7196,7 +7196,7 @@
           <p:cNvPr id="109" name="pattern">
             <a:extLst>
               <a:ext uri="{FF2B5EF4-FFF2-40B4-BE49-F238E27FC236}">
-                <a16:creationId xmlns:a16="http://schemas.microsoft.com/office/drawing/2014/main" id="{84191751-F7B5-7F90-F72C-6B383BAEFC3B}"/>
+                <a16:creationId xmlns:a16="http://schemas.microsoft.com/office/drawing/2014/main" id="{DE5EDDD8-CE67-5CB3-E342-67DD077B602A}"/>
               </a:ext>
             </a:extLst>
           </p:cNvPr>
@@ -7253,7 +7253,7 @@
           <p:cNvPr id="110" name="pattern">
             <a:extLst>
               <a:ext uri="{FF2B5EF4-FFF2-40B4-BE49-F238E27FC236}">
-                <a16:creationId xmlns:a16="http://schemas.microsoft.com/office/drawing/2014/main" id="{71A7AF35-936F-07B9-5F99-8396B4AF4D9F}"/>
+                <a16:creationId xmlns:a16="http://schemas.microsoft.com/office/drawing/2014/main" id="{A7364120-A3F2-5DC5-DB1D-F21D244AC84E}"/>
               </a:ext>
             </a:extLst>
           </p:cNvPr>
@@ -7310,7 +7310,7 @@
           <p:cNvPr id="111" name="pattern">
             <a:extLst>
               <a:ext uri="{FF2B5EF4-FFF2-40B4-BE49-F238E27FC236}">
-                <a16:creationId xmlns:a16="http://schemas.microsoft.com/office/drawing/2014/main" id="{A5AA5D39-0ED0-23E8-D21D-6F9714D597DC}"/>
+                <a16:creationId xmlns:a16="http://schemas.microsoft.com/office/drawing/2014/main" id="{0D687F6F-1BC2-F6FD-40EA-1444B4138629}"/>
               </a:ext>
             </a:extLst>
           </p:cNvPr>
@@ -7367,7 +7367,7 @@
           <p:cNvPr id="112" name="pattern">
             <a:extLst>
               <a:ext uri="{FF2B5EF4-FFF2-40B4-BE49-F238E27FC236}">
-                <a16:creationId xmlns:a16="http://schemas.microsoft.com/office/drawing/2014/main" id="{702D5282-06C1-6E40-41D2-CB52E5ED3EB5}"/>
+                <a16:creationId xmlns:a16="http://schemas.microsoft.com/office/drawing/2014/main" id="{F6CD0914-A58E-CE22-30FA-96943B8E9A57}"/>
               </a:ext>
             </a:extLst>
           </p:cNvPr>
@@ -7424,7 +7424,7 @@
           <p:cNvPr id="113" name="pattern">
             <a:extLst>
               <a:ext uri="{FF2B5EF4-FFF2-40B4-BE49-F238E27FC236}">
-                <a16:creationId xmlns:a16="http://schemas.microsoft.com/office/drawing/2014/main" id="{BA830248-7C45-4160-E425-6A75015E8424}"/>
+                <a16:creationId xmlns:a16="http://schemas.microsoft.com/office/drawing/2014/main" id="{66723629-E04B-F53A-102B-F4378410A1A8}"/>
               </a:ext>
             </a:extLst>
           </p:cNvPr>
@@ -7481,7 +7481,7 @@
           <p:cNvPr id="114" name="pattern">
             <a:extLst>
               <a:ext uri="{FF2B5EF4-FFF2-40B4-BE49-F238E27FC236}">
-                <a16:creationId xmlns:a16="http://schemas.microsoft.com/office/drawing/2014/main" id="{E2F4AB42-E985-FA15-EA26-374ADA16B021}"/>
+                <a16:creationId xmlns:a16="http://schemas.microsoft.com/office/drawing/2014/main" id="{2A9BA9C8-D847-B038-021E-8A0683A198F4}"/>
               </a:ext>
             </a:extLst>
           </p:cNvPr>
@@ -7538,7 +7538,7 @@
           <p:cNvPr id="115" name="pattern">
             <a:extLst>
               <a:ext uri="{FF2B5EF4-FFF2-40B4-BE49-F238E27FC236}">
-                <a16:creationId xmlns:a16="http://schemas.microsoft.com/office/drawing/2014/main" id="{74802E34-4D34-4E0C-CFED-DF1842B29344}"/>
+                <a16:creationId xmlns:a16="http://schemas.microsoft.com/office/drawing/2014/main" id="{1D7517EF-3461-4756-30F8-BE60779C33F2}"/>
               </a:ext>
             </a:extLst>
           </p:cNvPr>
@@ -7595,7 +7595,7 @@
           <p:cNvPr id="116" name="pattern">
             <a:extLst>
               <a:ext uri="{FF2B5EF4-FFF2-40B4-BE49-F238E27FC236}">
-                <a16:creationId xmlns:a16="http://schemas.microsoft.com/office/drawing/2014/main" id="{DE5E23FA-A237-C089-7FA2-1197B8438535}"/>
+                <a16:creationId xmlns:a16="http://schemas.microsoft.com/office/drawing/2014/main" id="{6E849A4C-752C-A1BF-E775-793129B8ECD9}"/>
               </a:ext>
             </a:extLst>
           </p:cNvPr>
@@ -7652,7 +7652,7 @@
           <p:cNvPr id="117" name="pattern">
             <a:extLst>
               <a:ext uri="{FF2B5EF4-FFF2-40B4-BE49-F238E27FC236}">
-                <a16:creationId xmlns:a16="http://schemas.microsoft.com/office/drawing/2014/main" id="{380F6A65-7E12-2176-2B29-DC50EDC6774B}"/>
+                <a16:creationId xmlns:a16="http://schemas.microsoft.com/office/drawing/2014/main" id="{7489BDBF-F88F-280B-C4DB-A4410D92954B}"/>
               </a:ext>
             </a:extLst>
           </p:cNvPr>
@@ -7709,7 +7709,7 @@
           <p:cNvPr id="118" name="pattern">
             <a:extLst>
               <a:ext uri="{FF2B5EF4-FFF2-40B4-BE49-F238E27FC236}">
-                <a16:creationId xmlns:a16="http://schemas.microsoft.com/office/drawing/2014/main" id="{A37734E9-96D8-B2FE-06DD-C258877E32C7}"/>
+                <a16:creationId xmlns:a16="http://schemas.microsoft.com/office/drawing/2014/main" id="{7C6EEC24-655A-CC6A-5366-1BAFA81269AD}"/>
               </a:ext>
             </a:extLst>
           </p:cNvPr>
@@ -7766,7 +7766,7 @@
           <p:cNvPr id="119" name="pattern">
             <a:extLst>
               <a:ext uri="{FF2B5EF4-FFF2-40B4-BE49-F238E27FC236}">
-                <a16:creationId xmlns:a16="http://schemas.microsoft.com/office/drawing/2014/main" id="{A116F8EF-50D0-1684-7555-4AEC146D485D}"/>
+                <a16:creationId xmlns:a16="http://schemas.microsoft.com/office/drawing/2014/main" id="{9C0542A2-7C9C-AE95-3F06-9B2FDBFA7639}"/>
               </a:ext>
             </a:extLst>
           </p:cNvPr>
@@ -7823,7 +7823,7 @@
           <p:cNvPr id="120" name="pattern">
             <a:extLst>
               <a:ext uri="{FF2B5EF4-FFF2-40B4-BE49-F238E27FC236}">
-                <a16:creationId xmlns:a16="http://schemas.microsoft.com/office/drawing/2014/main" id="{BAA3A2C6-2B20-4B4B-3888-695BFD3FD355}"/>
+                <a16:creationId xmlns:a16="http://schemas.microsoft.com/office/drawing/2014/main" id="{5BF106AF-DDB8-7092-C042-0982A88B865E}"/>
               </a:ext>
             </a:extLst>
           </p:cNvPr>
@@ -7880,7 +7880,7 @@
           <p:cNvPr id="121" name="pattern">
             <a:extLst>
               <a:ext uri="{FF2B5EF4-FFF2-40B4-BE49-F238E27FC236}">
-                <a16:creationId xmlns:a16="http://schemas.microsoft.com/office/drawing/2014/main" id="{71959514-CA86-48EF-7D24-6D2E410C0611}"/>
+                <a16:creationId xmlns:a16="http://schemas.microsoft.com/office/drawing/2014/main" id="{BDA56831-EFD6-ABEF-5714-77BE803D8D44}"/>
               </a:ext>
             </a:extLst>
           </p:cNvPr>
@@ -7937,7 +7937,7 @@
           <p:cNvPr id="122" name="pattern">
             <a:extLst>
               <a:ext uri="{FF2B5EF4-FFF2-40B4-BE49-F238E27FC236}">
-                <a16:creationId xmlns:a16="http://schemas.microsoft.com/office/drawing/2014/main" id="{5199D5BE-86C6-0EF4-3FAC-39BE906ECD0B}"/>
+                <a16:creationId xmlns:a16="http://schemas.microsoft.com/office/drawing/2014/main" id="{5107FCEF-06E8-FE2B-8925-5620DE52BCF2}"/>
               </a:ext>
             </a:extLst>
           </p:cNvPr>
@@ -7994,7 +7994,7 @@
           <p:cNvPr id="123" name="pattern">
             <a:extLst>
               <a:ext uri="{FF2B5EF4-FFF2-40B4-BE49-F238E27FC236}">
-                <a16:creationId xmlns:a16="http://schemas.microsoft.com/office/drawing/2014/main" id="{AF305459-EF48-951B-3AC3-65B82351667C}"/>
+                <a16:creationId xmlns:a16="http://schemas.microsoft.com/office/drawing/2014/main" id="{2C716F03-ADB3-5B2A-2779-5450F4D71740}"/>
               </a:ext>
             </a:extLst>
           </p:cNvPr>
@@ -8051,7 +8051,7 @@
           <p:cNvPr id="124" name="pattern">
             <a:extLst>
               <a:ext uri="{FF2B5EF4-FFF2-40B4-BE49-F238E27FC236}">
-                <a16:creationId xmlns:a16="http://schemas.microsoft.com/office/drawing/2014/main" id="{4A29AF4C-E026-2EE2-B00B-6D1A686981B6}"/>
+                <a16:creationId xmlns:a16="http://schemas.microsoft.com/office/drawing/2014/main" id="{7CFAD7EA-CAEE-BCC2-D347-975EBDD27CDA}"/>
               </a:ext>
             </a:extLst>
           </p:cNvPr>
@@ -8108,7 +8108,7 @@
           <p:cNvPr id="125" name="pattern">
             <a:extLst>
               <a:ext uri="{FF2B5EF4-FFF2-40B4-BE49-F238E27FC236}">
-                <a16:creationId xmlns:a16="http://schemas.microsoft.com/office/drawing/2014/main" id="{4AB22F78-75E0-45E3-F0B6-48D64A7C8F18}"/>
+                <a16:creationId xmlns:a16="http://schemas.microsoft.com/office/drawing/2014/main" id="{79760B9D-33C5-A5CC-E53D-A2225178DF32}"/>
               </a:ext>
             </a:extLst>
           </p:cNvPr>
@@ -8165,7 +8165,7 @@
           <p:cNvPr id="126" name="pattern">
             <a:extLst>
               <a:ext uri="{FF2B5EF4-FFF2-40B4-BE49-F238E27FC236}">
-                <a16:creationId xmlns:a16="http://schemas.microsoft.com/office/drawing/2014/main" id="{DDD4EFC8-3713-A61A-778A-5E7FB35D8BB4}"/>
+                <a16:creationId xmlns:a16="http://schemas.microsoft.com/office/drawing/2014/main" id="{ED131923-671F-2110-AB23-F4CED204C508}"/>
               </a:ext>
             </a:extLst>
           </p:cNvPr>
@@ -8222,7 +8222,7 @@
           <p:cNvPr id="127" name="pattern">
             <a:extLst>
               <a:ext uri="{FF2B5EF4-FFF2-40B4-BE49-F238E27FC236}">
-                <a16:creationId xmlns:a16="http://schemas.microsoft.com/office/drawing/2014/main" id="{524D74EA-24A5-4F56-DDC8-B3D1709A387B}"/>
+                <a16:creationId xmlns:a16="http://schemas.microsoft.com/office/drawing/2014/main" id="{FD4EA38C-69FB-E205-DAF0-1524172921B0}"/>
               </a:ext>
             </a:extLst>
           </p:cNvPr>
@@ -8279,7 +8279,7 @@
           <p:cNvPr id="128" name="pattern">
             <a:extLst>
               <a:ext uri="{FF2B5EF4-FFF2-40B4-BE49-F238E27FC236}">
-                <a16:creationId xmlns:a16="http://schemas.microsoft.com/office/drawing/2014/main" id="{CAC89427-3C90-5A14-253A-68CD9EC56DD2}"/>
+                <a16:creationId xmlns:a16="http://schemas.microsoft.com/office/drawing/2014/main" id="{D036F269-51E3-FEB6-E9E6-005145E8AFA1}"/>
               </a:ext>
             </a:extLst>
           </p:cNvPr>
@@ -8336,7 +8336,7 @@
           <p:cNvPr id="129" name="pattern">
             <a:extLst>
               <a:ext uri="{FF2B5EF4-FFF2-40B4-BE49-F238E27FC236}">
-                <a16:creationId xmlns:a16="http://schemas.microsoft.com/office/drawing/2014/main" id="{266DCACC-7130-0473-3295-A3F9A3D403A4}"/>
+                <a16:creationId xmlns:a16="http://schemas.microsoft.com/office/drawing/2014/main" id="{1F9A194A-9F29-8BB7-AE2E-AF0E0E7AAF35}"/>
               </a:ext>
             </a:extLst>
           </p:cNvPr>
@@ -8393,7 +8393,7 @@
           <p:cNvPr id="130" name="pattern">
             <a:extLst>
               <a:ext uri="{FF2B5EF4-FFF2-40B4-BE49-F238E27FC236}">
-                <a16:creationId xmlns:a16="http://schemas.microsoft.com/office/drawing/2014/main" id="{8BB16030-0D62-6182-8095-B95222C1BEBE}"/>
+                <a16:creationId xmlns:a16="http://schemas.microsoft.com/office/drawing/2014/main" id="{CA21A249-4341-B834-F8FF-A483C37E4228}"/>
               </a:ext>
             </a:extLst>
           </p:cNvPr>
@@ -8450,7 +8450,7 @@
           <p:cNvPr id="131" name="pattern">
             <a:extLst>
               <a:ext uri="{FF2B5EF4-FFF2-40B4-BE49-F238E27FC236}">
-                <a16:creationId xmlns:a16="http://schemas.microsoft.com/office/drawing/2014/main" id="{F031821D-FFE9-906C-17C3-E94157C1909F}"/>
+                <a16:creationId xmlns:a16="http://schemas.microsoft.com/office/drawing/2014/main" id="{0DE155B7-2F05-A54B-BAD3-3477517AC1A8}"/>
               </a:ext>
             </a:extLst>
           </p:cNvPr>
@@ -8507,7 +8507,7 @@
           <p:cNvPr id="132" name="pattern">
             <a:extLst>
               <a:ext uri="{FF2B5EF4-FFF2-40B4-BE49-F238E27FC236}">
-                <a16:creationId xmlns:a16="http://schemas.microsoft.com/office/drawing/2014/main" id="{36785494-6A1A-A31C-FCE4-E7E6F7E3E9C8}"/>
+                <a16:creationId xmlns:a16="http://schemas.microsoft.com/office/drawing/2014/main" id="{449FC7E1-B7D5-7DFF-A7C6-7018C64076CB}"/>
               </a:ext>
             </a:extLst>
           </p:cNvPr>
@@ -8564,7 +8564,7 @@
           <p:cNvPr id="133" name="pattern">
             <a:extLst>
               <a:ext uri="{FF2B5EF4-FFF2-40B4-BE49-F238E27FC236}">
-                <a16:creationId xmlns:a16="http://schemas.microsoft.com/office/drawing/2014/main" id="{6C82F877-BE73-EF26-77C7-A8783D2C9FA9}"/>
+                <a16:creationId xmlns:a16="http://schemas.microsoft.com/office/drawing/2014/main" id="{38629B97-5C78-7BA9-39B9-3578B2553F0B}"/>
               </a:ext>
             </a:extLst>
           </p:cNvPr>
@@ -8621,7 +8621,7 @@
           <p:cNvPr id="134" name="pattern">
             <a:extLst>
               <a:ext uri="{FF2B5EF4-FFF2-40B4-BE49-F238E27FC236}">
-                <a16:creationId xmlns:a16="http://schemas.microsoft.com/office/drawing/2014/main" id="{1A1C5B93-84FE-D89B-6645-0B7DBD29466B}"/>
+                <a16:creationId xmlns:a16="http://schemas.microsoft.com/office/drawing/2014/main" id="{DF1E4A6B-2C10-C364-C52F-111D59371E1E}"/>
               </a:ext>
             </a:extLst>
           </p:cNvPr>
@@ -8678,7 +8678,7 @@
           <p:cNvPr id="135" name="pattern">
             <a:extLst>
               <a:ext uri="{FF2B5EF4-FFF2-40B4-BE49-F238E27FC236}">
-                <a16:creationId xmlns:a16="http://schemas.microsoft.com/office/drawing/2014/main" id="{3882ACA2-8831-44D8-C5FE-6CFF9CB64E90}"/>
+                <a16:creationId xmlns:a16="http://schemas.microsoft.com/office/drawing/2014/main" id="{FFA3361B-72CD-7F78-49FE-D7A3C86D3B91}"/>
               </a:ext>
             </a:extLst>
           </p:cNvPr>
@@ -8735,7 +8735,7 @@
           <p:cNvPr id="136" name="pattern">
             <a:extLst>
               <a:ext uri="{FF2B5EF4-FFF2-40B4-BE49-F238E27FC236}">
-                <a16:creationId xmlns:a16="http://schemas.microsoft.com/office/drawing/2014/main" id="{EAE11F9D-6E7E-8186-B65E-760F3B8BDAA8}"/>
+                <a16:creationId xmlns:a16="http://schemas.microsoft.com/office/drawing/2014/main" id="{0743ACB8-CC39-315E-1F57-9CEEA75D7033}"/>
               </a:ext>
             </a:extLst>
           </p:cNvPr>
@@ -8792,7 +8792,7 @@
           <p:cNvPr id="137" name="pattern">
             <a:extLst>
               <a:ext uri="{FF2B5EF4-FFF2-40B4-BE49-F238E27FC236}">
-                <a16:creationId xmlns:a16="http://schemas.microsoft.com/office/drawing/2014/main" id="{29AC6550-EAE1-C75E-4DD1-DA5438282E03}"/>
+                <a16:creationId xmlns:a16="http://schemas.microsoft.com/office/drawing/2014/main" id="{C7E01BE8-451D-53F7-F096-D72E7DA30C95}"/>
               </a:ext>
             </a:extLst>
           </p:cNvPr>
@@ -8847,7 +8847,7 @@
     </p:spTree>
     <p:extLst>
       <p:ext uri="{BB962C8B-B14F-4D97-AF65-F5344CB8AC3E}">
-        <p14:creationId xmlns:p14="http://schemas.microsoft.com/office/powerpoint/2010/main" val="3912328126"/>
+        <p14:creationId xmlns:p14="http://schemas.microsoft.com/office/powerpoint/2010/main" val="343475968"/>
       </p:ext>
     </p:extLst>
   </p:cSld>
@@ -8997,9 +8997,9 @@
             </a:lvl1pPr>
           </a:lstStyle>
           <a:p>
-            <a:fld id="{90A7BBED-E6FA-40A6-8A51-59E4B08CD8B8}" type="datetimeFigureOut">
+            <a:fld id="{3DE1F4D6-9B94-49E1-9259-C44CF083EB57}" type="datetimeFigureOut">
               <a:rPr lang="en-US" smtClean="0"/>
-              <a:t>10/3/2026</a:t>
+              <a:t>10/4/2026</a:t>
             </a:fld>
             <a:endParaRPr lang="en-US"/>
           </a:p>
@@ -9042,7 +9042,7 @@
             </a:lvl1pPr>
           </a:lstStyle>
           <a:p>
-            <a:fld id="{4F0FE17B-5063-4433-97D2-96EAD825CE6E}" type="slidenum">
+            <a:fld id="{022853CD-29C7-4A68-BCE3-2ED71C774B8A}" type="slidenum">
               <a:rPr lang="en-US" smtClean="0"/>
               <a:t>‹#›</a:t>
             </a:fld>
@@ -9162,7 +9162,7 @@
           <p:cNvPr id="8" name="item_1_title">
             <a:extLst>
               <a:ext uri="{FF2B5EF4-FFF2-40B4-BE49-F238E27FC236}">
-                <a16:creationId xmlns:a16="http://schemas.microsoft.com/office/drawing/2014/main" id="{813BA195-AAD8-7357-5D9F-D4B636B179D3}"/>
+                <a16:creationId xmlns:a16="http://schemas.microsoft.com/office/drawing/2014/main" id="{4932A0CD-9DA4-38C1-B1DC-4D7EAA53D814}"/>
               </a:ext>
             </a:extLst>
           </p:cNvPr>
@@ -9175,8 +9175,8 @@
         </p:nvSpPr>
         <p:spPr>
           <a:xfrm>
-            <a:off x="676029" y="2372339"/>
-            <a:ext cx="3251982" cy="565055"/>
+            <a:off x="658119" y="2372339"/>
+            <a:ext cx="2843628" cy="565055"/>
           </a:xfrm>
         </p:spPr>
         <p:txBody>
@@ -9214,7 +9214,7 @@
           <p:cNvPr id="9" name="item_1">
             <a:extLst>
               <a:ext uri="{FF2B5EF4-FFF2-40B4-BE49-F238E27FC236}">
-                <a16:creationId xmlns:a16="http://schemas.microsoft.com/office/drawing/2014/main" id="{9904237F-C538-8902-DC65-F1A5CEA051D0}"/>
+                <a16:creationId xmlns:a16="http://schemas.microsoft.com/office/drawing/2014/main" id="{5E5125F9-E3B1-C2A1-FD07-14C0A74ECEAA}"/>
               </a:ext>
             </a:extLst>
           </p:cNvPr>
@@ -9227,8 +9227,8 @@
         </p:nvSpPr>
         <p:spPr>
           <a:xfrm>
-            <a:off x="4042116" y="2372339"/>
-            <a:ext cx="7473854" cy="565055"/>
+            <a:off x="3601523" y="2372339"/>
+            <a:ext cx="6535356" cy="565055"/>
           </a:xfrm>
           <a:prstGeom prst="rect">
             <a:avLst/>
@@ -9262,7 +9262,7 @@
           <p:cNvPr id="10" name="item_2_title">
             <a:extLst>
               <a:ext uri="{FF2B5EF4-FFF2-40B4-BE49-F238E27FC236}">
-                <a16:creationId xmlns:a16="http://schemas.microsoft.com/office/drawing/2014/main" id="{0689C31E-5F43-EB5E-EEAA-A4F8B5EAE2AD}"/>
+                <a16:creationId xmlns:a16="http://schemas.microsoft.com/office/drawing/2014/main" id="{1F9BB869-4661-749B-CEF3-A7B1ABBF5C77}"/>
               </a:ext>
             </a:extLst>
           </p:cNvPr>
@@ -9275,8 +9275,8 @@
         </p:nvSpPr>
         <p:spPr>
           <a:xfrm>
-            <a:off x="676029" y="3361186"/>
-            <a:ext cx="3251982" cy="565055"/>
+            <a:off x="658119" y="3361186"/>
+            <a:ext cx="2843628" cy="565055"/>
           </a:xfrm>
           <a:prstGeom prst="rect">
             <a:avLst/>
@@ -9317,7 +9317,7 @@
           <p:cNvPr id="11" name="item_2">
             <a:extLst>
               <a:ext uri="{FF2B5EF4-FFF2-40B4-BE49-F238E27FC236}">
-                <a16:creationId xmlns:a16="http://schemas.microsoft.com/office/drawing/2014/main" id="{48767F65-C36F-2DAD-34D5-2C23D5D32708}"/>
+                <a16:creationId xmlns:a16="http://schemas.microsoft.com/office/drawing/2014/main" id="{AF1D0677-A906-5D4D-9248-304C2880964C}"/>
               </a:ext>
             </a:extLst>
           </p:cNvPr>
@@ -9330,8 +9330,8 @@
         </p:nvSpPr>
         <p:spPr>
           <a:xfrm>
-            <a:off x="4042116" y="3361186"/>
-            <a:ext cx="7473854" cy="565055"/>
+            <a:off x="3601523" y="3361186"/>
+            <a:ext cx="6535356" cy="565055"/>
           </a:xfrm>
           <a:prstGeom prst="rect">
             <a:avLst/>
@@ -9365,7 +9365,7 @@
           <p:cNvPr id="12" name="item_3_title">
             <a:extLst>
               <a:ext uri="{FF2B5EF4-FFF2-40B4-BE49-F238E27FC236}">
-                <a16:creationId xmlns:a16="http://schemas.microsoft.com/office/drawing/2014/main" id="{218D291F-CF57-C29F-3881-8A1D375D1EE7}"/>
+                <a16:creationId xmlns:a16="http://schemas.microsoft.com/office/drawing/2014/main" id="{DDA3A0EE-2EB3-A7B2-16F0-96742A1758A8}"/>
               </a:ext>
             </a:extLst>
           </p:cNvPr>
@@ -9378,8 +9378,8 @@
         </p:nvSpPr>
         <p:spPr>
           <a:xfrm>
-            <a:off x="676029" y="4350033"/>
-            <a:ext cx="3251982" cy="565055"/>
+            <a:off x="658119" y="4350033"/>
+            <a:ext cx="2843628" cy="565055"/>
           </a:xfrm>
           <a:prstGeom prst="rect">
             <a:avLst/>
@@ -9420,7 +9420,7 @@
           <p:cNvPr id="13" name="item_3">
             <a:extLst>
               <a:ext uri="{FF2B5EF4-FFF2-40B4-BE49-F238E27FC236}">
-                <a16:creationId xmlns:a16="http://schemas.microsoft.com/office/drawing/2014/main" id="{BF7B8BD4-80BC-8559-6A4C-C9DE0BDEB1B3}"/>
+                <a16:creationId xmlns:a16="http://schemas.microsoft.com/office/drawing/2014/main" id="{1325D1AB-26DD-0BFA-2E43-D8E32FC9DA76}"/>
               </a:ext>
             </a:extLst>
           </p:cNvPr>
@@ -9433,8 +9433,8 @@
         </p:nvSpPr>
         <p:spPr>
           <a:xfrm>
-            <a:off x="4042116" y="4350033"/>
-            <a:ext cx="7473854" cy="565055"/>
+            <a:off x="3601523" y="4350033"/>
+            <a:ext cx="6535356" cy="565055"/>
           </a:xfrm>
           <a:prstGeom prst="rect">
             <a:avLst/>
@@ -9468,7 +9468,7 @@
           <p:cNvPr id="14" name="item_4_title">
             <a:extLst>
               <a:ext uri="{FF2B5EF4-FFF2-40B4-BE49-F238E27FC236}">
-                <a16:creationId xmlns:a16="http://schemas.microsoft.com/office/drawing/2014/main" id="{C75A8736-4B3F-3D36-3701-84FB19B0BBCB}"/>
+                <a16:creationId xmlns:a16="http://schemas.microsoft.com/office/drawing/2014/main" id="{31AE1100-4621-8F17-7383-CF9A46385830}"/>
               </a:ext>
             </a:extLst>
           </p:cNvPr>
@@ -9481,8 +9481,8 @@
         </p:nvSpPr>
         <p:spPr>
           <a:xfrm>
-            <a:off x="676029" y="5338880"/>
-            <a:ext cx="3251982" cy="565055"/>
+            <a:off x="658119" y="5338880"/>
+            <a:ext cx="2843628" cy="565055"/>
           </a:xfrm>
           <a:prstGeom prst="rect">
             <a:avLst/>
@@ -9523,7 +9523,7 @@
           <p:cNvPr id="15" name="item_4">
             <a:extLst>
               <a:ext uri="{FF2B5EF4-FFF2-40B4-BE49-F238E27FC236}">
-                <a16:creationId xmlns:a16="http://schemas.microsoft.com/office/drawing/2014/main" id="{36B0AE47-8E0C-5507-D121-CC0A51E1BC93}"/>
+                <a16:creationId xmlns:a16="http://schemas.microsoft.com/office/drawing/2014/main" id="{6539728A-8E9F-310A-D8EF-0741FD4CED60}"/>
               </a:ext>
             </a:extLst>
           </p:cNvPr>
@@ -9536,8 +9536,8 @@
         </p:nvSpPr>
         <p:spPr>
           <a:xfrm>
-            <a:off x="4042116" y="5338880"/>
-            <a:ext cx="7473854" cy="565055"/>
+            <a:off x="3601523" y="5338880"/>
+            <a:ext cx="6535356" cy="565055"/>
           </a:xfrm>
           <a:prstGeom prst="rect">
             <a:avLst/>
@@ -9571,7 +9571,7 @@
           <p:cNvPr id="16" name="source">
             <a:extLst>
               <a:ext uri="{FF2B5EF4-FFF2-40B4-BE49-F238E27FC236}">
-                <a16:creationId xmlns:a16="http://schemas.microsoft.com/office/drawing/2014/main" id="{78D9CE4D-CD37-FF85-CE12-25E4F52E179D}"/>
+                <a16:creationId xmlns:a16="http://schemas.microsoft.com/office/drawing/2014/main" id="{A169E0D0-3814-DF71-CF25-6B6D7ACA0A7B}"/>
               </a:ext>
             </a:extLst>
           </p:cNvPr>
@@ -9628,7 +9628,7 @@
     </p:spTree>
     <p:extLst>
       <p:ext uri="{BB962C8B-B14F-4D97-AF65-F5344CB8AC3E}">
-        <p14:creationId xmlns:p14="http://schemas.microsoft.com/office/powerpoint/2010/main" val="2968238158"/>
+        <p14:creationId xmlns:p14="http://schemas.microsoft.com/office/powerpoint/2010/main" val="1127048219"/>
       </p:ext>
     </p:extLst>
   </p:cSld>
@@ -9778,9 +9778,9 @@
             </a:lvl1pPr>
           </a:lstStyle>
           <a:p>
-            <a:fld id="{90A7BBED-E6FA-40A6-8A51-59E4B08CD8B8}" type="datetimeFigureOut">
+            <a:fld id="{3DE1F4D6-9B94-49E1-9259-C44CF083EB57}" type="datetimeFigureOut">
               <a:rPr lang="en-US" smtClean="0"/>
-              <a:t>10/3/2026</a:t>
+              <a:t>10/4/2026</a:t>
             </a:fld>
             <a:endParaRPr lang="en-US"/>
           </a:p>
@@ -9823,7 +9823,7 @@
             </a:lvl1pPr>
           </a:lstStyle>
           <a:p>
-            <a:fld id="{4F0FE17B-5063-4433-97D2-96EAD825CE6E}" type="slidenum">
+            <a:fld id="{022853CD-29C7-4A68-BCE3-2ED71C774B8A}" type="slidenum">
               <a:rPr lang="en-US" smtClean="0"/>
               <a:t>‹#›</a:t>
             </a:fld>
@@ -9943,7 +9943,7 @@
           <p:cNvPr id="8" name="body">
             <a:extLst>
               <a:ext uri="{FF2B5EF4-FFF2-40B4-BE49-F238E27FC236}">
-                <a16:creationId xmlns:a16="http://schemas.microsoft.com/office/drawing/2014/main" id="{C23D53FE-44C4-07A5-EFD0-CE1CFB153692}"/>
+                <a16:creationId xmlns:a16="http://schemas.microsoft.com/office/drawing/2014/main" id="{9192E66C-DE1B-AD9F-4DF0-CE843EE86C25}"/>
               </a:ext>
             </a:extLst>
           </p:cNvPr>
@@ -9957,7 +9957,7 @@
         <p:spPr>
           <a:xfrm>
             <a:off x="533398" y="2231074"/>
-            <a:ext cx="11125202" cy="3814124"/>
+            <a:ext cx="9728202" cy="3814124"/>
           </a:xfrm>
         </p:spPr>
         <p:txBody>
@@ -9988,7 +9988,7 @@
           <p:cNvPr id="9" name="source">
             <a:extLst>
               <a:ext uri="{FF2B5EF4-FFF2-40B4-BE49-F238E27FC236}">
-                <a16:creationId xmlns:a16="http://schemas.microsoft.com/office/drawing/2014/main" id="{CF70A86B-DF2A-5C9F-8EA4-560F35BF3E03}"/>
+                <a16:creationId xmlns:a16="http://schemas.microsoft.com/office/drawing/2014/main" id="{2B056B62-F17B-D943-973A-07678CA08938}"/>
               </a:ext>
             </a:extLst>
           </p:cNvPr>
@@ -10045,7 +10045,7 @@
     </p:spTree>
     <p:extLst>
       <p:ext uri="{BB962C8B-B14F-4D97-AF65-F5344CB8AC3E}">
-        <p14:creationId xmlns:p14="http://schemas.microsoft.com/office/powerpoint/2010/main" val="478127596"/>
+        <p14:creationId xmlns:p14="http://schemas.microsoft.com/office/powerpoint/2010/main" val="428261117"/>
       </p:ext>
     </p:extLst>
   </p:cSld>
@@ -10195,9 +10195,9 @@
             </a:lvl1pPr>
           </a:lstStyle>
           <a:p>
-            <a:fld id="{90A7BBED-E6FA-40A6-8A51-59E4B08CD8B8}" type="datetimeFigureOut">
+            <a:fld id="{3DE1F4D6-9B94-49E1-9259-C44CF083EB57}" type="datetimeFigureOut">
               <a:rPr lang="en-US" smtClean="0"/>
-              <a:t>10/3/2026</a:t>
+              <a:t>10/4/2026</a:t>
             </a:fld>
             <a:endParaRPr lang="en-US"/>
           </a:p>
@@ -10240,7 +10240,7 @@
             </a:lvl1pPr>
           </a:lstStyle>
           <a:p>
-            <a:fld id="{4F0FE17B-5063-4433-97D2-96EAD825CE6E}" type="slidenum">
+            <a:fld id="{022853CD-29C7-4A68-BCE3-2ED71C774B8A}" type="slidenum">
               <a:rPr lang="en-US" smtClean="0"/>
               <a:t>‹#›</a:t>
             </a:fld>
@@ -10360,7 +10360,7 @@
           <p:cNvPr id="8" name="item_1_title">
             <a:extLst>
               <a:ext uri="{FF2B5EF4-FFF2-40B4-BE49-F238E27FC236}">
-                <a16:creationId xmlns:a16="http://schemas.microsoft.com/office/drawing/2014/main" id="{E97D9723-C22C-E263-46AA-2024BE6B383C}"/>
+                <a16:creationId xmlns:a16="http://schemas.microsoft.com/office/drawing/2014/main" id="{C2DE300E-4D03-5644-7E93-3BDAF6DA501D}"/>
               </a:ext>
             </a:extLst>
           </p:cNvPr>
@@ -10373,8 +10373,8 @@
         </p:nvSpPr>
         <p:spPr>
           <a:xfrm>
-            <a:off x="733082" y="2428844"/>
-            <a:ext cx="5049131" cy="411327"/>
+            <a:off x="708008" y="2428844"/>
+            <a:ext cx="4415107" cy="411327"/>
           </a:xfrm>
         </p:spPr>
         <p:txBody>
@@ -10412,7 +10412,7 @@
           <p:cNvPr id="9" name="item_1">
             <a:extLst>
               <a:ext uri="{FF2B5EF4-FFF2-40B4-BE49-F238E27FC236}">
-                <a16:creationId xmlns:a16="http://schemas.microsoft.com/office/drawing/2014/main" id="{FCD982AE-7189-B3A2-A81D-B167604DDB13}"/>
+                <a16:creationId xmlns:a16="http://schemas.microsoft.com/office/drawing/2014/main" id="{09BF32E4-7886-E8EF-1336-F7A5EE6BDAA7}"/>
               </a:ext>
             </a:extLst>
           </p:cNvPr>
@@ -10425,8 +10425,8 @@
         </p:nvSpPr>
         <p:spPr>
           <a:xfrm>
-            <a:off x="733082" y="2840171"/>
-            <a:ext cx="5049131" cy="987185"/>
+            <a:off x="708008" y="2840171"/>
+            <a:ext cx="4415107" cy="987185"/>
           </a:xfrm>
           <a:prstGeom prst="rect">
             <a:avLst/>
@@ -10460,7 +10460,7 @@
           <p:cNvPr id="10" name="item_2_title">
             <a:extLst>
               <a:ext uri="{FF2B5EF4-FFF2-40B4-BE49-F238E27FC236}">
-                <a16:creationId xmlns:a16="http://schemas.microsoft.com/office/drawing/2014/main" id="{9D643413-6926-2B4A-6DF5-97C4F772900A}"/>
+                <a16:creationId xmlns:a16="http://schemas.microsoft.com/office/drawing/2014/main" id="{06D63313-DAF3-9ED8-9D6D-8C02B4CEBB9F}"/>
               </a:ext>
             </a:extLst>
           </p:cNvPr>
@@ -10473,8 +10473,8 @@
         </p:nvSpPr>
         <p:spPr>
           <a:xfrm>
-            <a:off x="6409788" y="2428844"/>
-            <a:ext cx="5049131" cy="411327"/>
+            <a:off x="5671885" y="2428844"/>
+            <a:ext cx="4415107" cy="411327"/>
           </a:xfrm>
           <a:prstGeom prst="rect">
             <a:avLst/>
@@ -10515,7 +10515,7 @@
           <p:cNvPr id="11" name="item_2">
             <a:extLst>
               <a:ext uri="{FF2B5EF4-FFF2-40B4-BE49-F238E27FC236}">
-                <a16:creationId xmlns:a16="http://schemas.microsoft.com/office/drawing/2014/main" id="{BB9C6276-8E5B-D2F1-1C2B-9E1FF778EE58}"/>
+                <a16:creationId xmlns:a16="http://schemas.microsoft.com/office/drawing/2014/main" id="{57CB7D07-C424-ECC5-B491-BEAACBE8A4BF}"/>
               </a:ext>
             </a:extLst>
           </p:cNvPr>
@@ -10528,8 +10528,8 @@
         </p:nvSpPr>
         <p:spPr>
           <a:xfrm>
-            <a:off x="6409788" y="2840171"/>
-            <a:ext cx="5049131" cy="987185"/>
+            <a:off x="5671885" y="2840171"/>
+            <a:ext cx="4415107" cy="987185"/>
           </a:xfrm>
           <a:prstGeom prst="rect">
             <a:avLst/>
@@ -10563,7 +10563,7 @@
           <p:cNvPr id="12" name="item_3_title">
             <a:extLst>
               <a:ext uri="{FF2B5EF4-FFF2-40B4-BE49-F238E27FC236}">
-                <a16:creationId xmlns:a16="http://schemas.microsoft.com/office/drawing/2014/main" id="{2749EBC0-ADE2-95FF-97EC-1063E12D863C}"/>
+                <a16:creationId xmlns:a16="http://schemas.microsoft.com/office/drawing/2014/main" id="{DE8DF948-1327-9F7E-1AC4-270AB630FB0F}"/>
               </a:ext>
             </a:extLst>
           </p:cNvPr>
@@ -10576,8 +10576,8 @@
         </p:nvSpPr>
         <p:spPr>
           <a:xfrm>
-            <a:off x="733082" y="4448917"/>
-            <a:ext cx="5049131" cy="411327"/>
+            <a:off x="708008" y="4448917"/>
+            <a:ext cx="4415107" cy="411327"/>
           </a:xfrm>
           <a:prstGeom prst="rect">
             <a:avLst/>
@@ -10618,7 +10618,7 @@
           <p:cNvPr id="13" name="item_3">
             <a:extLst>
               <a:ext uri="{FF2B5EF4-FFF2-40B4-BE49-F238E27FC236}">
-                <a16:creationId xmlns:a16="http://schemas.microsoft.com/office/drawing/2014/main" id="{ADCEC31F-F744-B6C1-ACB0-FFBE78165BE4}"/>
+                <a16:creationId xmlns:a16="http://schemas.microsoft.com/office/drawing/2014/main" id="{7D912EE2-3881-2ABE-CA17-B99ED0C91A6D}"/>
               </a:ext>
             </a:extLst>
           </p:cNvPr>
@@ -10631,8 +10631,8 @@
         </p:nvSpPr>
         <p:spPr>
           <a:xfrm>
-            <a:off x="733082" y="4860245"/>
-            <a:ext cx="5049131" cy="987185"/>
+            <a:off x="708008" y="4860245"/>
+            <a:ext cx="4415107" cy="987185"/>
           </a:xfrm>
           <a:prstGeom prst="rect">
             <a:avLst/>
@@ -10666,7 +10666,7 @@
           <p:cNvPr id="14" name="item_4_title">
             <a:extLst>
               <a:ext uri="{FF2B5EF4-FFF2-40B4-BE49-F238E27FC236}">
-                <a16:creationId xmlns:a16="http://schemas.microsoft.com/office/drawing/2014/main" id="{61FFB201-AB96-8DBE-A632-37DF67C5CD69}"/>
+                <a16:creationId xmlns:a16="http://schemas.microsoft.com/office/drawing/2014/main" id="{F84989A9-D5D5-60D8-6218-4291A7F7FB34}"/>
               </a:ext>
             </a:extLst>
           </p:cNvPr>
@@ -10679,8 +10679,8 @@
         </p:nvSpPr>
         <p:spPr>
           <a:xfrm>
-            <a:off x="6409788" y="4448917"/>
-            <a:ext cx="5049131" cy="411327"/>
+            <a:off x="5671885" y="4448917"/>
+            <a:ext cx="4415107" cy="411327"/>
           </a:xfrm>
           <a:prstGeom prst="rect">
             <a:avLst/>
@@ -10721,7 +10721,7 @@
           <p:cNvPr id="15" name="item_4">
             <a:extLst>
               <a:ext uri="{FF2B5EF4-FFF2-40B4-BE49-F238E27FC236}">
-                <a16:creationId xmlns:a16="http://schemas.microsoft.com/office/drawing/2014/main" id="{1B450D88-596A-302D-4495-D621F59D2C43}"/>
+                <a16:creationId xmlns:a16="http://schemas.microsoft.com/office/drawing/2014/main" id="{7DFFDBD3-C543-A4C3-CEDF-9176DBF1BEE4}"/>
               </a:ext>
             </a:extLst>
           </p:cNvPr>
@@ -10734,8 +10734,8 @@
         </p:nvSpPr>
         <p:spPr>
           <a:xfrm>
-            <a:off x="6409788" y="4860245"/>
-            <a:ext cx="5049131" cy="987185"/>
+            <a:off x="5671885" y="4860245"/>
+            <a:ext cx="4415107" cy="987185"/>
           </a:xfrm>
           <a:prstGeom prst="rect">
             <a:avLst/>
@@ -10769,7 +10769,7 @@
           <p:cNvPr id="16" name="source">
             <a:extLst>
               <a:ext uri="{FF2B5EF4-FFF2-40B4-BE49-F238E27FC236}">
-                <a16:creationId xmlns:a16="http://schemas.microsoft.com/office/drawing/2014/main" id="{215EFA6C-FC58-5C20-A6AF-1F85588922F6}"/>
+                <a16:creationId xmlns:a16="http://schemas.microsoft.com/office/drawing/2014/main" id="{E6ECC28D-5FAD-3F25-70F8-BE667C4669DA}"/>
               </a:ext>
             </a:extLst>
           </p:cNvPr>
@@ -10826,7 +10826,7 @@
     </p:spTree>
     <p:extLst>
       <p:ext uri="{BB962C8B-B14F-4D97-AF65-F5344CB8AC3E}">
-        <p14:creationId xmlns:p14="http://schemas.microsoft.com/office/powerpoint/2010/main" val="4097179293"/>
+        <p14:creationId xmlns:p14="http://schemas.microsoft.com/office/powerpoint/2010/main" val="646076344"/>
       </p:ext>
     </p:extLst>
   </p:cSld>
@@ -10976,9 +10976,9 @@
             </a:lvl1pPr>
           </a:lstStyle>
           <a:p>
-            <a:fld id="{90A7BBED-E6FA-40A6-8A51-59E4B08CD8B8}" type="datetimeFigureOut">
+            <a:fld id="{3DE1F4D6-9B94-49E1-9259-C44CF083EB57}" type="datetimeFigureOut">
               <a:rPr lang="en-US" smtClean="0"/>
-              <a:t>10/3/2026</a:t>
+              <a:t>10/4/2026</a:t>
             </a:fld>
             <a:endParaRPr lang="en-US"/>
           </a:p>
@@ -11021,7 +11021,7 @@
             </a:lvl1pPr>
           </a:lstStyle>
           <a:p>
-            <a:fld id="{4F0FE17B-5063-4433-97D2-96EAD825CE6E}" type="slidenum">
+            <a:fld id="{022853CD-29C7-4A68-BCE3-2ED71C774B8A}" type="slidenum">
               <a:rPr lang="en-US" smtClean="0"/>
               <a:t>‹#›</a:t>
             </a:fld>
@@ -11141,7 +11141,7 @@
           <p:cNvPr id="8" name="body">
             <a:extLst>
               <a:ext uri="{FF2B5EF4-FFF2-40B4-BE49-F238E27FC236}">
-                <a16:creationId xmlns:a16="http://schemas.microsoft.com/office/drawing/2014/main" id="{32C36129-3762-A25F-ECE3-484C0F3227BC}"/>
+                <a16:creationId xmlns:a16="http://schemas.microsoft.com/office/drawing/2014/main" id="{40F6F3D5-2185-A9A2-3BFE-03CE83127245}"/>
               </a:ext>
             </a:extLst>
           </p:cNvPr>
@@ -11154,8 +11154,8 @@
         </p:nvSpPr>
         <p:spPr>
           <a:xfrm>
-            <a:off x="7653528" y="2803193"/>
-            <a:ext cx="4005073" cy="2669887"/>
+            <a:off x="6759448" y="2803193"/>
+            <a:ext cx="3502153" cy="2669887"/>
           </a:xfrm>
         </p:spPr>
         <p:txBody>
@@ -11181,7 +11181,7 @@
           <p:cNvPr id="9" name="kpi_value_1">
             <a:extLst>
               <a:ext uri="{FF2B5EF4-FFF2-40B4-BE49-F238E27FC236}">
-                <a16:creationId xmlns:a16="http://schemas.microsoft.com/office/drawing/2014/main" id="{03D647EE-9347-8FC4-526F-08E3BC1E2288}"/>
+                <a16:creationId xmlns:a16="http://schemas.microsoft.com/office/drawing/2014/main" id="{E33FE275-CC56-8759-38A3-D35D16CFB79D}"/>
               </a:ext>
             </a:extLst>
           </p:cNvPr>
@@ -11195,7 +11195,7 @@
         <p:spPr>
           <a:xfrm>
             <a:off x="533399" y="2231075"/>
-            <a:ext cx="6675121" cy="2451937"/>
+            <a:ext cx="5836921" cy="2451937"/>
           </a:xfrm>
           <a:prstGeom prst="rect">
             <a:avLst/>
@@ -11236,7 +11236,7 @@
           <p:cNvPr id="10" name="kpi_label_1">
             <a:extLst>
               <a:ext uri="{FF2B5EF4-FFF2-40B4-BE49-F238E27FC236}">
-                <a16:creationId xmlns:a16="http://schemas.microsoft.com/office/drawing/2014/main" id="{C129D0FD-D8B1-34D2-7B1C-53AF092907E1}"/>
+                <a16:creationId xmlns:a16="http://schemas.microsoft.com/office/drawing/2014/main" id="{1CB1BF9D-5568-85DA-15D8-C832A8B55724}"/>
               </a:ext>
             </a:extLst>
           </p:cNvPr>
@@ -11250,7 +11250,7 @@
         <p:spPr>
           <a:xfrm>
             <a:off x="533399" y="4683012"/>
-            <a:ext cx="6675121" cy="1362187"/>
+            <a:ext cx="5836921" cy="1362187"/>
           </a:xfrm>
           <a:prstGeom prst="rect">
             <a:avLst/>
@@ -11284,7 +11284,7 @@
           <p:cNvPr id="11" name="source">
             <a:extLst>
               <a:ext uri="{FF2B5EF4-FFF2-40B4-BE49-F238E27FC236}">
-                <a16:creationId xmlns:a16="http://schemas.microsoft.com/office/drawing/2014/main" id="{74FB9881-4009-A062-FB16-969013E678A2}"/>
+                <a16:creationId xmlns:a16="http://schemas.microsoft.com/office/drawing/2014/main" id="{069ACC38-9752-103C-68D7-AB8C659C27B5}"/>
               </a:ext>
             </a:extLst>
           </p:cNvPr>
@@ -11341,7 +11341,7 @@
     </p:spTree>
     <p:extLst>
       <p:ext uri="{BB962C8B-B14F-4D97-AF65-F5344CB8AC3E}">
-        <p14:creationId xmlns:p14="http://schemas.microsoft.com/office/powerpoint/2010/main" val="1510952173"/>
+        <p14:creationId xmlns:p14="http://schemas.microsoft.com/office/powerpoint/2010/main" val="3782100404"/>
       </p:ext>
     </p:extLst>
   </p:cSld>
@@ -11491,9 +11491,9 @@
             </a:lvl1pPr>
           </a:lstStyle>
           <a:p>
-            <a:fld id="{90A7BBED-E6FA-40A6-8A51-59E4B08CD8B8}" type="datetimeFigureOut">
+            <a:fld id="{3DE1F4D6-9B94-49E1-9259-C44CF083EB57}" type="datetimeFigureOut">
               <a:rPr lang="en-US" smtClean="0"/>
-              <a:t>10/3/2026</a:t>
+              <a:t>10/4/2026</a:t>
             </a:fld>
             <a:endParaRPr lang="en-US"/>
           </a:p>
@@ -11536,7 +11536,7 @@
             </a:lvl1pPr>
           </a:lstStyle>
           <a:p>
-            <a:fld id="{4F0FE17B-5063-4433-97D2-96EAD825CE6E}" type="slidenum">
+            <a:fld id="{022853CD-29C7-4A68-BCE3-2ED71C774B8A}" type="slidenum">
               <a:rPr lang="en-US" smtClean="0"/>
               <a:t>‹#›</a:t>
             </a:fld>
@@ -11656,7 +11656,7 @@
           <p:cNvPr id="8" name="body">
             <a:extLst>
               <a:ext uri="{FF2B5EF4-FFF2-40B4-BE49-F238E27FC236}">
-                <a16:creationId xmlns:a16="http://schemas.microsoft.com/office/drawing/2014/main" id="{B3A586A3-B887-EE1D-C92E-018597DED249}"/>
+                <a16:creationId xmlns:a16="http://schemas.microsoft.com/office/drawing/2014/main" id="{21D5E955-D17D-F955-9F5A-943EFD4EF93E}"/>
               </a:ext>
             </a:extLst>
           </p:cNvPr>
@@ -11670,7 +11670,7 @@
         <p:spPr>
           <a:xfrm>
             <a:off x="533398" y="5358656"/>
-            <a:ext cx="11125202" cy="686542"/>
+            <a:ext cx="9728202" cy="686542"/>
           </a:xfrm>
         </p:spPr>
         <p:txBody>
@@ -11696,7 +11696,7 @@
           <p:cNvPr id="9" name="kpi_value_1">
             <a:extLst>
               <a:ext uri="{FF2B5EF4-FFF2-40B4-BE49-F238E27FC236}">
-                <a16:creationId xmlns:a16="http://schemas.microsoft.com/office/drawing/2014/main" id="{3259CD03-0D8C-1FD4-52B5-FC3899003A53}"/>
+                <a16:creationId xmlns:a16="http://schemas.microsoft.com/office/drawing/2014/main" id="{AFD446D5-C836-D99C-4354-B6424565A33F}"/>
               </a:ext>
             </a:extLst>
           </p:cNvPr>
@@ -11709,8 +11709,8 @@
         </p:nvSpPr>
         <p:spPr>
           <a:xfrm>
-            <a:off x="733082" y="2428843"/>
-            <a:ext cx="5163235" cy="1658236"/>
+            <a:off x="708007" y="2428843"/>
+            <a:ext cx="4514884" cy="1658236"/>
           </a:xfrm>
           <a:prstGeom prst="rect">
             <a:avLst/>
@@ -11751,7 +11751,7 @@
           <p:cNvPr id="10" name="kpi_label_1">
             <a:extLst>
               <a:ext uri="{FF2B5EF4-FFF2-40B4-BE49-F238E27FC236}">
-                <a16:creationId xmlns:a16="http://schemas.microsoft.com/office/drawing/2014/main" id="{766DFBC3-D1CF-D3BE-9111-861D001708E2}"/>
+                <a16:creationId xmlns:a16="http://schemas.microsoft.com/office/drawing/2014/main" id="{D3BE4313-E63A-99C5-209A-3CBB228145A0}"/>
               </a:ext>
             </a:extLst>
           </p:cNvPr>
@@ -11764,8 +11764,8 @@
         </p:nvSpPr>
         <p:spPr>
           <a:xfrm>
-            <a:off x="733082" y="4087079"/>
-            <a:ext cx="5163235" cy="921242"/>
+            <a:off x="708007" y="4087079"/>
+            <a:ext cx="4514884" cy="921242"/>
           </a:xfrm>
           <a:prstGeom prst="rect">
             <a:avLst/>
@@ -11799,7 +11799,7 @@
           <p:cNvPr id="11" name="kpi_value_2">
             <a:extLst>
               <a:ext uri="{FF2B5EF4-FFF2-40B4-BE49-F238E27FC236}">
-                <a16:creationId xmlns:a16="http://schemas.microsoft.com/office/drawing/2014/main" id="{55E2EA72-A3E8-BAC1-594B-FB298BC9F45E}"/>
+                <a16:creationId xmlns:a16="http://schemas.microsoft.com/office/drawing/2014/main" id="{5F1FCA3E-1C2C-7DD7-1C85-A5A6F236F78B}"/>
               </a:ext>
             </a:extLst>
           </p:cNvPr>
@@ -11812,8 +11812,8 @@
         </p:nvSpPr>
         <p:spPr>
           <a:xfrm>
-            <a:off x="6523892" y="2428844"/>
-            <a:ext cx="4935026" cy="629331"/>
+            <a:off x="5771662" y="2428844"/>
+            <a:ext cx="4315331" cy="629331"/>
           </a:xfrm>
           <a:prstGeom prst="rect">
             <a:avLst/>
@@ -11854,7 +11854,7 @@
           <p:cNvPr id="12" name="kpi_label_2">
             <a:extLst>
               <a:ext uri="{FF2B5EF4-FFF2-40B4-BE49-F238E27FC236}">
-                <a16:creationId xmlns:a16="http://schemas.microsoft.com/office/drawing/2014/main" id="{6D86E217-0817-1B0C-4668-42FEC7475FC5}"/>
+                <a16:creationId xmlns:a16="http://schemas.microsoft.com/office/drawing/2014/main" id="{C5E97ED8-1C64-70C7-C0A4-8A5A616A56D9}"/>
               </a:ext>
             </a:extLst>
           </p:cNvPr>
@@ -11867,8 +11867,8 @@
         </p:nvSpPr>
         <p:spPr>
           <a:xfrm>
-            <a:off x="6523892" y="3058174"/>
-            <a:ext cx="4935026" cy="349628"/>
+            <a:off x="5771662" y="3058174"/>
+            <a:ext cx="4315331" cy="349628"/>
           </a:xfrm>
           <a:prstGeom prst="rect">
             <a:avLst/>
@@ -11902,7 +11902,7 @@
           <p:cNvPr id="13" name="kpi_value_3">
             <a:extLst>
               <a:ext uri="{FF2B5EF4-FFF2-40B4-BE49-F238E27FC236}">
-                <a16:creationId xmlns:a16="http://schemas.microsoft.com/office/drawing/2014/main" id="{91832C22-25A5-580D-0BAC-EA528D73691D}"/>
+                <a16:creationId xmlns:a16="http://schemas.microsoft.com/office/drawing/2014/main" id="{CBE819B3-99EB-B889-1326-DA6CBB3EA32E}"/>
               </a:ext>
             </a:extLst>
           </p:cNvPr>
@@ -11915,8 +11915,8 @@
         </p:nvSpPr>
         <p:spPr>
           <a:xfrm>
-            <a:off x="6523893" y="4029364"/>
-            <a:ext cx="2153725" cy="629331"/>
+            <a:off x="5771661" y="4029364"/>
+            <a:ext cx="1883280" cy="629331"/>
           </a:xfrm>
           <a:prstGeom prst="rect">
             <a:avLst/>
@@ -11957,7 +11957,7 @@
           <p:cNvPr id="14" name="kpi_label_3">
             <a:extLst>
               <a:ext uri="{FF2B5EF4-FFF2-40B4-BE49-F238E27FC236}">
-                <a16:creationId xmlns:a16="http://schemas.microsoft.com/office/drawing/2014/main" id="{5705EB15-CAF4-74A5-0B74-8C7D6258C053}"/>
+                <a16:creationId xmlns:a16="http://schemas.microsoft.com/office/drawing/2014/main" id="{E25DDAEA-400B-CE01-A839-8E2C5C8A9083}"/>
               </a:ext>
             </a:extLst>
           </p:cNvPr>
@@ -11970,8 +11970,8 @@
         </p:nvSpPr>
         <p:spPr>
           <a:xfrm>
-            <a:off x="6523893" y="4658693"/>
-            <a:ext cx="2153725" cy="349628"/>
+            <a:off x="5771661" y="4658693"/>
+            <a:ext cx="1883280" cy="349628"/>
           </a:xfrm>
           <a:prstGeom prst="rect">
             <a:avLst/>
@@ -12005,7 +12005,7 @@
           <p:cNvPr id="15" name="kpi_value_4">
             <a:extLst>
               <a:ext uri="{FF2B5EF4-FFF2-40B4-BE49-F238E27FC236}">
-                <a16:creationId xmlns:a16="http://schemas.microsoft.com/office/drawing/2014/main" id="{E2A0E19F-8EE6-D4E6-21F7-0605AFF2F9F5}"/>
+                <a16:creationId xmlns:a16="http://schemas.microsoft.com/office/drawing/2014/main" id="{43F2304A-D0F3-5C1C-9890-EBBB2A0B8236}"/>
               </a:ext>
             </a:extLst>
           </p:cNvPr>
@@ -12018,8 +12018,8 @@
         </p:nvSpPr>
         <p:spPr>
           <a:xfrm>
-            <a:off x="9305193" y="4029364"/>
-            <a:ext cx="2153725" cy="629331"/>
+            <a:off x="8203712" y="4029364"/>
+            <a:ext cx="1883280" cy="629331"/>
           </a:xfrm>
           <a:prstGeom prst="rect">
             <a:avLst/>
@@ -12060,7 +12060,7 @@
           <p:cNvPr id="16" name="kpi_label_4">
             <a:extLst>
               <a:ext uri="{FF2B5EF4-FFF2-40B4-BE49-F238E27FC236}">
-                <a16:creationId xmlns:a16="http://schemas.microsoft.com/office/drawing/2014/main" id="{332796AC-C1A3-820E-2CD9-F3E5718CDBF8}"/>
+                <a16:creationId xmlns:a16="http://schemas.microsoft.com/office/drawing/2014/main" id="{A82FB10F-2EC8-C84A-058D-17946E0EC136}"/>
               </a:ext>
             </a:extLst>
           </p:cNvPr>
@@ -12073,8 +12073,8 @@
         </p:nvSpPr>
         <p:spPr>
           <a:xfrm>
-            <a:off x="9305193" y="4658693"/>
-            <a:ext cx="2153725" cy="349628"/>
+            <a:off x="8203712" y="4658693"/>
+            <a:ext cx="1883280" cy="349628"/>
           </a:xfrm>
           <a:prstGeom prst="rect">
             <a:avLst/>
@@ -12108,7 +12108,7 @@
           <p:cNvPr id="17" name="source">
             <a:extLst>
               <a:ext uri="{FF2B5EF4-FFF2-40B4-BE49-F238E27FC236}">
-                <a16:creationId xmlns:a16="http://schemas.microsoft.com/office/drawing/2014/main" id="{B361E649-0CE6-48C3-B622-C0918DEABAF0}"/>
+                <a16:creationId xmlns:a16="http://schemas.microsoft.com/office/drawing/2014/main" id="{9D756038-6279-8CE1-D216-F1548042A085}"/>
               </a:ext>
             </a:extLst>
           </p:cNvPr>
@@ -12165,7 +12165,7 @@
     </p:spTree>
     <p:extLst>
       <p:ext uri="{BB962C8B-B14F-4D97-AF65-F5344CB8AC3E}">
-        <p14:creationId xmlns:p14="http://schemas.microsoft.com/office/powerpoint/2010/main" val="2610465086"/>
+        <p14:creationId xmlns:p14="http://schemas.microsoft.com/office/powerpoint/2010/main" val="3488245086"/>
       </p:ext>
     </p:extLst>
   </p:cSld>
@@ -12315,9 +12315,9 @@
             </a:lvl1pPr>
           </a:lstStyle>
           <a:p>
-            <a:fld id="{90A7BBED-E6FA-40A6-8A51-59E4B08CD8B8}" type="datetimeFigureOut">
+            <a:fld id="{3DE1F4D6-9B94-49E1-9259-C44CF083EB57}" type="datetimeFigureOut">
               <a:rPr lang="en-US" smtClean="0"/>
-              <a:t>10/3/2026</a:t>
+              <a:t>10/4/2026</a:t>
             </a:fld>
             <a:endParaRPr lang="en-US"/>
           </a:p>
@@ -12360,7 +12360,7 @@
             </a:lvl1pPr>
           </a:lstStyle>
           <a:p>
-            <a:fld id="{4F0FE17B-5063-4433-97D2-96EAD825CE6E}" type="slidenum">
+            <a:fld id="{022853CD-29C7-4A68-BCE3-2ED71C774B8A}" type="slidenum">
               <a:rPr lang="en-US" smtClean="0"/>
               <a:t>‹#›</a:t>
             </a:fld>
@@ -12480,7 +12480,7 @@
           <p:cNvPr id="8" name="body">
             <a:extLst>
               <a:ext uri="{FF2B5EF4-FFF2-40B4-BE49-F238E27FC236}">
-                <a16:creationId xmlns:a16="http://schemas.microsoft.com/office/drawing/2014/main" id="{42D9BB80-D5D5-2474-F745-52831618F566}"/>
+                <a16:creationId xmlns:a16="http://schemas.microsoft.com/office/drawing/2014/main" id="{C9F4ECEA-AF4F-1722-0769-F0190759E26E}"/>
               </a:ext>
             </a:extLst>
           </p:cNvPr>
@@ -12494,7 +12494,7 @@
         <p:spPr>
           <a:xfrm>
             <a:off x="533398" y="5358656"/>
-            <a:ext cx="11125202" cy="686542"/>
+            <a:ext cx="9728202" cy="686542"/>
           </a:xfrm>
         </p:spPr>
         <p:txBody>
@@ -12520,7 +12520,7 @@
           <p:cNvPr id="9" name="kpi_value_1">
             <a:extLst>
               <a:ext uri="{FF2B5EF4-FFF2-40B4-BE49-F238E27FC236}">
-                <a16:creationId xmlns:a16="http://schemas.microsoft.com/office/drawing/2014/main" id="{E60BE19B-5499-7D40-132C-24504CE25ECC}"/>
+                <a16:creationId xmlns:a16="http://schemas.microsoft.com/office/drawing/2014/main" id="{17269875-4143-4E3D-E92A-87464D8A3ACE}"/>
               </a:ext>
             </a:extLst>
           </p:cNvPr>
@@ -12533,8 +12533,8 @@
         </p:nvSpPr>
         <p:spPr>
           <a:xfrm>
-            <a:off x="733082" y="2428844"/>
-            <a:ext cx="5049131" cy="1254881"/>
+            <a:off x="708008" y="2428844"/>
+            <a:ext cx="4415107" cy="1254881"/>
           </a:xfrm>
           <a:prstGeom prst="rect">
             <a:avLst/>
@@ -12575,7 +12575,7 @@
           <p:cNvPr id="10" name="kpi_label_1">
             <a:extLst>
               <a:ext uri="{FF2B5EF4-FFF2-40B4-BE49-F238E27FC236}">
-                <a16:creationId xmlns:a16="http://schemas.microsoft.com/office/drawing/2014/main" id="{389004A2-A68E-5998-8B13-EA667ED3FA7D}"/>
+                <a16:creationId xmlns:a16="http://schemas.microsoft.com/office/drawing/2014/main" id="{FE00D9C0-E5B7-6A10-2922-7CCF5EF60233}"/>
               </a:ext>
             </a:extLst>
           </p:cNvPr>
@@ -12588,8 +12588,8 @@
         </p:nvSpPr>
         <p:spPr>
           <a:xfrm>
-            <a:off x="733082" y="3683724"/>
-            <a:ext cx="5049131" cy="697156"/>
+            <a:off x="708008" y="3683724"/>
+            <a:ext cx="4415107" cy="697156"/>
           </a:xfrm>
           <a:prstGeom prst="rect">
             <a:avLst/>
@@ -12623,7 +12623,7 @@
           <p:cNvPr id="11" name="kpi_value_2">
             <a:extLst>
               <a:ext uri="{FF2B5EF4-FFF2-40B4-BE49-F238E27FC236}">
-                <a16:creationId xmlns:a16="http://schemas.microsoft.com/office/drawing/2014/main" id="{47C983B0-628F-3507-0D1D-BDB5C02BBCBD}"/>
+                <a16:creationId xmlns:a16="http://schemas.microsoft.com/office/drawing/2014/main" id="{0233A9B4-13A4-1BD7-8E24-74849BFC38C3}"/>
               </a:ext>
             </a:extLst>
           </p:cNvPr>
@@ -12636,8 +12636,8 @@
         </p:nvSpPr>
         <p:spPr>
           <a:xfrm>
-            <a:off x="6409788" y="2428844"/>
-            <a:ext cx="5049131" cy="1254881"/>
+            <a:off x="5671885" y="2428844"/>
+            <a:ext cx="4415107" cy="1254881"/>
           </a:xfrm>
           <a:prstGeom prst="rect">
             <a:avLst/>
@@ -12678,7 +12678,7 @@
           <p:cNvPr id="12" name="kpi_label_2">
             <a:extLst>
               <a:ext uri="{FF2B5EF4-FFF2-40B4-BE49-F238E27FC236}">
-                <a16:creationId xmlns:a16="http://schemas.microsoft.com/office/drawing/2014/main" id="{F561130C-467A-AD9F-B1D5-C5F9AD30AE17}"/>
+                <a16:creationId xmlns:a16="http://schemas.microsoft.com/office/drawing/2014/main" id="{E6E5CC2A-8B01-CAEF-20DF-840FC889118F}"/>
               </a:ext>
             </a:extLst>
           </p:cNvPr>
@@ -12691,8 +12691,8 @@
         </p:nvSpPr>
         <p:spPr>
           <a:xfrm>
-            <a:off x="6409788" y="3683724"/>
-            <a:ext cx="5049131" cy="697156"/>
+            <a:off x="5671885" y="3683724"/>
+            <a:ext cx="4415107" cy="697156"/>
           </a:xfrm>
           <a:prstGeom prst="rect">
             <a:avLst/>
@@ -12726,7 +12726,7 @@
           <p:cNvPr id="13" name="source">
             <a:extLst>
               <a:ext uri="{FF2B5EF4-FFF2-40B4-BE49-F238E27FC236}">
-                <a16:creationId xmlns:a16="http://schemas.microsoft.com/office/drawing/2014/main" id="{78F762C1-9B0D-AB98-7090-92FF88CE8B6F}"/>
+                <a16:creationId xmlns:a16="http://schemas.microsoft.com/office/drawing/2014/main" id="{A8B17AA6-B88A-802C-19DE-F47C54703BE2}"/>
               </a:ext>
             </a:extLst>
           </p:cNvPr>
@@ -12783,7 +12783,7 @@
     </p:spTree>
     <p:extLst>
       <p:ext uri="{BB962C8B-B14F-4D97-AF65-F5344CB8AC3E}">
-        <p14:creationId xmlns:p14="http://schemas.microsoft.com/office/powerpoint/2010/main" val="2997925755"/>
+        <p14:creationId xmlns:p14="http://schemas.microsoft.com/office/powerpoint/2010/main" val="2100176483"/>
       </p:ext>
     </p:extLst>
   </p:cSld>
@@ -12933,9 +12933,9 @@
             </a:lvl1pPr>
           </a:lstStyle>
           <a:p>
-            <a:fld id="{90A7BBED-E6FA-40A6-8A51-59E4B08CD8B8}" type="datetimeFigureOut">
+            <a:fld id="{3DE1F4D6-9B94-49E1-9259-C44CF083EB57}" type="datetimeFigureOut">
               <a:rPr lang="en-US" smtClean="0"/>
-              <a:t>10/3/2026</a:t>
+              <a:t>10/4/2026</a:t>
             </a:fld>
             <a:endParaRPr lang="en-US"/>
           </a:p>
@@ -12978,7 +12978,7 @@
             </a:lvl1pPr>
           </a:lstStyle>
           <a:p>
-            <a:fld id="{4F0FE17B-5063-4433-97D2-96EAD825CE6E}" type="slidenum">
+            <a:fld id="{022853CD-29C7-4A68-BCE3-2ED71C774B8A}" type="slidenum">
               <a:rPr lang="en-US" smtClean="0"/>
               <a:t>‹#›</a:t>
             </a:fld>
@@ -13098,7 +13098,7 @@
           <p:cNvPr id="8" name="body">
             <a:extLst>
               <a:ext uri="{FF2B5EF4-FFF2-40B4-BE49-F238E27FC236}">
-                <a16:creationId xmlns:a16="http://schemas.microsoft.com/office/drawing/2014/main" id="{B6F7BD4E-15B8-A6A1-7EAD-F657834A38AC}"/>
+                <a16:creationId xmlns:a16="http://schemas.microsoft.com/office/drawing/2014/main" id="{2E58BD51-F5C5-06BE-8803-A9EEB14BBA03}"/>
               </a:ext>
             </a:extLst>
           </p:cNvPr>
@@ -13112,7 +13112,7 @@
         <p:spPr>
           <a:xfrm>
             <a:off x="533398" y="5358656"/>
-            <a:ext cx="11125202" cy="686542"/>
+            <a:ext cx="9728202" cy="686542"/>
           </a:xfrm>
         </p:spPr>
         <p:txBody>
@@ -13138,7 +13138,7 @@
           <p:cNvPr id="9" name="kpi_value_1">
             <a:extLst>
               <a:ext uri="{FF2B5EF4-FFF2-40B4-BE49-F238E27FC236}">
-                <a16:creationId xmlns:a16="http://schemas.microsoft.com/office/drawing/2014/main" id="{CCDBA900-12FB-E836-08BE-5A8B95B91F46}"/>
+                <a16:creationId xmlns:a16="http://schemas.microsoft.com/office/drawing/2014/main" id="{94277564-8930-D3AF-B348-7FB742ED8743}"/>
               </a:ext>
             </a:extLst>
           </p:cNvPr>
@@ -13151,8 +13151,8 @@
         </p:nvSpPr>
         <p:spPr>
           <a:xfrm>
-            <a:off x="676030" y="2372339"/>
-            <a:ext cx="2818385" cy="355279"/>
+            <a:off x="658119" y="2372339"/>
+            <a:ext cx="2464478" cy="355279"/>
           </a:xfrm>
           <a:prstGeom prst="rect">
             <a:avLst/>
@@ -13193,7 +13193,7 @@
           <p:cNvPr id="10" name="kpi_label_1">
             <a:extLst>
               <a:ext uri="{FF2B5EF4-FFF2-40B4-BE49-F238E27FC236}">
-                <a16:creationId xmlns:a16="http://schemas.microsoft.com/office/drawing/2014/main" id="{A942375C-314F-D2F7-1238-45C8957B086F}"/>
+                <a16:creationId xmlns:a16="http://schemas.microsoft.com/office/drawing/2014/main" id="{2D468196-E98A-FD23-BBA2-07ED3DD6DFCA}"/>
               </a:ext>
             </a:extLst>
           </p:cNvPr>
@@ -13206,8 +13206,8 @@
         </p:nvSpPr>
         <p:spPr>
           <a:xfrm>
-            <a:off x="3608519" y="2372339"/>
-            <a:ext cx="7907451" cy="263169"/>
+            <a:off x="3222374" y="2372339"/>
+            <a:ext cx="6914507" cy="263169"/>
           </a:xfrm>
           <a:prstGeom prst="rect">
             <a:avLst/>
@@ -13241,7 +13241,7 @@
           <p:cNvPr id="11" name="kpi_value_2">
             <a:extLst>
               <a:ext uri="{FF2B5EF4-FFF2-40B4-BE49-F238E27FC236}">
-                <a16:creationId xmlns:a16="http://schemas.microsoft.com/office/drawing/2014/main" id="{42B40ED7-CC51-30AC-AF3A-22DAFD15BB3C}"/>
+                <a16:creationId xmlns:a16="http://schemas.microsoft.com/office/drawing/2014/main" id="{FE31501D-92CB-2F60-CF90-229CD23172D7}"/>
               </a:ext>
             </a:extLst>
           </p:cNvPr>
@@ -13254,8 +13254,8 @@
         </p:nvSpPr>
         <p:spPr>
           <a:xfrm>
-            <a:off x="676030" y="3151409"/>
-            <a:ext cx="2818385" cy="355279"/>
+            <a:off x="658119" y="3151409"/>
+            <a:ext cx="2464478" cy="355279"/>
           </a:xfrm>
           <a:prstGeom prst="rect">
             <a:avLst/>
@@ -13296,7 +13296,7 @@
           <p:cNvPr id="12" name="kpi_label_2">
             <a:extLst>
               <a:ext uri="{FF2B5EF4-FFF2-40B4-BE49-F238E27FC236}">
-                <a16:creationId xmlns:a16="http://schemas.microsoft.com/office/drawing/2014/main" id="{39DBAD88-A1D1-7EBC-5C43-82B06BC5EB11}"/>
+                <a16:creationId xmlns:a16="http://schemas.microsoft.com/office/drawing/2014/main" id="{F7D3D2A0-7E0A-F8A9-F16C-AF67039CCBAF}"/>
               </a:ext>
             </a:extLst>
           </p:cNvPr>
@@ -13309,8 +13309,8 @@
         </p:nvSpPr>
         <p:spPr>
           <a:xfrm>
-            <a:off x="3608519" y="3151409"/>
-            <a:ext cx="7907451" cy="263169"/>
+            <a:off x="3222374" y="3151409"/>
+            <a:ext cx="6914507" cy="263169"/>
           </a:xfrm>
           <a:prstGeom prst="rect">
             <a:avLst/>
@@ -13344,7 +13344,7 @@
           <p:cNvPr id="13" name="kpi_value_3">
             <a:extLst>
               <a:ext uri="{FF2B5EF4-FFF2-40B4-BE49-F238E27FC236}">
-                <a16:creationId xmlns:a16="http://schemas.microsoft.com/office/drawing/2014/main" id="{E5563C4F-3B23-837E-F677-E1C831E29654}"/>
+                <a16:creationId xmlns:a16="http://schemas.microsoft.com/office/drawing/2014/main" id="{6FD37633-41CD-7614-BC4C-966ADAF99445}"/>
               </a:ext>
             </a:extLst>
           </p:cNvPr>
@@ -13357,8 +13357,8 @@
         </p:nvSpPr>
         <p:spPr>
           <a:xfrm>
-            <a:off x="676030" y="3930479"/>
-            <a:ext cx="2818385" cy="355279"/>
+            <a:off x="658119" y="3930479"/>
+            <a:ext cx="2464478" cy="355279"/>
           </a:xfrm>
           <a:prstGeom prst="rect">
             <a:avLst/>
@@ -13399,7 +13399,7 @@
           <p:cNvPr id="14" name="kpi_label_3">
             <a:extLst>
               <a:ext uri="{FF2B5EF4-FFF2-40B4-BE49-F238E27FC236}">
-                <a16:creationId xmlns:a16="http://schemas.microsoft.com/office/drawing/2014/main" id="{B39300BF-BD54-9EA9-04A3-1D12FC0E4AC2}"/>
+                <a16:creationId xmlns:a16="http://schemas.microsoft.com/office/drawing/2014/main" id="{A5D50E31-483D-218F-7AD6-DF3F81C7428D}"/>
               </a:ext>
             </a:extLst>
           </p:cNvPr>
@@ -13412,8 +13412,8 @@
         </p:nvSpPr>
         <p:spPr>
           <a:xfrm>
-            <a:off x="3608519" y="3930479"/>
-            <a:ext cx="7907451" cy="263169"/>
+            <a:off x="3222374" y="3930479"/>
+            <a:ext cx="6914507" cy="263169"/>
           </a:xfrm>
           <a:prstGeom prst="rect">
             <a:avLst/>
@@ -13447,7 +13447,7 @@
           <p:cNvPr id="15" name="kpi_value_4">
             <a:extLst>
               <a:ext uri="{FF2B5EF4-FFF2-40B4-BE49-F238E27FC236}">
-                <a16:creationId xmlns:a16="http://schemas.microsoft.com/office/drawing/2014/main" id="{DFD76D23-F069-12CD-EC94-CB8DCE33E791}"/>
+                <a16:creationId xmlns:a16="http://schemas.microsoft.com/office/drawing/2014/main" id="{5508A08A-2A6B-04F3-FB17-30930A29A005}"/>
               </a:ext>
             </a:extLst>
           </p:cNvPr>
@@ -13460,8 +13460,8 @@
         </p:nvSpPr>
         <p:spPr>
           <a:xfrm>
-            <a:off x="676030" y="4709549"/>
-            <a:ext cx="2818385" cy="355279"/>
+            <a:off x="658119" y="4709549"/>
+            <a:ext cx="2464478" cy="355279"/>
           </a:xfrm>
           <a:prstGeom prst="rect">
             <a:avLst/>
@@ -13502,7 +13502,7 @@
           <p:cNvPr id="16" name="kpi_label_4">
             <a:extLst>
               <a:ext uri="{FF2B5EF4-FFF2-40B4-BE49-F238E27FC236}">
-                <a16:creationId xmlns:a16="http://schemas.microsoft.com/office/drawing/2014/main" id="{BEDE80A8-5D02-9F70-3BBC-2E69AC4A28EE}"/>
+                <a16:creationId xmlns:a16="http://schemas.microsoft.com/office/drawing/2014/main" id="{9D0113E5-AA37-AC27-95A8-6866ED64CE49}"/>
               </a:ext>
             </a:extLst>
           </p:cNvPr>
@@ -13515,8 +13515,8 @@
         </p:nvSpPr>
         <p:spPr>
           <a:xfrm>
-            <a:off x="3608519" y="4709549"/>
-            <a:ext cx="7907451" cy="263169"/>
+            <a:off x="3222374" y="4709549"/>
+            <a:ext cx="6914507" cy="263169"/>
           </a:xfrm>
           <a:prstGeom prst="rect">
             <a:avLst/>
@@ -13550,7 +13550,7 @@
           <p:cNvPr id="17" name="source">
             <a:extLst>
               <a:ext uri="{FF2B5EF4-FFF2-40B4-BE49-F238E27FC236}">
-                <a16:creationId xmlns:a16="http://schemas.microsoft.com/office/drawing/2014/main" id="{B7B3A0DA-36E4-B65D-D7E0-01D1F1B6103B}"/>
+                <a16:creationId xmlns:a16="http://schemas.microsoft.com/office/drawing/2014/main" id="{36DEB30C-DD1E-E1BC-E0FD-EB11C606CF84}"/>
               </a:ext>
             </a:extLst>
           </p:cNvPr>
@@ -13607,7 +13607,7 @@
     </p:spTree>
     <p:extLst>
       <p:ext uri="{BB962C8B-B14F-4D97-AF65-F5344CB8AC3E}">
-        <p14:creationId xmlns:p14="http://schemas.microsoft.com/office/powerpoint/2010/main" val="380875177"/>
+        <p14:creationId xmlns:p14="http://schemas.microsoft.com/office/powerpoint/2010/main" val="362878864"/>
       </p:ext>
     </p:extLst>
   </p:cSld>
@@ -13757,9 +13757,9 @@
             </a:lvl1pPr>
           </a:lstStyle>
           <a:p>
-            <a:fld id="{90A7BBED-E6FA-40A6-8A51-59E4B08CD8B8}" type="datetimeFigureOut">
+            <a:fld id="{3DE1F4D6-9B94-49E1-9259-C44CF083EB57}" type="datetimeFigureOut">
               <a:rPr lang="en-US" smtClean="0"/>
-              <a:t>10/3/2026</a:t>
+              <a:t>10/4/2026</a:t>
             </a:fld>
             <a:endParaRPr lang="en-US"/>
           </a:p>
@@ -13802,7 +13802,7 @@
             </a:lvl1pPr>
           </a:lstStyle>
           <a:p>
-            <a:fld id="{4F0FE17B-5063-4433-97D2-96EAD825CE6E}" type="slidenum">
+            <a:fld id="{022853CD-29C7-4A68-BCE3-2ED71C774B8A}" type="slidenum">
               <a:rPr lang="en-US" smtClean="0"/>
               <a:t>‹#›</a:t>
             </a:fld>
@@ -13922,7 +13922,7 @@
           <p:cNvPr id="8" name="item_1_title">
             <a:extLst>
               <a:ext uri="{FF2B5EF4-FFF2-40B4-BE49-F238E27FC236}">
-                <a16:creationId xmlns:a16="http://schemas.microsoft.com/office/drawing/2014/main" id="{C56A0FC5-C1D8-0013-32A9-D8DCE274E507}"/>
+                <a16:creationId xmlns:a16="http://schemas.microsoft.com/office/drawing/2014/main" id="{C48E3D57-D276-0F26-8100-73C66F063946}"/>
               </a:ext>
             </a:extLst>
           </p:cNvPr>
@@ -13935,8 +13935,8 @@
         </p:nvSpPr>
         <p:spPr>
           <a:xfrm>
-            <a:off x="676029" y="2372339"/>
-            <a:ext cx="3251982" cy="565055"/>
+            <a:off x="658119" y="2372339"/>
+            <a:ext cx="2843628" cy="565055"/>
           </a:xfrm>
         </p:spPr>
         <p:txBody>
@@ -13974,7 +13974,7 @@
           <p:cNvPr id="9" name="item_1">
             <a:extLst>
               <a:ext uri="{FF2B5EF4-FFF2-40B4-BE49-F238E27FC236}">
-                <a16:creationId xmlns:a16="http://schemas.microsoft.com/office/drawing/2014/main" id="{07E7B4DB-62FB-85C8-5265-DFC52701DD9A}"/>
+                <a16:creationId xmlns:a16="http://schemas.microsoft.com/office/drawing/2014/main" id="{0C65E197-AD27-7D89-03B1-F2FBADF3E44B}"/>
               </a:ext>
             </a:extLst>
           </p:cNvPr>
@@ -13987,8 +13987,8 @@
         </p:nvSpPr>
         <p:spPr>
           <a:xfrm>
-            <a:off x="4042116" y="2372339"/>
-            <a:ext cx="7473854" cy="565055"/>
+            <a:off x="3601523" y="2372339"/>
+            <a:ext cx="6535356" cy="565055"/>
           </a:xfrm>
           <a:prstGeom prst="rect">
             <a:avLst/>
@@ -14022,7 +14022,7 @@
           <p:cNvPr id="10" name="item_2_title">
             <a:extLst>
               <a:ext uri="{FF2B5EF4-FFF2-40B4-BE49-F238E27FC236}">
-                <a16:creationId xmlns:a16="http://schemas.microsoft.com/office/drawing/2014/main" id="{1154B787-2F99-1018-732C-0BD20D9D39E3}"/>
+                <a16:creationId xmlns:a16="http://schemas.microsoft.com/office/drawing/2014/main" id="{FE06551A-F031-6E17-2512-CDA5DCDD6E1F}"/>
               </a:ext>
             </a:extLst>
           </p:cNvPr>
@@ -14035,8 +14035,8 @@
         </p:nvSpPr>
         <p:spPr>
           <a:xfrm>
-            <a:off x="676029" y="3361186"/>
-            <a:ext cx="3251982" cy="565055"/>
+            <a:off x="658119" y="3361186"/>
+            <a:ext cx="2843628" cy="565055"/>
           </a:xfrm>
           <a:prstGeom prst="rect">
             <a:avLst/>
@@ -14077,7 +14077,7 @@
           <p:cNvPr id="11" name="item_2">
             <a:extLst>
               <a:ext uri="{FF2B5EF4-FFF2-40B4-BE49-F238E27FC236}">
-                <a16:creationId xmlns:a16="http://schemas.microsoft.com/office/drawing/2014/main" id="{81604651-C12B-E508-FA1D-C09DB407EA66}"/>
+                <a16:creationId xmlns:a16="http://schemas.microsoft.com/office/drawing/2014/main" id="{D117282C-58C1-1447-2401-971127E852D8}"/>
               </a:ext>
             </a:extLst>
           </p:cNvPr>
@@ -14090,8 +14090,8 @@
         </p:nvSpPr>
         <p:spPr>
           <a:xfrm>
-            <a:off x="4042116" y="3361186"/>
-            <a:ext cx="7473854" cy="565055"/>
+            <a:off x="3601523" y="3361186"/>
+            <a:ext cx="6535356" cy="565055"/>
           </a:xfrm>
           <a:prstGeom prst="rect">
             <a:avLst/>
@@ -14125,7 +14125,7 @@
           <p:cNvPr id="12" name="item_3_title">
             <a:extLst>
               <a:ext uri="{FF2B5EF4-FFF2-40B4-BE49-F238E27FC236}">
-                <a16:creationId xmlns:a16="http://schemas.microsoft.com/office/drawing/2014/main" id="{0E624A19-8437-6890-0224-3AC838CAF891}"/>
+                <a16:creationId xmlns:a16="http://schemas.microsoft.com/office/drawing/2014/main" id="{D46986A6-8731-343C-1D35-529653120E39}"/>
               </a:ext>
             </a:extLst>
           </p:cNvPr>
@@ -14138,8 +14138,8 @@
         </p:nvSpPr>
         <p:spPr>
           <a:xfrm>
-            <a:off x="676029" y="4350033"/>
-            <a:ext cx="3251982" cy="565055"/>
+            <a:off x="658119" y="4350033"/>
+            <a:ext cx="2843628" cy="565055"/>
           </a:xfrm>
           <a:prstGeom prst="rect">
             <a:avLst/>
@@ -14180,7 +14180,7 @@
           <p:cNvPr id="13" name="item_3">
             <a:extLst>
               <a:ext uri="{FF2B5EF4-FFF2-40B4-BE49-F238E27FC236}">
-                <a16:creationId xmlns:a16="http://schemas.microsoft.com/office/drawing/2014/main" id="{7201E941-DD82-BF22-87C0-4F082903A3FB}"/>
+                <a16:creationId xmlns:a16="http://schemas.microsoft.com/office/drawing/2014/main" id="{D68335C9-82E7-8DC8-C0E3-8B6F916C0047}"/>
               </a:ext>
             </a:extLst>
           </p:cNvPr>
@@ -14193,8 +14193,8 @@
         </p:nvSpPr>
         <p:spPr>
           <a:xfrm>
-            <a:off x="4042116" y="4350033"/>
-            <a:ext cx="7473854" cy="565055"/>
+            <a:off x="3601523" y="4350033"/>
+            <a:ext cx="6535356" cy="565055"/>
           </a:xfrm>
           <a:prstGeom prst="rect">
             <a:avLst/>
@@ -14228,7 +14228,7 @@
           <p:cNvPr id="14" name="item_4_title">
             <a:extLst>
               <a:ext uri="{FF2B5EF4-FFF2-40B4-BE49-F238E27FC236}">
-                <a16:creationId xmlns:a16="http://schemas.microsoft.com/office/drawing/2014/main" id="{0FB47588-AD79-402F-FF42-4E5792BF6CCC}"/>
+                <a16:creationId xmlns:a16="http://schemas.microsoft.com/office/drawing/2014/main" id="{BB0F1D7E-D4EE-44A9-D9C3-CC58EDB606C7}"/>
               </a:ext>
             </a:extLst>
           </p:cNvPr>
@@ -14241,8 +14241,8 @@
         </p:nvSpPr>
         <p:spPr>
           <a:xfrm>
-            <a:off x="676029" y="5338880"/>
-            <a:ext cx="3251982" cy="565055"/>
+            <a:off x="658119" y="5338880"/>
+            <a:ext cx="2843628" cy="565055"/>
           </a:xfrm>
           <a:prstGeom prst="rect">
             <a:avLst/>
@@ -14283,7 +14283,7 @@
           <p:cNvPr id="15" name="item_4">
             <a:extLst>
               <a:ext uri="{FF2B5EF4-FFF2-40B4-BE49-F238E27FC236}">
-                <a16:creationId xmlns:a16="http://schemas.microsoft.com/office/drawing/2014/main" id="{CCECBA97-F052-3C8E-5451-67F9E6EAA6B8}"/>
+                <a16:creationId xmlns:a16="http://schemas.microsoft.com/office/drawing/2014/main" id="{C50C49D6-F19B-24BE-D638-6FA085292545}"/>
               </a:ext>
             </a:extLst>
           </p:cNvPr>
@@ -14296,8 +14296,8 @@
         </p:nvSpPr>
         <p:spPr>
           <a:xfrm>
-            <a:off x="4042116" y="5338880"/>
-            <a:ext cx="7473854" cy="565055"/>
+            <a:off x="3601523" y="5338880"/>
+            <a:ext cx="6535356" cy="565055"/>
           </a:xfrm>
           <a:prstGeom prst="rect">
             <a:avLst/>
@@ -14331,7 +14331,7 @@
           <p:cNvPr id="16" name="source">
             <a:extLst>
               <a:ext uri="{FF2B5EF4-FFF2-40B4-BE49-F238E27FC236}">
-                <a16:creationId xmlns:a16="http://schemas.microsoft.com/office/drawing/2014/main" id="{70378907-591F-EE03-181F-60BFA451274F}"/>
+                <a16:creationId xmlns:a16="http://schemas.microsoft.com/office/drawing/2014/main" id="{0530BF39-6178-BDBE-4D70-A3B99B65B314}"/>
               </a:ext>
             </a:extLst>
           </p:cNvPr>
@@ -14388,7 +14388,7 @@
     </p:spTree>
     <p:extLst>
       <p:ext uri="{BB962C8B-B14F-4D97-AF65-F5344CB8AC3E}">
-        <p14:creationId xmlns:p14="http://schemas.microsoft.com/office/powerpoint/2010/main" val="1459420543"/>
+        <p14:creationId xmlns:p14="http://schemas.microsoft.com/office/powerpoint/2010/main" val="973655256"/>
       </p:ext>
     </p:extLst>
   </p:cSld>
@@ -14538,9 +14538,9 @@
             </a:lvl1pPr>
           </a:lstStyle>
           <a:p>
-            <a:fld id="{90A7BBED-E6FA-40A6-8A51-59E4B08CD8B8}" type="datetimeFigureOut">
+            <a:fld id="{3DE1F4D6-9B94-49E1-9259-C44CF083EB57}" type="datetimeFigureOut">
               <a:rPr lang="en-US" smtClean="0"/>
-              <a:t>10/3/2026</a:t>
+              <a:t>10/4/2026</a:t>
             </a:fld>
             <a:endParaRPr lang="en-US"/>
           </a:p>
@@ -14583,7 +14583,7 @@
             </a:lvl1pPr>
           </a:lstStyle>
           <a:p>
-            <a:fld id="{4F0FE17B-5063-4433-97D2-96EAD825CE6E}" type="slidenum">
+            <a:fld id="{022853CD-29C7-4A68-BCE3-2ED71C774B8A}" type="slidenum">
               <a:rPr lang="en-US" smtClean="0"/>
               <a:t>‹#›</a:t>
             </a:fld>
@@ -14703,7 +14703,7 @@
           <p:cNvPr id="8" name="marker_1">
             <a:extLst>
               <a:ext uri="{FF2B5EF4-FFF2-40B4-BE49-F238E27FC236}">
-                <a16:creationId xmlns:a16="http://schemas.microsoft.com/office/drawing/2014/main" id="{0972FE88-69A0-BCA2-7217-2B72CD4835C9}"/>
+                <a16:creationId xmlns:a16="http://schemas.microsoft.com/office/drawing/2014/main" id="{39E8C579-5B63-AB34-3537-6F15B404BEDD}"/>
               </a:ext>
             </a:extLst>
           </p:cNvPr>
@@ -14716,8 +14716,8 @@
         </p:nvSpPr>
         <p:spPr>
           <a:xfrm>
-            <a:off x="733081" y="2428844"/>
-            <a:ext cx="627576" cy="621561"/>
+            <a:off x="708007" y="2428844"/>
+            <a:ext cx="548770" cy="621561"/>
           </a:xfrm>
           <a:prstGeom prst="ellipse">
             <a:avLst/>
@@ -14761,7 +14761,7 @@
           <p:cNvPr id="9" name="item_1_title">
             <a:extLst>
               <a:ext uri="{FF2B5EF4-FFF2-40B4-BE49-F238E27FC236}">
-                <a16:creationId xmlns:a16="http://schemas.microsoft.com/office/drawing/2014/main" id="{E8510A7D-2E6E-5A81-A5FA-A93FF9F705A9}"/>
+                <a16:creationId xmlns:a16="http://schemas.microsoft.com/office/drawing/2014/main" id="{97E9A944-0662-5515-C019-C60A94B2E6CC}"/>
               </a:ext>
             </a:extLst>
           </p:cNvPr>
@@ -14774,8 +14774,8 @@
         </p:nvSpPr>
         <p:spPr>
           <a:xfrm>
-            <a:off x="1474761" y="2428844"/>
-            <a:ext cx="9984156" cy="411327"/>
+            <a:off x="1356554" y="2428844"/>
+            <a:ext cx="8730438" cy="411327"/>
           </a:xfrm>
           <a:prstGeom prst="rect">
             <a:avLst/>
@@ -14816,7 +14816,7 @@
           <p:cNvPr id="10" name="item_1">
             <a:extLst>
               <a:ext uri="{FF2B5EF4-FFF2-40B4-BE49-F238E27FC236}">
-                <a16:creationId xmlns:a16="http://schemas.microsoft.com/office/drawing/2014/main" id="{4C909C09-13A2-F92C-EA3D-6135EC190C30}"/>
+                <a16:creationId xmlns:a16="http://schemas.microsoft.com/office/drawing/2014/main" id="{33C8ECAE-CB88-4F0B-950B-A5E72F479318}"/>
               </a:ext>
             </a:extLst>
           </p:cNvPr>
@@ -14829,8 +14829,8 @@
         </p:nvSpPr>
         <p:spPr>
           <a:xfrm>
-            <a:off x="1474761" y="2840171"/>
-            <a:ext cx="9984156" cy="987185"/>
+            <a:off x="1356554" y="2840171"/>
+            <a:ext cx="8730438" cy="987185"/>
           </a:xfrm>
           <a:prstGeom prst="rect">
             <a:avLst/>
@@ -14864,7 +14864,7 @@
           <p:cNvPr id="11" name="marker_2">
             <a:extLst>
               <a:ext uri="{FF2B5EF4-FFF2-40B4-BE49-F238E27FC236}">
-                <a16:creationId xmlns:a16="http://schemas.microsoft.com/office/drawing/2014/main" id="{FC554A17-D784-3E4F-88CD-D94275AD1994}"/>
+                <a16:creationId xmlns:a16="http://schemas.microsoft.com/office/drawing/2014/main" id="{655901BD-9271-9DC2-D183-B49F4B80FED3}"/>
               </a:ext>
             </a:extLst>
           </p:cNvPr>
@@ -14877,8 +14877,8 @@
         </p:nvSpPr>
         <p:spPr>
           <a:xfrm>
-            <a:off x="733081" y="4448917"/>
-            <a:ext cx="627576" cy="621561"/>
+            <a:off x="708007" y="4448917"/>
+            <a:ext cx="548770" cy="621561"/>
           </a:xfrm>
           <a:prstGeom prst="ellipse">
             <a:avLst/>
@@ -14922,7 +14922,7 @@
           <p:cNvPr id="12" name="item_2_title">
             <a:extLst>
               <a:ext uri="{FF2B5EF4-FFF2-40B4-BE49-F238E27FC236}">
-                <a16:creationId xmlns:a16="http://schemas.microsoft.com/office/drawing/2014/main" id="{1D39FF7B-63B5-F6C7-4139-615E1D791356}"/>
+                <a16:creationId xmlns:a16="http://schemas.microsoft.com/office/drawing/2014/main" id="{59D7CD33-591B-F696-DB74-743AE54860F6}"/>
               </a:ext>
             </a:extLst>
           </p:cNvPr>
@@ -14935,8 +14935,8 @@
         </p:nvSpPr>
         <p:spPr>
           <a:xfrm>
-            <a:off x="1474761" y="4448917"/>
-            <a:ext cx="9984156" cy="411327"/>
+            <a:off x="1356554" y="4448917"/>
+            <a:ext cx="8730438" cy="411327"/>
           </a:xfrm>
           <a:prstGeom prst="rect">
             <a:avLst/>
@@ -14977,7 +14977,7 @@
           <p:cNvPr id="13" name="item_2">
             <a:extLst>
               <a:ext uri="{FF2B5EF4-FFF2-40B4-BE49-F238E27FC236}">
-                <a16:creationId xmlns:a16="http://schemas.microsoft.com/office/drawing/2014/main" id="{B08B2CA6-5624-CB4C-082C-7834339AF877}"/>
+                <a16:creationId xmlns:a16="http://schemas.microsoft.com/office/drawing/2014/main" id="{58D3E291-51F1-369C-A483-016A4B87C9A7}"/>
               </a:ext>
             </a:extLst>
           </p:cNvPr>
@@ -14990,8 +14990,8 @@
         </p:nvSpPr>
         <p:spPr>
           <a:xfrm>
-            <a:off x="1474761" y="4860245"/>
-            <a:ext cx="9984156" cy="987185"/>
+            <a:off x="1356554" y="4860245"/>
+            <a:ext cx="8730438" cy="987185"/>
           </a:xfrm>
           <a:prstGeom prst="rect">
             <a:avLst/>
@@ -15025,7 +15025,7 @@
           <p:cNvPr id="14" name="source">
             <a:extLst>
               <a:ext uri="{FF2B5EF4-FFF2-40B4-BE49-F238E27FC236}">
-                <a16:creationId xmlns:a16="http://schemas.microsoft.com/office/drawing/2014/main" id="{14F9C527-2084-2929-10D3-2BC96BBA0FF4}"/>
+                <a16:creationId xmlns:a16="http://schemas.microsoft.com/office/drawing/2014/main" id="{A0C18041-8E24-67B7-2E98-417F361B5087}"/>
               </a:ext>
             </a:extLst>
           </p:cNvPr>
@@ -15082,7 +15082,7 @@
     </p:spTree>
     <p:extLst>
       <p:ext uri="{BB962C8B-B14F-4D97-AF65-F5344CB8AC3E}">
-        <p14:creationId xmlns:p14="http://schemas.microsoft.com/office/powerpoint/2010/main" val="3107894314"/>
+        <p14:creationId xmlns:p14="http://schemas.microsoft.com/office/powerpoint/2010/main" val="3747665222"/>
       </p:ext>
     </p:extLst>
   </p:cSld>
@@ -15232,9 +15232,9 @@
             </a:lvl1pPr>
           </a:lstStyle>
           <a:p>
-            <a:fld id="{90A7BBED-E6FA-40A6-8A51-59E4B08CD8B8}" type="datetimeFigureOut">
+            <a:fld id="{3DE1F4D6-9B94-49E1-9259-C44CF083EB57}" type="datetimeFigureOut">
               <a:rPr lang="en-US" smtClean="0"/>
-              <a:t>10/3/2026</a:t>
+              <a:t>10/4/2026</a:t>
             </a:fld>
             <a:endParaRPr lang="en-US"/>
           </a:p>
@@ -15277,7 +15277,7 @@
             </a:lvl1pPr>
           </a:lstStyle>
           <a:p>
-            <a:fld id="{4F0FE17B-5063-4433-97D2-96EAD825CE6E}" type="slidenum">
+            <a:fld id="{022853CD-29C7-4A68-BCE3-2ED71C774B8A}" type="slidenum">
               <a:rPr lang="en-US" smtClean="0"/>
               <a:t>‹#›</a:t>
             </a:fld>
@@ -15397,7 +15397,7 @@
           <p:cNvPr id="8" name="item_1_title">
             <a:extLst>
               <a:ext uri="{FF2B5EF4-FFF2-40B4-BE49-F238E27FC236}">
-                <a16:creationId xmlns:a16="http://schemas.microsoft.com/office/drawing/2014/main" id="{BD3D5D8A-0655-F0ED-4B42-03F170F3C78A}"/>
+                <a16:creationId xmlns:a16="http://schemas.microsoft.com/office/drawing/2014/main" id="{1123813A-4C76-103A-BC28-B43AABC4F130}"/>
               </a:ext>
             </a:extLst>
           </p:cNvPr>
@@ -15410,8 +15410,8 @@
         </p:nvSpPr>
         <p:spPr>
           <a:xfrm>
-            <a:off x="733082" y="2428844"/>
-            <a:ext cx="5049131" cy="411327"/>
+            <a:off x="708008" y="2428844"/>
+            <a:ext cx="4415107" cy="411327"/>
           </a:xfrm>
         </p:spPr>
         <p:txBody>
@@ -15449,7 +15449,7 @@
           <p:cNvPr id="9" name="item_1">
             <a:extLst>
               <a:ext uri="{FF2B5EF4-FFF2-40B4-BE49-F238E27FC236}">
-                <a16:creationId xmlns:a16="http://schemas.microsoft.com/office/drawing/2014/main" id="{0110D668-F19E-0747-FFD3-67B747C663F5}"/>
+                <a16:creationId xmlns:a16="http://schemas.microsoft.com/office/drawing/2014/main" id="{A27BF77A-1BB5-FA1D-2134-E308267DB347}"/>
               </a:ext>
             </a:extLst>
           </p:cNvPr>
@@ -15462,8 +15462,8 @@
         </p:nvSpPr>
         <p:spPr>
           <a:xfrm>
-            <a:off x="733082" y="2840171"/>
-            <a:ext cx="5049131" cy="987185"/>
+            <a:off x="708008" y="2840171"/>
+            <a:ext cx="4415107" cy="987185"/>
           </a:xfrm>
           <a:prstGeom prst="rect">
             <a:avLst/>
@@ -15497,7 +15497,7 @@
           <p:cNvPr id="10" name="item_2_title">
             <a:extLst>
               <a:ext uri="{FF2B5EF4-FFF2-40B4-BE49-F238E27FC236}">
-                <a16:creationId xmlns:a16="http://schemas.microsoft.com/office/drawing/2014/main" id="{1BAD3D23-8979-E548-ADDF-3BECC62026B3}"/>
+                <a16:creationId xmlns:a16="http://schemas.microsoft.com/office/drawing/2014/main" id="{3BBED63D-046B-9225-0420-DC3823A230A8}"/>
               </a:ext>
             </a:extLst>
           </p:cNvPr>
@@ -15510,8 +15510,8 @@
         </p:nvSpPr>
         <p:spPr>
           <a:xfrm>
-            <a:off x="6409788" y="2428844"/>
-            <a:ext cx="5049131" cy="411327"/>
+            <a:off x="5671885" y="2428844"/>
+            <a:ext cx="4415107" cy="411327"/>
           </a:xfrm>
           <a:prstGeom prst="rect">
             <a:avLst/>
@@ -15552,7 +15552,7 @@
           <p:cNvPr id="11" name="item_2">
             <a:extLst>
               <a:ext uri="{FF2B5EF4-FFF2-40B4-BE49-F238E27FC236}">
-                <a16:creationId xmlns:a16="http://schemas.microsoft.com/office/drawing/2014/main" id="{2C6FD4FC-8F3D-B19E-80BB-3F0490E4D4E8}"/>
+                <a16:creationId xmlns:a16="http://schemas.microsoft.com/office/drawing/2014/main" id="{4B082E0B-86E2-CCEA-7E0C-7EFCB0988616}"/>
               </a:ext>
             </a:extLst>
           </p:cNvPr>
@@ -15565,8 +15565,8 @@
         </p:nvSpPr>
         <p:spPr>
           <a:xfrm>
-            <a:off x="6409788" y="2840171"/>
-            <a:ext cx="5049131" cy="987185"/>
+            <a:off x="5671885" y="2840171"/>
+            <a:ext cx="4415107" cy="987185"/>
           </a:xfrm>
           <a:prstGeom prst="rect">
             <a:avLst/>
@@ -15600,7 +15600,7 @@
           <p:cNvPr id="12" name="item_3_title">
             <a:extLst>
               <a:ext uri="{FF2B5EF4-FFF2-40B4-BE49-F238E27FC236}">
-                <a16:creationId xmlns:a16="http://schemas.microsoft.com/office/drawing/2014/main" id="{D669A036-BF63-DC0A-374F-78F943C37CC3}"/>
+                <a16:creationId xmlns:a16="http://schemas.microsoft.com/office/drawing/2014/main" id="{5ACC2569-F356-F88A-DDAD-F0008AEDE714}"/>
               </a:ext>
             </a:extLst>
           </p:cNvPr>
@@ -15613,8 +15613,8 @@
         </p:nvSpPr>
         <p:spPr>
           <a:xfrm>
-            <a:off x="733082" y="4448917"/>
-            <a:ext cx="5049131" cy="411327"/>
+            <a:off x="708008" y="4448917"/>
+            <a:ext cx="4415107" cy="411327"/>
           </a:xfrm>
           <a:prstGeom prst="rect">
             <a:avLst/>
@@ -15655,7 +15655,7 @@
           <p:cNvPr id="13" name="item_3">
             <a:extLst>
               <a:ext uri="{FF2B5EF4-FFF2-40B4-BE49-F238E27FC236}">
-                <a16:creationId xmlns:a16="http://schemas.microsoft.com/office/drawing/2014/main" id="{D375B290-4BE5-46E8-5D3A-9E8C2ACE42C3}"/>
+                <a16:creationId xmlns:a16="http://schemas.microsoft.com/office/drawing/2014/main" id="{64319C02-C4DD-2725-792F-7B46DECE329A}"/>
               </a:ext>
             </a:extLst>
           </p:cNvPr>
@@ -15668,8 +15668,8 @@
         </p:nvSpPr>
         <p:spPr>
           <a:xfrm>
-            <a:off x="733082" y="4860245"/>
-            <a:ext cx="5049131" cy="987185"/>
+            <a:off x="708008" y="4860245"/>
+            <a:ext cx="4415107" cy="987185"/>
           </a:xfrm>
           <a:prstGeom prst="rect">
             <a:avLst/>
@@ -15703,7 +15703,7 @@
           <p:cNvPr id="14" name="item_4_title">
             <a:extLst>
               <a:ext uri="{FF2B5EF4-FFF2-40B4-BE49-F238E27FC236}">
-                <a16:creationId xmlns:a16="http://schemas.microsoft.com/office/drawing/2014/main" id="{B94E7133-6F69-46B3-1341-6FA76F4EB800}"/>
+                <a16:creationId xmlns:a16="http://schemas.microsoft.com/office/drawing/2014/main" id="{A8C2D3DF-994D-1990-F8CA-403FF4860538}"/>
               </a:ext>
             </a:extLst>
           </p:cNvPr>
@@ -15716,8 +15716,8 @@
         </p:nvSpPr>
         <p:spPr>
           <a:xfrm>
-            <a:off x="6409788" y="4448917"/>
-            <a:ext cx="5049131" cy="411327"/>
+            <a:off x="5671885" y="4448917"/>
+            <a:ext cx="4415107" cy="411327"/>
           </a:xfrm>
           <a:prstGeom prst="rect">
             <a:avLst/>
@@ -15758,7 +15758,7 @@
           <p:cNvPr id="15" name="item_4">
             <a:extLst>
               <a:ext uri="{FF2B5EF4-FFF2-40B4-BE49-F238E27FC236}">
-                <a16:creationId xmlns:a16="http://schemas.microsoft.com/office/drawing/2014/main" id="{CB48CEAD-6F1E-69F5-BACD-4B4636C71CD8}"/>
+                <a16:creationId xmlns:a16="http://schemas.microsoft.com/office/drawing/2014/main" id="{1BDB1407-3152-AA33-4341-689A8C1AA3E6}"/>
               </a:ext>
             </a:extLst>
           </p:cNvPr>
@@ -15771,8 +15771,8 @@
         </p:nvSpPr>
         <p:spPr>
           <a:xfrm>
-            <a:off x="6409788" y="4860245"/>
-            <a:ext cx="5049131" cy="987185"/>
+            <a:off x="5671885" y="4860245"/>
+            <a:ext cx="4415107" cy="987185"/>
           </a:xfrm>
           <a:prstGeom prst="rect">
             <a:avLst/>
@@ -15806,7 +15806,7 @@
           <p:cNvPr id="16" name="source">
             <a:extLst>
               <a:ext uri="{FF2B5EF4-FFF2-40B4-BE49-F238E27FC236}">
-                <a16:creationId xmlns:a16="http://schemas.microsoft.com/office/drawing/2014/main" id="{F2131290-3461-A19E-8B96-C9797F5163C9}"/>
+                <a16:creationId xmlns:a16="http://schemas.microsoft.com/office/drawing/2014/main" id="{99A8F37E-4460-8E27-B9CE-5FA5BD12C231}"/>
               </a:ext>
             </a:extLst>
           </p:cNvPr>
@@ -15863,7 +15863,7 @@
     </p:spTree>
     <p:extLst>
       <p:ext uri="{BB962C8B-B14F-4D97-AF65-F5344CB8AC3E}">
-        <p14:creationId xmlns:p14="http://schemas.microsoft.com/office/powerpoint/2010/main" val="1519494198"/>
+        <p14:creationId xmlns:p14="http://schemas.microsoft.com/office/powerpoint/2010/main" val="4206769654"/>
       </p:ext>
     </p:extLst>
   </p:cSld>
@@ -16013,9 +16013,9 @@
             </a:lvl1pPr>
           </a:lstStyle>
           <a:p>
-            <a:fld id="{90A7BBED-E6FA-40A6-8A51-59E4B08CD8B8}" type="datetimeFigureOut">
+            <a:fld id="{3DE1F4D6-9B94-49E1-9259-C44CF083EB57}" type="datetimeFigureOut">
               <a:rPr lang="en-US" smtClean="0"/>
-              <a:t>10/3/2026</a:t>
+              <a:t>10/4/2026</a:t>
             </a:fld>
             <a:endParaRPr lang="en-US"/>
           </a:p>
@@ -16058,7 +16058,7 @@
             </a:lvl1pPr>
           </a:lstStyle>
           <a:p>
-            <a:fld id="{4F0FE17B-5063-4433-97D2-96EAD825CE6E}" type="slidenum">
+            <a:fld id="{022853CD-29C7-4A68-BCE3-2ED71C774B8A}" type="slidenum">
               <a:rPr lang="en-US" smtClean="0"/>
               <a:t>‹#›</a:t>
             </a:fld>
@@ -16178,7 +16178,7 @@
           <p:cNvPr id="8" name="item_1_title">
             <a:extLst>
               <a:ext uri="{FF2B5EF4-FFF2-40B4-BE49-F238E27FC236}">
-                <a16:creationId xmlns:a16="http://schemas.microsoft.com/office/drawing/2014/main" id="{5C01D437-D1E2-E1FC-E172-542BD37516DA}"/>
+                <a16:creationId xmlns:a16="http://schemas.microsoft.com/office/drawing/2014/main" id="{0FC475FF-EA20-FF34-1EAE-80C4B804A7BD}"/>
               </a:ext>
             </a:extLst>
           </p:cNvPr>
@@ -16191,8 +16191,8 @@
         </p:nvSpPr>
         <p:spPr>
           <a:xfrm>
-            <a:off x="733082" y="2788694"/>
-            <a:ext cx="2210777" cy="899628"/>
+            <a:off x="708007" y="2788694"/>
+            <a:ext cx="1933168" cy="899628"/>
           </a:xfrm>
         </p:spPr>
         <p:txBody>
@@ -16230,7 +16230,7 @@
           <p:cNvPr id="9" name="item_1">
             <a:extLst>
               <a:ext uri="{FF2B5EF4-FFF2-40B4-BE49-F238E27FC236}">
-                <a16:creationId xmlns:a16="http://schemas.microsoft.com/office/drawing/2014/main" id="{12F88D45-3C19-E40D-774B-9EB679095FE6}"/>
+                <a16:creationId xmlns:a16="http://schemas.microsoft.com/office/drawing/2014/main" id="{6EA30EA7-0C49-7FC9-870D-484344D58866}"/>
               </a:ext>
             </a:extLst>
           </p:cNvPr>
@@ -16243,8 +16243,8 @@
         </p:nvSpPr>
         <p:spPr>
           <a:xfrm>
-            <a:off x="733082" y="3688323"/>
-            <a:ext cx="2210777" cy="2159107"/>
+            <a:off x="708007" y="3688323"/>
+            <a:ext cx="1933168" cy="2159107"/>
           </a:xfrm>
           <a:prstGeom prst="rect">
             <a:avLst/>
@@ -16278,7 +16278,7 @@
           <p:cNvPr id="10" name="item_2_title">
             <a:extLst>
               <a:ext uri="{FF2B5EF4-FFF2-40B4-BE49-F238E27FC236}">
-                <a16:creationId xmlns:a16="http://schemas.microsoft.com/office/drawing/2014/main" id="{E644D0B8-E5EC-5781-4DA6-6CC13710D706}"/>
+                <a16:creationId xmlns:a16="http://schemas.microsoft.com/office/drawing/2014/main" id="{EC33538E-090B-2CC4-6878-DC6A98735E50}"/>
               </a:ext>
             </a:extLst>
           </p:cNvPr>
@@ -16291,8 +16291,8 @@
         </p:nvSpPr>
         <p:spPr>
           <a:xfrm>
-            <a:off x="3571435" y="2788694"/>
-            <a:ext cx="2210777" cy="899628"/>
+            <a:off x="3189946" y="2788694"/>
+            <a:ext cx="1933168" cy="899628"/>
           </a:xfrm>
           <a:prstGeom prst="rect">
             <a:avLst/>
@@ -16333,7 +16333,7 @@
           <p:cNvPr id="11" name="item_2">
             <a:extLst>
               <a:ext uri="{FF2B5EF4-FFF2-40B4-BE49-F238E27FC236}">
-                <a16:creationId xmlns:a16="http://schemas.microsoft.com/office/drawing/2014/main" id="{99B7B10A-74B5-D4AE-8205-91926FFFE162}"/>
+                <a16:creationId xmlns:a16="http://schemas.microsoft.com/office/drawing/2014/main" id="{F1FE26C5-5EB7-D24F-6FE6-0BF0673254E7}"/>
               </a:ext>
             </a:extLst>
           </p:cNvPr>
@@ -16346,8 +16346,8 @@
         </p:nvSpPr>
         <p:spPr>
           <a:xfrm>
-            <a:off x="3571435" y="3688323"/>
-            <a:ext cx="2210777" cy="2159107"/>
+            <a:off x="3189946" y="3688323"/>
+            <a:ext cx="1933168" cy="2159107"/>
           </a:xfrm>
           <a:prstGeom prst="rect">
             <a:avLst/>
@@ -16381,7 +16381,7 @@
           <p:cNvPr id="12" name="item_3_title">
             <a:extLst>
               <a:ext uri="{FF2B5EF4-FFF2-40B4-BE49-F238E27FC236}">
-                <a16:creationId xmlns:a16="http://schemas.microsoft.com/office/drawing/2014/main" id="{CE5D51B9-53DC-F10C-DE36-339FA8BEF788}"/>
+                <a16:creationId xmlns:a16="http://schemas.microsoft.com/office/drawing/2014/main" id="{E503AAA0-9702-5F47-50D2-55DA441DA427}"/>
               </a:ext>
             </a:extLst>
           </p:cNvPr>
@@ -16394,8 +16394,8 @@
         </p:nvSpPr>
         <p:spPr>
           <a:xfrm>
-            <a:off x="6409788" y="2788694"/>
-            <a:ext cx="2210777" cy="899628"/>
+            <a:off x="5671884" y="2788694"/>
+            <a:ext cx="1933168" cy="899628"/>
           </a:xfrm>
           <a:prstGeom prst="rect">
             <a:avLst/>
@@ -16436,7 +16436,7 @@
           <p:cNvPr id="13" name="item_3">
             <a:extLst>
               <a:ext uri="{FF2B5EF4-FFF2-40B4-BE49-F238E27FC236}">
-                <a16:creationId xmlns:a16="http://schemas.microsoft.com/office/drawing/2014/main" id="{125485A7-8723-72E7-9035-933C91EAEBF0}"/>
+                <a16:creationId xmlns:a16="http://schemas.microsoft.com/office/drawing/2014/main" id="{9A08F387-F5B6-583E-3192-7B93A0C29635}"/>
               </a:ext>
             </a:extLst>
           </p:cNvPr>
@@ -16449,8 +16449,8 @@
         </p:nvSpPr>
         <p:spPr>
           <a:xfrm>
-            <a:off x="6409788" y="3688323"/>
-            <a:ext cx="2210777" cy="2159107"/>
+            <a:off x="5671884" y="3688323"/>
+            <a:ext cx="1933168" cy="2159107"/>
           </a:xfrm>
           <a:prstGeom prst="rect">
             <a:avLst/>
@@ -16484,7 +16484,7 @@
           <p:cNvPr id="14" name="item_4_title">
             <a:extLst>
               <a:ext uri="{FF2B5EF4-FFF2-40B4-BE49-F238E27FC236}">
-                <a16:creationId xmlns:a16="http://schemas.microsoft.com/office/drawing/2014/main" id="{4BAC2131-37A4-9EE1-2997-E74596DAD094}"/>
+                <a16:creationId xmlns:a16="http://schemas.microsoft.com/office/drawing/2014/main" id="{FBEEFAB6-E75F-F962-64A5-F5F6B2FC497D}"/>
               </a:ext>
             </a:extLst>
           </p:cNvPr>
@@ -16497,8 +16497,8 @@
         </p:nvSpPr>
         <p:spPr>
           <a:xfrm>
-            <a:off x="9248141" y="2788694"/>
-            <a:ext cx="2210777" cy="899628"/>
+            <a:off x="8153823" y="2788694"/>
+            <a:ext cx="1933168" cy="899628"/>
           </a:xfrm>
           <a:prstGeom prst="rect">
             <a:avLst/>
@@ -16539,7 +16539,7 @@
           <p:cNvPr id="15" name="item_4">
             <a:extLst>
               <a:ext uri="{FF2B5EF4-FFF2-40B4-BE49-F238E27FC236}">
-                <a16:creationId xmlns:a16="http://schemas.microsoft.com/office/drawing/2014/main" id="{BE1014AC-A868-FD0F-DA7D-ED651FCA354C}"/>
+                <a16:creationId xmlns:a16="http://schemas.microsoft.com/office/drawing/2014/main" id="{2ABB5E4D-981C-6671-CDB5-C2A8AF426AFD}"/>
               </a:ext>
             </a:extLst>
           </p:cNvPr>
@@ -16552,8 +16552,8 @@
         </p:nvSpPr>
         <p:spPr>
           <a:xfrm>
-            <a:off x="9248141" y="3688323"/>
-            <a:ext cx="2210777" cy="2159107"/>
+            <a:off x="8153823" y="3688323"/>
+            <a:ext cx="1933168" cy="2159107"/>
           </a:xfrm>
           <a:prstGeom prst="rect">
             <a:avLst/>
@@ -16587,7 +16587,7 @@
           <p:cNvPr id="16" name="source">
             <a:extLst>
               <a:ext uri="{FF2B5EF4-FFF2-40B4-BE49-F238E27FC236}">
-                <a16:creationId xmlns:a16="http://schemas.microsoft.com/office/drawing/2014/main" id="{A9299E4B-2795-55C0-03D4-216D74DAB702}"/>
+                <a16:creationId xmlns:a16="http://schemas.microsoft.com/office/drawing/2014/main" id="{044DCDBC-30B2-558D-9378-3F8D4215E9F3}"/>
               </a:ext>
             </a:extLst>
           </p:cNvPr>
@@ -16644,7 +16644,7 @@
     </p:spTree>
     <p:extLst>
       <p:ext uri="{BB962C8B-B14F-4D97-AF65-F5344CB8AC3E}">
-        <p14:creationId xmlns:p14="http://schemas.microsoft.com/office/powerpoint/2010/main" val="1522023546"/>
+        <p14:creationId xmlns:p14="http://schemas.microsoft.com/office/powerpoint/2010/main" val="3667224827"/>
       </p:ext>
     </p:extLst>
   </p:cSld>
@@ -16794,9 +16794,9 @@
             </a:lvl1pPr>
           </a:lstStyle>
           <a:p>
-            <a:fld id="{90A7BBED-E6FA-40A6-8A51-59E4B08CD8B8}" type="datetimeFigureOut">
+            <a:fld id="{3DE1F4D6-9B94-49E1-9259-C44CF083EB57}" type="datetimeFigureOut">
               <a:rPr lang="en-US" smtClean="0"/>
-              <a:t>10/3/2026</a:t>
+              <a:t>10/4/2026</a:t>
             </a:fld>
             <a:endParaRPr lang="en-US"/>
           </a:p>
@@ -16839,7 +16839,7 @@
             </a:lvl1pPr>
           </a:lstStyle>
           <a:p>
-            <a:fld id="{4F0FE17B-5063-4433-97D2-96EAD825CE6E}" type="slidenum">
+            <a:fld id="{022853CD-29C7-4A68-BCE3-2ED71C774B8A}" type="slidenum">
               <a:rPr lang="en-US" smtClean="0"/>
               <a:t>‹#›</a:t>
             </a:fld>
@@ -16959,7 +16959,7 @@
           <p:cNvPr id="8" name="kpi_value_1">
             <a:extLst>
               <a:ext uri="{FF2B5EF4-FFF2-40B4-BE49-F238E27FC236}">
-                <a16:creationId xmlns:a16="http://schemas.microsoft.com/office/drawing/2014/main" id="{5F9AEAF3-269C-4450-9F05-6B1C179C3663}"/>
+                <a16:creationId xmlns:a16="http://schemas.microsoft.com/office/drawing/2014/main" id="{00F0100E-9C76-D182-6C5F-66E3E7D0C771}"/>
               </a:ext>
             </a:extLst>
           </p:cNvPr>
@@ -16972,8 +16972,8 @@
         </p:nvSpPr>
         <p:spPr>
           <a:xfrm>
-            <a:off x="733082" y="2428844"/>
-            <a:ext cx="5385739" cy="2119523"/>
+            <a:off x="708007" y="2428844"/>
+            <a:ext cx="4709448" cy="2119523"/>
           </a:xfrm>
         </p:spPr>
         <p:txBody>
@@ -17011,7 +17011,7 @@
           <p:cNvPr id="9" name="kpi_label_1">
             <a:extLst>
               <a:ext uri="{FF2B5EF4-FFF2-40B4-BE49-F238E27FC236}">
-                <a16:creationId xmlns:a16="http://schemas.microsoft.com/office/drawing/2014/main" id="{54A1A859-1154-6910-7053-25D8460062F3}"/>
+                <a16:creationId xmlns:a16="http://schemas.microsoft.com/office/drawing/2014/main" id="{F6E50464-9984-431E-2DFC-34450CA5235C}"/>
               </a:ext>
             </a:extLst>
           </p:cNvPr>
@@ -17024,8 +17024,8 @@
         </p:nvSpPr>
         <p:spPr>
           <a:xfrm>
-            <a:off x="733082" y="4616739"/>
-            <a:ext cx="5385739" cy="1230691"/>
+            <a:off x="708007" y="4616739"/>
+            <a:ext cx="4709448" cy="1230691"/>
           </a:xfrm>
           <a:prstGeom prst="rect">
             <a:avLst/>
@@ -17059,7 +17059,7 @@
           <p:cNvPr id="10" name="quote">
             <a:extLst>
               <a:ext uri="{FF2B5EF4-FFF2-40B4-BE49-F238E27FC236}">
-                <a16:creationId xmlns:a16="http://schemas.microsoft.com/office/drawing/2014/main" id="{6969E228-C125-732D-779D-686C729B8FFF}"/>
+                <a16:creationId xmlns:a16="http://schemas.microsoft.com/office/drawing/2014/main" id="{95BF23D6-F48C-45E9-D5C0-5D8D2E0E457C}"/>
               </a:ext>
             </a:extLst>
           </p:cNvPr>
@@ -17072,8 +17072,8 @@
         </p:nvSpPr>
         <p:spPr>
           <a:xfrm>
-            <a:off x="733082" y="2428844"/>
-            <a:ext cx="5385739" cy="2666497"/>
+            <a:off x="708007" y="2428844"/>
+            <a:ext cx="4709448" cy="2666497"/>
           </a:xfrm>
           <a:prstGeom prst="rect">
             <a:avLst/>
@@ -17109,7 +17109,7 @@
           <p:cNvPr id="11" name="attribution">
             <a:extLst>
               <a:ext uri="{FF2B5EF4-FFF2-40B4-BE49-F238E27FC236}">
-                <a16:creationId xmlns:a16="http://schemas.microsoft.com/office/drawing/2014/main" id="{5D564200-90EF-C546-1CD4-EF6AC5B4D6B5}"/>
+                <a16:creationId xmlns:a16="http://schemas.microsoft.com/office/drawing/2014/main" id="{B7538425-A5FB-7C7B-066B-C062F37F1375}"/>
               </a:ext>
             </a:extLst>
           </p:cNvPr>
@@ -17122,8 +17122,8 @@
         </p:nvSpPr>
         <p:spPr>
           <a:xfrm>
-            <a:off x="733082" y="5163713"/>
-            <a:ext cx="5385739" cy="683717"/>
+            <a:off x="708007" y="5163713"/>
+            <a:ext cx="4709448" cy="683717"/>
           </a:xfrm>
           <a:prstGeom prst="rect">
             <a:avLst/>
@@ -17157,7 +17157,7 @@
           <p:cNvPr id="12" name="item_1_title">
             <a:extLst>
               <a:ext uri="{FF2B5EF4-FFF2-40B4-BE49-F238E27FC236}">
-                <a16:creationId xmlns:a16="http://schemas.microsoft.com/office/drawing/2014/main" id="{98544B10-46CD-0BB5-2CE3-339DE37C0251}"/>
+                <a16:creationId xmlns:a16="http://schemas.microsoft.com/office/drawing/2014/main" id="{949F677A-7869-5D9D-0C6F-F66FAFC9FD57}"/>
               </a:ext>
             </a:extLst>
           </p:cNvPr>
@@ -17170,8 +17170,8 @@
         </p:nvSpPr>
         <p:spPr>
           <a:xfrm>
-            <a:off x="6763512" y="2231075"/>
-            <a:ext cx="4895089" cy="1121801"/>
+            <a:off x="5981192" y="2231075"/>
+            <a:ext cx="4280409" cy="1121801"/>
           </a:xfrm>
           <a:prstGeom prst="rect">
             <a:avLst/>
@@ -17212,7 +17212,7 @@
           <p:cNvPr id="13" name="item_1">
             <a:extLst>
               <a:ext uri="{FF2B5EF4-FFF2-40B4-BE49-F238E27FC236}">
-                <a16:creationId xmlns:a16="http://schemas.microsoft.com/office/drawing/2014/main" id="{918D2851-8A11-4389-36C5-89ECFE42C7E9}"/>
+                <a16:creationId xmlns:a16="http://schemas.microsoft.com/office/drawing/2014/main" id="{B0E91AAF-B1C9-BA60-E6AD-581EAD4B790D}"/>
               </a:ext>
             </a:extLst>
           </p:cNvPr>
@@ -17225,8 +17225,8 @@
         </p:nvSpPr>
         <p:spPr>
           <a:xfrm>
-            <a:off x="6763512" y="3352876"/>
-            <a:ext cx="4895089" cy="2692323"/>
+            <a:off x="5981192" y="3352876"/>
+            <a:ext cx="4280409" cy="2692323"/>
           </a:xfrm>
           <a:prstGeom prst="rect">
             <a:avLst/>
@@ -17260,7 +17260,7 @@
           <p:cNvPr id="14" name="source">
             <a:extLst>
               <a:ext uri="{FF2B5EF4-FFF2-40B4-BE49-F238E27FC236}">
-                <a16:creationId xmlns:a16="http://schemas.microsoft.com/office/drawing/2014/main" id="{9AC6E76A-D484-951D-732F-CE5DA3888BA3}"/>
+                <a16:creationId xmlns:a16="http://schemas.microsoft.com/office/drawing/2014/main" id="{B6A1AB26-5356-FABF-0D95-7075A743C99A}"/>
               </a:ext>
             </a:extLst>
           </p:cNvPr>
@@ -17317,7 +17317,7 @@
     </p:spTree>
     <p:extLst>
       <p:ext uri="{BB962C8B-B14F-4D97-AF65-F5344CB8AC3E}">
-        <p14:creationId xmlns:p14="http://schemas.microsoft.com/office/powerpoint/2010/main" val="3551116666"/>
+        <p14:creationId xmlns:p14="http://schemas.microsoft.com/office/powerpoint/2010/main" val="409130462"/>
       </p:ext>
     </p:extLst>
   </p:cSld>
@@ -17467,9 +17467,9 @@
             </a:lvl1pPr>
           </a:lstStyle>
           <a:p>
-            <a:fld id="{90A7BBED-E6FA-40A6-8A51-59E4B08CD8B8}" type="datetimeFigureOut">
+            <a:fld id="{3DE1F4D6-9B94-49E1-9259-C44CF083EB57}" type="datetimeFigureOut">
               <a:rPr lang="en-US" smtClean="0"/>
-              <a:t>10/3/2026</a:t>
+              <a:t>10/4/2026</a:t>
             </a:fld>
             <a:endParaRPr lang="en-US"/>
           </a:p>
@@ -17512,7 +17512,7 @@
             </a:lvl1pPr>
           </a:lstStyle>
           <a:p>
-            <a:fld id="{4F0FE17B-5063-4433-97D2-96EAD825CE6E}" type="slidenum">
+            <a:fld id="{022853CD-29C7-4A68-BCE3-2ED71C774B8A}" type="slidenum">
               <a:rPr lang="en-US" smtClean="0"/>
               <a:t>‹#›</a:t>
             </a:fld>
@@ -17632,7 +17632,7 @@
           <p:cNvPr id="8" name="item_1_title">
             <a:extLst>
               <a:ext uri="{FF2B5EF4-FFF2-40B4-BE49-F238E27FC236}">
-                <a16:creationId xmlns:a16="http://schemas.microsoft.com/office/drawing/2014/main" id="{547B8D95-E327-3549-54E5-2B1B418FE364}"/>
+                <a16:creationId xmlns:a16="http://schemas.microsoft.com/office/drawing/2014/main" id="{A5DE85E1-D1E9-7FE8-5387-5CE7BC912D09}"/>
               </a:ext>
             </a:extLst>
           </p:cNvPr>
@@ -17645,8 +17645,8 @@
         </p:nvSpPr>
         <p:spPr>
           <a:xfrm>
-            <a:off x="733082" y="2428843"/>
-            <a:ext cx="3156895" cy="1005466"/>
+            <a:off x="708008" y="2428843"/>
+            <a:ext cx="2760481" cy="1005466"/>
           </a:xfrm>
         </p:spPr>
         <p:txBody>
@@ -17684,7 +17684,7 @@
           <p:cNvPr id="9" name="item_1">
             <a:extLst>
               <a:ext uri="{FF2B5EF4-FFF2-40B4-BE49-F238E27FC236}">
-                <a16:creationId xmlns:a16="http://schemas.microsoft.com/office/drawing/2014/main" id="{215A2322-69AA-4FEF-B640-1AB0E54B4E24}"/>
+                <a16:creationId xmlns:a16="http://schemas.microsoft.com/office/drawing/2014/main" id="{30855746-E478-EE20-CC83-F99C55323F22}"/>
               </a:ext>
             </a:extLst>
           </p:cNvPr>
@@ -17697,8 +17697,8 @@
         </p:nvSpPr>
         <p:spPr>
           <a:xfrm>
-            <a:off x="733082" y="3434310"/>
-            <a:ext cx="3156895" cy="2413119"/>
+            <a:off x="708008" y="3434310"/>
+            <a:ext cx="2760481" cy="2413119"/>
           </a:xfrm>
           <a:prstGeom prst="rect">
             <a:avLst/>
@@ -17732,7 +17732,7 @@
           <p:cNvPr id="10" name="item_2_title">
             <a:extLst>
               <a:ext uri="{FF2B5EF4-FFF2-40B4-BE49-F238E27FC236}">
-                <a16:creationId xmlns:a16="http://schemas.microsoft.com/office/drawing/2014/main" id="{0686A301-25A8-2AB9-0046-AEAEF73F0B5C}"/>
+                <a16:creationId xmlns:a16="http://schemas.microsoft.com/office/drawing/2014/main" id="{526429FC-6A9D-E138-3FAE-2B33319CB19D}"/>
               </a:ext>
             </a:extLst>
           </p:cNvPr>
@@ -17745,8 +17745,8 @@
         </p:nvSpPr>
         <p:spPr>
           <a:xfrm>
-            <a:off x="4517553" y="2428843"/>
-            <a:ext cx="3156895" cy="1005466"/>
+            <a:off x="4017259" y="2428843"/>
+            <a:ext cx="2760481" cy="1005466"/>
           </a:xfrm>
           <a:prstGeom prst="rect">
             <a:avLst/>
@@ -17787,7 +17787,7 @@
           <p:cNvPr id="11" name="item_2">
             <a:extLst>
               <a:ext uri="{FF2B5EF4-FFF2-40B4-BE49-F238E27FC236}">
-                <a16:creationId xmlns:a16="http://schemas.microsoft.com/office/drawing/2014/main" id="{4B32D676-957F-0435-4AB0-4ED1B04AF1F8}"/>
+                <a16:creationId xmlns:a16="http://schemas.microsoft.com/office/drawing/2014/main" id="{743E7B2F-2686-BDE6-65F0-F3FA6EC54BDB}"/>
               </a:ext>
             </a:extLst>
           </p:cNvPr>
@@ -17800,8 +17800,8 @@
         </p:nvSpPr>
         <p:spPr>
           <a:xfrm>
-            <a:off x="4517553" y="3434310"/>
-            <a:ext cx="3156895" cy="2413119"/>
+            <a:off x="4017259" y="3434310"/>
+            <a:ext cx="2760481" cy="2413119"/>
           </a:xfrm>
           <a:prstGeom prst="rect">
             <a:avLst/>
@@ -17835,7 +17835,7 @@
           <p:cNvPr id="12" name="item_3_title">
             <a:extLst>
               <a:ext uri="{FF2B5EF4-FFF2-40B4-BE49-F238E27FC236}">
-                <a16:creationId xmlns:a16="http://schemas.microsoft.com/office/drawing/2014/main" id="{E2122830-0B8A-4C17-7B56-3EEC6237CD4B}"/>
+                <a16:creationId xmlns:a16="http://schemas.microsoft.com/office/drawing/2014/main" id="{485F8B12-390B-3B4E-B1CE-0B5789AB2776}"/>
               </a:ext>
             </a:extLst>
           </p:cNvPr>
@@ -17848,8 +17848,8 @@
         </p:nvSpPr>
         <p:spPr>
           <a:xfrm>
-            <a:off x="8302023" y="2428843"/>
-            <a:ext cx="3156895" cy="1005466"/>
+            <a:off x="7326511" y="2428843"/>
+            <a:ext cx="2760481" cy="1005466"/>
           </a:xfrm>
           <a:prstGeom prst="rect">
             <a:avLst/>
@@ -17890,7 +17890,7 @@
           <p:cNvPr id="13" name="item_3">
             <a:extLst>
               <a:ext uri="{FF2B5EF4-FFF2-40B4-BE49-F238E27FC236}">
-                <a16:creationId xmlns:a16="http://schemas.microsoft.com/office/drawing/2014/main" id="{62C4FFA7-B0FC-2F8F-6A4B-8A5D22F3BF2B}"/>
+                <a16:creationId xmlns:a16="http://schemas.microsoft.com/office/drawing/2014/main" id="{E27A246F-F126-1C37-D7A6-306B64B3D263}"/>
               </a:ext>
             </a:extLst>
           </p:cNvPr>
@@ -17903,8 +17903,8 @@
         </p:nvSpPr>
         <p:spPr>
           <a:xfrm>
-            <a:off x="8302023" y="3434310"/>
-            <a:ext cx="3156895" cy="2413119"/>
+            <a:off x="7326511" y="3434310"/>
+            <a:ext cx="2760481" cy="2413119"/>
           </a:xfrm>
           <a:prstGeom prst="rect">
             <a:avLst/>
@@ -17938,7 +17938,7 @@
           <p:cNvPr id="14" name="source">
             <a:extLst>
               <a:ext uri="{FF2B5EF4-FFF2-40B4-BE49-F238E27FC236}">
-                <a16:creationId xmlns:a16="http://schemas.microsoft.com/office/drawing/2014/main" id="{3CF7F627-354E-9F64-1B3D-DFADB793A692}"/>
+                <a16:creationId xmlns:a16="http://schemas.microsoft.com/office/drawing/2014/main" id="{2F12C14E-471E-C0D3-A2F4-71B30B3ACDF9}"/>
               </a:ext>
             </a:extLst>
           </p:cNvPr>
@@ -17995,7 +17995,7 @@
     </p:spTree>
     <p:extLst>
       <p:ext uri="{BB962C8B-B14F-4D97-AF65-F5344CB8AC3E}">
-        <p14:creationId xmlns:p14="http://schemas.microsoft.com/office/powerpoint/2010/main" val="510732548"/>
+        <p14:creationId xmlns:p14="http://schemas.microsoft.com/office/powerpoint/2010/main" val="1087746415"/>
       </p:ext>
     </p:extLst>
   </p:cSld>
@@ -18145,9 +18145,9 @@
             </a:lvl1pPr>
           </a:lstStyle>
           <a:p>
-            <a:fld id="{90A7BBED-E6FA-40A6-8A51-59E4B08CD8B8}" type="datetimeFigureOut">
+            <a:fld id="{3DE1F4D6-9B94-49E1-9259-C44CF083EB57}" type="datetimeFigureOut">
               <a:rPr lang="en-US" smtClean="0"/>
-              <a:t>10/3/2026</a:t>
+              <a:t>10/4/2026</a:t>
             </a:fld>
             <a:endParaRPr lang="en-US"/>
           </a:p>
@@ -18190,7 +18190,7 @@
             </a:lvl1pPr>
           </a:lstStyle>
           <a:p>
-            <a:fld id="{4F0FE17B-5063-4433-97D2-96EAD825CE6E}" type="slidenum">
+            <a:fld id="{022853CD-29C7-4A68-BCE3-2ED71C774B8A}" type="slidenum">
               <a:rPr lang="en-US" smtClean="0"/>
               <a:t>‹#›</a:t>
             </a:fld>
@@ -18310,7 +18310,7 @@
           <p:cNvPr id="8" name="marker_1">
             <a:extLst>
               <a:ext uri="{FF2B5EF4-FFF2-40B4-BE49-F238E27FC236}">
-                <a16:creationId xmlns:a16="http://schemas.microsoft.com/office/drawing/2014/main" id="{5BDECB51-22FF-6CE1-0C86-357FB34B9B40}"/>
+                <a16:creationId xmlns:a16="http://schemas.microsoft.com/office/drawing/2014/main" id="{3F3447C6-8E43-F7F3-26EB-49C6639DD962}"/>
               </a:ext>
             </a:extLst>
           </p:cNvPr>
@@ -18323,8 +18323,8 @@
         </p:nvSpPr>
         <p:spPr>
           <a:xfrm>
-            <a:off x="733081" y="2428844"/>
-            <a:ext cx="627576" cy="621561"/>
+            <a:off x="708007" y="2428844"/>
+            <a:ext cx="548770" cy="621561"/>
           </a:xfrm>
           <a:prstGeom prst="ellipse">
             <a:avLst/>
@@ -18368,7 +18368,7 @@
           <p:cNvPr id="9" name="item_1_title">
             <a:extLst>
               <a:ext uri="{FF2B5EF4-FFF2-40B4-BE49-F238E27FC236}">
-                <a16:creationId xmlns:a16="http://schemas.microsoft.com/office/drawing/2014/main" id="{F60DE006-9559-4C9C-8165-A85EC5D30C5E}"/>
+                <a16:creationId xmlns:a16="http://schemas.microsoft.com/office/drawing/2014/main" id="{147CA542-411A-0AFE-AC39-80A2DBE3165F}"/>
               </a:ext>
             </a:extLst>
           </p:cNvPr>
@@ -18381,8 +18381,8 @@
         </p:nvSpPr>
         <p:spPr>
           <a:xfrm>
-            <a:off x="1474761" y="2428844"/>
-            <a:ext cx="9984156" cy="411327"/>
+            <a:off x="1356554" y="2428844"/>
+            <a:ext cx="8730438" cy="411327"/>
           </a:xfrm>
           <a:prstGeom prst="rect">
             <a:avLst/>
@@ -18423,7 +18423,7 @@
           <p:cNvPr id="10" name="item_1">
             <a:extLst>
               <a:ext uri="{FF2B5EF4-FFF2-40B4-BE49-F238E27FC236}">
-                <a16:creationId xmlns:a16="http://schemas.microsoft.com/office/drawing/2014/main" id="{EE93D087-E0BD-3E73-E37D-8FAA5835059C}"/>
+                <a16:creationId xmlns:a16="http://schemas.microsoft.com/office/drawing/2014/main" id="{4CC448E1-E358-F328-C4B1-6F5D2B87E6E6}"/>
               </a:ext>
             </a:extLst>
           </p:cNvPr>
@@ -18436,8 +18436,8 @@
         </p:nvSpPr>
         <p:spPr>
           <a:xfrm>
-            <a:off x="1474761" y="2840171"/>
-            <a:ext cx="9984156" cy="987185"/>
+            <a:off x="1356554" y="2840171"/>
+            <a:ext cx="8730438" cy="987185"/>
           </a:xfrm>
           <a:prstGeom prst="rect">
             <a:avLst/>
@@ -18471,7 +18471,7 @@
           <p:cNvPr id="11" name="marker_2">
             <a:extLst>
               <a:ext uri="{FF2B5EF4-FFF2-40B4-BE49-F238E27FC236}">
-                <a16:creationId xmlns:a16="http://schemas.microsoft.com/office/drawing/2014/main" id="{A5586212-7377-798A-06F6-80115D5F4E21}"/>
+                <a16:creationId xmlns:a16="http://schemas.microsoft.com/office/drawing/2014/main" id="{87327A66-A125-96E0-15AA-2B5FA39FFC42}"/>
               </a:ext>
             </a:extLst>
           </p:cNvPr>
@@ -18484,8 +18484,8 @@
         </p:nvSpPr>
         <p:spPr>
           <a:xfrm>
-            <a:off x="733081" y="4448917"/>
-            <a:ext cx="627576" cy="621561"/>
+            <a:off x="708007" y="4448917"/>
+            <a:ext cx="548770" cy="621561"/>
           </a:xfrm>
           <a:prstGeom prst="ellipse">
             <a:avLst/>
@@ -18529,7 +18529,7 @@
           <p:cNvPr id="12" name="item_2_title">
             <a:extLst>
               <a:ext uri="{FF2B5EF4-FFF2-40B4-BE49-F238E27FC236}">
-                <a16:creationId xmlns:a16="http://schemas.microsoft.com/office/drawing/2014/main" id="{0CCBD6B7-BD3F-6FDB-8177-C55671E9F960}"/>
+                <a16:creationId xmlns:a16="http://schemas.microsoft.com/office/drawing/2014/main" id="{E0ED15C0-ED45-F5DB-E8FC-AC36F30F59FA}"/>
               </a:ext>
             </a:extLst>
           </p:cNvPr>
@@ -18542,8 +18542,8 @@
         </p:nvSpPr>
         <p:spPr>
           <a:xfrm>
-            <a:off x="1474761" y="4448917"/>
-            <a:ext cx="9984156" cy="411327"/>
+            <a:off x="1356554" y="4448917"/>
+            <a:ext cx="8730438" cy="411327"/>
           </a:xfrm>
           <a:prstGeom prst="rect">
             <a:avLst/>
@@ -18584,7 +18584,7 @@
           <p:cNvPr id="13" name="item_2">
             <a:extLst>
               <a:ext uri="{FF2B5EF4-FFF2-40B4-BE49-F238E27FC236}">
-                <a16:creationId xmlns:a16="http://schemas.microsoft.com/office/drawing/2014/main" id="{3FCFDC7E-5A6F-19BD-BBC4-05BBD0AD0EF1}"/>
+                <a16:creationId xmlns:a16="http://schemas.microsoft.com/office/drawing/2014/main" id="{239AED16-8376-6F2B-3586-1697BB644FB9}"/>
               </a:ext>
             </a:extLst>
           </p:cNvPr>
@@ -18597,8 +18597,8 @@
         </p:nvSpPr>
         <p:spPr>
           <a:xfrm>
-            <a:off x="1474761" y="4860245"/>
-            <a:ext cx="9984156" cy="987185"/>
+            <a:off x="1356554" y="4860245"/>
+            <a:ext cx="8730438" cy="987185"/>
           </a:xfrm>
           <a:prstGeom prst="rect">
             <a:avLst/>
@@ -18632,7 +18632,7 @@
           <p:cNvPr id="14" name="source">
             <a:extLst>
               <a:ext uri="{FF2B5EF4-FFF2-40B4-BE49-F238E27FC236}">
-                <a16:creationId xmlns:a16="http://schemas.microsoft.com/office/drawing/2014/main" id="{C3D9EDDB-A5F0-6C6D-0259-0AB2D1EE17BF}"/>
+                <a16:creationId xmlns:a16="http://schemas.microsoft.com/office/drawing/2014/main" id="{B05A8F9C-0271-4F7B-DADA-B43EB2353AE5}"/>
               </a:ext>
             </a:extLst>
           </p:cNvPr>
@@ -18689,7 +18689,7 @@
     </p:spTree>
     <p:extLst>
       <p:ext uri="{BB962C8B-B14F-4D97-AF65-F5344CB8AC3E}">
-        <p14:creationId xmlns:p14="http://schemas.microsoft.com/office/powerpoint/2010/main" val="2121778499"/>
+        <p14:creationId xmlns:p14="http://schemas.microsoft.com/office/powerpoint/2010/main" val="3748623837"/>
       </p:ext>
     </p:extLst>
   </p:cSld>
@@ -18839,9 +18839,9 @@
             </a:lvl1pPr>
           </a:lstStyle>
           <a:p>
-            <a:fld id="{90A7BBED-E6FA-40A6-8A51-59E4B08CD8B8}" type="datetimeFigureOut">
+            <a:fld id="{3DE1F4D6-9B94-49E1-9259-C44CF083EB57}" type="datetimeFigureOut">
               <a:rPr lang="en-US" smtClean="0"/>
-              <a:t>10/3/2026</a:t>
+              <a:t>10/4/2026</a:t>
             </a:fld>
             <a:endParaRPr lang="en-US"/>
           </a:p>
@@ -18884,7 +18884,7 @@
             </a:lvl1pPr>
           </a:lstStyle>
           <a:p>
-            <a:fld id="{4F0FE17B-5063-4433-97D2-96EAD825CE6E}" type="slidenum">
+            <a:fld id="{022853CD-29C7-4A68-BCE3-2ED71C774B8A}" type="slidenum">
               <a:rPr lang="en-US" smtClean="0"/>
               <a:t>‹#›</a:t>
             </a:fld>
@@ -19004,7 +19004,7 @@
           <p:cNvPr id="8" name="kpi_value_1">
             <a:extLst>
               <a:ext uri="{FF2B5EF4-FFF2-40B4-BE49-F238E27FC236}">
-                <a16:creationId xmlns:a16="http://schemas.microsoft.com/office/drawing/2014/main" id="{5D6C4614-7AC9-D51C-5B39-E882ECC06991}"/>
+                <a16:creationId xmlns:a16="http://schemas.microsoft.com/office/drawing/2014/main" id="{0F12F94C-5B13-E1ED-C8F0-3AE60CAA0090}"/>
               </a:ext>
             </a:extLst>
           </p:cNvPr>
@@ -19017,8 +19017,8 @@
         </p:nvSpPr>
         <p:spPr>
           <a:xfrm>
-            <a:off x="733082" y="2428844"/>
-            <a:ext cx="5385739" cy="2119523"/>
+            <a:off x="708007" y="2428844"/>
+            <a:ext cx="4709448" cy="2119523"/>
           </a:xfrm>
         </p:spPr>
         <p:txBody>
@@ -19056,7 +19056,7 @@
           <p:cNvPr id="9" name="kpi_label_1">
             <a:extLst>
               <a:ext uri="{FF2B5EF4-FFF2-40B4-BE49-F238E27FC236}">
-                <a16:creationId xmlns:a16="http://schemas.microsoft.com/office/drawing/2014/main" id="{B761510F-0B83-4A55-771F-2C7023D3C84B}"/>
+                <a16:creationId xmlns:a16="http://schemas.microsoft.com/office/drawing/2014/main" id="{996FC380-8FD5-C11A-8FB7-CDDBDD733836}"/>
               </a:ext>
             </a:extLst>
           </p:cNvPr>
@@ -19069,8 +19069,8 @@
         </p:nvSpPr>
         <p:spPr>
           <a:xfrm>
-            <a:off x="733082" y="4616739"/>
-            <a:ext cx="5385739" cy="1230691"/>
+            <a:off x="708007" y="4616739"/>
+            <a:ext cx="4709448" cy="1230691"/>
           </a:xfrm>
           <a:prstGeom prst="rect">
             <a:avLst/>
@@ -19104,7 +19104,7 @@
           <p:cNvPr id="10" name="quote">
             <a:extLst>
               <a:ext uri="{FF2B5EF4-FFF2-40B4-BE49-F238E27FC236}">
-                <a16:creationId xmlns:a16="http://schemas.microsoft.com/office/drawing/2014/main" id="{FA688083-C025-8C8F-EF94-06DC75D186D3}"/>
+                <a16:creationId xmlns:a16="http://schemas.microsoft.com/office/drawing/2014/main" id="{3EE8D273-D5A1-AF30-06D9-697FAF06E694}"/>
               </a:ext>
             </a:extLst>
           </p:cNvPr>
@@ -19117,8 +19117,8 @@
         </p:nvSpPr>
         <p:spPr>
           <a:xfrm>
-            <a:off x="733082" y="2428844"/>
-            <a:ext cx="5385739" cy="2666497"/>
+            <a:off x="708007" y="2428844"/>
+            <a:ext cx="4709448" cy="2666497"/>
           </a:xfrm>
           <a:prstGeom prst="rect">
             <a:avLst/>
@@ -19154,7 +19154,7 @@
           <p:cNvPr id="11" name="attribution">
             <a:extLst>
               <a:ext uri="{FF2B5EF4-FFF2-40B4-BE49-F238E27FC236}">
-                <a16:creationId xmlns:a16="http://schemas.microsoft.com/office/drawing/2014/main" id="{3BFDE860-5FBD-CF09-B4F4-0C1B5B79156F}"/>
+                <a16:creationId xmlns:a16="http://schemas.microsoft.com/office/drawing/2014/main" id="{58415963-E43D-B426-B0FD-610615CF0199}"/>
               </a:ext>
             </a:extLst>
           </p:cNvPr>
@@ -19167,8 +19167,8 @@
         </p:nvSpPr>
         <p:spPr>
           <a:xfrm>
-            <a:off x="733082" y="5163713"/>
-            <a:ext cx="5385739" cy="683717"/>
+            <a:off x="708007" y="5163713"/>
+            <a:ext cx="4709448" cy="683717"/>
           </a:xfrm>
           <a:prstGeom prst="rect">
             <a:avLst/>
@@ -19202,7 +19202,7 @@
           <p:cNvPr id="12" name="item_1_title">
             <a:extLst>
               <a:ext uri="{FF2B5EF4-FFF2-40B4-BE49-F238E27FC236}">
-                <a16:creationId xmlns:a16="http://schemas.microsoft.com/office/drawing/2014/main" id="{7C724B6B-B567-9DFA-ED71-3C1F1DAC36F3}"/>
+                <a16:creationId xmlns:a16="http://schemas.microsoft.com/office/drawing/2014/main" id="{BB00D00A-F0D8-82DA-BEBE-20A9C53148C6}"/>
               </a:ext>
             </a:extLst>
           </p:cNvPr>
@@ -19215,8 +19215,8 @@
         </p:nvSpPr>
         <p:spPr>
           <a:xfrm>
-            <a:off x="6763512" y="2231075"/>
-            <a:ext cx="4895089" cy="1121801"/>
+            <a:off x="5981192" y="2231075"/>
+            <a:ext cx="4280409" cy="1121801"/>
           </a:xfrm>
           <a:prstGeom prst="rect">
             <a:avLst/>
@@ -19257,7 +19257,7 @@
           <p:cNvPr id="13" name="item_1">
             <a:extLst>
               <a:ext uri="{FF2B5EF4-FFF2-40B4-BE49-F238E27FC236}">
-                <a16:creationId xmlns:a16="http://schemas.microsoft.com/office/drawing/2014/main" id="{E9176F30-FF22-9248-0E64-13F7EB302944}"/>
+                <a16:creationId xmlns:a16="http://schemas.microsoft.com/office/drawing/2014/main" id="{6A695682-E209-0864-EB6A-F668EEC535F3}"/>
               </a:ext>
             </a:extLst>
           </p:cNvPr>
@@ -19270,8 +19270,8 @@
         </p:nvSpPr>
         <p:spPr>
           <a:xfrm>
-            <a:off x="6763512" y="3352876"/>
-            <a:ext cx="4895089" cy="2692323"/>
+            <a:off x="5981192" y="3352876"/>
+            <a:ext cx="4280409" cy="2692323"/>
           </a:xfrm>
           <a:prstGeom prst="rect">
             <a:avLst/>
@@ -19305,7 +19305,7 @@
           <p:cNvPr id="14" name="source">
             <a:extLst>
               <a:ext uri="{FF2B5EF4-FFF2-40B4-BE49-F238E27FC236}">
-                <a16:creationId xmlns:a16="http://schemas.microsoft.com/office/drawing/2014/main" id="{6F4AFD07-D26A-740D-F6B0-A4474BDA2198}"/>
+                <a16:creationId xmlns:a16="http://schemas.microsoft.com/office/drawing/2014/main" id="{56E6B6E0-A447-6AEC-1ADF-9A3E8B1D4BE5}"/>
               </a:ext>
             </a:extLst>
           </p:cNvPr>
@@ -19362,7 +19362,7 @@
     </p:spTree>
     <p:extLst>
       <p:ext uri="{BB962C8B-B14F-4D97-AF65-F5344CB8AC3E}">
-        <p14:creationId xmlns:p14="http://schemas.microsoft.com/office/powerpoint/2010/main" val="2312588192"/>
+        <p14:creationId xmlns:p14="http://schemas.microsoft.com/office/powerpoint/2010/main" val="34920981"/>
       </p:ext>
     </p:extLst>
   </p:cSld>
@@ -19512,9 +19512,9 @@
             </a:lvl1pPr>
           </a:lstStyle>
           <a:p>
-            <a:fld id="{90A7BBED-E6FA-40A6-8A51-59E4B08CD8B8}" type="datetimeFigureOut">
+            <a:fld id="{3DE1F4D6-9B94-49E1-9259-C44CF083EB57}" type="datetimeFigureOut">
               <a:rPr lang="en-US" smtClean="0"/>
-              <a:t>10/3/2026</a:t>
+              <a:t>10/4/2026</a:t>
             </a:fld>
             <a:endParaRPr lang="en-US"/>
           </a:p>
@@ -19557,7 +19557,7 @@
             </a:lvl1pPr>
           </a:lstStyle>
           <a:p>
-            <a:fld id="{4F0FE17B-5063-4433-97D2-96EAD825CE6E}" type="slidenum">
+            <a:fld id="{022853CD-29C7-4A68-BCE3-2ED71C774B8A}" type="slidenum">
               <a:rPr lang="en-US" smtClean="0"/>
               <a:t>‹#›</a:t>
             </a:fld>
@@ -19677,7 +19677,7 @@
           <p:cNvPr id="8" name="marker_1">
             <a:extLst>
               <a:ext uri="{FF2B5EF4-FFF2-40B4-BE49-F238E27FC236}">
-                <a16:creationId xmlns:a16="http://schemas.microsoft.com/office/drawing/2014/main" id="{C2E3D9E9-301F-9E63-3289-AAAAF92003EE}"/>
+                <a16:creationId xmlns:a16="http://schemas.microsoft.com/office/drawing/2014/main" id="{0A18809A-38F9-216C-03F5-BD6B491DF534}"/>
               </a:ext>
             </a:extLst>
           </p:cNvPr>
@@ -19690,8 +19690,8 @@
         </p:nvSpPr>
         <p:spPr>
           <a:xfrm>
-            <a:off x="676029" y="2372339"/>
-            <a:ext cx="627576" cy="621561"/>
+            <a:off x="658119" y="2372339"/>
+            <a:ext cx="548770" cy="621561"/>
           </a:xfrm>
           <a:prstGeom prst="ellipse">
             <a:avLst/>
@@ -19735,7 +19735,7 @@
           <p:cNvPr id="9" name="item_1">
             <a:extLst>
               <a:ext uri="{FF2B5EF4-FFF2-40B4-BE49-F238E27FC236}">
-                <a16:creationId xmlns:a16="http://schemas.microsoft.com/office/drawing/2014/main" id="{005AC9F8-84C3-6D74-A4B0-F2CEFFDA6362}"/>
+                <a16:creationId xmlns:a16="http://schemas.microsoft.com/office/drawing/2014/main" id="{75F48472-6591-E3EC-C2CD-1268BC257624}"/>
               </a:ext>
             </a:extLst>
           </p:cNvPr>
@@ -19748,8 +19748,8 @@
         </p:nvSpPr>
         <p:spPr>
           <a:xfrm>
-            <a:off x="1417710" y="2372339"/>
-            <a:ext cx="10098261" cy="565055"/>
+            <a:off x="1306666" y="2372339"/>
+            <a:ext cx="8830215" cy="565055"/>
           </a:xfrm>
           <a:prstGeom prst="rect">
             <a:avLst/>
@@ -19783,7 +19783,7 @@
           <p:cNvPr id="10" name="marker_2">
             <a:extLst>
               <a:ext uri="{FF2B5EF4-FFF2-40B4-BE49-F238E27FC236}">
-                <a16:creationId xmlns:a16="http://schemas.microsoft.com/office/drawing/2014/main" id="{CF778F3E-7FAE-E374-D978-26975BDFA5F2}"/>
+                <a16:creationId xmlns:a16="http://schemas.microsoft.com/office/drawing/2014/main" id="{C8F28449-6039-5BC4-8253-7E9D50B32A9F}"/>
               </a:ext>
             </a:extLst>
           </p:cNvPr>
@@ -19796,8 +19796,8 @@
         </p:nvSpPr>
         <p:spPr>
           <a:xfrm>
-            <a:off x="676029" y="3361186"/>
-            <a:ext cx="627576" cy="621561"/>
+            <a:off x="658119" y="3361186"/>
+            <a:ext cx="548770" cy="621561"/>
           </a:xfrm>
           <a:prstGeom prst="ellipse">
             <a:avLst/>
@@ -19841,7 +19841,7 @@
           <p:cNvPr id="11" name="item_2">
             <a:extLst>
               <a:ext uri="{FF2B5EF4-FFF2-40B4-BE49-F238E27FC236}">
-                <a16:creationId xmlns:a16="http://schemas.microsoft.com/office/drawing/2014/main" id="{612A6343-D96F-37ED-8A16-B9F6ECA40D46}"/>
+                <a16:creationId xmlns:a16="http://schemas.microsoft.com/office/drawing/2014/main" id="{BCF2F66B-4809-8B1F-1E4D-6D774205BFEA}"/>
               </a:ext>
             </a:extLst>
           </p:cNvPr>
@@ -19854,8 +19854,8 @@
         </p:nvSpPr>
         <p:spPr>
           <a:xfrm>
-            <a:off x="1417710" y="3361186"/>
-            <a:ext cx="10098261" cy="565055"/>
+            <a:off x="1306666" y="3361186"/>
+            <a:ext cx="8830215" cy="565055"/>
           </a:xfrm>
           <a:prstGeom prst="rect">
             <a:avLst/>
@@ -19889,7 +19889,7 @@
           <p:cNvPr id="12" name="marker_3">
             <a:extLst>
               <a:ext uri="{FF2B5EF4-FFF2-40B4-BE49-F238E27FC236}">
-                <a16:creationId xmlns:a16="http://schemas.microsoft.com/office/drawing/2014/main" id="{E3E1F391-890A-41BB-61FE-1C80D5DCF467}"/>
+                <a16:creationId xmlns:a16="http://schemas.microsoft.com/office/drawing/2014/main" id="{A4B6EBB9-A544-AB13-FDEE-22AF52E67272}"/>
               </a:ext>
             </a:extLst>
           </p:cNvPr>
@@ -19902,8 +19902,8 @@
         </p:nvSpPr>
         <p:spPr>
           <a:xfrm>
-            <a:off x="676029" y="4350033"/>
-            <a:ext cx="627576" cy="621561"/>
+            <a:off x="658119" y="4350033"/>
+            <a:ext cx="548770" cy="621561"/>
           </a:xfrm>
           <a:prstGeom prst="ellipse">
             <a:avLst/>
@@ -19947,7 +19947,7 @@
           <p:cNvPr id="13" name="item_3">
             <a:extLst>
               <a:ext uri="{FF2B5EF4-FFF2-40B4-BE49-F238E27FC236}">
-                <a16:creationId xmlns:a16="http://schemas.microsoft.com/office/drawing/2014/main" id="{7FB6EFA5-82F6-3865-550C-B2E395D34ADD}"/>
+                <a16:creationId xmlns:a16="http://schemas.microsoft.com/office/drawing/2014/main" id="{4066EA7D-F5F9-4C9B-E584-A29B2604841A}"/>
               </a:ext>
             </a:extLst>
           </p:cNvPr>
@@ -19960,8 +19960,8 @@
         </p:nvSpPr>
         <p:spPr>
           <a:xfrm>
-            <a:off x="1417710" y="4350033"/>
-            <a:ext cx="10098261" cy="565055"/>
+            <a:off x="1306666" y="4350033"/>
+            <a:ext cx="8830215" cy="565055"/>
           </a:xfrm>
           <a:prstGeom prst="rect">
             <a:avLst/>
@@ -19995,7 +19995,7 @@
           <p:cNvPr id="14" name="marker_4">
             <a:extLst>
               <a:ext uri="{FF2B5EF4-FFF2-40B4-BE49-F238E27FC236}">
-                <a16:creationId xmlns:a16="http://schemas.microsoft.com/office/drawing/2014/main" id="{861FD1AE-89DA-6DDA-AE07-48E7AC174D63}"/>
+                <a16:creationId xmlns:a16="http://schemas.microsoft.com/office/drawing/2014/main" id="{80D55F8B-A28D-CCF2-7A32-7B3425C88A1C}"/>
               </a:ext>
             </a:extLst>
           </p:cNvPr>
@@ -20008,8 +20008,8 @@
         </p:nvSpPr>
         <p:spPr>
           <a:xfrm>
-            <a:off x="676029" y="5338880"/>
-            <a:ext cx="627576" cy="621561"/>
+            <a:off x="658119" y="5338880"/>
+            <a:ext cx="548770" cy="621561"/>
           </a:xfrm>
           <a:prstGeom prst="ellipse">
             <a:avLst/>
@@ -20053,7 +20053,7 @@
           <p:cNvPr id="15" name="item_4">
             <a:extLst>
               <a:ext uri="{FF2B5EF4-FFF2-40B4-BE49-F238E27FC236}">
-                <a16:creationId xmlns:a16="http://schemas.microsoft.com/office/drawing/2014/main" id="{846FF7F3-D179-4BC9-3A84-9FD83F4D178E}"/>
+                <a16:creationId xmlns:a16="http://schemas.microsoft.com/office/drawing/2014/main" id="{3F131B8D-7EA3-F360-EA9C-57788279E5F2}"/>
               </a:ext>
             </a:extLst>
           </p:cNvPr>
@@ -20066,8 +20066,8 @@
         </p:nvSpPr>
         <p:spPr>
           <a:xfrm>
-            <a:off x="1417710" y="5338880"/>
-            <a:ext cx="10098261" cy="565055"/>
+            <a:off x="1306666" y="5338880"/>
+            <a:ext cx="8830215" cy="565055"/>
           </a:xfrm>
           <a:prstGeom prst="rect">
             <a:avLst/>
@@ -20101,7 +20101,7 @@
           <p:cNvPr id="16" name="source">
             <a:extLst>
               <a:ext uri="{FF2B5EF4-FFF2-40B4-BE49-F238E27FC236}">
-                <a16:creationId xmlns:a16="http://schemas.microsoft.com/office/drawing/2014/main" id="{C4681F74-5BD6-838A-110A-E60071FF9FA5}"/>
+                <a16:creationId xmlns:a16="http://schemas.microsoft.com/office/drawing/2014/main" id="{9E0B4CA2-0F6B-20E8-2563-8D51C26251FF}"/>
               </a:ext>
             </a:extLst>
           </p:cNvPr>
@@ -20158,7 +20158,7 @@
     </p:spTree>
     <p:extLst>
       <p:ext uri="{BB962C8B-B14F-4D97-AF65-F5344CB8AC3E}">
-        <p14:creationId xmlns:p14="http://schemas.microsoft.com/office/powerpoint/2010/main" val="706916566"/>
+        <p14:creationId xmlns:p14="http://schemas.microsoft.com/office/powerpoint/2010/main" val="4059807966"/>
       </p:ext>
     </p:extLst>
   </p:cSld>
@@ -20308,9 +20308,9 @@
             </a:lvl1pPr>
           </a:lstStyle>
           <a:p>
-            <a:fld id="{90A7BBED-E6FA-40A6-8A51-59E4B08CD8B8}" type="datetimeFigureOut">
+            <a:fld id="{3DE1F4D6-9B94-49E1-9259-C44CF083EB57}" type="datetimeFigureOut">
               <a:rPr lang="en-US" smtClean="0"/>
-              <a:t>10/3/2026</a:t>
+              <a:t>10/4/2026</a:t>
             </a:fld>
             <a:endParaRPr lang="en-US"/>
           </a:p>
@@ -20353,7 +20353,7 @@
             </a:lvl1pPr>
           </a:lstStyle>
           <a:p>
-            <a:fld id="{4F0FE17B-5063-4433-97D2-96EAD825CE6E}" type="slidenum">
+            <a:fld id="{022853CD-29C7-4A68-BCE3-2ED71C774B8A}" type="slidenum">
               <a:rPr lang="en-US" smtClean="0"/>
               <a:t>‹#›</a:t>
             </a:fld>
@@ -20473,7 +20473,7 @@
           <p:cNvPr id="8" name="decisions_title">
             <a:extLst>
               <a:ext uri="{FF2B5EF4-FFF2-40B4-BE49-F238E27FC236}">
-                <a16:creationId xmlns:a16="http://schemas.microsoft.com/office/drawing/2014/main" id="{88E14ACA-29F1-5643-1AE1-8C42FB75E9EF}"/>
+                <a16:creationId xmlns:a16="http://schemas.microsoft.com/office/drawing/2014/main" id="{35ECFC49-9D26-DBC9-E8FA-B3E3B681B1AC}"/>
               </a:ext>
             </a:extLst>
           </p:cNvPr>
@@ -20486,8 +20486,8 @@
         </p:nvSpPr>
         <p:spPr>
           <a:xfrm>
-            <a:off x="733081" y="4946166"/>
-            <a:ext cx="2692870" cy="901263"/>
+            <a:off x="708007" y="4946166"/>
+            <a:ext cx="2354724" cy="901263"/>
           </a:xfrm>
         </p:spPr>
         <p:txBody>
@@ -20525,7 +20525,7 @@
           <p:cNvPr id="9" name="decisions">
             <a:extLst>
               <a:ext uri="{FF2B5EF4-FFF2-40B4-BE49-F238E27FC236}">
-                <a16:creationId xmlns:a16="http://schemas.microsoft.com/office/drawing/2014/main" id="{4C214548-D2F3-D297-438E-52E29985100A}"/>
+                <a16:creationId xmlns:a16="http://schemas.microsoft.com/office/drawing/2014/main" id="{574580F6-A04E-ACB8-5C0A-3270F1CDECC4}"/>
               </a:ext>
             </a:extLst>
           </p:cNvPr>
@@ -20538,8 +20538,8 @@
         </p:nvSpPr>
         <p:spPr>
           <a:xfrm>
-            <a:off x="3537204" y="4946166"/>
-            <a:ext cx="7921715" cy="901263"/>
+            <a:off x="3160014" y="4946166"/>
+            <a:ext cx="6926979" cy="901263"/>
           </a:xfrm>
           <a:prstGeom prst="rect">
             <a:avLst/>
@@ -20568,7 +20568,7 @@
           <p:cNvPr id="10" name="item_1_title">
             <a:extLst>
               <a:ext uri="{FF2B5EF4-FFF2-40B4-BE49-F238E27FC236}">
-                <a16:creationId xmlns:a16="http://schemas.microsoft.com/office/drawing/2014/main" id="{300AC3A8-0DF3-54C5-49BB-1F25A54D1484}"/>
+                <a16:creationId xmlns:a16="http://schemas.microsoft.com/office/drawing/2014/main" id="{98117D7D-1AF8-C671-9E70-00590C2DBD50}"/>
               </a:ext>
             </a:extLst>
           </p:cNvPr>
@@ -20581,8 +20581,8 @@
         </p:nvSpPr>
         <p:spPr>
           <a:xfrm>
-            <a:off x="733082" y="2428843"/>
-            <a:ext cx="3156895" cy="556746"/>
+            <a:off x="708008" y="2428843"/>
+            <a:ext cx="2760481" cy="556746"/>
           </a:xfrm>
           <a:prstGeom prst="rect">
             <a:avLst/>
@@ -20623,7 +20623,7 @@
           <p:cNvPr id="11" name="item_1">
             <a:extLst>
               <a:ext uri="{FF2B5EF4-FFF2-40B4-BE49-F238E27FC236}">
-                <a16:creationId xmlns:a16="http://schemas.microsoft.com/office/drawing/2014/main" id="{87B648D8-D4AE-1EDF-C21D-DA9FC9F45A3D}"/>
+                <a16:creationId xmlns:a16="http://schemas.microsoft.com/office/drawing/2014/main" id="{A168F92B-901E-17CC-4F48-4374C51A969C}"/>
               </a:ext>
             </a:extLst>
           </p:cNvPr>
@@ -20636,8 +20636,8 @@
         </p:nvSpPr>
         <p:spPr>
           <a:xfrm>
-            <a:off x="733082" y="2985589"/>
-            <a:ext cx="3156895" cy="1336190"/>
+            <a:off x="708008" y="2985589"/>
+            <a:ext cx="2760481" cy="1336190"/>
           </a:xfrm>
           <a:prstGeom prst="rect">
             <a:avLst/>
@@ -20671,7 +20671,7 @@
           <p:cNvPr id="12" name="item_2_title">
             <a:extLst>
               <a:ext uri="{FF2B5EF4-FFF2-40B4-BE49-F238E27FC236}">
-                <a16:creationId xmlns:a16="http://schemas.microsoft.com/office/drawing/2014/main" id="{DB45DBE0-3755-A84F-9FB7-B7FC3E885602}"/>
+                <a16:creationId xmlns:a16="http://schemas.microsoft.com/office/drawing/2014/main" id="{C5C95C49-DC14-9E83-31FA-57FE1A48A4AD}"/>
               </a:ext>
             </a:extLst>
           </p:cNvPr>
@@ -20684,8 +20684,8 @@
         </p:nvSpPr>
         <p:spPr>
           <a:xfrm>
-            <a:off x="4517553" y="2428843"/>
-            <a:ext cx="3156895" cy="556746"/>
+            <a:off x="4017259" y="2428843"/>
+            <a:ext cx="2760481" cy="556746"/>
           </a:xfrm>
           <a:prstGeom prst="rect">
             <a:avLst/>
@@ -20726,7 +20726,7 @@
           <p:cNvPr id="13" name="item_2">
             <a:extLst>
               <a:ext uri="{FF2B5EF4-FFF2-40B4-BE49-F238E27FC236}">
-                <a16:creationId xmlns:a16="http://schemas.microsoft.com/office/drawing/2014/main" id="{DF20C678-3992-7E76-F752-362E0FCD0308}"/>
+                <a16:creationId xmlns:a16="http://schemas.microsoft.com/office/drawing/2014/main" id="{02E7775B-164A-47E9-FCF7-C1BF8F6D648A}"/>
               </a:ext>
             </a:extLst>
           </p:cNvPr>
@@ -20739,8 +20739,8 @@
         </p:nvSpPr>
         <p:spPr>
           <a:xfrm>
-            <a:off x="4517553" y="2985589"/>
-            <a:ext cx="3156895" cy="1336190"/>
+            <a:off x="4017259" y="2985589"/>
+            <a:ext cx="2760481" cy="1336190"/>
           </a:xfrm>
           <a:prstGeom prst="rect">
             <a:avLst/>
@@ -20774,7 +20774,7 @@
           <p:cNvPr id="14" name="item_3_title">
             <a:extLst>
               <a:ext uri="{FF2B5EF4-FFF2-40B4-BE49-F238E27FC236}">
-                <a16:creationId xmlns:a16="http://schemas.microsoft.com/office/drawing/2014/main" id="{CAF8CE19-8FA2-49DA-87FD-2325B72BF88F}"/>
+                <a16:creationId xmlns:a16="http://schemas.microsoft.com/office/drawing/2014/main" id="{EF9FEF92-8153-3A37-AD0A-A4909A825EA7}"/>
               </a:ext>
             </a:extLst>
           </p:cNvPr>
@@ -20787,8 +20787,8 @@
         </p:nvSpPr>
         <p:spPr>
           <a:xfrm>
-            <a:off x="8302023" y="2428843"/>
-            <a:ext cx="3156895" cy="556746"/>
+            <a:off x="7326511" y="2428843"/>
+            <a:ext cx="2760481" cy="556746"/>
           </a:xfrm>
           <a:prstGeom prst="rect">
             <a:avLst/>
@@ -20829,7 +20829,7 @@
           <p:cNvPr id="15" name="item_3">
             <a:extLst>
               <a:ext uri="{FF2B5EF4-FFF2-40B4-BE49-F238E27FC236}">
-                <a16:creationId xmlns:a16="http://schemas.microsoft.com/office/drawing/2014/main" id="{FA5DFC59-C4E6-214E-7904-86E12CB899C4}"/>
+                <a16:creationId xmlns:a16="http://schemas.microsoft.com/office/drawing/2014/main" id="{F95AD823-54DF-D6B3-AE50-04DC275CDC00}"/>
               </a:ext>
             </a:extLst>
           </p:cNvPr>
@@ -20842,8 +20842,8 @@
         </p:nvSpPr>
         <p:spPr>
           <a:xfrm>
-            <a:off x="8302023" y="2985589"/>
-            <a:ext cx="3156895" cy="1336190"/>
+            <a:off x="7326511" y="2985589"/>
+            <a:ext cx="2760481" cy="1336190"/>
           </a:xfrm>
           <a:prstGeom prst="rect">
             <a:avLst/>
@@ -20877,7 +20877,7 @@
           <p:cNvPr id="16" name="source">
             <a:extLst>
               <a:ext uri="{FF2B5EF4-FFF2-40B4-BE49-F238E27FC236}">
-                <a16:creationId xmlns:a16="http://schemas.microsoft.com/office/drawing/2014/main" id="{4F863FE9-1501-60BB-9757-205F2F714C4C}"/>
+                <a16:creationId xmlns:a16="http://schemas.microsoft.com/office/drawing/2014/main" id="{B78C47DA-4A34-4A03-EA9D-FB08896C20E9}"/>
               </a:ext>
             </a:extLst>
           </p:cNvPr>
@@ -20934,7 +20934,7 @@
     </p:spTree>
     <p:extLst>
       <p:ext uri="{BB962C8B-B14F-4D97-AF65-F5344CB8AC3E}">
-        <p14:creationId xmlns:p14="http://schemas.microsoft.com/office/powerpoint/2010/main" val="879783967"/>
+        <p14:creationId xmlns:p14="http://schemas.microsoft.com/office/powerpoint/2010/main" val="730393368"/>
       </p:ext>
     </p:extLst>
   </p:cSld>
@@ -21084,9 +21084,9 @@
             </a:lvl1pPr>
           </a:lstStyle>
           <a:p>
-            <a:fld id="{90A7BBED-E6FA-40A6-8A51-59E4B08CD8B8}" type="datetimeFigureOut">
+            <a:fld id="{3DE1F4D6-9B94-49E1-9259-C44CF083EB57}" type="datetimeFigureOut">
               <a:rPr lang="en-US" smtClean="0"/>
-              <a:t>10/3/2026</a:t>
+              <a:t>10/4/2026</a:t>
             </a:fld>
             <a:endParaRPr lang="en-US"/>
           </a:p>
@@ -21129,7 +21129,7 @@
             </a:lvl1pPr>
           </a:lstStyle>
           <a:p>
-            <a:fld id="{4F0FE17B-5063-4433-97D2-96EAD825CE6E}" type="slidenum">
+            <a:fld id="{022853CD-29C7-4A68-BCE3-2ED71C774B8A}" type="slidenum">
               <a:rPr lang="en-US" smtClean="0"/>
               <a:t>‹#›</a:t>
             </a:fld>
@@ -21249,7 +21249,7 @@
           <p:cNvPr id="8" name="body">
             <a:extLst>
               <a:ext uri="{FF2B5EF4-FFF2-40B4-BE49-F238E27FC236}">
-                <a16:creationId xmlns:a16="http://schemas.microsoft.com/office/drawing/2014/main" id="{899907ED-B816-BD11-F7F0-7DC61010F491}"/>
+                <a16:creationId xmlns:a16="http://schemas.microsoft.com/office/drawing/2014/main" id="{B41213A9-8D0F-1045-703D-B7A25EF7AD9B}"/>
               </a:ext>
             </a:extLst>
           </p:cNvPr>
@@ -21263,7 +21263,7 @@
         <p:spPr>
           <a:xfrm>
             <a:off x="533398" y="5282374"/>
-            <a:ext cx="11125202" cy="762825"/>
+            <a:ext cx="9728202" cy="762825"/>
           </a:xfrm>
         </p:spPr>
         <p:txBody>
@@ -21289,7 +21289,7 @@
           <p:cNvPr id="9" name="kpi_value_1">
             <a:extLst>
               <a:ext uri="{FF2B5EF4-FFF2-40B4-BE49-F238E27FC236}">
-                <a16:creationId xmlns:a16="http://schemas.microsoft.com/office/drawing/2014/main" id="{661F95F1-A35A-4046-2E6C-E299FF6718B0}"/>
+                <a16:creationId xmlns:a16="http://schemas.microsoft.com/office/drawing/2014/main" id="{A3AF3DC1-05BB-EB80-39F2-6931004EE08D}"/>
               </a:ext>
             </a:extLst>
           </p:cNvPr>
@@ -21302,8 +21302,8 @@
         </p:nvSpPr>
         <p:spPr>
           <a:xfrm>
-            <a:off x="733082" y="2428844"/>
-            <a:ext cx="5049131" cy="1609197"/>
+            <a:off x="708008" y="2428844"/>
+            <a:ext cx="4415107" cy="1609197"/>
           </a:xfrm>
           <a:prstGeom prst="rect">
             <a:avLst/>
@@ -21344,7 +21344,7 @@
           <p:cNvPr id="10" name="kpi_label_1">
             <a:extLst>
               <a:ext uri="{FF2B5EF4-FFF2-40B4-BE49-F238E27FC236}">
-                <a16:creationId xmlns:a16="http://schemas.microsoft.com/office/drawing/2014/main" id="{348E3FAD-C735-8F59-57F0-B3EF59674D0C}"/>
+                <a16:creationId xmlns:a16="http://schemas.microsoft.com/office/drawing/2014/main" id="{A04B4263-0D0B-77EC-F30B-7C8EB9F84A6E}"/>
               </a:ext>
             </a:extLst>
           </p:cNvPr>
@@ -21357,8 +21357,8 @@
         </p:nvSpPr>
         <p:spPr>
           <a:xfrm>
-            <a:off x="733082" y="4038040"/>
-            <a:ext cx="5049131" cy="893998"/>
+            <a:off x="708008" y="4038040"/>
+            <a:ext cx="4415107" cy="893998"/>
           </a:xfrm>
           <a:prstGeom prst="rect">
             <a:avLst/>
@@ -21392,7 +21392,7 @@
           <p:cNvPr id="11" name="kpi_value_2">
             <a:extLst>
               <a:ext uri="{FF2B5EF4-FFF2-40B4-BE49-F238E27FC236}">
-                <a16:creationId xmlns:a16="http://schemas.microsoft.com/office/drawing/2014/main" id="{F504F54F-BC62-EAD1-86DD-AC59D5F5485C}"/>
+                <a16:creationId xmlns:a16="http://schemas.microsoft.com/office/drawing/2014/main" id="{BA4099CD-D1F9-355F-D812-45DF07C0037D}"/>
               </a:ext>
             </a:extLst>
           </p:cNvPr>
@@ -21405,8 +21405,8 @@
         </p:nvSpPr>
         <p:spPr>
           <a:xfrm>
-            <a:off x="6409788" y="2428844"/>
-            <a:ext cx="5049131" cy="1609197"/>
+            <a:off x="5671885" y="2428844"/>
+            <a:ext cx="4415107" cy="1609197"/>
           </a:xfrm>
           <a:prstGeom prst="rect">
             <a:avLst/>
@@ -21447,7 +21447,7 @@
           <p:cNvPr id="12" name="kpi_label_2">
             <a:extLst>
               <a:ext uri="{FF2B5EF4-FFF2-40B4-BE49-F238E27FC236}">
-                <a16:creationId xmlns:a16="http://schemas.microsoft.com/office/drawing/2014/main" id="{8CCD5861-525B-9378-0B7E-2CA30E9CA0B1}"/>
+                <a16:creationId xmlns:a16="http://schemas.microsoft.com/office/drawing/2014/main" id="{572826BD-CB21-F2DF-592F-A68410D26253}"/>
               </a:ext>
             </a:extLst>
           </p:cNvPr>
@@ -21460,8 +21460,8 @@
         </p:nvSpPr>
         <p:spPr>
           <a:xfrm>
-            <a:off x="6409788" y="4038040"/>
-            <a:ext cx="5049131" cy="893998"/>
+            <a:off x="5671885" y="4038040"/>
+            <a:ext cx="4415107" cy="893998"/>
           </a:xfrm>
           <a:prstGeom prst="rect">
             <a:avLst/>
@@ -21495,7 +21495,7 @@
           <p:cNvPr id="13" name="source">
             <a:extLst>
               <a:ext uri="{FF2B5EF4-FFF2-40B4-BE49-F238E27FC236}">
-                <a16:creationId xmlns:a16="http://schemas.microsoft.com/office/drawing/2014/main" id="{6C94E663-080E-D9A6-D2FA-4073554FA3E7}"/>
+                <a16:creationId xmlns:a16="http://schemas.microsoft.com/office/drawing/2014/main" id="{7B97D90C-8F03-9D08-27D0-F119507426A6}"/>
               </a:ext>
             </a:extLst>
           </p:cNvPr>
@@ -21552,7 +21552,7 @@
     </p:spTree>
     <p:extLst>
       <p:ext uri="{BB962C8B-B14F-4D97-AF65-F5344CB8AC3E}">
-        <p14:creationId xmlns:p14="http://schemas.microsoft.com/office/powerpoint/2010/main" val="3100997651"/>
+        <p14:creationId xmlns:p14="http://schemas.microsoft.com/office/powerpoint/2010/main" val="1428086823"/>
       </p:ext>
     </p:extLst>
   </p:cSld>
@@ -21702,9 +21702,9 @@
             </a:lvl1pPr>
           </a:lstStyle>
           <a:p>
-            <a:fld id="{90A7BBED-E6FA-40A6-8A51-59E4B08CD8B8}" type="datetimeFigureOut">
+            <a:fld id="{3DE1F4D6-9B94-49E1-9259-C44CF083EB57}" type="datetimeFigureOut">
               <a:rPr lang="en-US" smtClean="0"/>
-              <a:t>10/3/2026</a:t>
+              <a:t>10/4/2026</a:t>
             </a:fld>
             <a:endParaRPr lang="en-US"/>
           </a:p>
@@ -21747,7 +21747,7 @@
             </a:lvl1pPr>
           </a:lstStyle>
           <a:p>
-            <a:fld id="{4F0FE17B-5063-4433-97D2-96EAD825CE6E}" type="slidenum">
+            <a:fld id="{022853CD-29C7-4A68-BCE3-2ED71C774B8A}" type="slidenum">
               <a:rPr lang="en-US" smtClean="0"/>
               <a:t>‹#›</a:t>
             </a:fld>
@@ -21867,7 +21867,7 @@
           <p:cNvPr id="8" name="body">
             <a:extLst>
               <a:ext uri="{FF2B5EF4-FFF2-40B4-BE49-F238E27FC236}">
-                <a16:creationId xmlns:a16="http://schemas.microsoft.com/office/drawing/2014/main" id="{78B5D885-518C-7C4E-7BEA-F4AFDDB70F13}"/>
+                <a16:creationId xmlns:a16="http://schemas.microsoft.com/office/drawing/2014/main" id="{C9B9AA66-45FD-5F52-56F4-95FEAFB19FA0}"/>
               </a:ext>
             </a:extLst>
           </p:cNvPr>
@@ -21881,7 +21881,7 @@
         <p:spPr>
           <a:xfrm>
             <a:off x="533398" y="5282374"/>
-            <a:ext cx="11125202" cy="762825"/>
+            <a:ext cx="9728202" cy="762825"/>
           </a:xfrm>
         </p:spPr>
         <p:txBody>
@@ -21907,7 +21907,7 @@
           <p:cNvPr id="9" name="kpi_value_1">
             <a:extLst>
               <a:ext uri="{FF2B5EF4-FFF2-40B4-BE49-F238E27FC236}">
-                <a16:creationId xmlns:a16="http://schemas.microsoft.com/office/drawing/2014/main" id="{1F63810D-84D3-7EA6-8BBB-8B67803357EA}"/>
+                <a16:creationId xmlns:a16="http://schemas.microsoft.com/office/drawing/2014/main" id="{FB5CABF6-E096-8BFC-68BE-E334E7B5C00A}"/>
               </a:ext>
             </a:extLst>
           </p:cNvPr>
@@ -21920,8 +21920,8 @@
         </p:nvSpPr>
         <p:spPr>
           <a:xfrm>
-            <a:off x="733082" y="2428844"/>
-            <a:ext cx="2210777" cy="1609197"/>
+            <a:off x="708007" y="2428844"/>
+            <a:ext cx="1933168" cy="1609197"/>
           </a:xfrm>
           <a:prstGeom prst="rect">
             <a:avLst/>
@@ -21962,7 +21962,7 @@
           <p:cNvPr id="10" name="kpi_label_1">
             <a:extLst>
               <a:ext uri="{FF2B5EF4-FFF2-40B4-BE49-F238E27FC236}">
-                <a16:creationId xmlns:a16="http://schemas.microsoft.com/office/drawing/2014/main" id="{1B6FB93C-CD22-4EEE-DE4C-8C30B0E06A97}"/>
+                <a16:creationId xmlns:a16="http://schemas.microsoft.com/office/drawing/2014/main" id="{4CFE31E1-65E5-9EBA-9E66-0B228CAB4112}"/>
               </a:ext>
             </a:extLst>
           </p:cNvPr>
@@ -21975,8 +21975,8 @@
         </p:nvSpPr>
         <p:spPr>
           <a:xfrm>
-            <a:off x="733082" y="4038040"/>
-            <a:ext cx="2210777" cy="893998"/>
+            <a:off x="708007" y="4038040"/>
+            <a:ext cx="1933168" cy="893998"/>
           </a:xfrm>
           <a:prstGeom prst="rect">
             <a:avLst/>
@@ -22010,7 +22010,7 @@
           <p:cNvPr id="11" name="kpi_value_2">
             <a:extLst>
               <a:ext uri="{FF2B5EF4-FFF2-40B4-BE49-F238E27FC236}">
-                <a16:creationId xmlns:a16="http://schemas.microsoft.com/office/drawing/2014/main" id="{B00CE5BE-6F82-33D3-CC4B-C43A13A7481F}"/>
+                <a16:creationId xmlns:a16="http://schemas.microsoft.com/office/drawing/2014/main" id="{75E19973-44E3-DBB4-ACC7-E70BA98490AF}"/>
               </a:ext>
             </a:extLst>
           </p:cNvPr>
@@ -22023,8 +22023,8 @@
         </p:nvSpPr>
         <p:spPr>
           <a:xfrm>
-            <a:off x="3571435" y="2428844"/>
-            <a:ext cx="2210777" cy="1609197"/>
+            <a:off x="3189946" y="2428844"/>
+            <a:ext cx="1933168" cy="1609197"/>
           </a:xfrm>
           <a:prstGeom prst="rect">
             <a:avLst/>
@@ -22065,7 +22065,7 @@
           <p:cNvPr id="12" name="kpi_label_2">
             <a:extLst>
               <a:ext uri="{FF2B5EF4-FFF2-40B4-BE49-F238E27FC236}">
-                <a16:creationId xmlns:a16="http://schemas.microsoft.com/office/drawing/2014/main" id="{25F762D7-87D3-8C9A-C007-D6ED975B3014}"/>
+                <a16:creationId xmlns:a16="http://schemas.microsoft.com/office/drawing/2014/main" id="{F4F92F65-72D6-7226-546B-58A31CF9D640}"/>
               </a:ext>
             </a:extLst>
           </p:cNvPr>
@@ -22078,8 +22078,8 @@
         </p:nvSpPr>
         <p:spPr>
           <a:xfrm>
-            <a:off x="3571435" y="4038040"/>
-            <a:ext cx="2210777" cy="893998"/>
+            <a:off x="3189946" y="4038040"/>
+            <a:ext cx="1933168" cy="893998"/>
           </a:xfrm>
           <a:prstGeom prst="rect">
             <a:avLst/>
@@ -22113,7 +22113,7 @@
           <p:cNvPr id="13" name="kpi_value_3">
             <a:extLst>
               <a:ext uri="{FF2B5EF4-FFF2-40B4-BE49-F238E27FC236}">
-                <a16:creationId xmlns:a16="http://schemas.microsoft.com/office/drawing/2014/main" id="{01E6E47F-FCCD-18BA-3F03-15797FA16EBC}"/>
+                <a16:creationId xmlns:a16="http://schemas.microsoft.com/office/drawing/2014/main" id="{43A13574-8838-58ED-AF7D-B8FC51002FFA}"/>
               </a:ext>
             </a:extLst>
           </p:cNvPr>
@@ -22126,8 +22126,8 @@
         </p:nvSpPr>
         <p:spPr>
           <a:xfrm>
-            <a:off x="6409788" y="2428844"/>
-            <a:ext cx="2210777" cy="1609197"/>
+            <a:off x="5671884" y="2428844"/>
+            <a:ext cx="1933168" cy="1609197"/>
           </a:xfrm>
           <a:prstGeom prst="rect">
             <a:avLst/>
@@ -22168,7 +22168,7 @@
           <p:cNvPr id="14" name="kpi_label_3">
             <a:extLst>
               <a:ext uri="{FF2B5EF4-FFF2-40B4-BE49-F238E27FC236}">
-                <a16:creationId xmlns:a16="http://schemas.microsoft.com/office/drawing/2014/main" id="{0A77A2DE-F2DE-558A-BF02-F1CFD3E1CDBF}"/>
+                <a16:creationId xmlns:a16="http://schemas.microsoft.com/office/drawing/2014/main" id="{45924526-26DB-9389-C6CF-D27A0DC5119C}"/>
               </a:ext>
             </a:extLst>
           </p:cNvPr>
@@ -22181,8 +22181,8 @@
         </p:nvSpPr>
         <p:spPr>
           <a:xfrm>
-            <a:off x="6409788" y="4038040"/>
-            <a:ext cx="2210777" cy="893998"/>
+            <a:off x="5671884" y="4038040"/>
+            <a:ext cx="1933168" cy="893998"/>
           </a:xfrm>
           <a:prstGeom prst="rect">
             <a:avLst/>
@@ -22216,7 +22216,7 @@
           <p:cNvPr id="15" name="kpi_value_4">
             <a:extLst>
               <a:ext uri="{FF2B5EF4-FFF2-40B4-BE49-F238E27FC236}">
-                <a16:creationId xmlns:a16="http://schemas.microsoft.com/office/drawing/2014/main" id="{4EDF186E-6F87-3DDF-ED30-731199820E1C}"/>
+                <a16:creationId xmlns:a16="http://schemas.microsoft.com/office/drawing/2014/main" id="{C98F2958-09D7-C625-D855-D8A5DC34B2DD}"/>
               </a:ext>
             </a:extLst>
           </p:cNvPr>
@@ -22229,8 +22229,8 @@
         </p:nvSpPr>
         <p:spPr>
           <a:xfrm>
-            <a:off x="9248141" y="2428844"/>
-            <a:ext cx="2210777" cy="1609197"/>
+            <a:off x="8153823" y="2428844"/>
+            <a:ext cx="1933168" cy="1609197"/>
           </a:xfrm>
           <a:prstGeom prst="rect">
             <a:avLst/>
@@ -22271,7 +22271,7 @@
           <p:cNvPr id="16" name="kpi_label_4">
             <a:extLst>
               <a:ext uri="{FF2B5EF4-FFF2-40B4-BE49-F238E27FC236}">
-                <a16:creationId xmlns:a16="http://schemas.microsoft.com/office/drawing/2014/main" id="{5A60885E-52BA-7DFD-66A8-53067C0A9830}"/>
+                <a16:creationId xmlns:a16="http://schemas.microsoft.com/office/drawing/2014/main" id="{263979CC-E075-E904-3A6C-6D23EDB9FB10}"/>
               </a:ext>
             </a:extLst>
           </p:cNvPr>
@@ -22284,8 +22284,8 @@
         </p:nvSpPr>
         <p:spPr>
           <a:xfrm>
-            <a:off x="9248141" y="4038040"/>
-            <a:ext cx="2210777" cy="893998"/>
+            <a:off x="8153823" y="4038040"/>
+            <a:ext cx="1933168" cy="893998"/>
           </a:xfrm>
           <a:prstGeom prst="rect">
             <a:avLst/>
@@ -22319,7 +22319,7 @@
           <p:cNvPr id="17" name="source">
             <a:extLst>
               <a:ext uri="{FF2B5EF4-FFF2-40B4-BE49-F238E27FC236}">
-                <a16:creationId xmlns:a16="http://schemas.microsoft.com/office/drawing/2014/main" id="{ADDC0CCE-B2F8-9B68-31F6-ECC0EAB09DCC}"/>
+                <a16:creationId xmlns:a16="http://schemas.microsoft.com/office/drawing/2014/main" id="{11DF0B1E-CC11-5500-E5F7-99A79FCC720B}"/>
               </a:ext>
             </a:extLst>
           </p:cNvPr>
@@ -22376,7 +22376,7 @@
     </p:spTree>
     <p:extLst>
       <p:ext uri="{BB962C8B-B14F-4D97-AF65-F5344CB8AC3E}">
-        <p14:creationId xmlns:p14="http://schemas.microsoft.com/office/powerpoint/2010/main" val="884059172"/>
+        <p14:creationId xmlns:p14="http://schemas.microsoft.com/office/powerpoint/2010/main" val="3371129573"/>
       </p:ext>
     </p:extLst>
   </p:cSld>
@@ -22526,9 +22526,9 @@
             </a:lvl1pPr>
           </a:lstStyle>
           <a:p>
-            <a:fld id="{90A7BBED-E6FA-40A6-8A51-59E4B08CD8B8}" type="datetimeFigureOut">
+            <a:fld id="{3DE1F4D6-9B94-49E1-9259-C44CF083EB57}" type="datetimeFigureOut">
               <a:rPr lang="en-US" smtClean="0"/>
-              <a:t>10/3/2026</a:t>
+              <a:t>10/4/2026</a:t>
             </a:fld>
             <a:endParaRPr lang="en-US"/>
           </a:p>
@@ -22571,7 +22571,7 @@
             </a:lvl1pPr>
           </a:lstStyle>
           <a:p>
-            <a:fld id="{4F0FE17B-5063-4433-97D2-96EAD825CE6E}" type="slidenum">
+            <a:fld id="{022853CD-29C7-4A68-BCE3-2ED71C774B8A}" type="slidenum">
               <a:rPr lang="en-US" smtClean="0"/>
               <a:t>‹#›</a:t>
             </a:fld>
@@ -22691,7 +22691,7 @@
           <p:cNvPr id="8" name="body">
             <a:extLst>
               <a:ext uri="{FF2B5EF4-FFF2-40B4-BE49-F238E27FC236}">
-                <a16:creationId xmlns:a16="http://schemas.microsoft.com/office/drawing/2014/main" id="{C94221ED-B370-B539-61AB-36A8D5549767}"/>
+                <a16:creationId xmlns:a16="http://schemas.microsoft.com/office/drawing/2014/main" id="{3139638B-0647-8FB0-5D73-8A33C49C753E}"/>
               </a:ext>
             </a:extLst>
           </p:cNvPr>
@@ -22704,8 +22704,8 @@
         </p:nvSpPr>
         <p:spPr>
           <a:xfrm>
-            <a:off x="533398" y="2231074"/>
-            <a:ext cx="6230114" cy="3814124"/>
+            <a:off x="533399" y="2231074"/>
+            <a:ext cx="5447793" cy="3814124"/>
           </a:xfrm>
         </p:spPr>
         <p:txBody>
@@ -22731,7 +22731,7 @@
           <p:cNvPr id="9" name="quote">
             <a:extLst>
               <a:ext uri="{FF2B5EF4-FFF2-40B4-BE49-F238E27FC236}">
-                <a16:creationId xmlns:a16="http://schemas.microsoft.com/office/drawing/2014/main" id="{5D658E76-EA3F-AF29-3ECE-B8F9DD88E18F}"/>
+                <a16:creationId xmlns:a16="http://schemas.microsoft.com/office/drawing/2014/main" id="{1FCB3A42-6E71-74C2-CE2A-EDCC2E8013AD}"/>
               </a:ext>
             </a:extLst>
           </p:cNvPr>
@@ -22744,8 +22744,8 @@
         </p:nvSpPr>
         <p:spPr>
           <a:xfrm>
-            <a:off x="7408204" y="2428843"/>
-            <a:ext cx="4050715" cy="2853530"/>
+            <a:off x="6544929" y="2428843"/>
+            <a:ext cx="3542063" cy="2853530"/>
           </a:xfrm>
           <a:prstGeom prst="rect">
             <a:avLst/>
@@ -22781,7 +22781,7 @@
           <p:cNvPr id="10" name="attribution">
             <a:extLst>
               <a:ext uri="{FF2B5EF4-FFF2-40B4-BE49-F238E27FC236}">
-                <a16:creationId xmlns:a16="http://schemas.microsoft.com/office/drawing/2014/main" id="{66F3286A-5229-0661-78E8-2E388B9AD281}"/>
+                <a16:creationId xmlns:a16="http://schemas.microsoft.com/office/drawing/2014/main" id="{E6C81CEB-5119-27DF-AF02-2C043C8381AA}"/>
               </a:ext>
             </a:extLst>
           </p:cNvPr>
@@ -22794,8 +22794,8 @@
         </p:nvSpPr>
         <p:spPr>
           <a:xfrm>
-            <a:off x="7408204" y="5282374"/>
-            <a:ext cx="4050715" cy="565055"/>
+            <a:off x="6544929" y="5282374"/>
+            <a:ext cx="3542063" cy="565055"/>
           </a:xfrm>
           <a:prstGeom prst="rect">
             <a:avLst/>
@@ -22829,7 +22829,7 @@
           <p:cNvPr id="11" name="source">
             <a:extLst>
               <a:ext uri="{FF2B5EF4-FFF2-40B4-BE49-F238E27FC236}">
-                <a16:creationId xmlns:a16="http://schemas.microsoft.com/office/drawing/2014/main" id="{923993F2-11A7-4877-F3FD-0F00E01B7BC8}"/>
+                <a16:creationId xmlns:a16="http://schemas.microsoft.com/office/drawing/2014/main" id="{3840C3A1-EFBB-A9EE-EC4F-FC633D63F2F1}"/>
               </a:ext>
             </a:extLst>
           </p:cNvPr>
@@ -22886,7 +22886,7 @@
     </p:spTree>
     <p:extLst>
       <p:ext uri="{BB962C8B-B14F-4D97-AF65-F5344CB8AC3E}">
-        <p14:creationId xmlns:p14="http://schemas.microsoft.com/office/powerpoint/2010/main" val="3935436072"/>
+        <p14:creationId xmlns:p14="http://schemas.microsoft.com/office/powerpoint/2010/main" val="3022180468"/>
       </p:ext>
     </p:extLst>
   </p:cSld>
@@ -23036,9 +23036,9 @@
             </a:lvl1pPr>
           </a:lstStyle>
           <a:p>
-            <a:fld id="{90A7BBED-E6FA-40A6-8A51-59E4B08CD8B8}" type="datetimeFigureOut">
+            <a:fld id="{3DE1F4D6-9B94-49E1-9259-C44CF083EB57}" type="datetimeFigureOut">
               <a:rPr lang="en-US" smtClean="0"/>
-              <a:t>10/3/2026</a:t>
+              <a:t>10/4/2026</a:t>
             </a:fld>
             <a:endParaRPr lang="en-US"/>
           </a:p>
@@ -23081,7 +23081,7 @@
             </a:lvl1pPr>
           </a:lstStyle>
           <a:p>
-            <a:fld id="{4F0FE17B-5063-4433-97D2-96EAD825CE6E}" type="slidenum">
+            <a:fld id="{022853CD-29C7-4A68-BCE3-2ED71C774B8A}" type="slidenum">
               <a:rPr lang="en-US" smtClean="0"/>
               <a:t>‹#›</a:t>
             </a:fld>
@@ -23201,7 +23201,7 @@
           <p:cNvPr id="8" name="item_1_title">
             <a:extLst>
               <a:ext uri="{FF2B5EF4-FFF2-40B4-BE49-F238E27FC236}">
-                <a16:creationId xmlns:a16="http://schemas.microsoft.com/office/drawing/2014/main" id="{6551CC7A-CA9B-0E14-007C-EAB1C394FAE4}"/>
+                <a16:creationId xmlns:a16="http://schemas.microsoft.com/office/drawing/2014/main" id="{FD293F08-D7CF-BCD1-2710-A2E65D5490C8}"/>
               </a:ext>
             </a:extLst>
           </p:cNvPr>
@@ -23214,8 +23214,8 @@
         </p:nvSpPr>
         <p:spPr>
           <a:xfrm>
-            <a:off x="733082" y="2428843"/>
-            <a:ext cx="3156895" cy="1005466"/>
+            <a:off x="708008" y="2428843"/>
+            <a:ext cx="2760481" cy="1005466"/>
           </a:xfrm>
         </p:spPr>
         <p:txBody>
@@ -23253,7 +23253,7 @@
           <p:cNvPr id="9" name="item_1">
             <a:extLst>
               <a:ext uri="{FF2B5EF4-FFF2-40B4-BE49-F238E27FC236}">
-                <a16:creationId xmlns:a16="http://schemas.microsoft.com/office/drawing/2014/main" id="{956970D3-FF66-58F0-4CD4-E2AE6A80EC3A}"/>
+                <a16:creationId xmlns:a16="http://schemas.microsoft.com/office/drawing/2014/main" id="{BA40A814-1577-E557-007D-D6B143716923}"/>
               </a:ext>
             </a:extLst>
           </p:cNvPr>
@@ -23266,8 +23266,8 @@
         </p:nvSpPr>
         <p:spPr>
           <a:xfrm>
-            <a:off x="733082" y="3434310"/>
-            <a:ext cx="3156895" cy="2413119"/>
+            <a:off x="708008" y="3434310"/>
+            <a:ext cx="2760481" cy="2413119"/>
           </a:xfrm>
           <a:prstGeom prst="rect">
             <a:avLst/>
@@ -23301,7 +23301,7 @@
           <p:cNvPr id="10" name="item_2_title">
             <a:extLst>
               <a:ext uri="{FF2B5EF4-FFF2-40B4-BE49-F238E27FC236}">
-                <a16:creationId xmlns:a16="http://schemas.microsoft.com/office/drawing/2014/main" id="{DE80496C-C789-F552-1076-46DD84A86092}"/>
+                <a16:creationId xmlns:a16="http://schemas.microsoft.com/office/drawing/2014/main" id="{738C10FE-316D-D6B6-FBB6-92BE4A409DE1}"/>
               </a:ext>
             </a:extLst>
           </p:cNvPr>
@@ -23314,8 +23314,8 @@
         </p:nvSpPr>
         <p:spPr>
           <a:xfrm>
-            <a:off x="4517553" y="2428843"/>
-            <a:ext cx="3156895" cy="1005466"/>
+            <a:off x="4017259" y="2428843"/>
+            <a:ext cx="2760481" cy="1005466"/>
           </a:xfrm>
           <a:prstGeom prst="rect">
             <a:avLst/>
@@ -23356,7 +23356,7 @@
           <p:cNvPr id="11" name="item_2">
             <a:extLst>
               <a:ext uri="{FF2B5EF4-FFF2-40B4-BE49-F238E27FC236}">
-                <a16:creationId xmlns:a16="http://schemas.microsoft.com/office/drawing/2014/main" id="{413CD5AC-FE05-8138-C36D-D71EF729F3FE}"/>
+                <a16:creationId xmlns:a16="http://schemas.microsoft.com/office/drawing/2014/main" id="{19834950-39C7-2237-7D9C-93A4613DD5D1}"/>
               </a:ext>
             </a:extLst>
           </p:cNvPr>
@@ -23369,8 +23369,8 @@
         </p:nvSpPr>
         <p:spPr>
           <a:xfrm>
-            <a:off x="4517553" y="3434310"/>
-            <a:ext cx="3156895" cy="2413119"/>
+            <a:off x="4017259" y="3434310"/>
+            <a:ext cx="2760481" cy="2413119"/>
           </a:xfrm>
           <a:prstGeom prst="rect">
             <a:avLst/>
@@ -23404,7 +23404,7 @@
           <p:cNvPr id="12" name="item_3_title">
             <a:extLst>
               <a:ext uri="{FF2B5EF4-FFF2-40B4-BE49-F238E27FC236}">
-                <a16:creationId xmlns:a16="http://schemas.microsoft.com/office/drawing/2014/main" id="{9BFC28F0-9FE7-0D33-2EE0-66FCFF56C049}"/>
+                <a16:creationId xmlns:a16="http://schemas.microsoft.com/office/drawing/2014/main" id="{670943FA-14F3-6337-576C-3175D2BF01EE}"/>
               </a:ext>
             </a:extLst>
           </p:cNvPr>
@@ -23417,8 +23417,8 @@
         </p:nvSpPr>
         <p:spPr>
           <a:xfrm>
-            <a:off x="8302023" y="2428843"/>
-            <a:ext cx="3156895" cy="1005466"/>
+            <a:off x="7326511" y="2428843"/>
+            <a:ext cx="2760481" cy="1005466"/>
           </a:xfrm>
           <a:prstGeom prst="rect">
             <a:avLst/>
@@ -23459,7 +23459,7 @@
           <p:cNvPr id="13" name="item_3">
             <a:extLst>
               <a:ext uri="{FF2B5EF4-FFF2-40B4-BE49-F238E27FC236}">
-                <a16:creationId xmlns:a16="http://schemas.microsoft.com/office/drawing/2014/main" id="{12D6E6D2-EDA4-7858-A449-61B951037126}"/>
+                <a16:creationId xmlns:a16="http://schemas.microsoft.com/office/drawing/2014/main" id="{53C14820-45B2-F8F7-B1D8-EE8FA9954F43}"/>
               </a:ext>
             </a:extLst>
           </p:cNvPr>
@@ -23472,8 +23472,8 @@
         </p:nvSpPr>
         <p:spPr>
           <a:xfrm>
-            <a:off x="8302023" y="3434310"/>
-            <a:ext cx="3156895" cy="2413119"/>
+            <a:off x="7326511" y="3434310"/>
+            <a:ext cx="2760481" cy="2413119"/>
           </a:xfrm>
           <a:prstGeom prst="rect">
             <a:avLst/>
@@ -23507,7 +23507,7 @@
           <p:cNvPr id="14" name="source">
             <a:extLst>
               <a:ext uri="{FF2B5EF4-FFF2-40B4-BE49-F238E27FC236}">
-                <a16:creationId xmlns:a16="http://schemas.microsoft.com/office/drawing/2014/main" id="{5A088D18-60C3-BB04-0CEC-452F5E86215A}"/>
+                <a16:creationId xmlns:a16="http://schemas.microsoft.com/office/drawing/2014/main" id="{7DD16CAB-2E31-BAC0-6DF0-C701803C9291}"/>
               </a:ext>
             </a:extLst>
           </p:cNvPr>
@@ -23564,7 +23564,7 @@
     </p:spTree>
     <p:extLst>
       <p:ext uri="{BB962C8B-B14F-4D97-AF65-F5344CB8AC3E}">
-        <p14:creationId xmlns:p14="http://schemas.microsoft.com/office/powerpoint/2010/main" val="3837282541"/>
+        <p14:creationId xmlns:p14="http://schemas.microsoft.com/office/powerpoint/2010/main" val="3820362911"/>
       </p:ext>
     </p:extLst>
   </p:cSld>
@@ -23714,9 +23714,9 @@
             </a:lvl1pPr>
           </a:lstStyle>
           <a:p>
-            <a:fld id="{90A7BBED-E6FA-40A6-8A51-59E4B08CD8B8}" type="datetimeFigureOut">
+            <a:fld id="{3DE1F4D6-9B94-49E1-9259-C44CF083EB57}" type="datetimeFigureOut">
               <a:rPr lang="en-US" smtClean="0"/>
-              <a:t>10/3/2026</a:t>
+              <a:t>10/4/2026</a:t>
             </a:fld>
             <a:endParaRPr lang="en-US"/>
           </a:p>
@@ -23759,7 +23759,7 @@
             </a:lvl1pPr>
           </a:lstStyle>
           <a:p>
-            <a:fld id="{4F0FE17B-5063-4433-97D2-96EAD825CE6E}" type="slidenum">
+            <a:fld id="{022853CD-29C7-4A68-BCE3-2ED71C774B8A}" type="slidenum">
               <a:rPr lang="en-US" smtClean="0"/>
               <a:t>‹#›</a:t>
             </a:fld>
@@ -23879,7 +23879,7 @@
           <p:cNvPr id="8" name="item_1_title">
             <a:extLst>
               <a:ext uri="{FF2B5EF4-FFF2-40B4-BE49-F238E27FC236}">
-                <a16:creationId xmlns:a16="http://schemas.microsoft.com/office/drawing/2014/main" id="{E345F748-397C-B4C1-D25A-F44804C5EA45}"/>
+                <a16:creationId xmlns:a16="http://schemas.microsoft.com/office/drawing/2014/main" id="{E3EE261B-056A-8D25-8B15-179EDEB92C9C}"/>
               </a:ext>
             </a:extLst>
           </p:cNvPr>
@@ -23892,8 +23892,8 @@
         </p:nvSpPr>
         <p:spPr>
           <a:xfrm>
-            <a:off x="733082" y="2428843"/>
-            <a:ext cx="5049131" cy="1005466"/>
+            <a:off x="708008" y="2428843"/>
+            <a:ext cx="4415107" cy="1005466"/>
           </a:xfrm>
         </p:spPr>
         <p:txBody>
@@ -23931,7 +23931,7 @@
           <p:cNvPr id="9" name="item_1">
             <a:extLst>
               <a:ext uri="{FF2B5EF4-FFF2-40B4-BE49-F238E27FC236}">
-                <a16:creationId xmlns:a16="http://schemas.microsoft.com/office/drawing/2014/main" id="{A38BC5E5-ACB0-CFA1-30E7-9E95E6828889}"/>
+                <a16:creationId xmlns:a16="http://schemas.microsoft.com/office/drawing/2014/main" id="{A7144253-7880-6FD7-23C2-66AC0CE15597}"/>
               </a:ext>
             </a:extLst>
           </p:cNvPr>
@@ -23944,8 +23944,8 @@
         </p:nvSpPr>
         <p:spPr>
           <a:xfrm>
-            <a:off x="733082" y="3434310"/>
-            <a:ext cx="5049131" cy="2413119"/>
+            <a:off x="708008" y="3434310"/>
+            <a:ext cx="4415107" cy="2413119"/>
           </a:xfrm>
           <a:prstGeom prst="rect">
             <a:avLst/>
@@ -23979,7 +23979,7 @@
           <p:cNvPr id="10" name="item_2_title">
             <a:extLst>
               <a:ext uri="{FF2B5EF4-FFF2-40B4-BE49-F238E27FC236}">
-                <a16:creationId xmlns:a16="http://schemas.microsoft.com/office/drawing/2014/main" id="{8BA6DD3B-B6EE-1DAE-8033-6243DC0401CB}"/>
+                <a16:creationId xmlns:a16="http://schemas.microsoft.com/office/drawing/2014/main" id="{4B1E6CBF-A605-D486-2AB8-CFBFBC759EAA}"/>
               </a:ext>
             </a:extLst>
           </p:cNvPr>
@@ -23992,8 +23992,8 @@
         </p:nvSpPr>
         <p:spPr>
           <a:xfrm>
-            <a:off x="6409788" y="2428843"/>
-            <a:ext cx="5049131" cy="1005466"/>
+            <a:off x="5671885" y="2428843"/>
+            <a:ext cx="4415107" cy="1005466"/>
           </a:xfrm>
           <a:prstGeom prst="rect">
             <a:avLst/>
@@ -24034,7 +24034,7 @@
           <p:cNvPr id="11" name="item_2">
             <a:extLst>
               <a:ext uri="{FF2B5EF4-FFF2-40B4-BE49-F238E27FC236}">
-                <a16:creationId xmlns:a16="http://schemas.microsoft.com/office/drawing/2014/main" id="{ADF6A01D-3F31-895B-2392-040D8D825A7C}"/>
+                <a16:creationId xmlns:a16="http://schemas.microsoft.com/office/drawing/2014/main" id="{EB581D06-28C8-8573-39C4-F327DBFBEBB3}"/>
               </a:ext>
             </a:extLst>
           </p:cNvPr>
@@ -24047,8 +24047,8 @@
         </p:nvSpPr>
         <p:spPr>
           <a:xfrm>
-            <a:off x="6409788" y="3434310"/>
-            <a:ext cx="5049131" cy="2413119"/>
+            <a:off x="5671885" y="3434310"/>
+            <a:ext cx="4415107" cy="2413119"/>
           </a:xfrm>
           <a:prstGeom prst="rect">
             <a:avLst/>
@@ -24082,7 +24082,7 @@
           <p:cNvPr id="12" name="source">
             <a:extLst>
               <a:ext uri="{FF2B5EF4-FFF2-40B4-BE49-F238E27FC236}">
-                <a16:creationId xmlns:a16="http://schemas.microsoft.com/office/drawing/2014/main" id="{1BE7FD71-A349-49AA-433B-4DF249E9B29A}"/>
+                <a16:creationId xmlns:a16="http://schemas.microsoft.com/office/drawing/2014/main" id="{255CE510-D5BE-C46A-F9FA-882408B27B28}"/>
               </a:ext>
             </a:extLst>
           </p:cNvPr>
@@ -24139,7 +24139,7 @@
     </p:spTree>
     <p:extLst>
       <p:ext uri="{BB962C8B-B14F-4D97-AF65-F5344CB8AC3E}">
-        <p14:creationId xmlns:p14="http://schemas.microsoft.com/office/powerpoint/2010/main" val="1132650108"/>
+        <p14:creationId xmlns:p14="http://schemas.microsoft.com/office/powerpoint/2010/main" val="2939714050"/>
       </p:ext>
     </p:extLst>
   </p:cSld>
@@ -24289,9 +24289,9 @@
             </a:lvl1pPr>
           </a:lstStyle>
           <a:p>
-            <a:fld id="{90A7BBED-E6FA-40A6-8A51-59E4B08CD8B8}" type="datetimeFigureOut">
+            <a:fld id="{3DE1F4D6-9B94-49E1-9259-C44CF083EB57}" type="datetimeFigureOut">
               <a:rPr lang="en-US" smtClean="0"/>
-              <a:t>10/3/2026</a:t>
+              <a:t>10/4/2026</a:t>
             </a:fld>
             <a:endParaRPr lang="en-US"/>
           </a:p>
@@ -24334,7 +24334,7 @@
             </a:lvl1pPr>
           </a:lstStyle>
           <a:p>
-            <a:fld id="{4F0FE17B-5063-4433-97D2-96EAD825CE6E}" type="slidenum">
+            <a:fld id="{022853CD-29C7-4A68-BCE3-2ED71C774B8A}" type="slidenum">
               <a:rPr lang="en-US" smtClean="0"/>
               <a:t>‹#›</a:t>
             </a:fld>
@@ -24454,7 +24454,7 @@
           <p:cNvPr id="8" name="chart">
             <a:extLst>
               <a:ext uri="{FF2B5EF4-FFF2-40B4-BE49-F238E27FC236}">
-                <a16:creationId xmlns:a16="http://schemas.microsoft.com/office/drawing/2014/main" id="{DF5453D0-1241-1E3E-BDEC-84B8EB262496}"/>
+                <a16:creationId xmlns:a16="http://schemas.microsoft.com/office/drawing/2014/main" id="{BC08A776-BA52-1DE5-7AF7-354A55A5B2C5}"/>
               </a:ext>
             </a:extLst>
           </p:cNvPr>
@@ -24468,7 +24468,7 @@
         <p:spPr>
           <a:xfrm>
             <a:off x="533398" y="2231074"/>
-            <a:ext cx="7787642" cy="3814124"/>
+            <a:ext cx="6809742" cy="3814124"/>
           </a:xfrm>
         </p:spPr>
         <p:txBody>
@@ -24484,7 +24484,7 @@
           <p:cNvPr id="9" name="body">
             <a:extLst>
               <a:ext uri="{FF2B5EF4-FFF2-40B4-BE49-F238E27FC236}">
-                <a16:creationId xmlns:a16="http://schemas.microsoft.com/office/drawing/2014/main" id="{0BD62B22-7B14-1A84-8CEA-1319065B7159}"/>
+                <a16:creationId xmlns:a16="http://schemas.microsoft.com/office/drawing/2014/main" id="{14188350-CC11-8AF8-5CE1-2AECE4E1B765}"/>
               </a:ext>
             </a:extLst>
           </p:cNvPr>
@@ -24497,8 +24497,8 @@
         </p:nvSpPr>
         <p:spPr>
           <a:xfrm>
-            <a:off x="8766049" y="2383639"/>
-            <a:ext cx="2892553" cy="3508994"/>
+            <a:off x="7732269" y="2383639"/>
+            <a:ext cx="2529333" cy="3508994"/>
           </a:xfrm>
           <a:prstGeom prst="rect">
             <a:avLst/>
@@ -24527,7 +24527,7 @@
           <p:cNvPr id="10" name="source">
             <a:extLst>
               <a:ext uri="{FF2B5EF4-FFF2-40B4-BE49-F238E27FC236}">
-                <a16:creationId xmlns:a16="http://schemas.microsoft.com/office/drawing/2014/main" id="{89F8ECF3-0DF0-348E-0F91-148FAA3AB6C3}"/>
+                <a16:creationId xmlns:a16="http://schemas.microsoft.com/office/drawing/2014/main" id="{E26A368F-D73D-C3EA-734E-D7357AE90B00}"/>
               </a:ext>
             </a:extLst>
           </p:cNvPr>
@@ -24584,7 +24584,7 @@
     </p:spTree>
     <p:extLst>
       <p:ext uri="{BB962C8B-B14F-4D97-AF65-F5344CB8AC3E}">
-        <p14:creationId xmlns:p14="http://schemas.microsoft.com/office/powerpoint/2010/main" val="3868304045"/>
+        <p14:creationId xmlns:p14="http://schemas.microsoft.com/office/powerpoint/2010/main" val="1196864542"/>
       </p:ext>
     </p:extLst>
   </p:cSld>
@@ -24734,9 +24734,9 @@
             </a:lvl1pPr>
           </a:lstStyle>
           <a:p>
-            <a:fld id="{90A7BBED-E6FA-40A6-8A51-59E4B08CD8B8}" type="datetimeFigureOut">
+            <a:fld id="{3DE1F4D6-9B94-49E1-9259-C44CF083EB57}" type="datetimeFigureOut">
               <a:rPr lang="en-US" smtClean="0"/>
-              <a:t>10/3/2026</a:t>
+              <a:t>10/4/2026</a:t>
             </a:fld>
             <a:endParaRPr lang="en-US"/>
           </a:p>
@@ -24779,7 +24779,7 @@
             </a:lvl1pPr>
           </a:lstStyle>
           <a:p>
-            <a:fld id="{4F0FE17B-5063-4433-97D2-96EAD825CE6E}" type="slidenum">
+            <a:fld id="{022853CD-29C7-4A68-BCE3-2ED71C774B8A}" type="slidenum">
               <a:rPr lang="en-US" smtClean="0"/>
               <a:t>‹#›</a:t>
             </a:fld>
@@ -24899,7 +24899,7 @@
           <p:cNvPr id="8" name="item_1_title">
             <a:extLst>
               <a:ext uri="{FF2B5EF4-FFF2-40B4-BE49-F238E27FC236}">
-                <a16:creationId xmlns:a16="http://schemas.microsoft.com/office/drawing/2014/main" id="{02636107-3127-28A4-35A7-FABA316CCDC9}"/>
+                <a16:creationId xmlns:a16="http://schemas.microsoft.com/office/drawing/2014/main" id="{B31DF6D0-28FD-5D83-261A-6AE66DC168A6}"/>
               </a:ext>
             </a:extLst>
           </p:cNvPr>
@@ -24912,8 +24912,8 @@
         </p:nvSpPr>
         <p:spPr>
           <a:xfrm>
-            <a:off x="733082" y="2428844"/>
-            <a:ext cx="5049131" cy="411327"/>
+            <a:off x="708008" y="2428844"/>
+            <a:ext cx="4415107" cy="411327"/>
           </a:xfrm>
         </p:spPr>
         <p:txBody>
@@ -24951,7 +24951,7 @@
           <p:cNvPr id="9" name="item_1">
             <a:extLst>
               <a:ext uri="{FF2B5EF4-FFF2-40B4-BE49-F238E27FC236}">
-                <a16:creationId xmlns:a16="http://schemas.microsoft.com/office/drawing/2014/main" id="{92B805EF-7484-55CD-C2A7-2EA329ABD17F}"/>
+                <a16:creationId xmlns:a16="http://schemas.microsoft.com/office/drawing/2014/main" id="{9BAE8DBD-D2B9-F909-712F-CD1B8F388CEA}"/>
               </a:ext>
             </a:extLst>
           </p:cNvPr>
@@ -24964,8 +24964,8 @@
         </p:nvSpPr>
         <p:spPr>
           <a:xfrm>
-            <a:off x="733082" y="2840171"/>
-            <a:ext cx="5049131" cy="987185"/>
+            <a:off x="708008" y="2840171"/>
+            <a:ext cx="4415107" cy="987185"/>
           </a:xfrm>
           <a:prstGeom prst="rect">
             <a:avLst/>
@@ -24999,7 +24999,7 @@
           <p:cNvPr id="10" name="item_2_title">
             <a:extLst>
               <a:ext uri="{FF2B5EF4-FFF2-40B4-BE49-F238E27FC236}">
-                <a16:creationId xmlns:a16="http://schemas.microsoft.com/office/drawing/2014/main" id="{4D9C0957-362F-17AD-E7AE-4423006ACB92}"/>
+                <a16:creationId xmlns:a16="http://schemas.microsoft.com/office/drawing/2014/main" id="{0B72D914-5877-0A25-D36E-8D3D80CD7DB4}"/>
               </a:ext>
             </a:extLst>
           </p:cNvPr>
@@ -25012,8 +25012,8 @@
         </p:nvSpPr>
         <p:spPr>
           <a:xfrm>
-            <a:off x="6409788" y="2428844"/>
-            <a:ext cx="5049131" cy="411327"/>
+            <a:off x="5671885" y="2428844"/>
+            <a:ext cx="4415107" cy="411327"/>
           </a:xfrm>
           <a:prstGeom prst="rect">
             <a:avLst/>
@@ -25054,7 +25054,7 @@
           <p:cNvPr id="11" name="item_2">
             <a:extLst>
               <a:ext uri="{FF2B5EF4-FFF2-40B4-BE49-F238E27FC236}">
-                <a16:creationId xmlns:a16="http://schemas.microsoft.com/office/drawing/2014/main" id="{6DD54B37-2D22-D30B-F992-A5D31EB918E1}"/>
+                <a16:creationId xmlns:a16="http://schemas.microsoft.com/office/drawing/2014/main" id="{32655810-3C3C-F228-05E7-2500E02860A0}"/>
               </a:ext>
             </a:extLst>
           </p:cNvPr>
@@ -25067,8 +25067,8 @@
         </p:nvSpPr>
         <p:spPr>
           <a:xfrm>
-            <a:off x="6409788" y="2840171"/>
-            <a:ext cx="5049131" cy="987185"/>
+            <a:off x="5671885" y="2840171"/>
+            <a:ext cx="4415107" cy="987185"/>
           </a:xfrm>
           <a:prstGeom prst="rect">
             <a:avLst/>
@@ -25102,7 +25102,7 @@
           <p:cNvPr id="12" name="item_3_title">
             <a:extLst>
               <a:ext uri="{FF2B5EF4-FFF2-40B4-BE49-F238E27FC236}">
-                <a16:creationId xmlns:a16="http://schemas.microsoft.com/office/drawing/2014/main" id="{8D1D780F-05FA-7F30-F79E-F3EADFBEADAD}"/>
+                <a16:creationId xmlns:a16="http://schemas.microsoft.com/office/drawing/2014/main" id="{2082F7FD-78D6-C78D-E321-5DBBC70C0FC4}"/>
               </a:ext>
             </a:extLst>
           </p:cNvPr>
@@ -25115,8 +25115,8 @@
         </p:nvSpPr>
         <p:spPr>
           <a:xfrm>
-            <a:off x="733082" y="4448917"/>
-            <a:ext cx="5049131" cy="411327"/>
+            <a:off x="708008" y="4448917"/>
+            <a:ext cx="4415107" cy="411327"/>
           </a:xfrm>
           <a:prstGeom prst="rect">
             <a:avLst/>
@@ -25157,7 +25157,7 @@
           <p:cNvPr id="13" name="item_3">
             <a:extLst>
               <a:ext uri="{FF2B5EF4-FFF2-40B4-BE49-F238E27FC236}">
-                <a16:creationId xmlns:a16="http://schemas.microsoft.com/office/drawing/2014/main" id="{02877D39-AAB7-4C04-90F5-AF8FB7D5F463}"/>
+                <a16:creationId xmlns:a16="http://schemas.microsoft.com/office/drawing/2014/main" id="{36585B84-2F83-BB96-98D1-418E49747ABF}"/>
               </a:ext>
             </a:extLst>
           </p:cNvPr>
@@ -25170,8 +25170,8 @@
         </p:nvSpPr>
         <p:spPr>
           <a:xfrm>
-            <a:off x="733082" y="4860245"/>
-            <a:ext cx="5049131" cy="987185"/>
+            <a:off x="708008" y="4860245"/>
+            <a:ext cx="4415107" cy="987185"/>
           </a:xfrm>
           <a:prstGeom prst="rect">
             <a:avLst/>
@@ -25205,7 +25205,7 @@
           <p:cNvPr id="14" name="item_4_title">
             <a:extLst>
               <a:ext uri="{FF2B5EF4-FFF2-40B4-BE49-F238E27FC236}">
-                <a16:creationId xmlns:a16="http://schemas.microsoft.com/office/drawing/2014/main" id="{D6B00120-1F32-DC98-1C2C-3E1A75E4565D}"/>
+                <a16:creationId xmlns:a16="http://schemas.microsoft.com/office/drawing/2014/main" id="{F79D7A71-80D4-0BB2-536D-5BB747A4AF9F}"/>
               </a:ext>
             </a:extLst>
           </p:cNvPr>
@@ -25218,8 +25218,8 @@
         </p:nvSpPr>
         <p:spPr>
           <a:xfrm>
-            <a:off x="6409788" y="4448917"/>
-            <a:ext cx="5049131" cy="411327"/>
+            <a:off x="5671885" y="4448917"/>
+            <a:ext cx="4415107" cy="411327"/>
           </a:xfrm>
           <a:prstGeom prst="rect">
             <a:avLst/>
@@ -25260,7 +25260,7 @@
           <p:cNvPr id="15" name="item_4">
             <a:extLst>
               <a:ext uri="{FF2B5EF4-FFF2-40B4-BE49-F238E27FC236}">
-                <a16:creationId xmlns:a16="http://schemas.microsoft.com/office/drawing/2014/main" id="{44323E82-158B-C796-4007-E9FE37B08487}"/>
+                <a16:creationId xmlns:a16="http://schemas.microsoft.com/office/drawing/2014/main" id="{1E10D249-5EBD-1D94-C40B-5EF733DE925D}"/>
               </a:ext>
             </a:extLst>
           </p:cNvPr>
@@ -25273,8 +25273,8 @@
         </p:nvSpPr>
         <p:spPr>
           <a:xfrm>
-            <a:off x="6409788" y="4860245"/>
-            <a:ext cx="5049131" cy="987185"/>
+            <a:off x="5671885" y="4860245"/>
+            <a:ext cx="4415107" cy="987185"/>
           </a:xfrm>
           <a:prstGeom prst="rect">
             <a:avLst/>
@@ -25308,7 +25308,7 @@
           <p:cNvPr id="16" name="source">
             <a:extLst>
               <a:ext uri="{FF2B5EF4-FFF2-40B4-BE49-F238E27FC236}">
-                <a16:creationId xmlns:a16="http://schemas.microsoft.com/office/drawing/2014/main" id="{A3493431-24F6-AAFA-5000-6A2A537E070F}"/>
+                <a16:creationId xmlns:a16="http://schemas.microsoft.com/office/drawing/2014/main" id="{802B95C2-5D67-9465-CDEF-14B65213218C}"/>
               </a:ext>
             </a:extLst>
           </p:cNvPr>
@@ -25365,7 +25365,7 @@
     </p:spTree>
     <p:extLst>
       <p:ext uri="{BB962C8B-B14F-4D97-AF65-F5344CB8AC3E}">
-        <p14:creationId xmlns:p14="http://schemas.microsoft.com/office/powerpoint/2010/main" val="468703984"/>
+        <p14:creationId xmlns:p14="http://schemas.microsoft.com/office/powerpoint/2010/main" val="4153817270"/>
       </p:ext>
     </p:extLst>
   </p:cSld>
@@ -25586,9 +25586,9 @@
             </a:lvl1pPr>
           </a:lstStyle>
           <a:p>
-            <a:fld id="{90A7BBED-E6FA-40A6-8A51-59E4B08CD8B8}" type="datetimeFigureOut">
+            <a:fld id="{3DE1F4D6-9B94-49E1-9259-C44CF083EB57}" type="datetimeFigureOut">
               <a:rPr lang="en-US" smtClean="0"/>
-              <a:t>10/3/2026</a:t>
+              <a:t>10/4/2026</a:t>
             </a:fld>
             <a:endParaRPr lang="en-US"/>
           </a:p>
@@ -25633,7 +25633,7 @@
             </a:lvl1pPr>
           </a:lstStyle>
           <a:p>
-            <a:fld id="{4F0FE17B-5063-4433-97D2-96EAD825CE6E}" type="slidenum">
+            <a:fld id="{022853CD-29C7-4A68-BCE3-2ED71C774B8A}" type="slidenum">
               <a:rPr lang="en-US" smtClean="0"/>
               <a:t>‹#›</a:t>
             </a:fld>
@@ -25644,7 +25644,7 @@
     </p:spTree>
     <p:extLst>
       <p:ext uri="{BB962C8B-B14F-4D97-AF65-F5344CB8AC3E}">
-        <p14:creationId xmlns:p14="http://schemas.microsoft.com/office/powerpoint/2010/main" val="3932171887"/>
+        <p14:creationId xmlns:p14="http://schemas.microsoft.com/office/powerpoint/2010/main" val="1769192209"/>
       </p:ext>
     </p:extLst>
   </p:cSld>
